--- a/Bases de Datos II/Clases/Clase 2 - Administracion de bases de datos/Presentacion.pptx
+++ b/Bases de Datos II/Clases/Clase 2 - Administracion de bases de datos/Presentacion.pptx
@@ -20,8 +20,6 @@
     <p:sldId id="268" r:id="rId19"/>
     <p:sldId id="269" r:id="rId20"/>
     <p:sldId id="270" r:id="rId21"/>
-    <p:sldId id="271" r:id="rId22"/>
-    <p:sldId id="272" r:id="rId23"/>
   </p:sldIdLst>
   <p:sldSz cx="12191695" cy="6858000" type="screen4x3"/>
   <p:notesSz cx="6858000" cy="9144000"/>
@@ -6128,1017 +6126,6 @@
         <p:spPr>
           <a:xfrm>
             <a:off x="0" y="0"/>
-            <a:ext cx="12191695" cy="1170432"/>
-          </a:xfrm>
-          <a:prstGeom prst="rect">
-            <a:avLst/>
-          </a:prstGeom>
-          <a:solidFill>
-            <a:srgbClr val="095292"/>
-          </a:solidFill>
-          <a:ln>
-            <a:noFill/>
-          </a:ln>
-        </p:spPr>
-        <p:style>
-          <a:lnRef idx="1">
-            <a:schemeClr val="accent1"/>
-          </a:lnRef>
-          <a:fillRef idx="3">
-            <a:schemeClr val="accent1"/>
-          </a:fillRef>
-          <a:effectRef idx="2">
-            <a:schemeClr val="accent1"/>
-          </a:effectRef>
-          <a:fontRef idx="minor">
-            <a:schemeClr val="lt1"/>
-          </a:fontRef>
-        </p:style>
-        <p:txBody>
-          <a:bodyPr rtlCol="0" anchor="ctr"/>
-          <a:lstStyle/>
-          <a:p>
-            <a:pPr algn="ctr"/>
-          </a:p>
-        </p:txBody>
-      </p:sp>
-      <p:sp>
-        <p:nvSpPr>
-          <p:cNvPr id="3" name="Rectangle 2"/>
-          <p:cNvSpPr/>
-          <p:nvPr/>
-        </p:nvSpPr>
-        <p:spPr>
-          <a:xfrm>
-            <a:off x="0" y="1170432"/>
-            <a:ext cx="12191695" cy="41148"/>
-          </a:xfrm>
-          <a:prstGeom prst="rect">
-            <a:avLst/>
-          </a:prstGeom>
-          <a:solidFill>
-            <a:srgbClr val="FFD000"/>
-          </a:solidFill>
-          <a:ln>
-            <a:noFill/>
-          </a:ln>
-        </p:spPr>
-        <p:style>
-          <a:lnRef idx="1">
-            <a:schemeClr val="accent1"/>
-          </a:lnRef>
-          <a:fillRef idx="3">
-            <a:schemeClr val="accent1"/>
-          </a:fillRef>
-          <a:effectRef idx="2">
-            <a:schemeClr val="accent1"/>
-          </a:effectRef>
-          <a:fontRef idx="minor">
-            <a:schemeClr val="lt1"/>
-          </a:fontRef>
-        </p:style>
-        <p:txBody>
-          <a:bodyPr rtlCol="0" anchor="ctr"/>
-          <a:lstStyle/>
-          <a:p>
-            <a:pPr algn="ctr"/>
-          </a:p>
-        </p:txBody>
-      </p:sp>
-      <p:sp>
-        <p:nvSpPr>
-          <p:cNvPr id="4" name="TextBox 3"/>
-          <p:cNvSpPr txBox="1"/>
-          <p:nvPr/>
-        </p:nvSpPr>
-        <p:spPr>
-          <a:xfrm>
-            <a:off x="457200" y="164592"/>
-            <a:ext cx="11277295" cy="384048"/>
-          </a:xfrm>
-          <a:prstGeom prst="rect">
-            <a:avLst/>
-          </a:prstGeom>
-          <a:noFill/>
-        </p:spPr>
-        <p:txBody>
-          <a:bodyPr wrap="square">
-            <a:spAutoFit/>
-          </a:bodyPr>
-          <a:lstStyle/>
-          <a:p>
-            <a:r>
-              <a:rPr sz="2600" b="1" i="0">
-                <a:solidFill>
-                  <a:srgbClr val="FFFFFF"/>
-                </a:solidFill>
-                <a:latin typeface="Calibri"/>
-              </a:rPr>
-              <a:t>Quiz rapido (cierre)</a:t>
-            </a:r>
-          </a:p>
-        </p:txBody>
-      </p:sp>
-      <p:sp>
-        <p:nvSpPr>
-          <p:cNvPr id="5" name="TextBox 4"/>
-          <p:cNvSpPr txBox="1"/>
-          <p:nvPr/>
-        </p:nvSpPr>
-        <p:spPr>
-          <a:xfrm>
-            <a:off x="457200" y="566928"/>
-            <a:ext cx="11277295" cy="411480"/>
-          </a:xfrm>
-          <a:prstGeom prst="rect">
-            <a:avLst/>
-          </a:prstGeom>
-          <a:noFill/>
-        </p:spPr>
-        <p:txBody>
-          <a:bodyPr wrap="square">
-            <a:spAutoFit/>
-          </a:bodyPr>
-          <a:lstStyle/>
-          <a:p>
-            <a:r>
-              <a:rPr sz="1400" b="0" i="0">
-                <a:solidFill>
-                  <a:srgbClr val="B8D8EE"/>
-                </a:solidFill>
-                <a:latin typeface="Calibri"/>
-              </a:rPr>
-              <a:t>Individual · 8–10 min</a:t>
-            </a:r>
-          </a:p>
-        </p:txBody>
-      </p:sp>
-      <p:sp>
-        <p:nvSpPr>
-          <p:cNvPr id="6" name="TextBox 5"/>
-          <p:cNvSpPr txBox="1"/>
-          <p:nvPr/>
-        </p:nvSpPr>
-        <p:spPr>
-          <a:xfrm>
-            <a:off x="457200" y="1380744"/>
-            <a:ext cx="11277295" cy="5020056"/>
-          </a:xfrm>
-          <a:prstGeom prst="rect">
-            <a:avLst/>
-          </a:prstGeom>
-          <a:noFill/>
-        </p:spPr>
-        <p:txBody>
-          <a:bodyPr wrap="square">
-            <a:spAutoFit/>
-          </a:bodyPr>
-          <a:lstStyle/>
-          <a:p>
-            <a:pPr>
-              <a:spcAft>
-                <a:spcPts val="800"/>
-              </a:spcAft>
-            </a:pPr>
-            <a:r>
-              <a:rPr sz="1200" b="1" i="0">
-                <a:solidFill>
-                  <a:srgbClr val="333333"/>
-                </a:solidFill>
-                <a:latin typeface="Calibri"/>
-              </a:rPr>
-              <a:t>1.</a:t>
-            </a:r>
-            <a:r>
-              <a:rPr sz="1200" b="0" i="0">
-                <a:solidFill>
-                  <a:srgbClr val="333333"/>
-                </a:solidFill>
-                <a:latin typeface="Calibri"/>
-              </a:rPr>
-              <a:t> Un rol con privilegios mínimos en VetCare sirve para:</a:t>
-            </a:r>
-          </a:p>
-          <a:p>
-            <a:pPr>
-              <a:spcAft>
-                <a:spcPts val="800"/>
-              </a:spcAft>
-            </a:pPr>
-            <a:r>
-              <a:rPr sz="1200" b="0" i="0">
-                <a:solidFill>
-                  <a:srgbClr val="333333"/>
-                </a:solidFill>
-                <a:latin typeface="Calibri"/>
-              </a:rPr>
-              <a:t>–   ('A) Dar SUPER a todos', 1)</a:t>
-            </a:r>
-          </a:p>
-          <a:p>
-            <a:pPr>
-              <a:spcAft>
-                <a:spcPts val="800"/>
-              </a:spcAft>
-            </a:pPr>
-            <a:r>
-              <a:rPr sz="1200" b="0" i="0">
-                <a:solidFill>
-                  <a:srgbClr val="333333"/>
-                </a:solidFill>
-                <a:latin typeface="Calibri"/>
-              </a:rPr>
-              <a:t>–   ('B) Least privilege por perfil (app/lectura/admin)', 1)</a:t>
-            </a:r>
-          </a:p>
-          <a:p>
-            <a:pPr>
-              <a:spcAft>
-                <a:spcPts val="800"/>
-              </a:spcAft>
-            </a:pPr>
-            <a:r>
-              <a:rPr sz="1200" b="0" i="0">
-                <a:solidFill>
-                  <a:srgbClr val="333333"/>
-                </a:solidFill>
-                <a:latin typeface="Calibri"/>
-              </a:rPr>
-              <a:t>–   ('C) Evitar backups', 1)</a:t>
-            </a:r>
-          </a:p>
-          <a:p>
-            <a:pPr>
-              <a:spcAft>
-                <a:spcPts val="800"/>
-              </a:spcAft>
-            </a:pPr>
-            <a:r>
-              <a:rPr sz="1200" b="0" i="0">
-                <a:solidFill>
-                  <a:srgbClr val="333333"/>
-                </a:solidFill>
-                <a:latin typeface="Calibri"/>
-              </a:rPr>
-              <a:t>–   ('D) Eliminar PK', 1)</a:t>
-            </a:r>
-          </a:p>
-          <a:p>
-            <a:pPr>
-              <a:spcAft>
-                <a:spcPts val="800"/>
-              </a:spcAft>
-            </a:pPr>
-            <a:r>
-              <a:rPr sz="1200" b="0" i="0">
-                <a:solidFill>
-                  <a:srgbClr val="333333"/>
-                </a:solidFill>
-                <a:latin typeface="Calibri"/>
-              </a:rPr>
-              <a:t>–   </a:t>
-            </a:r>
-            <a:r>
-              <a:rPr sz="1200" b="1" i="0">
-                <a:solidFill>
-                  <a:srgbClr val="333333"/>
-                </a:solidFill>
-                <a:latin typeface="Calibri"/>
-              </a:rPr>
-              <a:t>2.</a:t>
-            </a:r>
-            <a:r>
-              <a:rPr sz="1200" b="0" i="0">
-                <a:solidFill>
-                  <a:srgbClr val="333333"/>
-                </a:solidFill>
-                <a:latin typeface="Calibri"/>
-              </a:rPr>
-              <a:t> ¿Qué privilegio NO debería tener el rol de solo lectura de agenda?</a:t>
-            </a:r>
-          </a:p>
-          <a:p>
-            <a:pPr>
-              <a:spcAft>
-                <a:spcPts val="800"/>
-              </a:spcAft>
-            </a:pPr>
-            <a:r>
-              <a:rPr sz="1200" b="0" i="0">
-                <a:solidFill>
-                  <a:srgbClr val="333333"/>
-                </a:solidFill>
-                <a:latin typeface="Calibri"/>
-              </a:rPr>
-              <a:t>–   ('A) SELECT sobre cita', 1)</a:t>
-            </a:r>
-          </a:p>
-          <a:p>
-            <a:pPr>
-              <a:spcAft>
-                <a:spcPts val="800"/>
-              </a:spcAft>
-            </a:pPr>
-            <a:r>
-              <a:rPr sz="1200" b="0" i="0">
-                <a:solidFill>
-                  <a:srgbClr val="333333"/>
-                </a:solidFill>
-                <a:latin typeface="Calibri"/>
-              </a:rPr>
-              <a:t>–   ('B) DROP TABLE', 1)</a:t>
-            </a:r>
-          </a:p>
-          <a:p>
-            <a:pPr>
-              <a:spcAft>
-                <a:spcPts val="800"/>
-              </a:spcAft>
-            </a:pPr>
-            <a:r>
-              <a:rPr sz="1200" b="0" i="0">
-                <a:solidFill>
-                  <a:srgbClr val="333333"/>
-                </a:solidFill>
-                <a:latin typeface="Calibri"/>
-              </a:rPr>
-              <a:t>–   ('C) SELECT sobre mascota', 1)</a:t>
-            </a:r>
-          </a:p>
-          <a:p>
-            <a:pPr>
-              <a:spcAft>
-                <a:spcPts val="800"/>
-              </a:spcAft>
-            </a:pPr>
-            <a:r>
-              <a:rPr sz="1200" b="0" i="0">
-                <a:solidFill>
-                  <a:srgbClr val="333333"/>
-                </a:solidFill>
-                <a:latin typeface="Calibri"/>
-              </a:rPr>
-              <a:t>–   ('D) Consultar veterinario', 1)</a:t>
-            </a:r>
-          </a:p>
-          <a:p>
-            <a:pPr>
-              <a:spcAft>
-                <a:spcPts val="800"/>
-              </a:spcAft>
-            </a:pPr>
-            <a:r>
-              <a:rPr sz="1200" b="0" i="0">
-                <a:solidFill>
-                  <a:srgbClr val="333333"/>
-                </a:solidFill>
-                <a:latin typeface="Calibri"/>
-              </a:rPr>
-              <a:t>–   </a:t>
-            </a:r>
-            <a:r>
-              <a:rPr sz="1200" b="1" i="0">
-                <a:solidFill>
-                  <a:srgbClr val="333333"/>
-                </a:solidFill>
-                <a:latin typeface="Calibri"/>
-              </a:rPr>
-              <a:t>3.</a:t>
-            </a:r>
-            <a:r>
-              <a:rPr sz="1200" b="0" i="0">
-                <a:solidFill>
-                  <a:srgbClr val="333333"/>
-                </a:solidFill>
-                <a:latin typeface="Calibri"/>
-              </a:rPr>
-              <a:t> GRANT y REVOKE forman parte de la administración de privilegios del PI.</a:t>
-            </a:r>
-          </a:p>
-          <a:p>
-            <a:pPr>
-              <a:spcAft>
-                <a:spcPts val="800"/>
-              </a:spcAft>
-            </a:pPr>
-            <a:r>
-              <a:rPr sz="1200" b="0" i="0">
-                <a:solidFill>
-                  <a:srgbClr val="333333"/>
-                </a:solidFill>
-                <a:latin typeface="Calibri"/>
-              </a:rPr>
-              <a:t>–   ('( ) Verdadero    ( ) Falso', 1)</a:t>
-            </a:r>
-          </a:p>
-          <a:p>
-            <a:pPr>
-              <a:spcAft>
-                <a:spcPts val="800"/>
-              </a:spcAft>
-            </a:pPr>
-            <a:r>
-              <a:rPr sz="1200" b="0" i="0">
-                <a:solidFill>
-                  <a:srgbClr val="333333"/>
-                </a:solidFill>
-                <a:latin typeface="Calibri"/>
-              </a:rPr>
-              <a:t>–   </a:t>
-            </a:r>
-            <a:r>
-              <a:rPr sz="1200" b="1" i="0">
-                <a:solidFill>
-                  <a:srgbClr val="333333"/>
-                </a:solidFill>
-                <a:latin typeface="Calibri"/>
-              </a:rPr>
-              <a:t>4.</a:t>
-            </a:r>
-            <a:r>
-              <a:rPr sz="1200" b="0" i="0">
-                <a:solidFill>
-                  <a:srgbClr val="333333"/>
-                </a:solidFill>
-                <a:latin typeface="Calibri"/>
-              </a:rPr>
-              <a:t> Usar el usuario root/admin de playground para la app en producción es buena práctica.</a:t>
-            </a:r>
-          </a:p>
-          <a:p>
-            <a:pPr>
-              <a:spcAft>
-                <a:spcPts val="800"/>
-              </a:spcAft>
-            </a:pPr>
-            <a:r>
-              <a:rPr sz="1200" b="0" i="0">
-                <a:solidFill>
-                  <a:srgbClr val="333333"/>
-                </a:solidFill>
-                <a:latin typeface="Calibri"/>
-              </a:rPr>
-              <a:t>–   ('( ) Verdadero    ( ) Falso', 1)</a:t>
-            </a:r>
-          </a:p>
-        </p:txBody>
-      </p:sp>
-      <p:sp>
-        <p:nvSpPr>
-          <p:cNvPr id="7" name="TextBox 6"/>
-          <p:cNvSpPr txBox="1"/>
-          <p:nvPr/>
-        </p:nvSpPr>
-        <p:spPr>
-          <a:xfrm>
-            <a:off x="11185855" y="6473952"/>
-            <a:ext cx="640080" cy="274320"/>
-          </a:xfrm>
-          <a:prstGeom prst="rect">
-            <a:avLst/>
-          </a:prstGeom>
-          <a:noFill/>
-        </p:spPr>
-        <p:txBody>
-          <a:bodyPr wrap="square">
-            <a:spAutoFit/>
-          </a:bodyPr>
-          <a:lstStyle/>
-          <a:p>
-            <a:pPr algn="r"/>
-            <a:r>
-              <a:rPr sz="1100" b="0" i="0">
-                <a:solidFill>
-                  <a:srgbClr val="666666"/>
-                </a:solidFill>
-                <a:latin typeface="Calibri"/>
-              </a:rPr>
-              <a:t>15</a:t>
-            </a:r>
-          </a:p>
-        </p:txBody>
-      </p:sp>
-    </p:spTree>
-  </p:cSld>
-  <p:clrMapOvr>
-    <a:masterClrMapping/>
-  </p:clrMapOvr>
-</p:sld>
-</file>
-
-<file path=ppt/slides/slide16.xml><?xml version="1.0" encoding="utf-8"?>
-<p:sld xmlns:a="http://schemas.openxmlformats.org/drawingml/2006/main" xmlns:p="http://schemas.openxmlformats.org/presentationml/2006/main" xmlns:r="http://schemas.openxmlformats.org/officeDocument/2006/relationships">
-  <p:cSld>
-    <p:bg>
-      <p:bgPr>
-        <a:solidFill>
-          <a:srgbClr val="FFFFFF"/>
-        </a:solidFill>
-        <a:effectLst/>
-      </p:bgPr>
-    </p:bg>
-    <p:spTree>
-      <p:nvGrpSpPr>
-        <p:cNvPr id="1" name=""/>
-        <p:cNvGrpSpPr/>
-        <p:nvPr/>
-      </p:nvGrpSpPr>
-      <p:grpSpPr/>
-      <p:sp>
-        <p:nvSpPr>
-          <p:cNvPr id="2" name="Rectangle 1"/>
-          <p:cNvSpPr/>
-          <p:nvPr/>
-        </p:nvSpPr>
-        <p:spPr>
-          <a:xfrm>
-            <a:off x="0" y="0"/>
-            <a:ext cx="12191695" cy="1170432"/>
-          </a:xfrm>
-          <a:prstGeom prst="rect">
-            <a:avLst/>
-          </a:prstGeom>
-          <a:solidFill>
-            <a:srgbClr val="095292"/>
-          </a:solidFill>
-          <a:ln>
-            <a:noFill/>
-          </a:ln>
-        </p:spPr>
-        <p:style>
-          <a:lnRef idx="1">
-            <a:schemeClr val="accent1"/>
-          </a:lnRef>
-          <a:fillRef idx="3">
-            <a:schemeClr val="accent1"/>
-          </a:fillRef>
-          <a:effectRef idx="2">
-            <a:schemeClr val="accent1"/>
-          </a:effectRef>
-          <a:fontRef idx="minor">
-            <a:schemeClr val="lt1"/>
-          </a:fontRef>
-        </p:style>
-        <p:txBody>
-          <a:bodyPr rtlCol="0" anchor="ctr"/>
-          <a:lstStyle/>
-          <a:p>
-            <a:pPr algn="ctr"/>
-          </a:p>
-        </p:txBody>
-      </p:sp>
-      <p:sp>
-        <p:nvSpPr>
-          <p:cNvPr id="3" name="Rectangle 2"/>
-          <p:cNvSpPr/>
-          <p:nvPr/>
-        </p:nvSpPr>
-        <p:spPr>
-          <a:xfrm>
-            <a:off x="0" y="1170432"/>
-            <a:ext cx="12191695" cy="41148"/>
-          </a:xfrm>
-          <a:prstGeom prst="rect">
-            <a:avLst/>
-          </a:prstGeom>
-          <a:solidFill>
-            <a:srgbClr val="FFD000"/>
-          </a:solidFill>
-          <a:ln>
-            <a:noFill/>
-          </a:ln>
-        </p:spPr>
-        <p:style>
-          <a:lnRef idx="1">
-            <a:schemeClr val="accent1"/>
-          </a:lnRef>
-          <a:fillRef idx="3">
-            <a:schemeClr val="accent1"/>
-          </a:fillRef>
-          <a:effectRef idx="2">
-            <a:schemeClr val="accent1"/>
-          </a:effectRef>
-          <a:fontRef idx="minor">
-            <a:schemeClr val="lt1"/>
-          </a:fontRef>
-        </p:style>
-        <p:txBody>
-          <a:bodyPr rtlCol="0" anchor="ctr"/>
-          <a:lstStyle/>
-          <a:p>
-            <a:pPr algn="ctr"/>
-          </a:p>
-        </p:txBody>
-      </p:sp>
-      <p:sp>
-        <p:nvSpPr>
-          <p:cNvPr id="4" name="TextBox 3"/>
-          <p:cNvSpPr txBox="1"/>
-          <p:nvPr/>
-        </p:nvSpPr>
-        <p:spPr>
-          <a:xfrm>
-            <a:off x="457200" y="164592"/>
-            <a:ext cx="11277295" cy="384048"/>
-          </a:xfrm>
-          <a:prstGeom prst="rect">
-            <a:avLst/>
-          </a:prstGeom>
-          <a:noFill/>
-        </p:spPr>
-        <p:txBody>
-          <a:bodyPr wrap="square">
-            <a:spAutoFit/>
-          </a:bodyPr>
-          <a:lstStyle/>
-          <a:p>
-            <a:r>
-              <a:rPr sz="2600" b="1" i="0">
-                <a:solidFill>
-                  <a:srgbClr val="FFFFFF"/>
-                </a:solidFill>
-                <a:latin typeface="Calibri"/>
-              </a:rPr>
-              <a:t>Quiz rapido (cierre) · cont. 2</a:t>
-            </a:r>
-          </a:p>
-        </p:txBody>
-      </p:sp>
-      <p:sp>
-        <p:nvSpPr>
-          <p:cNvPr id="5" name="TextBox 4"/>
-          <p:cNvSpPr txBox="1"/>
-          <p:nvPr/>
-        </p:nvSpPr>
-        <p:spPr>
-          <a:xfrm>
-            <a:off x="457200" y="566928"/>
-            <a:ext cx="11277295" cy="411480"/>
-          </a:xfrm>
-          <a:prstGeom prst="rect">
-            <a:avLst/>
-          </a:prstGeom>
-          <a:noFill/>
-        </p:spPr>
-        <p:txBody>
-          <a:bodyPr wrap="square">
-            <a:spAutoFit/>
-          </a:bodyPr>
-          <a:lstStyle/>
-          <a:p>
-            <a:r>
-              <a:rPr sz="1400" b="0" i="0">
-                <a:solidFill>
-                  <a:srgbClr val="B8D8EE"/>
-                </a:solidFill>
-                <a:latin typeface="Calibri"/>
-              </a:rPr>
-              <a:t>Individual · 8–10 min</a:t>
-            </a:r>
-          </a:p>
-        </p:txBody>
-      </p:sp>
-      <p:sp>
-        <p:nvSpPr>
-          <p:cNvPr id="6" name="TextBox 5"/>
-          <p:cNvSpPr txBox="1"/>
-          <p:nvPr/>
-        </p:nvSpPr>
-        <p:spPr>
-          <a:xfrm>
-            <a:off x="457200" y="1380744"/>
-            <a:ext cx="11277295" cy="5020056"/>
-          </a:xfrm>
-          <a:prstGeom prst="rect">
-            <a:avLst/>
-          </a:prstGeom>
-          <a:noFill/>
-        </p:spPr>
-        <p:txBody>
-          <a:bodyPr wrap="square">
-            <a:spAutoFit/>
-          </a:bodyPr>
-          <a:lstStyle/>
-          <a:p>
-            <a:pPr>
-              <a:spcAft>
-                <a:spcPts val="800"/>
-              </a:spcAft>
-            </a:pPr>
-            <a:r>
-              <a:rPr sz="1200" b="0" i="0">
-                <a:solidFill>
-                  <a:srgbClr val="333333"/>
-                </a:solidFill>
-                <a:latin typeface="Calibri"/>
-              </a:rPr>
-              <a:t>–   </a:t>
-            </a:r>
-            <a:r>
-              <a:rPr sz="1200" b="1" i="0">
-                <a:solidFill>
-                  <a:srgbClr val="333333"/>
-                </a:solidFill>
-                <a:latin typeface="Calibri"/>
-              </a:rPr>
-              <a:t>5.</a:t>
-            </a:r>
-            <a:r>
-              <a:rPr sz="1200" b="0" i="0">
-                <a:solidFill>
-                  <a:srgbClr val="333333"/>
-                </a:solidFill>
-                <a:latin typeface="Calibri"/>
-              </a:rPr>
-              <a:t> Evidencia típica del taller de roles:</a:t>
-            </a:r>
-          </a:p>
-          <a:p>
-            <a:pPr>
-              <a:spcAft>
-                <a:spcPts val="800"/>
-              </a:spcAft>
-            </a:pPr>
-            <a:r>
-              <a:rPr sz="1200" b="0" i="0">
-                <a:solidFill>
-                  <a:srgbClr val="333333"/>
-                </a:solidFill>
-                <a:latin typeface="Calibri"/>
-              </a:rPr>
-              <a:t>–   ('A) Solo un screenshot del logo', 1)</a:t>
-            </a:r>
-          </a:p>
-          <a:p>
-            <a:pPr>
-              <a:spcAft>
-                <a:spcPts val="800"/>
-              </a:spcAft>
-            </a:pPr>
-            <a:r>
-              <a:rPr sz="1200" b="0" i="0">
-                <a:solidFill>
-                  <a:srgbClr val="333333"/>
-                </a:solidFill>
-                <a:latin typeface="Calibri"/>
-              </a:rPr>
-              <a:t>–   ('B) Script de roles + prueba de permiso denegado', 1)</a:t>
-            </a:r>
-          </a:p>
-          <a:p>
-            <a:pPr>
-              <a:spcAft>
-                <a:spcPts val="800"/>
-              </a:spcAft>
-            </a:pPr>
-            <a:r>
-              <a:rPr sz="1200" b="0" i="0">
-                <a:solidFill>
-                  <a:srgbClr val="333333"/>
-                </a:solidFill>
-                <a:latin typeface="Calibri"/>
-              </a:rPr>
-              <a:t>–   ('C) Factura AWS', 1)</a:t>
-            </a:r>
-          </a:p>
-          <a:p>
-            <a:pPr>
-              <a:spcAft>
-                <a:spcPts val="800"/>
-              </a:spcAft>
-            </a:pPr>
-            <a:r>
-              <a:rPr sz="1200" b="0" i="0">
-                <a:solidFill>
-                  <a:srgbClr val="333333"/>
-                </a:solidFill>
-                <a:latin typeface="Calibri"/>
-              </a:rPr>
-              <a:t>–   ('D) Diagrama sin usuarios', 1)</a:t>
-            </a:r>
-          </a:p>
-          <a:p>
-            <a:pPr>
-              <a:spcAft>
-                <a:spcPts val="800"/>
-              </a:spcAft>
-            </a:pPr>
-            <a:r>
-              <a:rPr sz="1200" b="0" i="0">
-                <a:solidFill>
-                  <a:srgbClr val="333333"/>
-                </a:solidFill>
-                <a:latin typeface="Calibri"/>
-              </a:rPr>
-              <a:t>–   </a:t>
-            </a:r>
-            <a:r>
-              <a:rPr sz="1200" b="1" i="0">
-                <a:solidFill>
-                  <a:srgbClr val="333333"/>
-                </a:solidFill>
-                <a:latin typeface="Calibri"/>
-              </a:rPr>
-              <a:t>6.</a:t>
-            </a:r>
-            <a:r>
-              <a:rPr sz="1200" b="0" i="0">
-                <a:solidFill>
-                  <a:srgbClr val="333333"/>
-                </a:solidFill>
-                <a:latin typeface="Calibri"/>
-              </a:rPr>
-              <a:t> Separar rol de aplicación y rol de DBA reduce el impacto de una filtración de credenciales.</a:t>
-            </a:r>
-          </a:p>
-          <a:p>
-            <a:pPr>
-              <a:spcAft>
-                <a:spcPts val="800"/>
-              </a:spcAft>
-            </a:pPr>
-            <a:r>
-              <a:rPr sz="1200" b="0" i="0">
-                <a:solidFill>
-                  <a:srgbClr val="333333"/>
-                </a:solidFill>
-                <a:latin typeface="Calibri"/>
-              </a:rPr>
-              <a:t>–   ('( ) Verdadero    ( ) Falso', 1)</a:t>
-            </a:r>
-          </a:p>
-          <a:p>
-            <a:pPr>
-              <a:spcAft>
-                <a:spcPts val="800"/>
-              </a:spcAft>
-            </a:pPr>
-            <a:r>
-              <a:rPr sz="1200" b="0" i="0">
-                <a:solidFill>
-                  <a:srgbClr val="333333"/>
-                </a:solidFill>
-                <a:latin typeface="Calibri"/>
-              </a:rPr>
-              <a:t>–   </a:t>
-            </a:r>
-            <a:r>
-              <a:rPr sz="1200" b="1" i="0">
-                <a:solidFill>
-                  <a:srgbClr val="333333"/>
-                </a:solidFill>
-                <a:latin typeface="Calibri"/>
-              </a:rPr>
-              <a:t>7.</a:t>
-            </a:r>
-            <a:r>
-              <a:rPr sz="1200" b="0" i="0">
-                <a:solidFill>
-                  <a:srgbClr val="333333"/>
-                </a:solidFill>
-                <a:latin typeface="Calibri"/>
-              </a:rPr>
-              <a:t> Defina 2 roles VetCare (nombre + privilegio clave de cada uno).</a:t>
-            </a:r>
-          </a:p>
-          <a:p>
-            <a:pPr>
-              <a:spcAft>
-                <a:spcPts val="800"/>
-              </a:spcAft>
-            </a:pPr>
-            <a:r>
-              <a:rPr sz="1200" b="0" i="0">
-                <a:solidFill>
-                  <a:srgbClr val="333333"/>
-                </a:solidFill>
-                <a:latin typeface="Calibri"/>
-              </a:rPr>
-              <a:t>–   ('Respuesta corta: ____________________________', 1)</a:t>
-            </a:r>
-          </a:p>
-          <a:p>
-            <a:pPr>
-              <a:spcAft>
-                <a:spcPts val="800"/>
-              </a:spcAft>
-            </a:pPr>
-            <a:r>
-              <a:rPr sz="1200" b="0" i="0">
-                <a:solidFill>
-                  <a:srgbClr val="333333"/>
-                </a:solidFill>
-                <a:latin typeface="Calibri"/>
-              </a:rPr>
-              <a:t>–   </a:t>
-            </a:r>
-            <a:r>
-              <a:rPr sz="1200" b="1" i="0">
-                <a:solidFill>
-                  <a:srgbClr val="333333"/>
-                </a:solidFill>
-                <a:latin typeface="Calibri"/>
-              </a:rPr>
-              <a:t>8.</a:t>
-            </a:r>
-            <a:r>
-              <a:rPr sz="1200" b="0" i="0">
-                <a:solidFill>
-                  <a:srgbClr val="333333"/>
-                </a:solidFill>
-                <a:latin typeface="Calibri"/>
-              </a:rPr>
-              <a:t> ¿Qué operación debería fallar con el rol de lectura y cómo lo evidencia?</a:t>
-            </a:r>
-          </a:p>
-          <a:p>
-            <a:pPr>
-              <a:spcAft>
-                <a:spcPts val="800"/>
-              </a:spcAft>
-            </a:pPr>
-            <a:r>
-              <a:rPr sz="1200" b="0" i="0">
-                <a:solidFill>
-                  <a:srgbClr val="333333"/>
-                </a:solidFill>
-                <a:latin typeface="Calibri"/>
-              </a:rPr>
-              <a:t>–   ('Respuesta corta: ____________________________', 1)</a:t>
-            </a:r>
-          </a:p>
-        </p:txBody>
-      </p:sp>
-      <p:sp>
-        <p:nvSpPr>
-          <p:cNvPr id="7" name="TextBox 6"/>
-          <p:cNvSpPr txBox="1"/>
-          <p:nvPr/>
-        </p:nvSpPr>
-        <p:spPr>
-          <a:xfrm>
-            <a:off x="11185855" y="6473952"/>
-            <a:ext cx="640080" cy="274320"/>
-          </a:xfrm>
-          <a:prstGeom prst="rect">
-            <a:avLst/>
-          </a:prstGeom>
-          <a:noFill/>
-        </p:spPr>
-        <p:txBody>
-          <a:bodyPr wrap="square">
-            <a:spAutoFit/>
-          </a:bodyPr>
-          <a:lstStyle/>
-          <a:p>
-            <a:pPr algn="r"/>
-            <a:r>
-              <a:rPr sz="1100" b="0" i="0">
-                <a:solidFill>
-                  <a:srgbClr val="666666"/>
-                </a:solidFill>
-                <a:latin typeface="Calibri"/>
-              </a:rPr>
-              <a:t>16</a:t>
-            </a:r>
-          </a:p>
-        </p:txBody>
-      </p:sp>
-    </p:spTree>
-  </p:cSld>
-  <p:clrMapOvr>
-    <a:masterClrMapping/>
-  </p:clrMapOvr>
-</p:sld>
-</file>
-
-<file path=ppt/slides/slide17.xml><?xml version="1.0" encoding="utf-8"?>
-<p:sld xmlns:a="http://schemas.openxmlformats.org/drawingml/2006/main" xmlns:p="http://schemas.openxmlformats.org/presentationml/2006/main" xmlns:r="http://schemas.openxmlformats.org/officeDocument/2006/relationships">
-  <p:cSld>
-    <p:bg>
-      <p:bgPr>
-        <a:solidFill>
-          <a:srgbClr val="FFFFFF"/>
-        </a:solidFill>
-        <a:effectLst/>
-      </p:bgPr>
-    </p:bg>
-    <p:spTree>
-      <p:nvGrpSpPr>
-        <p:cNvPr id="1" name=""/>
-        <p:cNvGrpSpPr/>
-        <p:nvPr/>
-      </p:nvGrpSpPr>
-      <p:grpSpPr/>
-      <p:sp>
-        <p:nvSpPr>
-          <p:cNvPr id="2" name="Rectangle 1"/>
-          <p:cNvSpPr/>
-          <p:nvPr/>
-        </p:nvSpPr>
-        <p:spPr>
-          <a:xfrm>
-            <a:off x="0" y="0"/>
             <a:ext cx="12191695" cy="164592"/>
           </a:xfrm>
           <a:prstGeom prst="rect">
@@ -8467,7 +7454,7 @@
                 </a:solidFill>
                 <a:latin typeface="Calibri"/>
               </a:rPr>
-              <a:t>Criterios · quiz/cierre · duda PI</a:t>
+              <a:t>Criterios de exito · cierre · dudas del PI</a:t>
             </a:r>
           </a:p>
         </p:txBody>

--- a/Bases de Datos II/Clases/Clase 2 - Administracion de bases de datos/Presentacion.pptx
+++ b/Bases de Datos II/Clases/Clase 2 - Administracion de bases de datos/Presentacion.pptx
@@ -5456,7 +5456,7 @@
                 </a:solidFill>
                 <a:latin typeface="Calibri"/>
               </a:rPr>
-              <a:t> (Talleres) — domingo 23:59 cuando aplique taller.</a:t>
+              <a:t> (https://examlab.lovable.app/) — domingo 23:59 cuando aplique taller.</a:t>
             </a:r>
           </a:p>
         </p:txBody>
@@ -6051,7 +6051,7 @@
                 </a:solidFill>
                 <a:latin typeface="Calibri"/>
               </a:rPr>
-              <a:t>Taller de la semana en ExamLab: domingo 23:59 (regla del Acuerdo) cuando aplique.</a:t>
+              <a:t>Taller de la semana en ExamLab (https://examlab.lovable.app/): domingo 23:59 (regla del Acuerdo) cuando aplique.</a:t>
             </a:r>
           </a:p>
         </p:txBody>

--- a/Bases de Datos II/Clases/Clase 2 - Administracion de bases de datos/Presentacion.pptx
+++ b/Bases de Datos II/Clases/Clase 2 - Administracion de bases de datos/Presentacion.pptx
@@ -7792,22 +7792,6 @@
                 <a:latin typeface="Calibri"/>
               </a:rPr>
               <a:t>–   Error de docente que no domina el tema: crear un unico usuario 'admin' que todos comparten (rompe la…</a:t>
-            </a:r>
-          </a:p>
-          <a:p>
-            <a:pPr>
-              <a:spcAft>
-                <a:spcPts val="800"/>
-              </a:spcAft>
-            </a:pPr>
-            <a:r>
-              <a:rPr sz="1500" b="0" i="0">
-                <a:solidFill>
-                  <a:srgbClr val="333333"/>
-                </a:solidFill>
-                <a:latin typeface="Calibri"/>
-              </a:rPr>
-              <a:t>–   En el playground (Live SQL / DB Fiddle) el motor puede restringir CREATE ROLE o GRANT reales: cuando eso…</a:t>
             </a:r>
           </a:p>
         </p:txBody>

--- a/Bases de Datos II/Clases/Clase 2 - Administracion de bases de datos/Presentacion.pptx
+++ b/Bases de Datos II/Clases/Clase 2 - Administracion de bases de datos/Presentacion.pptx
@@ -5406,7 +5406,7 @@
                 </a:solidFill>
                 <a:latin typeface="Calibri"/>
               </a:rPr>
-              <a:t>–   Evidencia en playground (enlace) o archivo SQL/PNG del equipo.</a:t>
+              <a:t>–   Evidencia en playground (enlace) o archivo SQL/PNG propio.</a:t>
             </a:r>
           </a:p>
           <a:p>
@@ -6655,7 +6655,7 @@
                 </a:solidFill>
                 <a:latin typeface="Calibri"/>
               </a:rPr>
-              <a:t>–   Al salir: avance concreto en el paquete VetCare del equipo.</a:t>
+              <a:t>–   Al salir: avance concreto en su paquete VetCare.</a:t>
             </a:r>
           </a:p>
         </p:txBody>
@@ -8692,7 +8692,7 @@
                 </a:solidFill>
                 <a:latin typeface="Calibri"/>
               </a:rPr>
-              <a:t>–   Al final de la demo: dejar enlace/script compartible al equipo.</a:t>
+              <a:t>–   Al final de la demo: dejar enlace/script compartible al grupo.</a:t>
             </a:r>
           </a:p>
         </p:txBody>

--- a/Bases de Datos II/Clases/Clase 2 - Administracion de bases de datos/Presentacion.pptx
+++ b/Bases de Datos II/Clases/Clase 2 - Administracion de bases de datos/Presentacion.pptx
@@ -3439,7 +3439,7 @@
                 </a:solidFill>
                 <a:latin typeface="Calibri"/>
               </a:rPr>
-              <a:t>Clase autonoma · privilegios y usuarios del PI</a:t>
+              <a:t>Privilegios y usuarios del PI</a:t>
             </a:r>
           </a:p>
         </p:txBody>
@@ -3620,7 +3620,7 @@
                 </a:solidFill>
                 <a:latin typeface="Calibri"/>
               </a:rPr>
-              <a:t>Actividad autonoma — escenario / datos de partida</a:t>
+              <a:t>Taller PI VetCare — escenario / datos de partida</a:t>
             </a:r>
           </a:p>
         </p:txBody>
@@ -3856,7 +3856,7 @@
                 </a:solidFill>
                 <a:latin typeface="Calibri"/>
               </a:rPr>
-              <a:t>Actividad autonoma — pasos guiados</a:t>
+              <a:t>Taller PI VetCare — pasos guiados</a:t>
             </a:r>
           </a:p>
         </p:txBody>
@@ -4657,7 +4657,7 @@
                 </a:solidFill>
                 <a:latin typeface="Calibri"/>
               </a:rPr>
-              <a:t>Actividad autonoma — pistas (checklist vacio)</a:t>
+              <a:t>Taller PI VetCare — pistas (checklist vacio)</a:t>
             </a:r>
           </a:p>
         </p:txBody>
@@ -6994,7 +6994,7 @@
                 </a:solidFill>
                 <a:latin typeface="Calibri"/>
               </a:rPr>
-              <a:t>Encuadre · clase autonoma (festivo) · VetCare</a:t>
+              <a:t>Encuadre · clase regular · VetCare</a:t>
             </a:r>
           </a:p>
         </p:txBody>
@@ -9700,7 +9700,7 @@
                 </a:solidFill>
                 <a:latin typeface="Calibri"/>
               </a:rPr>
-              <a:t>Actividad autonoma — contexto / por que importa</a:t>
+              <a:t>Taller PI VetCare — contexto / por que importa</a:t>
             </a:r>
           </a:p>
         </p:txBody>
@@ -9789,7 +9789,7 @@
                 </a:solidFill>
                 <a:latin typeface="Calibri"/>
               </a:rPr>
-              <a:t>–   Autónoma: documentar matriz aunque el playground no persista usuarios.</a:t>
+              <a:t>–   Si el playground no persiste usuarios, la matriz igual se documenta: es el entregable.</a:t>
             </a:r>
           </a:p>
         </p:txBody>
@@ -9970,7 +9970,7 @@
                 </a:solidFill>
                 <a:latin typeface="Calibri"/>
               </a:rPr>
-              <a:t>Actividad autonoma — objetivo y criterios</a:t>
+              <a:t>Taller PI VetCare — objetivo y criterios</a:t>
             </a:r>
           </a:p>
         </p:txBody>

--- a/Bases de Datos II/Clases/Clase 2 - Administracion de bases de datos/Presentacion.pptx
+++ b/Bases de Datos II/Clases/Clase 2 - Administracion de bases de datos/Presentacion.pptx
@@ -5456,7 +5456,7 @@
                 </a:solidFill>
                 <a:latin typeface="Calibri"/>
               </a:rPr>
-              <a:t> (https://examlab.lovable.app/) — domingo 23:59 cuando aplique taller.</a:t>
+              <a:t> (https://uniaj.examlab.workers.dev/) — domingo 23:59 cuando aplique taller.</a:t>
             </a:r>
           </a:p>
         </p:txBody>
@@ -6051,7 +6051,7 @@
                 </a:solidFill>
                 <a:latin typeface="Calibri"/>
               </a:rPr>
-              <a:t>Taller de la semana en ExamLab (https://examlab.lovable.app/): domingo 23:59 (regla del Acuerdo) cuando aplique.</a:t>
+              <a:t>Taller de la semana en ExamLab (https://uniaj.examlab.workers.dev/): domingo 23:59 (regla del Acuerdo) cuando aplique.</a:t>
             </a:r>
           </a:p>
         </p:txBody>

--- a/Bases de Datos II/Clases/Clase 2 - Administracion de bases de datos/Presentacion.pptx
+++ b/Bases de Datos II/Clases/Clase 2 - Administracion de bases de datos/Presentacion.pptx
@@ -3869,8 +3869,8 @@
         </p:nvSpPr>
         <p:spPr>
           <a:xfrm>
-            <a:off x="457200" y="1234440"/>
-            <a:ext cx="11277295" cy="777240"/>
+            <a:off x="457200" y="1554480"/>
+            <a:ext cx="11277295" cy="1051560"/>
           </a:xfrm>
           <a:prstGeom prst="roundRect">
             <a:avLst>
@@ -3914,7 +3914,7 @@
         </p:nvSpPr>
         <p:spPr>
           <a:xfrm>
-            <a:off x="594360" y="1403604"/>
+            <a:off x="594360" y="1860804"/>
             <a:ext cx="438912" cy="438912"/>
           </a:xfrm>
           <a:prstGeom prst="roundRect">
@@ -3959,7 +3959,7 @@
         </p:nvSpPr>
         <p:spPr>
           <a:xfrm>
-            <a:off x="594360" y="1403604"/>
+            <a:off x="594360" y="1860804"/>
             <a:ext cx="438912" cy="438912"/>
           </a:xfrm>
           <a:prstGeom prst="rect">
@@ -3992,8 +3992,8 @@
         </p:nvSpPr>
         <p:spPr>
           <a:xfrm>
-            <a:off x="1188720" y="1325880"/>
-            <a:ext cx="10271455" cy="612647"/>
+            <a:off x="1188720" y="1645920"/>
+            <a:ext cx="10271455" cy="886968"/>
           </a:xfrm>
           <a:prstGeom prst="rect">
             <a:avLst/>
@@ -4024,8 +4024,8 @@
         </p:nvSpPr>
         <p:spPr>
           <a:xfrm>
-            <a:off x="457200" y="2103120"/>
-            <a:ext cx="11277295" cy="777240"/>
+            <a:off x="457200" y="2697480"/>
+            <a:ext cx="11277295" cy="1051560"/>
           </a:xfrm>
           <a:prstGeom prst="roundRect">
             <a:avLst>
@@ -4069,7 +4069,7 @@
         </p:nvSpPr>
         <p:spPr>
           <a:xfrm>
-            <a:off x="594360" y="2272284"/>
+            <a:off x="594360" y="3003804"/>
             <a:ext cx="438912" cy="438912"/>
           </a:xfrm>
           <a:prstGeom prst="roundRect">
@@ -4114,7 +4114,7 @@
         </p:nvSpPr>
         <p:spPr>
           <a:xfrm>
-            <a:off x="594360" y="2272284"/>
+            <a:off x="594360" y="3003804"/>
             <a:ext cx="438912" cy="438912"/>
           </a:xfrm>
           <a:prstGeom prst="rect">
@@ -4147,8 +4147,8 @@
         </p:nvSpPr>
         <p:spPr>
           <a:xfrm>
-            <a:off x="1188720" y="2194560"/>
-            <a:ext cx="10271455" cy="612647"/>
+            <a:off x="1188720" y="2788920"/>
+            <a:ext cx="10271455" cy="886968"/>
           </a:xfrm>
           <a:prstGeom prst="rect">
             <a:avLst/>
@@ -4179,8 +4179,8 @@
         </p:nvSpPr>
         <p:spPr>
           <a:xfrm>
-            <a:off x="457200" y="2971800"/>
-            <a:ext cx="11277295" cy="777240"/>
+            <a:off x="457200" y="3840480"/>
+            <a:ext cx="11277295" cy="1051560"/>
           </a:xfrm>
           <a:prstGeom prst="roundRect">
             <a:avLst>
@@ -4224,7 +4224,7 @@
         </p:nvSpPr>
         <p:spPr>
           <a:xfrm>
-            <a:off x="594360" y="3140964"/>
+            <a:off x="594360" y="4146804"/>
             <a:ext cx="438912" cy="438912"/>
           </a:xfrm>
           <a:prstGeom prst="roundRect">
@@ -4269,7 +4269,7 @@
         </p:nvSpPr>
         <p:spPr>
           <a:xfrm>
-            <a:off x="594360" y="3140964"/>
+            <a:off x="594360" y="4146804"/>
             <a:ext cx="438912" cy="438912"/>
           </a:xfrm>
           <a:prstGeom prst="rect">
@@ -4302,8 +4302,8 @@
         </p:nvSpPr>
         <p:spPr>
           <a:xfrm>
-            <a:off x="1188720" y="3063240"/>
-            <a:ext cx="10271455" cy="612647"/>
+            <a:off x="1188720" y="3931920"/>
+            <a:ext cx="10271455" cy="886968"/>
           </a:xfrm>
           <a:prstGeom prst="rect">
             <a:avLst/>
@@ -4334,8 +4334,8 @@
         </p:nvSpPr>
         <p:spPr>
           <a:xfrm>
-            <a:off x="457200" y="3840479"/>
-            <a:ext cx="11277295" cy="777240"/>
+            <a:off x="457200" y="4983480"/>
+            <a:ext cx="11277295" cy="1051560"/>
           </a:xfrm>
           <a:prstGeom prst="roundRect">
             <a:avLst>
@@ -4379,7 +4379,7 @@
         </p:nvSpPr>
         <p:spPr>
           <a:xfrm>
-            <a:off x="594360" y="4009643"/>
+            <a:off x="594360" y="5289804"/>
             <a:ext cx="438912" cy="438912"/>
           </a:xfrm>
           <a:prstGeom prst="roundRect">
@@ -4424,7 +4424,7 @@
         </p:nvSpPr>
         <p:spPr>
           <a:xfrm>
-            <a:off x="594360" y="4009643"/>
+            <a:off x="594360" y="5289804"/>
             <a:ext cx="438912" cy="438912"/>
           </a:xfrm>
           <a:prstGeom prst="rect">
@@ -4457,8 +4457,8 @@
         </p:nvSpPr>
         <p:spPr>
           <a:xfrm>
-            <a:off x="1188720" y="3931919"/>
-            <a:ext cx="10271455" cy="612647"/>
+            <a:off x="1188720" y="5074920"/>
+            <a:ext cx="10271455" cy="886968"/>
           </a:xfrm>
           <a:prstGeom prst="rect">
             <a:avLst/>
@@ -9059,8 +9059,8 @@
         </p:blipFill>
         <p:spPr>
           <a:xfrm>
-            <a:off x="1743913" y="1792224"/>
-            <a:ext cx="1051560" cy="1051560"/>
+            <a:off x="1643329" y="1847087"/>
+            <a:ext cx="1252728" cy="1252728"/>
           </a:xfrm>
           <a:prstGeom prst="rect">
             <a:avLst/>
@@ -9075,8 +9075,8 @@
         </p:nvSpPr>
         <p:spPr>
           <a:xfrm>
-            <a:off x="530352" y="2916936"/>
-            <a:ext cx="3478682" cy="502920"/>
+            <a:off x="530352" y="3191256"/>
+            <a:ext cx="3478682" cy="621792"/>
           </a:xfrm>
           <a:prstGeom prst="rect">
             <a:avLst/>
@@ -9263,8 +9263,8 @@
         </p:blipFill>
         <p:spPr>
           <a:xfrm>
-            <a:off x="5570067" y="1792224"/>
-            <a:ext cx="1051560" cy="1051560"/>
+            <a:off x="5469483" y="1847087"/>
+            <a:ext cx="1252728" cy="1252728"/>
           </a:xfrm>
           <a:prstGeom prst="rect">
             <a:avLst/>
@@ -9279,8 +9279,8 @@
         </p:nvSpPr>
         <p:spPr>
           <a:xfrm>
-            <a:off x="4356506" y="2916936"/>
-            <a:ext cx="3478682" cy="502920"/>
+            <a:off x="4356506" y="3191256"/>
+            <a:ext cx="3478682" cy="621792"/>
           </a:xfrm>
           <a:prstGeom prst="rect">
             <a:avLst/>
@@ -9467,8 +9467,8 @@
         </p:blipFill>
         <p:spPr>
           <a:xfrm>
-            <a:off x="9396222" y="1792224"/>
-            <a:ext cx="1051560" cy="1051560"/>
+            <a:off x="9295638" y="1847087"/>
+            <a:ext cx="1252728" cy="1252728"/>
           </a:xfrm>
           <a:prstGeom prst="rect">
             <a:avLst/>
@@ -9483,8 +9483,8 @@
         </p:nvSpPr>
         <p:spPr>
           <a:xfrm>
-            <a:off x="8182660" y="2916936"/>
-            <a:ext cx="3478682" cy="502920"/>
+            <a:off x="8182660" y="3191256"/>
+            <a:ext cx="3478682" cy="621792"/>
           </a:xfrm>
           <a:prstGeom prst="rect">
             <a:avLst/>

--- a/Bases de Datos II/Clases/Clase 2 - Administracion de bases de datos/Presentacion.pptx
+++ b/Bases de Datos II/Clases/Clase 2 - Administracion de bases de datos/Presentacion.pptx
@@ -20,6 +20,7 @@
     <p:sldId id="268" r:id="rId19"/>
     <p:sldId id="269" r:id="rId20"/>
     <p:sldId id="270" r:id="rId21"/>
+    <p:sldId id="271" r:id="rId22"/>
   </p:sldIdLst>
   <p:sldSz cx="12191695" cy="6858000" type="screen4x3"/>
   <p:notesSz cx="6858000" cy="9144000"/>
@@ -3620,7 +3621,7 @@
                 </a:solidFill>
                 <a:latin typeface="Calibri"/>
               </a:rPr>
-              <a:t>Taller PI VetCare — escenario / datos de partida</a:t>
+              <a:t>Taller PI VetCare — objetivo y criterios</a:t>
             </a:r>
           </a:p>
         </p:txBody>
@@ -3653,13 +3654,31 @@
               </a:spcAft>
             </a:pPr>
             <a:r>
-              <a:rPr sz="1600" b="0" i="0">
+              <a:rPr sz="1500" b="0" i="0">
                 <a:solidFill>
                   <a:srgbClr val="333333"/>
                 </a:solidFill>
                 <a:latin typeface="Calibri"/>
               </a:rPr>
-              <a:t>–   Roles: ADMIN_BD, RECEPCION, VETERINARIO, AUDITOR.</a:t>
+              <a:t>–   </a:t>
+            </a:r>
+            <a:r>
+              <a:rPr sz="1500" b="1" i="0">
+                <a:solidFill>
+                  <a:srgbClr val="333333"/>
+                </a:solidFill>
+                <a:latin typeface="Calibri"/>
+              </a:rPr>
+              <a:t>Objetivo:</a:t>
+            </a:r>
+            <a:r>
+              <a:rPr sz="1500" b="0" i="0">
+                <a:solidFill>
+                  <a:srgbClr val="333333"/>
+                </a:solidFill>
+                <a:latin typeface="Calibri"/>
+              </a:rPr>
+              <a:t> Plan de roles/privilegios VetCare (&gt;=4 roles).</a:t>
             </a:r>
           </a:p>
           <a:p>
@@ -3669,13 +3688,167 @@
               </a:spcAft>
             </a:pPr>
             <a:r>
-              <a:rPr sz="1600" b="0" i="0">
+              <a:rPr sz="1500" b="0" i="0">
                 <a:solidFill>
                   <a:srgbClr val="333333"/>
                 </a:solidFill>
                 <a:latin typeface="Calibri"/>
               </a:rPr>
-              <a:t>–   Live SQL / Docs.</a:t>
+              <a:t>–   </a:t>
+            </a:r>
+            <a:r>
+              <a:rPr sz="1500" b="1" i="0">
+                <a:solidFill>
+                  <a:srgbClr val="333333"/>
+                </a:solidFill>
+                <a:latin typeface="Calibri"/>
+              </a:rPr>
+              <a:t>Exito:</a:t>
+            </a:r>
+            <a:r>
+              <a:rPr sz="1500" b="0" i="0">
+                <a:solidFill>
+                  <a:srgbClr val="333333"/>
+                </a:solidFill>
+                <a:latin typeface="Calibri"/>
+              </a:rPr>
+              <a:t> &gt;=4 roles.</a:t>
+            </a:r>
+          </a:p>
+          <a:p>
+            <a:pPr>
+              <a:spcAft>
+                <a:spcPts val="800"/>
+              </a:spcAft>
+            </a:pPr>
+            <a:r>
+              <a:rPr sz="1500" b="0" i="0">
+                <a:solidFill>
+                  <a:srgbClr val="333333"/>
+                </a:solidFill>
+                <a:latin typeface="Calibri"/>
+              </a:rPr>
+              <a:t>–   </a:t>
+            </a:r>
+            <a:r>
+              <a:rPr sz="1500" b="1" i="0">
+                <a:solidFill>
+                  <a:srgbClr val="333333"/>
+                </a:solidFill>
+                <a:latin typeface="Calibri"/>
+              </a:rPr>
+              <a:t>Exito:</a:t>
+            </a:r>
+            <a:r>
+              <a:rPr sz="1500" b="0" i="0">
+                <a:solidFill>
+                  <a:srgbClr val="333333"/>
+                </a:solidFill>
+                <a:latin typeface="Calibri"/>
+              </a:rPr>
+              <a:t> Matriz privilegio x objeto.</a:t>
+            </a:r>
+          </a:p>
+          <a:p>
+            <a:pPr>
+              <a:spcAft>
+                <a:spcPts val="800"/>
+              </a:spcAft>
+            </a:pPr>
+            <a:r>
+              <a:rPr sz="1500" b="0" i="0">
+                <a:solidFill>
+                  <a:srgbClr val="333333"/>
+                </a:solidFill>
+                <a:latin typeface="Calibri"/>
+              </a:rPr>
+              <a:t>–   </a:t>
+            </a:r>
+            <a:r>
+              <a:rPr sz="1500" b="1" i="0">
+                <a:solidFill>
+                  <a:srgbClr val="333333"/>
+                </a:solidFill>
+                <a:latin typeface="Calibri"/>
+              </a:rPr>
+              <a:t>Exito:</a:t>
+            </a:r>
+            <a:r>
+              <a:rPr sz="1500" b="0" i="0">
+                <a:solidFill>
+                  <a:srgbClr val="333333"/>
+                </a:solidFill>
+                <a:latin typeface="Calibri"/>
+              </a:rPr>
+              <a:t> Justificación least privilege.</a:t>
+            </a:r>
+          </a:p>
+          <a:p>
+            <a:pPr>
+              <a:spcAft>
+                <a:spcPts val="800"/>
+              </a:spcAft>
+            </a:pPr>
+            <a:r>
+              <a:rPr sz="1500" b="0" i="0">
+                <a:solidFill>
+                  <a:srgbClr val="333333"/>
+                </a:solidFill>
+                <a:latin typeface="Calibri"/>
+              </a:rPr>
+              <a:t>–   </a:t>
+            </a:r>
+            <a:r>
+              <a:rPr sz="1500" b="1" i="0">
+                <a:solidFill>
+                  <a:srgbClr val="333333"/>
+                </a:solidFill>
+                <a:latin typeface="Calibri"/>
+              </a:rPr>
+              <a:t>Exito:</a:t>
+            </a:r>
+            <a:r>
+              <a:rPr sz="1500" b="0" i="0">
+                <a:solidFill>
+                  <a:srgbClr val="333333"/>
+                </a:solidFill>
+                <a:latin typeface="Calibri"/>
+              </a:rPr>
+              <a:t> 1 página política.</a:t>
+            </a:r>
+          </a:p>
+          <a:p>
+            <a:pPr>
+              <a:spcAft>
+                <a:spcPts val="800"/>
+              </a:spcAft>
+            </a:pPr>
+            <a:r>
+              <a:rPr sz="1500" b="0" i="0">
+                <a:solidFill>
+                  <a:srgbClr val="333333"/>
+                </a:solidFill>
+                <a:latin typeface="Calibri"/>
+              </a:rPr>
+              <a:t>–   </a:t>
+            </a:r>
+            <a:r>
+              <a:rPr sz="1500" b="1" i="0">
+                <a:solidFill>
+                  <a:srgbClr val="333333"/>
+                </a:solidFill>
+                <a:latin typeface="Calibri"/>
+              </a:rPr>
+              <a:t>Exito:</a:t>
+            </a:r>
+            <a:r>
+              <a:rPr sz="1500" b="0" i="0">
+                <a:solidFill>
+                  <a:srgbClr val="333333"/>
+                </a:solidFill>
+                <a:latin typeface="Calibri"/>
+              </a:rPr>
+              <a:t> Domingo 23:59.</a:t>
             </a:r>
           </a:p>
         </p:txBody>
@@ -3856,111 +4029,21 @@
                 </a:solidFill>
                 <a:latin typeface="Calibri"/>
               </a:rPr>
-              <a:t>Taller PI VetCare — pasos guiados</a:t>
-            </a:r>
-          </a:p>
-        </p:txBody>
-      </p:sp>
-      <p:sp>
-        <p:nvSpPr>
-          <p:cNvPr id="5" name="Rounded Rectangle 4"/>
-          <p:cNvSpPr/>
-          <p:nvPr/>
-        </p:nvSpPr>
-        <p:spPr>
-          <a:xfrm>
-            <a:off x="457200" y="1554480"/>
-            <a:ext cx="11277295" cy="1051560"/>
-          </a:xfrm>
-          <a:prstGeom prst="roundRect">
-            <a:avLst>
-              <a:gd name="adj" fmla="val 12000"/>
-            </a:avLst>
-          </a:prstGeom>
-          <a:solidFill>
-            <a:srgbClr val="F2F2F2"/>
-          </a:solidFill>
-          <a:ln>
-            <a:noFill/>
-          </a:ln>
-        </p:spPr>
-        <p:style>
-          <a:lnRef idx="1">
-            <a:schemeClr val="accent1"/>
-          </a:lnRef>
-          <a:fillRef idx="3">
-            <a:schemeClr val="accent1"/>
-          </a:fillRef>
-          <a:effectRef idx="2">
-            <a:schemeClr val="accent1"/>
-          </a:effectRef>
-          <a:fontRef idx="minor">
-            <a:schemeClr val="lt1"/>
-          </a:fontRef>
-        </p:style>
-        <p:txBody>
-          <a:bodyPr rtlCol="0" anchor="ctr"/>
-          <a:lstStyle/>
-          <a:p>
-            <a:pPr algn="ctr"/>
-          </a:p>
-        </p:txBody>
-      </p:sp>
-      <p:sp>
-        <p:nvSpPr>
-          <p:cNvPr id="6" name="Rounded Rectangle 5"/>
-          <p:cNvSpPr/>
-          <p:nvPr/>
-        </p:nvSpPr>
-        <p:spPr>
-          <a:xfrm>
-            <a:off x="594360" y="1860804"/>
-            <a:ext cx="438912" cy="438912"/>
-          </a:xfrm>
-          <a:prstGeom prst="roundRect">
-            <a:avLst>
-              <a:gd name="adj" fmla="val 12000"/>
-            </a:avLst>
-          </a:prstGeom>
-          <a:solidFill>
-            <a:srgbClr val="095292"/>
-          </a:solidFill>
-          <a:ln>
-            <a:noFill/>
-          </a:ln>
-        </p:spPr>
-        <p:style>
-          <a:lnRef idx="1">
-            <a:schemeClr val="accent1"/>
-          </a:lnRef>
-          <a:fillRef idx="3">
-            <a:schemeClr val="accent1"/>
-          </a:fillRef>
-          <a:effectRef idx="2">
-            <a:schemeClr val="accent1"/>
-          </a:effectRef>
-          <a:fontRef idx="minor">
-            <a:schemeClr val="lt1"/>
-          </a:fontRef>
-        </p:style>
-        <p:txBody>
-          <a:bodyPr rtlCol="0" anchor="ctr"/>
-          <a:lstStyle/>
-          <a:p>
-            <a:pPr algn="ctr"/>
-          </a:p>
-        </p:txBody>
-      </p:sp>
-      <p:sp>
-        <p:nvSpPr>
-          <p:cNvPr id="7" name="TextBox 6"/>
+              <a:t>Taller PI VetCare — escenario / datos de partida</a:t>
+            </a:r>
+          </a:p>
+        </p:txBody>
+      </p:sp>
+      <p:sp>
+        <p:nvSpPr>
+          <p:cNvPr id="5" name="TextBox 4"/>
           <p:cNvSpPr txBox="1"/>
           <p:nvPr/>
         </p:nvSpPr>
         <p:spPr>
           <a:xfrm>
-            <a:off x="594360" y="1860804"/>
-            <a:ext cx="438912" cy="438912"/>
+            <a:off x="457200" y="1170432"/>
+            <a:ext cx="11277295" cy="5230368"/>
           </a:xfrm>
           <a:prstGeom prst="rect">
             <a:avLst/>
@@ -3968,522 +4051,47 @@
           <a:noFill/>
         </p:spPr>
         <p:txBody>
-          <a:bodyPr wrap="square" anchor="ctr"/>
-          <a:lstStyle/>
-          <a:p>
-            <a:pPr algn="ctr"/>
-            <a:r>
-              <a:rPr sz="1600" b="1" i="0">
-                <a:solidFill>
-                  <a:srgbClr val="FFFFFF"/>
-                </a:solidFill>
-                <a:latin typeface="Calibri"/>
-              </a:rPr>
-              <a:t>1</a:t>
-            </a:r>
-          </a:p>
-        </p:txBody>
-      </p:sp>
-      <p:sp>
-        <p:nvSpPr>
-          <p:cNvPr id="8" name="TextBox 7"/>
-          <p:cNvSpPr txBox="1"/>
-          <p:nvPr/>
-        </p:nvSpPr>
-        <p:spPr>
-          <a:xfrm>
-            <a:off x="1188720" y="1645920"/>
-            <a:ext cx="10271455" cy="886968"/>
-          </a:xfrm>
-          <a:prstGeom prst="rect">
-            <a:avLst/>
-          </a:prstGeom>
-          <a:noFill/>
-        </p:spPr>
-        <p:txBody>
-          <a:bodyPr wrap="square" anchor="ctr"/>
-          <a:lstStyle/>
-          <a:p>
-            <a:r>
-              <a:rPr sz="1500" b="1" i="0">
-                <a:solidFill>
-                  <a:srgbClr val="095292"/>
-                </a:solidFill>
-                <a:latin typeface="Calibri"/>
-              </a:rPr>
-              <a:t>Definir &gt;=4 roles (ADMIN_BD, RECEPCION, VETERINARIO, AUDITOR).</a:t>
-            </a:r>
-          </a:p>
-        </p:txBody>
-      </p:sp>
-      <p:sp>
-        <p:nvSpPr>
-          <p:cNvPr id="9" name="Rounded Rectangle 8"/>
-          <p:cNvSpPr/>
-          <p:nvPr/>
-        </p:nvSpPr>
-        <p:spPr>
-          <a:xfrm>
-            <a:off x="457200" y="2697480"/>
-            <a:ext cx="11277295" cy="1051560"/>
-          </a:xfrm>
-          <a:prstGeom prst="roundRect">
-            <a:avLst>
-              <a:gd name="adj" fmla="val 12000"/>
-            </a:avLst>
-          </a:prstGeom>
-          <a:solidFill>
-            <a:srgbClr val="E8F4FA"/>
-          </a:solidFill>
-          <a:ln>
-            <a:noFill/>
-          </a:ln>
-        </p:spPr>
-        <p:style>
-          <a:lnRef idx="1">
-            <a:schemeClr val="accent1"/>
-          </a:lnRef>
-          <a:fillRef idx="3">
-            <a:schemeClr val="accent1"/>
-          </a:fillRef>
-          <a:effectRef idx="2">
-            <a:schemeClr val="accent1"/>
-          </a:effectRef>
-          <a:fontRef idx="minor">
-            <a:schemeClr val="lt1"/>
-          </a:fontRef>
-        </p:style>
-        <p:txBody>
-          <a:bodyPr rtlCol="0" anchor="ctr"/>
-          <a:lstStyle/>
-          <a:p>
-            <a:pPr algn="ctr"/>
-          </a:p>
-        </p:txBody>
-      </p:sp>
-      <p:sp>
-        <p:nvSpPr>
-          <p:cNvPr id="10" name="Rounded Rectangle 9"/>
-          <p:cNvSpPr/>
-          <p:nvPr/>
-        </p:nvSpPr>
-        <p:spPr>
-          <a:xfrm>
-            <a:off x="594360" y="3003804"/>
-            <a:ext cx="438912" cy="438912"/>
-          </a:xfrm>
-          <a:prstGeom prst="roundRect">
-            <a:avLst>
-              <a:gd name="adj" fmla="val 12000"/>
-            </a:avLst>
-          </a:prstGeom>
-          <a:solidFill>
-            <a:srgbClr val="095292"/>
-          </a:solidFill>
-          <a:ln>
-            <a:noFill/>
-          </a:ln>
-        </p:spPr>
-        <p:style>
-          <a:lnRef idx="1">
-            <a:schemeClr val="accent1"/>
-          </a:lnRef>
-          <a:fillRef idx="3">
-            <a:schemeClr val="accent1"/>
-          </a:fillRef>
-          <a:effectRef idx="2">
-            <a:schemeClr val="accent1"/>
-          </a:effectRef>
-          <a:fontRef idx="minor">
-            <a:schemeClr val="lt1"/>
-          </a:fontRef>
-        </p:style>
-        <p:txBody>
-          <a:bodyPr rtlCol="0" anchor="ctr"/>
-          <a:lstStyle/>
-          <a:p>
-            <a:pPr algn="ctr"/>
-          </a:p>
-        </p:txBody>
-      </p:sp>
-      <p:sp>
-        <p:nvSpPr>
-          <p:cNvPr id="11" name="TextBox 10"/>
-          <p:cNvSpPr txBox="1"/>
-          <p:nvPr/>
-        </p:nvSpPr>
-        <p:spPr>
-          <a:xfrm>
-            <a:off x="594360" y="3003804"/>
-            <a:ext cx="438912" cy="438912"/>
-          </a:xfrm>
-          <a:prstGeom prst="rect">
-            <a:avLst/>
-          </a:prstGeom>
-          <a:noFill/>
-        </p:spPr>
-        <p:txBody>
-          <a:bodyPr wrap="square" anchor="ctr"/>
-          <a:lstStyle/>
-          <a:p>
-            <a:pPr algn="ctr"/>
-            <a:r>
-              <a:rPr sz="1600" b="1" i="0">
-                <a:solidFill>
-                  <a:srgbClr val="FFFFFF"/>
-                </a:solidFill>
-                <a:latin typeface="Calibri"/>
-              </a:rPr>
-              <a:t>2</a:t>
-            </a:r>
-          </a:p>
-        </p:txBody>
-      </p:sp>
-      <p:sp>
-        <p:nvSpPr>
-          <p:cNvPr id="12" name="TextBox 11"/>
-          <p:cNvSpPr txBox="1"/>
-          <p:nvPr/>
-        </p:nvSpPr>
-        <p:spPr>
-          <a:xfrm>
-            <a:off x="1188720" y="2788920"/>
-            <a:ext cx="10271455" cy="886968"/>
-          </a:xfrm>
-          <a:prstGeom prst="rect">
-            <a:avLst/>
-          </a:prstGeom>
-          <a:noFill/>
-        </p:spPr>
-        <p:txBody>
-          <a:bodyPr wrap="square" anchor="ctr"/>
-          <a:lstStyle/>
-          <a:p>
-            <a:r>
-              <a:rPr sz="1500" b="1" i="0">
-                <a:solidFill>
-                  <a:srgbClr val="095292"/>
-                </a:solidFill>
-                <a:latin typeface="Calibri"/>
-              </a:rPr>
-              <a:t>Matriz SELECT/INSERT/UPDATE/DELETE/EXECUTE por objeto clave.</a:t>
-            </a:r>
-          </a:p>
-        </p:txBody>
-      </p:sp>
-      <p:sp>
-        <p:nvSpPr>
-          <p:cNvPr id="13" name="Rounded Rectangle 12"/>
-          <p:cNvSpPr/>
-          <p:nvPr/>
-        </p:nvSpPr>
-        <p:spPr>
-          <a:xfrm>
-            <a:off x="457200" y="3840480"/>
-            <a:ext cx="11277295" cy="1051560"/>
-          </a:xfrm>
-          <a:prstGeom prst="roundRect">
-            <a:avLst>
-              <a:gd name="adj" fmla="val 12000"/>
-            </a:avLst>
-          </a:prstGeom>
-          <a:solidFill>
-            <a:srgbClr val="F2F2F2"/>
-          </a:solidFill>
-          <a:ln>
-            <a:noFill/>
-          </a:ln>
-        </p:spPr>
-        <p:style>
-          <a:lnRef idx="1">
-            <a:schemeClr val="accent1"/>
-          </a:lnRef>
-          <a:fillRef idx="3">
-            <a:schemeClr val="accent1"/>
-          </a:fillRef>
-          <a:effectRef idx="2">
-            <a:schemeClr val="accent1"/>
-          </a:effectRef>
-          <a:fontRef idx="minor">
-            <a:schemeClr val="lt1"/>
-          </a:fontRef>
-        </p:style>
-        <p:txBody>
-          <a:bodyPr rtlCol="0" anchor="ctr"/>
-          <a:lstStyle/>
-          <a:p>
-            <a:pPr algn="ctr"/>
-          </a:p>
-        </p:txBody>
-      </p:sp>
-      <p:sp>
-        <p:nvSpPr>
-          <p:cNvPr id="14" name="Rounded Rectangle 13"/>
-          <p:cNvSpPr/>
-          <p:nvPr/>
-        </p:nvSpPr>
-        <p:spPr>
-          <a:xfrm>
-            <a:off x="594360" y="4146804"/>
-            <a:ext cx="438912" cy="438912"/>
-          </a:xfrm>
-          <a:prstGeom prst="roundRect">
-            <a:avLst>
-              <a:gd name="adj" fmla="val 12000"/>
-            </a:avLst>
-          </a:prstGeom>
-          <a:solidFill>
-            <a:srgbClr val="095292"/>
-          </a:solidFill>
-          <a:ln>
-            <a:noFill/>
-          </a:ln>
-        </p:spPr>
-        <p:style>
-          <a:lnRef idx="1">
-            <a:schemeClr val="accent1"/>
-          </a:lnRef>
-          <a:fillRef idx="3">
-            <a:schemeClr val="accent1"/>
-          </a:fillRef>
-          <a:effectRef idx="2">
-            <a:schemeClr val="accent1"/>
-          </a:effectRef>
-          <a:fontRef idx="minor">
-            <a:schemeClr val="lt1"/>
-          </a:fontRef>
-        </p:style>
-        <p:txBody>
-          <a:bodyPr rtlCol="0" anchor="ctr"/>
-          <a:lstStyle/>
-          <a:p>
-            <a:pPr algn="ctr"/>
-          </a:p>
-        </p:txBody>
-      </p:sp>
-      <p:sp>
-        <p:nvSpPr>
-          <p:cNvPr id="15" name="TextBox 14"/>
-          <p:cNvSpPr txBox="1"/>
-          <p:nvPr/>
-        </p:nvSpPr>
-        <p:spPr>
-          <a:xfrm>
-            <a:off x="594360" y="4146804"/>
-            <a:ext cx="438912" cy="438912"/>
-          </a:xfrm>
-          <a:prstGeom prst="rect">
-            <a:avLst/>
-          </a:prstGeom>
-          <a:noFill/>
-        </p:spPr>
-        <p:txBody>
-          <a:bodyPr wrap="square" anchor="ctr"/>
-          <a:lstStyle/>
-          <a:p>
-            <a:pPr algn="ctr"/>
-            <a:r>
-              <a:rPr sz="1600" b="1" i="0">
-                <a:solidFill>
-                  <a:srgbClr val="FFFFFF"/>
-                </a:solidFill>
-                <a:latin typeface="Calibri"/>
-              </a:rPr>
-              <a:t>3</a:t>
-            </a:r>
-          </a:p>
-        </p:txBody>
-      </p:sp>
-      <p:sp>
-        <p:nvSpPr>
-          <p:cNvPr id="16" name="TextBox 15"/>
-          <p:cNvSpPr txBox="1"/>
-          <p:nvPr/>
-        </p:nvSpPr>
-        <p:spPr>
-          <a:xfrm>
-            <a:off x="1188720" y="3931920"/>
-            <a:ext cx="10271455" cy="886968"/>
-          </a:xfrm>
-          <a:prstGeom prst="rect">
-            <a:avLst/>
-          </a:prstGeom>
-          <a:noFill/>
-        </p:spPr>
-        <p:txBody>
-          <a:bodyPr wrap="square" anchor="ctr"/>
-          <a:lstStyle/>
-          <a:p>
-            <a:r>
-              <a:rPr sz="1500" b="1" i="0">
-                <a:solidFill>
-                  <a:srgbClr val="095292"/>
-                </a:solidFill>
-                <a:latin typeface="Calibri"/>
-              </a:rPr>
-              <a:t>Justificar privilegio minimo (least privilege).</a:t>
-            </a:r>
-          </a:p>
-        </p:txBody>
-      </p:sp>
-      <p:sp>
-        <p:nvSpPr>
-          <p:cNvPr id="17" name="Rounded Rectangle 16"/>
-          <p:cNvSpPr/>
-          <p:nvPr/>
-        </p:nvSpPr>
-        <p:spPr>
-          <a:xfrm>
-            <a:off x="457200" y="4983480"/>
-            <a:ext cx="11277295" cy="1051560"/>
-          </a:xfrm>
-          <a:prstGeom prst="roundRect">
-            <a:avLst>
-              <a:gd name="adj" fmla="val 12000"/>
-            </a:avLst>
-          </a:prstGeom>
-          <a:solidFill>
-            <a:srgbClr val="E8F4FA"/>
-          </a:solidFill>
-          <a:ln>
-            <a:noFill/>
-          </a:ln>
-        </p:spPr>
-        <p:style>
-          <a:lnRef idx="1">
-            <a:schemeClr val="accent1"/>
-          </a:lnRef>
-          <a:fillRef idx="3">
-            <a:schemeClr val="accent1"/>
-          </a:fillRef>
-          <a:effectRef idx="2">
-            <a:schemeClr val="accent1"/>
-          </a:effectRef>
-          <a:fontRef idx="minor">
-            <a:schemeClr val="lt1"/>
-          </a:fontRef>
-        </p:style>
-        <p:txBody>
-          <a:bodyPr rtlCol="0" anchor="ctr"/>
-          <a:lstStyle/>
-          <a:p>
-            <a:pPr algn="ctr"/>
-          </a:p>
-        </p:txBody>
-      </p:sp>
-      <p:sp>
-        <p:nvSpPr>
-          <p:cNvPr id="18" name="Rounded Rectangle 17"/>
-          <p:cNvSpPr/>
-          <p:nvPr/>
-        </p:nvSpPr>
-        <p:spPr>
-          <a:xfrm>
-            <a:off x="594360" y="5289804"/>
-            <a:ext cx="438912" cy="438912"/>
-          </a:xfrm>
-          <a:prstGeom prst="roundRect">
-            <a:avLst>
-              <a:gd name="adj" fmla="val 12000"/>
-            </a:avLst>
-          </a:prstGeom>
-          <a:solidFill>
-            <a:srgbClr val="095292"/>
-          </a:solidFill>
-          <a:ln>
-            <a:noFill/>
-          </a:ln>
-        </p:spPr>
-        <p:style>
-          <a:lnRef idx="1">
-            <a:schemeClr val="accent1"/>
-          </a:lnRef>
-          <a:fillRef idx="3">
-            <a:schemeClr val="accent1"/>
-          </a:fillRef>
-          <a:effectRef idx="2">
-            <a:schemeClr val="accent1"/>
-          </a:effectRef>
-          <a:fontRef idx="minor">
-            <a:schemeClr val="lt1"/>
-          </a:fontRef>
-        </p:style>
-        <p:txBody>
-          <a:bodyPr rtlCol="0" anchor="ctr"/>
-          <a:lstStyle/>
-          <a:p>
-            <a:pPr algn="ctr"/>
-          </a:p>
-        </p:txBody>
-      </p:sp>
-      <p:sp>
-        <p:nvSpPr>
-          <p:cNvPr id="19" name="TextBox 18"/>
-          <p:cNvSpPr txBox="1"/>
-          <p:nvPr/>
-        </p:nvSpPr>
-        <p:spPr>
-          <a:xfrm>
-            <a:off x="594360" y="5289804"/>
-            <a:ext cx="438912" cy="438912"/>
-          </a:xfrm>
-          <a:prstGeom prst="rect">
-            <a:avLst/>
-          </a:prstGeom>
-          <a:noFill/>
-        </p:spPr>
-        <p:txBody>
-          <a:bodyPr wrap="square" anchor="ctr"/>
-          <a:lstStyle/>
-          <a:p>
-            <a:pPr algn="ctr"/>
-            <a:r>
-              <a:rPr sz="1600" b="1" i="0">
-                <a:solidFill>
-                  <a:srgbClr val="FFFFFF"/>
-                </a:solidFill>
-                <a:latin typeface="Calibri"/>
-              </a:rPr>
-              <a:t>4</a:t>
-            </a:r>
-          </a:p>
-        </p:txBody>
-      </p:sp>
-      <p:sp>
-        <p:nvSpPr>
-          <p:cNvPr id="20" name="TextBox 19"/>
-          <p:cNvSpPr txBox="1"/>
-          <p:nvPr/>
-        </p:nvSpPr>
-        <p:spPr>
-          <a:xfrm>
-            <a:off x="1188720" y="5074920"/>
-            <a:ext cx="10271455" cy="886968"/>
-          </a:xfrm>
-          <a:prstGeom prst="rect">
-            <a:avLst/>
-          </a:prstGeom>
-          <a:noFill/>
-        </p:spPr>
-        <p:txBody>
-          <a:bodyPr wrap="square" anchor="ctr"/>
-          <a:lstStyle/>
-          <a:p>
-            <a:r>
-              <a:rPr sz="1500" b="1" i="0">
-                <a:solidFill>
-                  <a:srgbClr val="095292"/>
-                </a:solidFill>
-                <a:latin typeface="Calibri"/>
-              </a:rPr>
-              <a:t>Redactar 1 pagina: politica de altas/bajas de usuarios.</a:t>
-            </a:r>
-          </a:p>
-        </p:txBody>
-      </p:sp>
-      <p:sp>
-        <p:nvSpPr>
-          <p:cNvPr id="21" name="TextBox 20"/>
+          <a:bodyPr wrap="square">
+            <a:spAutoFit/>
+          </a:bodyPr>
+          <a:lstStyle/>
+          <a:p>
+            <a:pPr>
+              <a:spcAft>
+                <a:spcPts val="800"/>
+              </a:spcAft>
+            </a:pPr>
+            <a:r>
+              <a:rPr sz="1600" b="0" i="0">
+                <a:solidFill>
+                  <a:srgbClr val="333333"/>
+                </a:solidFill>
+                <a:latin typeface="Calibri"/>
+              </a:rPr>
+              <a:t>–   Roles: ADMIN_BD, RECEPCION, VETERINARIO, AUDITOR.</a:t>
+            </a:r>
+          </a:p>
+          <a:p>
+            <a:pPr>
+              <a:spcAft>
+                <a:spcPts val="800"/>
+              </a:spcAft>
+            </a:pPr>
+            <a:r>
+              <a:rPr sz="1600" b="0" i="0">
+                <a:solidFill>
+                  <a:srgbClr val="333333"/>
+                </a:solidFill>
+                <a:latin typeface="Calibri"/>
+              </a:rPr>
+              <a:t>–   Live SQL / Docs.</a:t>
+            </a:r>
+          </a:p>
+        </p:txBody>
+      </p:sp>
+      <p:sp>
+        <p:nvSpPr>
+          <p:cNvPr id="6" name="TextBox 5"/>
           <p:cNvSpPr txBox="1"/>
           <p:nvPr/>
         </p:nvSpPr>
@@ -4657,7 +4265,7 @@
                 </a:solidFill>
                 <a:latin typeface="Calibri"/>
               </a:rPr>
-              <a:t>Taller PI VetCare — pistas (checklist vacio)</a:t>
+              <a:t>Taller PI VetCare — pasos guiados</a:t>
             </a:r>
           </a:p>
         </p:txBody>
@@ -4670,8 +4278,8 @@
         </p:nvSpPr>
         <p:spPr>
           <a:xfrm>
-            <a:off x="457200" y="1261872"/>
-            <a:ext cx="11277295" cy="566928"/>
+            <a:off x="457200" y="1554480"/>
+            <a:ext cx="11277295" cy="1051560"/>
           </a:xfrm>
           <a:prstGeom prst="roundRect">
             <a:avLst>
@@ -4709,25 +4317,25 @@
       </p:sp>
       <p:sp>
         <p:nvSpPr>
-          <p:cNvPr id="6" name="Rectangle 5"/>
+          <p:cNvPr id="6" name="Rounded Rectangle 5"/>
           <p:cNvSpPr/>
           <p:nvPr/>
         </p:nvSpPr>
         <p:spPr>
           <a:xfrm>
-            <a:off x="640080" y="1408175"/>
-            <a:ext cx="274320" cy="274320"/>
-          </a:xfrm>
-          <a:prstGeom prst="rect">
-            <a:avLst/>
+            <a:off x="594360" y="1860804"/>
+            <a:ext cx="438912" cy="438912"/>
+          </a:xfrm>
+          <a:prstGeom prst="roundRect">
+            <a:avLst>
+              <a:gd name="adj" fmla="val 12000"/>
+            </a:avLst>
           </a:prstGeom>
           <a:solidFill>
-            <a:srgbClr val="FFFFFF"/>
+            <a:srgbClr val="095292"/>
           </a:solidFill>
           <a:ln>
-            <a:solidFill>
-              <a:srgbClr val="333333"/>
-            </a:solidFill>
+            <a:noFill/>
           </a:ln>
         </p:spPr>
         <p:style>
@@ -4754,20 +4362,87 @@
       </p:sp>
       <p:sp>
         <p:nvSpPr>
-          <p:cNvPr id="7" name="Rectangle 6"/>
+          <p:cNvPr id="7" name="TextBox 6"/>
+          <p:cNvSpPr txBox="1"/>
+          <p:nvPr/>
+        </p:nvSpPr>
+        <p:spPr>
+          <a:xfrm>
+            <a:off x="594360" y="1860804"/>
+            <a:ext cx="438912" cy="438912"/>
+          </a:xfrm>
+          <a:prstGeom prst="rect">
+            <a:avLst/>
+          </a:prstGeom>
+          <a:noFill/>
+        </p:spPr>
+        <p:txBody>
+          <a:bodyPr wrap="square" anchor="ctr"/>
+          <a:lstStyle/>
+          <a:p>
+            <a:pPr algn="ctr"/>
+            <a:r>
+              <a:rPr sz="1600" b="1" i="0">
+                <a:solidFill>
+                  <a:srgbClr val="FFFFFF"/>
+                </a:solidFill>
+                <a:latin typeface="Calibri"/>
+              </a:rPr>
+              <a:t>1</a:t>
+            </a:r>
+          </a:p>
+        </p:txBody>
+      </p:sp>
+      <p:sp>
+        <p:nvSpPr>
+          <p:cNvPr id="8" name="TextBox 7"/>
+          <p:cNvSpPr txBox="1"/>
+          <p:nvPr/>
+        </p:nvSpPr>
+        <p:spPr>
+          <a:xfrm>
+            <a:off x="1188720" y="1645920"/>
+            <a:ext cx="10271455" cy="886968"/>
+          </a:xfrm>
+          <a:prstGeom prst="rect">
+            <a:avLst/>
+          </a:prstGeom>
+          <a:noFill/>
+        </p:spPr>
+        <p:txBody>
+          <a:bodyPr wrap="square" anchor="ctr"/>
+          <a:lstStyle/>
+          <a:p>
+            <a:r>
+              <a:rPr sz="1500" b="1" i="0">
+                <a:solidFill>
+                  <a:srgbClr val="095292"/>
+                </a:solidFill>
+                <a:latin typeface="Calibri"/>
+              </a:rPr>
+              <a:t>Crear los 4 roles (admin_bd, recepcion, veterinario_rol, auditor) con GRANT/REVOKE que corran.</a:t>
+            </a:r>
+          </a:p>
+        </p:txBody>
+      </p:sp>
+      <p:sp>
+        <p:nvSpPr>
+          <p:cNvPr id="9" name="Rounded Rectangle 8"/>
           <p:cNvSpPr/>
           <p:nvPr/>
         </p:nvSpPr>
         <p:spPr>
           <a:xfrm>
-            <a:off x="640080" y="1408175"/>
-            <a:ext cx="73152" cy="274320"/>
-          </a:xfrm>
-          <a:prstGeom prst="rect">
-            <a:avLst/>
+            <a:off x="457200" y="2697480"/>
+            <a:ext cx="11277295" cy="1051560"/>
+          </a:xfrm>
+          <a:prstGeom prst="roundRect">
+            <a:avLst>
+              <a:gd name="adj" fmla="val 12000"/>
+            </a:avLst>
           </a:prstGeom>
           <a:solidFill>
-            <a:srgbClr val="269CCB"/>
+            <a:srgbClr val="E8F4FA"/>
           </a:solidFill>
           <a:ln>
             <a:noFill/>
@@ -4797,14 +4472,59 @@
       </p:sp>
       <p:sp>
         <p:nvSpPr>
-          <p:cNvPr id="8" name="TextBox 7"/>
+          <p:cNvPr id="10" name="Rounded Rectangle 9"/>
+          <p:cNvSpPr/>
+          <p:nvPr/>
+        </p:nvSpPr>
+        <p:spPr>
+          <a:xfrm>
+            <a:off x="594360" y="3003804"/>
+            <a:ext cx="438912" cy="438912"/>
+          </a:xfrm>
+          <a:prstGeom prst="roundRect">
+            <a:avLst>
+              <a:gd name="adj" fmla="val 12000"/>
+            </a:avLst>
+          </a:prstGeom>
+          <a:solidFill>
+            <a:srgbClr val="095292"/>
+          </a:solidFill>
+          <a:ln>
+            <a:noFill/>
+          </a:ln>
+        </p:spPr>
+        <p:style>
+          <a:lnRef idx="1">
+            <a:schemeClr val="accent1"/>
+          </a:lnRef>
+          <a:fillRef idx="3">
+            <a:schemeClr val="accent1"/>
+          </a:fillRef>
+          <a:effectRef idx="2">
+            <a:schemeClr val="accent1"/>
+          </a:effectRef>
+          <a:fontRef idx="minor">
+            <a:schemeClr val="lt1"/>
+          </a:fontRef>
+        </p:style>
+        <p:txBody>
+          <a:bodyPr rtlCol="0" anchor="ctr"/>
+          <a:lstStyle/>
+          <a:p>
+            <a:pPr algn="ctr"/>
+          </a:p>
+        </p:txBody>
+      </p:sp>
+      <p:sp>
+        <p:nvSpPr>
+          <p:cNvPr id="11" name="TextBox 10"/>
           <p:cNvSpPr txBox="1"/>
           <p:nvPr/>
         </p:nvSpPr>
         <p:spPr>
           <a:xfrm>
-            <a:off x="1097280" y="1353312"/>
-            <a:ext cx="10362895" cy="402336"/>
+            <a:off x="594360" y="3003804"/>
+            <a:ext cx="438912" cy="438912"/>
           </a:xfrm>
           <a:prstGeom prst="rect">
             <a:avLst/>
@@ -4815,28 +4535,61 @@
           <a:bodyPr wrap="square" anchor="ctr"/>
           <a:lstStyle/>
           <a:p>
-            <a:r>
-              <a:rPr sz="1500" b="0" i="0">
-                <a:solidFill>
-                  <a:srgbClr val="333333"/>
-                </a:solidFill>
-                <a:latin typeface="Calibri"/>
-              </a:rPr>
-              <a:t>□ Recepción con DELETE historial? (no)</a:t>
-            </a:r>
-          </a:p>
-        </p:txBody>
-      </p:sp>
-      <p:sp>
-        <p:nvSpPr>
-          <p:cNvPr id="9" name="Rounded Rectangle 8"/>
+            <a:pPr algn="ctr"/>
+            <a:r>
+              <a:rPr sz="1600" b="1" i="0">
+                <a:solidFill>
+                  <a:srgbClr val="FFFFFF"/>
+                </a:solidFill>
+                <a:latin typeface="Calibri"/>
+              </a:rPr>
+              <a:t>2</a:t>
+            </a:r>
+          </a:p>
+        </p:txBody>
+      </p:sp>
+      <p:sp>
+        <p:nvSpPr>
+          <p:cNvPr id="12" name="TextBox 11"/>
+          <p:cNvSpPr txBox="1"/>
+          <p:nvPr/>
+        </p:nvSpPr>
+        <p:spPr>
+          <a:xfrm>
+            <a:off x="1188720" y="2788920"/>
+            <a:ext cx="10271455" cy="886968"/>
+          </a:xfrm>
+          <a:prstGeom prst="rect">
+            <a:avLst/>
+          </a:prstGeom>
+          <a:noFill/>
+        </p:spPr>
+        <p:txBody>
+          <a:bodyPr wrap="square" anchor="ctr"/>
+          <a:lstStyle/>
+          <a:p>
+            <a:r>
+              <a:rPr sz="1500" b="1" i="0">
+                <a:solidFill>
+                  <a:srgbClr val="095292"/>
+                </a:solidFill>
+                <a:latin typeface="Calibri"/>
+              </a:rPr>
+              <a:t>Recortar la superficie: vista v_agenda_recepcion + privilegio por columna sobre dueno.</a:t>
+            </a:r>
+          </a:p>
+        </p:txBody>
+      </p:sp>
+      <p:sp>
+        <p:nvSpPr>
+          <p:cNvPr id="13" name="Rounded Rectangle 12"/>
           <p:cNvSpPr/>
           <p:nvPr/>
         </p:nvSpPr>
         <p:spPr>
           <a:xfrm>
-            <a:off x="457200" y="1938528"/>
-            <a:ext cx="11277295" cy="566928"/>
+            <a:off x="457200" y="3840480"/>
+            <a:ext cx="11277295" cy="1051560"/>
           </a:xfrm>
           <a:prstGeom prst="roundRect">
             <a:avLst>
@@ -4874,25 +4627,25 @@
       </p:sp>
       <p:sp>
         <p:nvSpPr>
-          <p:cNvPr id="10" name="Rectangle 9"/>
+          <p:cNvPr id="14" name="Rounded Rectangle 13"/>
           <p:cNvSpPr/>
           <p:nvPr/>
         </p:nvSpPr>
         <p:spPr>
           <a:xfrm>
-            <a:off x="640080" y="2084832"/>
-            <a:ext cx="274320" cy="274320"/>
-          </a:xfrm>
-          <a:prstGeom prst="rect">
-            <a:avLst/>
+            <a:off x="594360" y="4146804"/>
+            <a:ext cx="438912" cy="438912"/>
+          </a:xfrm>
+          <a:prstGeom prst="roundRect">
+            <a:avLst>
+              <a:gd name="adj" fmla="val 12000"/>
+            </a:avLst>
           </a:prstGeom>
           <a:solidFill>
-            <a:srgbClr val="FFFFFF"/>
+            <a:srgbClr val="095292"/>
           </a:solidFill>
           <a:ln>
-            <a:solidFill>
-              <a:srgbClr val="333333"/>
-            </a:solidFill>
+            <a:noFill/>
           </a:ln>
         </p:spPr>
         <p:style>
@@ -4919,20 +4672,87 @@
       </p:sp>
       <p:sp>
         <p:nvSpPr>
-          <p:cNvPr id="11" name="Rectangle 10"/>
+          <p:cNvPr id="15" name="TextBox 14"/>
+          <p:cNvSpPr txBox="1"/>
+          <p:nvPr/>
+        </p:nvSpPr>
+        <p:spPr>
+          <a:xfrm>
+            <a:off x="594360" y="4146804"/>
+            <a:ext cx="438912" cy="438912"/>
+          </a:xfrm>
+          <a:prstGeom prst="rect">
+            <a:avLst/>
+          </a:prstGeom>
+          <a:noFill/>
+        </p:spPr>
+        <p:txBody>
+          <a:bodyPr wrap="square" anchor="ctr"/>
+          <a:lstStyle/>
+          <a:p>
+            <a:pPr algn="ctr"/>
+            <a:r>
+              <a:rPr sz="1600" b="1" i="0">
+                <a:solidFill>
+                  <a:srgbClr val="FFFFFF"/>
+                </a:solidFill>
+                <a:latin typeface="Calibri"/>
+              </a:rPr>
+              <a:t>3</a:t>
+            </a:r>
+          </a:p>
+        </p:txBody>
+      </p:sp>
+      <p:sp>
+        <p:nvSpPr>
+          <p:cNvPr id="16" name="TextBox 15"/>
+          <p:cNvSpPr txBox="1"/>
+          <p:nvPr/>
+        </p:nvSpPr>
+        <p:spPr>
+          <a:xfrm>
+            <a:off x="1188720" y="3931920"/>
+            <a:ext cx="10271455" cy="886968"/>
+          </a:xfrm>
+          <a:prstGeom prst="rect">
+            <a:avLst/>
+          </a:prstGeom>
+          <a:noFill/>
+        </p:spPr>
+        <p:txBody>
+          <a:bodyPr wrap="square" anchor="ctr"/>
+          <a:lstStyle/>
+          <a:p>
+            <a:r>
+              <a:rPr sz="1500" b="1" i="0">
+                <a:solidFill>
+                  <a:srgbClr val="095292"/>
+                </a:solidFill>
+                <a:latin typeface="Calibri"/>
+              </a:rPr>
+              <a:t>Matriz rol x objeto x privilegio de los 10 objetos, justificando privilegio minimo.</a:t>
+            </a:r>
+          </a:p>
+        </p:txBody>
+      </p:sp>
+      <p:sp>
+        <p:nvSpPr>
+          <p:cNvPr id="17" name="Rounded Rectangle 16"/>
           <p:cNvSpPr/>
           <p:nvPr/>
         </p:nvSpPr>
         <p:spPr>
           <a:xfrm>
-            <a:off x="640080" y="2084832"/>
-            <a:ext cx="73152" cy="274320"/>
-          </a:xfrm>
-          <a:prstGeom prst="rect">
-            <a:avLst/>
+            <a:off x="457200" y="4983480"/>
+            <a:ext cx="11277295" cy="1051560"/>
+          </a:xfrm>
+          <a:prstGeom prst="roundRect">
+            <a:avLst>
+              <a:gd name="adj" fmla="val 12000"/>
+            </a:avLst>
           </a:prstGeom>
           <a:solidFill>
-            <a:srgbClr val="269CCB"/>
+            <a:srgbClr val="E8F4FA"/>
           </a:solidFill>
           <a:ln>
             <a:noFill/>
@@ -4962,46 +4782,14 @@
       </p:sp>
       <p:sp>
         <p:nvSpPr>
-          <p:cNvPr id="12" name="TextBox 11"/>
-          <p:cNvSpPr txBox="1"/>
-          <p:nvPr/>
-        </p:nvSpPr>
-        <p:spPr>
-          <a:xfrm>
-            <a:off x="1097280" y="2029968"/>
-            <a:ext cx="10362895" cy="402336"/>
-          </a:xfrm>
-          <a:prstGeom prst="rect">
-            <a:avLst/>
-          </a:prstGeom>
-          <a:noFill/>
-        </p:spPr>
-        <p:txBody>
-          <a:bodyPr wrap="square" anchor="ctr"/>
-          <a:lstStyle/>
-          <a:p>
-            <a:r>
-              <a:rPr sz="1500" b="0" i="0">
-                <a:solidFill>
-                  <a:srgbClr val="333333"/>
-                </a:solidFill>
-                <a:latin typeface="Calibri"/>
-              </a:rPr>
-              <a:t>□ Auditor solo SELECT?</a:t>
-            </a:r>
-          </a:p>
-        </p:txBody>
-      </p:sp>
-      <p:sp>
-        <p:nvSpPr>
-          <p:cNvPr id="13" name="Rounded Rectangle 12"/>
+          <p:cNvPr id="18" name="Rounded Rectangle 17"/>
           <p:cNvSpPr/>
           <p:nvPr/>
         </p:nvSpPr>
         <p:spPr>
           <a:xfrm>
-            <a:off x="457200" y="2615184"/>
-            <a:ext cx="11277295" cy="566928"/>
+            <a:off x="594360" y="5289804"/>
+            <a:ext cx="438912" cy="438912"/>
           </a:xfrm>
           <a:prstGeom prst="roundRect">
             <a:avLst>
@@ -5009,7 +4797,7 @@
             </a:avLst>
           </a:prstGeom>
           <a:solidFill>
-            <a:srgbClr val="F2F2F2"/>
+            <a:srgbClr val="095292"/>
           </a:solidFill>
           <a:ln>
             <a:noFill/>
@@ -5039,102 +4827,47 @@
       </p:sp>
       <p:sp>
         <p:nvSpPr>
-          <p:cNvPr id="14" name="Rectangle 13"/>
-          <p:cNvSpPr/>
-          <p:nvPr/>
-        </p:nvSpPr>
-        <p:spPr>
-          <a:xfrm>
-            <a:off x="640080" y="2761488"/>
-            <a:ext cx="274320" cy="274320"/>
-          </a:xfrm>
-          <a:prstGeom prst="rect">
-            <a:avLst/>
-          </a:prstGeom>
-          <a:solidFill>
-            <a:srgbClr val="FFFFFF"/>
-          </a:solidFill>
-          <a:ln>
-            <a:solidFill>
-              <a:srgbClr val="333333"/>
-            </a:solidFill>
-          </a:ln>
-        </p:spPr>
-        <p:style>
-          <a:lnRef idx="1">
-            <a:schemeClr val="accent1"/>
-          </a:lnRef>
-          <a:fillRef idx="3">
-            <a:schemeClr val="accent1"/>
-          </a:fillRef>
-          <a:effectRef idx="2">
-            <a:schemeClr val="accent1"/>
-          </a:effectRef>
-          <a:fontRef idx="minor">
-            <a:schemeClr val="lt1"/>
-          </a:fontRef>
-        </p:style>
-        <p:txBody>
-          <a:bodyPr rtlCol="0" anchor="ctr"/>
+          <p:cNvPr id="19" name="TextBox 18"/>
+          <p:cNvSpPr txBox="1"/>
+          <p:nvPr/>
+        </p:nvSpPr>
+        <p:spPr>
+          <a:xfrm>
+            <a:off x="594360" y="5289804"/>
+            <a:ext cx="438912" cy="438912"/>
+          </a:xfrm>
+          <a:prstGeom prst="rect">
+            <a:avLst/>
+          </a:prstGeom>
+          <a:noFill/>
+        </p:spPr>
+        <p:txBody>
+          <a:bodyPr wrap="square" anchor="ctr"/>
           <a:lstStyle/>
           <a:p>
             <a:pPr algn="ctr"/>
-          </a:p>
-        </p:txBody>
-      </p:sp>
-      <p:sp>
-        <p:nvSpPr>
-          <p:cNvPr id="15" name="Rectangle 14"/>
-          <p:cNvSpPr/>
-          <p:nvPr/>
-        </p:nvSpPr>
-        <p:spPr>
-          <a:xfrm>
-            <a:off x="640080" y="2761488"/>
-            <a:ext cx="73152" cy="274320"/>
-          </a:xfrm>
-          <a:prstGeom prst="rect">
-            <a:avLst/>
-          </a:prstGeom>
-          <a:solidFill>
-            <a:srgbClr val="269CCB"/>
-          </a:solidFill>
-          <a:ln>
-            <a:noFill/>
-          </a:ln>
-        </p:spPr>
-        <p:style>
-          <a:lnRef idx="1">
-            <a:schemeClr val="accent1"/>
-          </a:lnRef>
-          <a:fillRef idx="3">
-            <a:schemeClr val="accent1"/>
-          </a:fillRef>
-          <a:effectRef idx="2">
-            <a:schemeClr val="accent1"/>
-          </a:effectRef>
-          <a:fontRef idx="minor">
-            <a:schemeClr val="lt1"/>
-          </a:fontRef>
-        </p:style>
-        <p:txBody>
-          <a:bodyPr rtlCol="0" anchor="ctr"/>
-          <a:lstStyle/>
-          <a:p>
-            <a:pPr algn="ctr"/>
-          </a:p>
-        </p:txBody>
-      </p:sp>
-      <p:sp>
-        <p:nvSpPr>
-          <p:cNvPr id="16" name="TextBox 15"/>
+            <a:r>
+              <a:rPr sz="1600" b="1" i="0">
+                <a:solidFill>
+                  <a:srgbClr val="FFFFFF"/>
+                </a:solidFill>
+                <a:latin typeface="Calibri"/>
+              </a:rPr>
+              <a:t>4</a:t>
+            </a:r>
+          </a:p>
+        </p:txBody>
+      </p:sp>
+      <p:sp>
+        <p:nvSpPr>
+          <p:cNvPr id="20" name="TextBox 19"/>
           <p:cNvSpPr txBox="1"/>
           <p:nvPr/>
         </p:nvSpPr>
         <p:spPr>
           <a:xfrm>
-            <a:off x="1097280" y="2706624"/>
-            <a:ext cx="10362895" cy="402336"/>
+            <a:off x="1188720" y="5074920"/>
+            <a:ext cx="10271455" cy="886968"/>
           </a:xfrm>
           <a:prstGeom prst="rect">
             <a:avLst/>
@@ -5146,20 +4879,20 @@
           <a:lstStyle/>
           <a:p>
             <a:r>
-              <a:rPr sz="1500" b="0" i="0">
-                <a:solidFill>
-                  <a:srgbClr val="333333"/>
-                </a:solidFill>
-                <a:latin typeface="Calibri"/>
-              </a:rPr>
-              <a:t>□ DDL separado?</a:t>
-            </a:r>
-          </a:p>
-        </p:txBody>
-      </p:sp>
-      <p:sp>
-        <p:nvSpPr>
-          <p:cNvPr id="17" name="TextBox 16"/>
+              <a:rPr sz="1500" b="1" i="0">
+                <a:solidFill>
+                  <a:srgbClr val="095292"/>
+                </a:solidFill>
+                <a:latin typeface="Calibri"/>
+              </a:rPr>
+              <a:t>Redactar 1 pagina: politica de altas/bajas de usuarios y limite del entorno.</a:t>
+            </a:r>
+          </a:p>
+        </p:txBody>
+      </p:sp>
+      <p:sp>
+        <p:nvSpPr>
+          <p:cNvPr id="21" name="TextBox 20"/>
           <p:cNvSpPr txBox="1"/>
           <p:nvPr/>
         </p:nvSpPr>
@@ -5333,21 +5066,154 @@
                 </a:solidFill>
                 <a:latin typeface="Calibri"/>
               </a:rPr>
-              <a:t>Criterios de exito / entregable</a:t>
-            </a:r>
-          </a:p>
-        </p:txBody>
-      </p:sp>
-      <p:sp>
-        <p:nvSpPr>
-          <p:cNvPr id="5" name="TextBox 4"/>
+              <a:t>Taller PI VetCare — pistas (checklist vacio)</a:t>
+            </a:r>
+          </a:p>
+        </p:txBody>
+      </p:sp>
+      <p:sp>
+        <p:nvSpPr>
+          <p:cNvPr id="5" name="Rounded Rectangle 4"/>
+          <p:cNvSpPr/>
+          <p:nvPr/>
+        </p:nvSpPr>
+        <p:spPr>
+          <a:xfrm>
+            <a:off x="457200" y="1261872"/>
+            <a:ext cx="11277295" cy="566928"/>
+          </a:xfrm>
+          <a:prstGeom prst="roundRect">
+            <a:avLst>
+              <a:gd name="adj" fmla="val 12000"/>
+            </a:avLst>
+          </a:prstGeom>
+          <a:solidFill>
+            <a:srgbClr val="F2F2F2"/>
+          </a:solidFill>
+          <a:ln>
+            <a:noFill/>
+          </a:ln>
+        </p:spPr>
+        <p:style>
+          <a:lnRef idx="1">
+            <a:schemeClr val="accent1"/>
+          </a:lnRef>
+          <a:fillRef idx="3">
+            <a:schemeClr val="accent1"/>
+          </a:fillRef>
+          <a:effectRef idx="2">
+            <a:schemeClr val="accent1"/>
+          </a:effectRef>
+          <a:fontRef idx="minor">
+            <a:schemeClr val="lt1"/>
+          </a:fontRef>
+        </p:style>
+        <p:txBody>
+          <a:bodyPr rtlCol="0" anchor="ctr"/>
+          <a:lstStyle/>
+          <a:p>
+            <a:pPr algn="ctr"/>
+          </a:p>
+        </p:txBody>
+      </p:sp>
+      <p:sp>
+        <p:nvSpPr>
+          <p:cNvPr id="6" name="Rectangle 5"/>
+          <p:cNvSpPr/>
+          <p:nvPr/>
+        </p:nvSpPr>
+        <p:spPr>
+          <a:xfrm>
+            <a:off x="640080" y="1408175"/>
+            <a:ext cx="274320" cy="274320"/>
+          </a:xfrm>
+          <a:prstGeom prst="rect">
+            <a:avLst/>
+          </a:prstGeom>
+          <a:solidFill>
+            <a:srgbClr val="FFFFFF"/>
+          </a:solidFill>
+          <a:ln>
+            <a:solidFill>
+              <a:srgbClr val="333333"/>
+            </a:solidFill>
+          </a:ln>
+        </p:spPr>
+        <p:style>
+          <a:lnRef idx="1">
+            <a:schemeClr val="accent1"/>
+          </a:lnRef>
+          <a:fillRef idx="3">
+            <a:schemeClr val="accent1"/>
+          </a:fillRef>
+          <a:effectRef idx="2">
+            <a:schemeClr val="accent1"/>
+          </a:effectRef>
+          <a:fontRef idx="minor">
+            <a:schemeClr val="lt1"/>
+          </a:fontRef>
+        </p:style>
+        <p:txBody>
+          <a:bodyPr rtlCol="0" anchor="ctr"/>
+          <a:lstStyle/>
+          <a:p>
+            <a:pPr algn="ctr"/>
+          </a:p>
+        </p:txBody>
+      </p:sp>
+      <p:sp>
+        <p:nvSpPr>
+          <p:cNvPr id="7" name="Rectangle 6"/>
+          <p:cNvSpPr/>
+          <p:nvPr/>
+        </p:nvSpPr>
+        <p:spPr>
+          <a:xfrm>
+            <a:off x="640080" y="1408175"/>
+            <a:ext cx="73152" cy="274320"/>
+          </a:xfrm>
+          <a:prstGeom prst="rect">
+            <a:avLst/>
+          </a:prstGeom>
+          <a:solidFill>
+            <a:srgbClr val="269CCB"/>
+          </a:solidFill>
+          <a:ln>
+            <a:noFill/>
+          </a:ln>
+        </p:spPr>
+        <p:style>
+          <a:lnRef idx="1">
+            <a:schemeClr val="accent1"/>
+          </a:lnRef>
+          <a:fillRef idx="3">
+            <a:schemeClr val="accent1"/>
+          </a:fillRef>
+          <a:effectRef idx="2">
+            <a:schemeClr val="accent1"/>
+          </a:effectRef>
+          <a:fontRef idx="minor">
+            <a:schemeClr val="lt1"/>
+          </a:fontRef>
+        </p:style>
+        <p:txBody>
+          <a:bodyPr rtlCol="0" anchor="ctr"/>
+          <a:lstStyle/>
+          <a:p>
+            <a:pPr algn="ctr"/>
+          </a:p>
+        </p:txBody>
+      </p:sp>
+      <p:sp>
+        <p:nvSpPr>
+          <p:cNvPr id="8" name="TextBox 7"/>
           <p:cNvSpPr txBox="1"/>
           <p:nvPr/>
         </p:nvSpPr>
         <p:spPr>
           <a:xfrm>
-            <a:off x="457200" y="1170432"/>
-            <a:ext cx="11277295" cy="5230368"/>
+            <a:off x="1097280" y="1353312"/>
+            <a:ext cx="10362895" cy="402336"/>
           </a:xfrm>
           <a:prstGeom prst="rect">
             <a:avLst/>
@@ -5355,115 +5221,354 @@
           <a:noFill/>
         </p:spPr>
         <p:txBody>
-          <a:bodyPr wrap="square">
-            <a:spAutoFit/>
-          </a:bodyPr>
-          <a:lstStyle/>
-          <a:p>
-            <a:pPr>
-              <a:spcAft>
-                <a:spcPts val="800"/>
-              </a:spcAft>
-            </a:pPr>
-            <a:r>
-              <a:rPr sz="1600" b="0" i="0">
+          <a:bodyPr wrap="square" anchor="ctr"/>
+          <a:lstStyle/>
+          <a:p>
+            <a:r>
+              <a:rPr sz="1500" b="0" i="0">
                 <a:solidFill>
                   <a:srgbClr val="333333"/>
                 </a:solidFill>
                 <a:latin typeface="Calibri"/>
               </a:rPr>
-              <a:t>–   </a:t>
-            </a:r>
-            <a:r>
-              <a:rPr sz="1600" b="1" i="0">
+              <a:t>□ Recepción con DELETE historial? (no)</a:t>
+            </a:r>
+          </a:p>
+        </p:txBody>
+      </p:sp>
+      <p:sp>
+        <p:nvSpPr>
+          <p:cNvPr id="9" name="Rounded Rectangle 8"/>
+          <p:cNvSpPr/>
+          <p:nvPr/>
+        </p:nvSpPr>
+        <p:spPr>
+          <a:xfrm>
+            <a:off x="457200" y="1938528"/>
+            <a:ext cx="11277295" cy="566928"/>
+          </a:xfrm>
+          <a:prstGeom prst="roundRect">
+            <a:avLst>
+              <a:gd name="adj" fmla="val 12000"/>
+            </a:avLst>
+          </a:prstGeom>
+          <a:solidFill>
+            <a:srgbClr val="F2F2F2"/>
+          </a:solidFill>
+          <a:ln>
+            <a:noFill/>
+          </a:ln>
+        </p:spPr>
+        <p:style>
+          <a:lnRef idx="1">
+            <a:schemeClr val="accent1"/>
+          </a:lnRef>
+          <a:fillRef idx="3">
+            <a:schemeClr val="accent1"/>
+          </a:fillRef>
+          <a:effectRef idx="2">
+            <a:schemeClr val="accent1"/>
+          </a:effectRef>
+          <a:fontRef idx="minor">
+            <a:schemeClr val="lt1"/>
+          </a:fontRef>
+        </p:style>
+        <p:txBody>
+          <a:bodyPr rtlCol="0" anchor="ctr"/>
+          <a:lstStyle/>
+          <a:p>
+            <a:pPr algn="ctr"/>
+          </a:p>
+        </p:txBody>
+      </p:sp>
+      <p:sp>
+        <p:nvSpPr>
+          <p:cNvPr id="10" name="Rectangle 9"/>
+          <p:cNvSpPr/>
+          <p:nvPr/>
+        </p:nvSpPr>
+        <p:spPr>
+          <a:xfrm>
+            <a:off x="640080" y="2084832"/>
+            <a:ext cx="274320" cy="274320"/>
+          </a:xfrm>
+          <a:prstGeom prst="rect">
+            <a:avLst/>
+          </a:prstGeom>
+          <a:solidFill>
+            <a:srgbClr val="FFFFFF"/>
+          </a:solidFill>
+          <a:ln>
+            <a:solidFill>
+              <a:srgbClr val="333333"/>
+            </a:solidFill>
+          </a:ln>
+        </p:spPr>
+        <p:style>
+          <a:lnRef idx="1">
+            <a:schemeClr val="accent1"/>
+          </a:lnRef>
+          <a:fillRef idx="3">
+            <a:schemeClr val="accent1"/>
+          </a:fillRef>
+          <a:effectRef idx="2">
+            <a:schemeClr val="accent1"/>
+          </a:effectRef>
+          <a:fontRef idx="minor">
+            <a:schemeClr val="lt1"/>
+          </a:fontRef>
+        </p:style>
+        <p:txBody>
+          <a:bodyPr rtlCol="0" anchor="ctr"/>
+          <a:lstStyle/>
+          <a:p>
+            <a:pPr algn="ctr"/>
+          </a:p>
+        </p:txBody>
+      </p:sp>
+      <p:sp>
+        <p:nvSpPr>
+          <p:cNvPr id="11" name="Rectangle 10"/>
+          <p:cNvSpPr/>
+          <p:nvPr/>
+        </p:nvSpPr>
+        <p:spPr>
+          <a:xfrm>
+            <a:off x="640080" y="2084832"/>
+            <a:ext cx="73152" cy="274320"/>
+          </a:xfrm>
+          <a:prstGeom prst="rect">
+            <a:avLst/>
+          </a:prstGeom>
+          <a:solidFill>
+            <a:srgbClr val="269CCB"/>
+          </a:solidFill>
+          <a:ln>
+            <a:noFill/>
+          </a:ln>
+        </p:spPr>
+        <p:style>
+          <a:lnRef idx="1">
+            <a:schemeClr val="accent1"/>
+          </a:lnRef>
+          <a:fillRef idx="3">
+            <a:schemeClr val="accent1"/>
+          </a:fillRef>
+          <a:effectRef idx="2">
+            <a:schemeClr val="accent1"/>
+          </a:effectRef>
+          <a:fontRef idx="minor">
+            <a:schemeClr val="lt1"/>
+          </a:fontRef>
+        </p:style>
+        <p:txBody>
+          <a:bodyPr rtlCol="0" anchor="ctr"/>
+          <a:lstStyle/>
+          <a:p>
+            <a:pPr algn="ctr"/>
+          </a:p>
+        </p:txBody>
+      </p:sp>
+      <p:sp>
+        <p:nvSpPr>
+          <p:cNvPr id="12" name="TextBox 11"/>
+          <p:cNvSpPr txBox="1"/>
+          <p:nvPr/>
+        </p:nvSpPr>
+        <p:spPr>
+          <a:xfrm>
+            <a:off x="1097280" y="2029968"/>
+            <a:ext cx="10362895" cy="402336"/>
+          </a:xfrm>
+          <a:prstGeom prst="rect">
+            <a:avLst/>
+          </a:prstGeom>
+          <a:noFill/>
+        </p:spPr>
+        <p:txBody>
+          <a:bodyPr wrap="square" anchor="ctr"/>
+          <a:lstStyle/>
+          <a:p>
+            <a:r>
+              <a:rPr sz="1500" b="0" i="0">
                 <a:solidFill>
                   <a:srgbClr val="333333"/>
                 </a:solidFill>
                 <a:latin typeface="Calibri"/>
               </a:rPr>
-              <a:t>Entregable:</a:t>
-            </a:r>
-            <a:r>
-              <a:rPr sz="1600" b="0" i="0">
+              <a:t>□ Auditor solo SELECT?</a:t>
+            </a:r>
+          </a:p>
+        </p:txBody>
+      </p:sp>
+      <p:sp>
+        <p:nvSpPr>
+          <p:cNvPr id="13" name="Rounded Rectangle 12"/>
+          <p:cNvSpPr/>
+          <p:nvPr/>
+        </p:nvSpPr>
+        <p:spPr>
+          <a:xfrm>
+            <a:off x="457200" y="2615184"/>
+            <a:ext cx="11277295" cy="566928"/>
+          </a:xfrm>
+          <a:prstGeom prst="roundRect">
+            <a:avLst>
+              <a:gd name="adj" fmla="val 12000"/>
+            </a:avLst>
+          </a:prstGeom>
+          <a:solidFill>
+            <a:srgbClr val="F2F2F2"/>
+          </a:solidFill>
+          <a:ln>
+            <a:noFill/>
+          </a:ln>
+        </p:spPr>
+        <p:style>
+          <a:lnRef idx="1">
+            <a:schemeClr val="accent1"/>
+          </a:lnRef>
+          <a:fillRef idx="3">
+            <a:schemeClr val="accent1"/>
+          </a:fillRef>
+          <a:effectRef idx="2">
+            <a:schemeClr val="accent1"/>
+          </a:effectRef>
+          <a:fontRef idx="minor">
+            <a:schemeClr val="lt1"/>
+          </a:fontRef>
+        </p:style>
+        <p:txBody>
+          <a:bodyPr rtlCol="0" anchor="ctr"/>
+          <a:lstStyle/>
+          <a:p>
+            <a:pPr algn="ctr"/>
+          </a:p>
+        </p:txBody>
+      </p:sp>
+      <p:sp>
+        <p:nvSpPr>
+          <p:cNvPr id="14" name="Rectangle 13"/>
+          <p:cNvSpPr/>
+          <p:nvPr/>
+        </p:nvSpPr>
+        <p:spPr>
+          <a:xfrm>
+            <a:off x="640080" y="2761488"/>
+            <a:ext cx="274320" cy="274320"/>
+          </a:xfrm>
+          <a:prstGeom prst="rect">
+            <a:avLst/>
+          </a:prstGeom>
+          <a:solidFill>
+            <a:srgbClr val="FFFFFF"/>
+          </a:solidFill>
+          <a:ln>
+            <a:solidFill>
+              <a:srgbClr val="333333"/>
+            </a:solidFill>
+          </a:ln>
+        </p:spPr>
+        <p:style>
+          <a:lnRef idx="1">
+            <a:schemeClr val="accent1"/>
+          </a:lnRef>
+          <a:fillRef idx="3">
+            <a:schemeClr val="accent1"/>
+          </a:fillRef>
+          <a:effectRef idx="2">
+            <a:schemeClr val="accent1"/>
+          </a:effectRef>
+          <a:fontRef idx="minor">
+            <a:schemeClr val="lt1"/>
+          </a:fontRef>
+        </p:style>
+        <p:txBody>
+          <a:bodyPr rtlCol="0" anchor="ctr"/>
+          <a:lstStyle/>
+          <a:p>
+            <a:pPr algn="ctr"/>
+          </a:p>
+        </p:txBody>
+      </p:sp>
+      <p:sp>
+        <p:nvSpPr>
+          <p:cNvPr id="15" name="Rectangle 14"/>
+          <p:cNvSpPr/>
+          <p:nvPr/>
+        </p:nvSpPr>
+        <p:spPr>
+          <a:xfrm>
+            <a:off x="640080" y="2761488"/>
+            <a:ext cx="73152" cy="274320"/>
+          </a:xfrm>
+          <a:prstGeom prst="rect">
+            <a:avLst/>
+          </a:prstGeom>
+          <a:solidFill>
+            <a:srgbClr val="269CCB"/>
+          </a:solidFill>
+          <a:ln>
+            <a:noFill/>
+          </a:ln>
+        </p:spPr>
+        <p:style>
+          <a:lnRef idx="1">
+            <a:schemeClr val="accent1"/>
+          </a:lnRef>
+          <a:fillRef idx="3">
+            <a:schemeClr val="accent1"/>
+          </a:fillRef>
+          <a:effectRef idx="2">
+            <a:schemeClr val="accent1"/>
+          </a:effectRef>
+          <a:fontRef idx="minor">
+            <a:schemeClr val="lt1"/>
+          </a:fontRef>
+        </p:style>
+        <p:txBody>
+          <a:bodyPr rtlCol="0" anchor="ctr"/>
+          <a:lstStyle/>
+          <a:p>
+            <a:pPr algn="ctr"/>
+          </a:p>
+        </p:txBody>
+      </p:sp>
+      <p:sp>
+        <p:nvSpPr>
+          <p:cNvPr id="16" name="TextBox 15"/>
+          <p:cNvSpPr txBox="1"/>
+          <p:nvPr/>
+        </p:nvSpPr>
+        <p:spPr>
+          <a:xfrm>
+            <a:off x="1097280" y="2706624"/>
+            <a:ext cx="10362895" cy="402336"/>
+          </a:xfrm>
+          <a:prstGeom prst="rect">
+            <a:avLst/>
+          </a:prstGeom>
+          <a:noFill/>
+        </p:spPr>
+        <p:txBody>
+          <a:bodyPr wrap="square" anchor="ctr"/>
+          <a:lstStyle/>
+          <a:p>
+            <a:r>
+              <a:rPr sz="1500" b="0" i="0">
                 <a:solidFill>
                   <a:srgbClr val="333333"/>
                 </a:solidFill>
                 <a:latin typeface="Calibri"/>
               </a:rPr>
-              <a:t> Documento Roles_VetCare + script GRANT/REVOKE (o plan equivalente)</a:t>
-            </a:r>
-          </a:p>
-          <a:p>
-            <a:pPr>
-              <a:spcAft>
-                <a:spcPts val="800"/>
-              </a:spcAft>
-            </a:pPr>
-            <a:r>
-              <a:rPr sz="1600" b="0" i="0">
-                <a:solidFill>
-                  <a:srgbClr val="333333"/>
-                </a:solidFill>
-                <a:latin typeface="Calibri"/>
-              </a:rPr>
-              <a:t>–   Evidencia en playground (enlace) o archivo SQL/PNG propio.</a:t>
-            </a:r>
-          </a:p>
-          <a:p>
-            <a:pPr>
-              <a:spcAft>
-                <a:spcPts val="800"/>
-              </a:spcAft>
-            </a:pPr>
-            <a:r>
-              <a:rPr sz="1600" b="0" i="0">
-                <a:solidFill>
-                  <a:srgbClr val="333333"/>
-                </a:solidFill>
-                <a:latin typeface="Calibri"/>
-              </a:rPr>
-              <a:t>–   Actualizar checklist PI (que criterio de rubrica avanzo).</a:t>
-            </a:r>
-          </a:p>
-          <a:p>
-            <a:pPr>
-              <a:spcAft>
-                <a:spcPts val="800"/>
-              </a:spcAft>
-            </a:pPr>
-            <a:r>
-              <a:rPr sz="1600" b="0" i="0">
-                <a:solidFill>
-                  <a:srgbClr val="333333"/>
-                </a:solidFill>
-                <a:latin typeface="Calibri"/>
-              </a:rPr>
-              <a:t>–   </a:t>
-            </a:r>
-            <a:r>
-              <a:rPr sz="1600" b="1" i="0">
-                <a:solidFill>
-                  <a:srgbClr val="333333"/>
-                </a:solidFill>
-                <a:latin typeface="Calibri"/>
-              </a:rPr>
-              <a:t>Entrega en ExamLab</a:t>
-            </a:r>
-            <a:r>
-              <a:rPr sz="1600" b="0" i="0">
-                <a:solidFill>
-                  <a:srgbClr val="333333"/>
-                </a:solidFill>
-                <a:latin typeface="Calibri"/>
-              </a:rPr>
-              <a:t> (https://uniaj.examlab.workers.dev/) — domingo 23:59 cuando aplique taller.</a:t>
-            </a:r>
-          </a:p>
-        </p:txBody>
-      </p:sp>
-      <p:sp>
-        <p:nvSpPr>
-          <p:cNvPr id="6" name="TextBox 5"/>
+              <a:t>□ DDL separado?</a:t>
+            </a:r>
+          </a:p>
+        </p:txBody>
+      </p:sp>
+      <p:sp>
+        <p:nvSpPr>
+          <p:cNvPr id="17" name="TextBox 16"/>
           <p:cNvSpPr txBox="1"/>
           <p:nvPr/>
         </p:nvSpPr>
@@ -5637,109 +5742,21 @@
                 </a:solidFill>
                 <a:latin typeface="Calibri"/>
               </a:rPr>
-              <a:t>Para el PI esta semana</a:t>
-            </a:r>
-          </a:p>
-        </p:txBody>
-      </p:sp>
-      <p:sp>
-        <p:nvSpPr>
-          <p:cNvPr id="5" name="Rounded Rectangle 4"/>
-          <p:cNvSpPr/>
-          <p:nvPr/>
-        </p:nvSpPr>
-        <p:spPr>
-          <a:xfrm>
-            <a:off x="457200" y="1261872"/>
-            <a:ext cx="11277295" cy="1051560"/>
-          </a:xfrm>
-          <a:prstGeom prst="roundRect">
-            <a:avLst>
-              <a:gd name="adj" fmla="val 12000"/>
-            </a:avLst>
-          </a:prstGeom>
-          <a:solidFill>
-            <a:srgbClr val="E8F4FA"/>
-          </a:solidFill>
-          <a:ln>
-            <a:noFill/>
-          </a:ln>
-        </p:spPr>
-        <p:style>
-          <a:lnRef idx="1">
-            <a:schemeClr val="accent1"/>
-          </a:lnRef>
-          <a:fillRef idx="3">
-            <a:schemeClr val="accent1"/>
-          </a:fillRef>
-          <a:effectRef idx="2">
-            <a:schemeClr val="accent1"/>
-          </a:effectRef>
-          <a:fontRef idx="minor">
-            <a:schemeClr val="lt1"/>
-          </a:fontRef>
-        </p:style>
-        <p:txBody>
-          <a:bodyPr rtlCol="0" anchor="ctr"/>
-          <a:lstStyle/>
-          <a:p>
-            <a:pPr algn="ctr"/>
-          </a:p>
-        </p:txBody>
-      </p:sp>
-      <p:sp>
-        <p:nvSpPr>
-          <p:cNvPr id="6" name="Rectangle 5"/>
-          <p:cNvSpPr/>
-          <p:nvPr/>
-        </p:nvSpPr>
-        <p:spPr>
-          <a:xfrm>
-            <a:off x="457200" y="1261872"/>
-            <a:ext cx="128016" cy="1051560"/>
-          </a:xfrm>
-          <a:prstGeom prst="rect">
-            <a:avLst/>
-          </a:prstGeom>
-          <a:solidFill>
-            <a:srgbClr val="269CCB"/>
-          </a:solidFill>
-          <a:ln>
-            <a:noFill/>
-          </a:ln>
-        </p:spPr>
-        <p:style>
-          <a:lnRef idx="1">
-            <a:schemeClr val="accent1"/>
-          </a:lnRef>
-          <a:fillRef idx="3">
-            <a:schemeClr val="accent1"/>
-          </a:fillRef>
-          <a:effectRef idx="2">
-            <a:schemeClr val="accent1"/>
-          </a:effectRef>
-          <a:fontRef idx="minor">
-            <a:schemeClr val="lt1"/>
-          </a:fontRef>
-        </p:style>
-        <p:txBody>
-          <a:bodyPr rtlCol="0" anchor="ctr"/>
-          <a:lstStyle/>
-          <a:p>
-            <a:pPr algn="ctr"/>
-          </a:p>
-        </p:txBody>
-      </p:sp>
-      <p:sp>
-        <p:nvSpPr>
-          <p:cNvPr id="7" name="TextBox 6"/>
+              <a:t>Criterios de exito / entregable</a:t>
+            </a:r>
+          </a:p>
+        </p:txBody>
+      </p:sp>
+      <p:sp>
+        <p:nvSpPr>
+          <p:cNvPr id="5" name="TextBox 4"/>
           <p:cNvSpPr txBox="1"/>
           <p:nvPr/>
         </p:nvSpPr>
         <p:spPr>
           <a:xfrm>
-            <a:off x="777240" y="1399031"/>
-            <a:ext cx="10774375" cy="822959"/>
+            <a:off x="457200" y="1170432"/>
+            <a:ext cx="11277295" cy="5230368"/>
           </a:xfrm>
           <a:prstGeom prst="rect">
             <a:avLst/>
@@ -5752,313 +5769,110 @@
           </a:bodyPr>
           <a:lstStyle/>
           <a:p>
-            <a:r>
-              <a:rPr sz="1200" b="1" i="0">
-                <a:solidFill>
-                  <a:srgbClr val="269CCB"/>
-                </a:solidFill>
-                <a:latin typeface="Calibri"/>
-              </a:rPr>
-              <a:t>Info</a:t>
-            </a:r>
-          </a:p>
-          <a:p>
             <a:pPr>
-              <a:spcBef>
-                <a:spcPts val="400"/>
-              </a:spcBef>
+              <a:spcAft>
+                <a:spcPts val="800"/>
+              </a:spcAft>
             </a:pPr>
             <a:r>
-              <a:rPr sz="1400" b="0" i="0">
+              <a:rPr sz="1600" b="0" i="0">
                 <a:solidFill>
                   <a:srgbClr val="333333"/>
                 </a:solidFill>
                 <a:latin typeface="Calibri"/>
               </a:rPr>
-              <a:t>Hito: Plan de roles/privilegios de VetCare</a:t>
-            </a:r>
-          </a:p>
-        </p:txBody>
-      </p:sp>
-      <p:sp>
-        <p:nvSpPr>
-          <p:cNvPr id="8" name="Rounded Rectangle 7"/>
-          <p:cNvSpPr/>
-          <p:nvPr/>
-        </p:nvSpPr>
-        <p:spPr>
-          <a:xfrm>
-            <a:off x="457200" y="2478024"/>
-            <a:ext cx="11277295" cy="1051560"/>
-          </a:xfrm>
-          <a:prstGeom prst="roundRect">
-            <a:avLst>
-              <a:gd name="adj" fmla="val 12000"/>
-            </a:avLst>
-          </a:prstGeom>
-          <a:solidFill>
-            <a:srgbClr val="FFF8E1"/>
-          </a:solidFill>
-          <a:ln>
-            <a:noFill/>
-          </a:ln>
-        </p:spPr>
-        <p:style>
-          <a:lnRef idx="1">
-            <a:schemeClr val="accent1"/>
-          </a:lnRef>
-          <a:fillRef idx="3">
-            <a:schemeClr val="accent1"/>
-          </a:fillRef>
-          <a:effectRef idx="2">
-            <a:schemeClr val="accent1"/>
-          </a:effectRef>
-          <a:fontRef idx="minor">
-            <a:schemeClr val="lt1"/>
-          </a:fontRef>
-        </p:style>
-        <p:txBody>
-          <a:bodyPr rtlCol="0" anchor="ctr"/>
-          <a:lstStyle/>
-          <a:p>
-            <a:pPr algn="ctr"/>
-          </a:p>
-        </p:txBody>
-      </p:sp>
-      <p:sp>
-        <p:nvSpPr>
-          <p:cNvPr id="9" name="Rectangle 8"/>
-          <p:cNvSpPr/>
-          <p:nvPr/>
-        </p:nvSpPr>
-        <p:spPr>
-          <a:xfrm>
-            <a:off x="457200" y="2478024"/>
-            <a:ext cx="128016" cy="1051560"/>
-          </a:xfrm>
-          <a:prstGeom prst="rect">
-            <a:avLst/>
-          </a:prstGeom>
-          <a:solidFill>
-            <a:srgbClr val="FFD000"/>
-          </a:solidFill>
-          <a:ln>
-            <a:noFill/>
-          </a:ln>
-        </p:spPr>
-        <p:style>
-          <a:lnRef idx="1">
-            <a:schemeClr val="accent1"/>
-          </a:lnRef>
-          <a:fillRef idx="3">
-            <a:schemeClr val="accent1"/>
-          </a:fillRef>
-          <a:effectRef idx="2">
-            <a:schemeClr val="accent1"/>
-          </a:effectRef>
-          <a:fontRef idx="minor">
-            <a:schemeClr val="lt1"/>
-          </a:fontRef>
-        </p:style>
-        <p:txBody>
-          <a:bodyPr rtlCol="0" anchor="ctr"/>
-          <a:lstStyle/>
-          <a:p>
-            <a:pPr algn="ctr"/>
-          </a:p>
-        </p:txBody>
-      </p:sp>
-      <p:sp>
-        <p:nvSpPr>
-          <p:cNvPr id="10" name="TextBox 9"/>
-          <p:cNvSpPr txBox="1"/>
-          <p:nvPr/>
-        </p:nvSpPr>
-        <p:spPr>
-          <a:xfrm>
-            <a:off x="777240" y="2615184"/>
-            <a:ext cx="10774375" cy="822959"/>
-          </a:xfrm>
-          <a:prstGeom prst="rect">
-            <a:avLst/>
-          </a:prstGeom>
-          <a:noFill/>
-        </p:spPr>
-        <p:txBody>
-          <a:bodyPr wrap="square">
-            <a:spAutoFit/>
-          </a:bodyPr>
-          <a:lstStyle/>
-          <a:p>
-            <a:r>
-              <a:rPr sz="1200" b="1" i="0">
-                <a:solidFill>
-                  <a:srgbClr val="FFD000"/>
-                </a:solidFill>
-                <a:latin typeface="Calibri"/>
-              </a:rPr>
-              <a:t>Aclaración</a:t>
+              <a:t>–   </a:t>
+            </a:r>
+            <a:r>
+              <a:rPr sz="1600" b="1" i="0">
+                <a:solidFill>
+                  <a:srgbClr val="333333"/>
+                </a:solidFill>
+                <a:latin typeface="Calibri"/>
+              </a:rPr>
+              <a:t>Entregable:</a:t>
+            </a:r>
+            <a:r>
+              <a:rPr sz="1600" b="0" i="0">
+                <a:solidFill>
+                  <a:srgbClr val="333333"/>
+                </a:solidFill>
+                <a:latin typeface="Calibri"/>
+              </a:rPr>
+              <a:t> Documento Roles_VetCare + script GRANT/REVOKE ejecutado en ExamLab</a:t>
             </a:r>
           </a:p>
           <a:p>
             <a:pPr>
-              <a:spcBef>
-                <a:spcPts val="400"/>
-              </a:spcBef>
+              <a:spcAft>
+                <a:spcPts val="800"/>
+              </a:spcAft>
             </a:pPr>
             <a:r>
-              <a:rPr sz="1400" b="0" i="0">
+              <a:rPr sz="1600" b="0" i="0">
                 <a:solidFill>
                   <a:srgbClr val="333333"/>
                 </a:solidFill>
                 <a:latin typeface="Calibri"/>
               </a:rPr>
-              <a:t>Enunciado completo: Clases/Proyecto Integrador/ (VetCare DB).</a:t>
-            </a:r>
-          </a:p>
-        </p:txBody>
-      </p:sp>
-      <p:sp>
-        <p:nvSpPr>
-          <p:cNvPr id="11" name="Rounded Rectangle 10"/>
-          <p:cNvSpPr/>
-          <p:nvPr/>
-        </p:nvSpPr>
-        <p:spPr>
-          <a:xfrm>
-            <a:off x="457200" y="3694176"/>
-            <a:ext cx="11277295" cy="1051560"/>
-          </a:xfrm>
-          <a:prstGeom prst="roundRect">
-            <a:avLst>
-              <a:gd name="adj" fmla="val 12000"/>
-            </a:avLst>
-          </a:prstGeom>
-          <a:solidFill>
-            <a:srgbClr val="FBE4E4"/>
-          </a:solidFill>
-          <a:ln>
-            <a:noFill/>
-          </a:ln>
-        </p:spPr>
-        <p:style>
-          <a:lnRef idx="1">
-            <a:schemeClr val="accent1"/>
-          </a:lnRef>
-          <a:fillRef idx="3">
-            <a:schemeClr val="accent1"/>
-          </a:fillRef>
-          <a:effectRef idx="2">
-            <a:schemeClr val="accent1"/>
-          </a:effectRef>
-          <a:fontRef idx="minor">
-            <a:schemeClr val="lt1"/>
-          </a:fontRef>
-        </p:style>
-        <p:txBody>
-          <a:bodyPr rtlCol="0" anchor="ctr"/>
-          <a:lstStyle/>
-          <a:p>
-            <a:pPr algn="ctr"/>
-          </a:p>
-        </p:txBody>
-      </p:sp>
-      <p:sp>
-        <p:nvSpPr>
-          <p:cNvPr id="12" name="Rectangle 11"/>
-          <p:cNvSpPr/>
-          <p:nvPr/>
-        </p:nvSpPr>
-        <p:spPr>
-          <a:xfrm>
-            <a:off x="457200" y="3694176"/>
-            <a:ext cx="128016" cy="1051560"/>
-          </a:xfrm>
-          <a:prstGeom prst="rect">
-            <a:avLst/>
-          </a:prstGeom>
-          <a:solidFill>
-            <a:srgbClr val="A02030"/>
-          </a:solidFill>
-          <a:ln>
-            <a:noFill/>
-          </a:ln>
-        </p:spPr>
-        <p:style>
-          <a:lnRef idx="1">
-            <a:schemeClr val="accent1"/>
-          </a:lnRef>
-          <a:fillRef idx="3">
-            <a:schemeClr val="accent1"/>
-          </a:fillRef>
-          <a:effectRef idx="2">
-            <a:schemeClr val="accent1"/>
-          </a:effectRef>
-          <a:fontRef idx="minor">
-            <a:schemeClr val="lt1"/>
-          </a:fontRef>
-        </p:style>
-        <p:txBody>
-          <a:bodyPr rtlCol="0" anchor="ctr"/>
-          <a:lstStyle/>
-          <a:p>
-            <a:pPr algn="ctr"/>
-          </a:p>
-        </p:txBody>
-      </p:sp>
-      <p:sp>
-        <p:nvSpPr>
-          <p:cNvPr id="13" name="TextBox 12"/>
-          <p:cNvSpPr txBox="1"/>
-          <p:nvPr/>
-        </p:nvSpPr>
-        <p:spPr>
-          <a:xfrm>
-            <a:off x="777240" y="3831336"/>
-            <a:ext cx="10774375" cy="822959"/>
-          </a:xfrm>
-          <a:prstGeom prst="rect">
-            <a:avLst/>
-          </a:prstGeom>
-          <a:noFill/>
-        </p:spPr>
-        <p:txBody>
-          <a:bodyPr wrap="square">
-            <a:spAutoFit/>
-          </a:bodyPr>
-          <a:lstStyle/>
-          <a:p>
-            <a:r>
-              <a:rPr sz="1200" b="1" i="0">
-                <a:solidFill>
-                  <a:srgbClr val="A02030"/>
-                </a:solidFill>
-                <a:latin typeface="Calibri"/>
-              </a:rPr>
-              <a:t>Atención</a:t>
+              <a:t>–   Evidencia en playground (enlace) o archivo SQL/PNG propio.</a:t>
             </a:r>
           </a:p>
           <a:p>
             <a:pPr>
-              <a:spcBef>
-                <a:spcPts val="400"/>
-              </a:spcBef>
+              <a:spcAft>
+                <a:spcPts val="800"/>
+              </a:spcAft>
             </a:pPr>
             <a:r>
-              <a:rPr sz="1400" b="0" i="0">
+              <a:rPr sz="1600" b="0" i="0">
                 <a:solidFill>
                   <a:srgbClr val="333333"/>
                 </a:solidFill>
                 <a:latin typeface="Calibri"/>
               </a:rPr>
-              <a:t>Taller de la semana en ExamLab (https://uniaj.examlab.workers.dev/): domingo 23:59 (regla del Acuerdo) cuando aplique.</a:t>
-            </a:r>
-          </a:p>
-        </p:txBody>
-      </p:sp>
-      <p:sp>
-        <p:nvSpPr>
-          <p:cNvPr id="14" name="TextBox 13"/>
+              <a:t>–   Actualizar checklist PI (que criterio de rubrica avanzo).</a:t>
+            </a:r>
+          </a:p>
+          <a:p>
+            <a:pPr>
+              <a:spcAft>
+                <a:spcPts val="800"/>
+              </a:spcAft>
+            </a:pPr>
+            <a:r>
+              <a:rPr sz="1600" b="0" i="0">
+                <a:solidFill>
+                  <a:srgbClr val="333333"/>
+                </a:solidFill>
+                <a:latin typeface="Calibri"/>
+              </a:rPr>
+              <a:t>–   </a:t>
+            </a:r>
+            <a:r>
+              <a:rPr sz="1600" b="1" i="0">
+                <a:solidFill>
+                  <a:srgbClr val="333333"/>
+                </a:solidFill>
+                <a:latin typeface="Calibri"/>
+              </a:rPr>
+              <a:t>Entrega en ExamLab</a:t>
+            </a:r>
+            <a:r>
+              <a:rPr sz="1600" b="0" i="0">
+                <a:solidFill>
+                  <a:srgbClr val="333333"/>
+                </a:solidFill>
+                <a:latin typeface="Calibri"/>
+              </a:rPr>
+              <a:t> (https://uniaj.examlab.workers.dev/) — domingo 23:59 cuando aplique taller.</a:t>
+            </a:r>
+          </a:p>
+        </p:txBody>
+      </p:sp>
+      <p:sp>
+        <p:nvSpPr>
+          <p:cNvPr id="6" name="TextBox 5"/>
           <p:cNvSpPr txBox="1"/>
           <p:nvPr/>
         </p:nvSpPr>
@@ -6126,6 +5940,601 @@
         <p:spPr>
           <a:xfrm>
             <a:off x="0" y="0"/>
+            <a:ext cx="12191695" cy="960120"/>
+          </a:xfrm>
+          <a:prstGeom prst="rect">
+            <a:avLst/>
+          </a:prstGeom>
+          <a:solidFill>
+            <a:srgbClr val="095292"/>
+          </a:solidFill>
+          <a:ln>
+            <a:noFill/>
+          </a:ln>
+        </p:spPr>
+        <p:style>
+          <a:lnRef idx="1">
+            <a:schemeClr val="accent1"/>
+          </a:lnRef>
+          <a:fillRef idx="3">
+            <a:schemeClr val="accent1"/>
+          </a:fillRef>
+          <a:effectRef idx="2">
+            <a:schemeClr val="accent1"/>
+          </a:effectRef>
+          <a:fontRef idx="minor">
+            <a:schemeClr val="lt1"/>
+          </a:fontRef>
+        </p:style>
+        <p:txBody>
+          <a:bodyPr rtlCol="0" anchor="ctr"/>
+          <a:lstStyle/>
+          <a:p>
+            <a:pPr algn="ctr"/>
+          </a:p>
+        </p:txBody>
+      </p:sp>
+      <p:sp>
+        <p:nvSpPr>
+          <p:cNvPr id="3" name="Rectangle 2"/>
+          <p:cNvSpPr/>
+          <p:nvPr/>
+        </p:nvSpPr>
+        <p:spPr>
+          <a:xfrm>
+            <a:off x="0" y="960120"/>
+            <a:ext cx="12191695" cy="41148"/>
+          </a:xfrm>
+          <a:prstGeom prst="rect">
+            <a:avLst/>
+          </a:prstGeom>
+          <a:solidFill>
+            <a:srgbClr val="FFD000"/>
+          </a:solidFill>
+          <a:ln>
+            <a:noFill/>
+          </a:ln>
+        </p:spPr>
+        <p:style>
+          <a:lnRef idx="1">
+            <a:schemeClr val="accent1"/>
+          </a:lnRef>
+          <a:fillRef idx="3">
+            <a:schemeClr val="accent1"/>
+          </a:fillRef>
+          <a:effectRef idx="2">
+            <a:schemeClr val="accent1"/>
+          </a:effectRef>
+          <a:fontRef idx="minor">
+            <a:schemeClr val="lt1"/>
+          </a:fontRef>
+        </p:style>
+        <p:txBody>
+          <a:bodyPr rtlCol="0" anchor="ctr"/>
+          <a:lstStyle/>
+          <a:p>
+            <a:pPr algn="ctr"/>
+          </a:p>
+        </p:txBody>
+      </p:sp>
+      <p:sp>
+        <p:nvSpPr>
+          <p:cNvPr id="4" name="TextBox 3"/>
+          <p:cNvSpPr txBox="1"/>
+          <p:nvPr/>
+        </p:nvSpPr>
+        <p:spPr>
+          <a:xfrm>
+            <a:off x="457200" y="164592"/>
+            <a:ext cx="11277295" cy="502920"/>
+          </a:xfrm>
+          <a:prstGeom prst="rect">
+            <a:avLst/>
+          </a:prstGeom>
+          <a:noFill/>
+        </p:spPr>
+        <p:txBody>
+          <a:bodyPr wrap="square">
+            <a:spAutoFit/>
+          </a:bodyPr>
+          <a:lstStyle/>
+          <a:p>
+            <a:r>
+              <a:rPr sz="2600" b="1" i="0">
+                <a:solidFill>
+                  <a:srgbClr val="FFFFFF"/>
+                </a:solidFill>
+                <a:latin typeface="Calibri"/>
+              </a:rPr>
+              <a:t>Para el PI esta semana</a:t>
+            </a:r>
+          </a:p>
+        </p:txBody>
+      </p:sp>
+      <p:sp>
+        <p:nvSpPr>
+          <p:cNvPr id="5" name="Rounded Rectangle 4"/>
+          <p:cNvSpPr/>
+          <p:nvPr/>
+        </p:nvSpPr>
+        <p:spPr>
+          <a:xfrm>
+            <a:off x="457200" y="1261872"/>
+            <a:ext cx="11277295" cy="1051560"/>
+          </a:xfrm>
+          <a:prstGeom prst="roundRect">
+            <a:avLst>
+              <a:gd name="adj" fmla="val 12000"/>
+            </a:avLst>
+          </a:prstGeom>
+          <a:solidFill>
+            <a:srgbClr val="E8F4FA"/>
+          </a:solidFill>
+          <a:ln>
+            <a:noFill/>
+          </a:ln>
+        </p:spPr>
+        <p:style>
+          <a:lnRef idx="1">
+            <a:schemeClr val="accent1"/>
+          </a:lnRef>
+          <a:fillRef idx="3">
+            <a:schemeClr val="accent1"/>
+          </a:fillRef>
+          <a:effectRef idx="2">
+            <a:schemeClr val="accent1"/>
+          </a:effectRef>
+          <a:fontRef idx="minor">
+            <a:schemeClr val="lt1"/>
+          </a:fontRef>
+        </p:style>
+        <p:txBody>
+          <a:bodyPr rtlCol="0" anchor="ctr"/>
+          <a:lstStyle/>
+          <a:p>
+            <a:pPr algn="ctr"/>
+          </a:p>
+        </p:txBody>
+      </p:sp>
+      <p:sp>
+        <p:nvSpPr>
+          <p:cNvPr id="6" name="Rectangle 5"/>
+          <p:cNvSpPr/>
+          <p:nvPr/>
+        </p:nvSpPr>
+        <p:spPr>
+          <a:xfrm>
+            <a:off x="457200" y="1261872"/>
+            <a:ext cx="128016" cy="1051560"/>
+          </a:xfrm>
+          <a:prstGeom prst="rect">
+            <a:avLst/>
+          </a:prstGeom>
+          <a:solidFill>
+            <a:srgbClr val="269CCB"/>
+          </a:solidFill>
+          <a:ln>
+            <a:noFill/>
+          </a:ln>
+        </p:spPr>
+        <p:style>
+          <a:lnRef idx="1">
+            <a:schemeClr val="accent1"/>
+          </a:lnRef>
+          <a:fillRef idx="3">
+            <a:schemeClr val="accent1"/>
+          </a:fillRef>
+          <a:effectRef idx="2">
+            <a:schemeClr val="accent1"/>
+          </a:effectRef>
+          <a:fontRef idx="minor">
+            <a:schemeClr val="lt1"/>
+          </a:fontRef>
+        </p:style>
+        <p:txBody>
+          <a:bodyPr rtlCol="0" anchor="ctr"/>
+          <a:lstStyle/>
+          <a:p>
+            <a:pPr algn="ctr"/>
+          </a:p>
+        </p:txBody>
+      </p:sp>
+      <p:sp>
+        <p:nvSpPr>
+          <p:cNvPr id="7" name="TextBox 6"/>
+          <p:cNvSpPr txBox="1"/>
+          <p:nvPr/>
+        </p:nvSpPr>
+        <p:spPr>
+          <a:xfrm>
+            <a:off x="777240" y="1399031"/>
+            <a:ext cx="10774375" cy="822959"/>
+          </a:xfrm>
+          <a:prstGeom prst="rect">
+            <a:avLst/>
+          </a:prstGeom>
+          <a:noFill/>
+        </p:spPr>
+        <p:txBody>
+          <a:bodyPr wrap="square">
+            <a:spAutoFit/>
+          </a:bodyPr>
+          <a:lstStyle/>
+          <a:p>
+            <a:r>
+              <a:rPr sz="1200" b="1" i="0">
+                <a:solidFill>
+                  <a:srgbClr val="269CCB"/>
+                </a:solidFill>
+                <a:latin typeface="Calibri"/>
+              </a:rPr>
+              <a:t>Info</a:t>
+            </a:r>
+          </a:p>
+          <a:p>
+            <a:pPr>
+              <a:spcBef>
+                <a:spcPts val="400"/>
+              </a:spcBef>
+            </a:pPr>
+            <a:r>
+              <a:rPr sz="1400" b="0" i="0">
+                <a:solidFill>
+                  <a:srgbClr val="333333"/>
+                </a:solidFill>
+                <a:latin typeface="Calibri"/>
+              </a:rPr>
+              <a:t>Hito: Plan de roles/privilegios de VetCare</a:t>
+            </a:r>
+          </a:p>
+        </p:txBody>
+      </p:sp>
+      <p:sp>
+        <p:nvSpPr>
+          <p:cNvPr id="8" name="Rounded Rectangle 7"/>
+          <p:cNvSpPr/>
+          <p:nvPr/>
+        </p:nvSpPr>
+        <p:spPr>
+          <a:xfrm>
+            <a:off x="457200" y="2478024"/>
+            <a:ext cx="11277295" cy="1051560"/>
+          </a:xfrm>
+          <a:prstGeom prst="roundRect">
+            <a:avLst>
+              <a:gd name="adj" fmla="val 12000"/>
+            </a:avLst>
+          </a:prstGeom>
+          <a:solidFill>
+            <a:srgbClr val="FFF8E1"/>
+          </a:solidFill>
+          <a:ln>
+            <a:noFill/>
+          </a:ln>
+        </p:spPr>
+        <p:style>
+          <a:lnRef idx="1">
+            <a:schemeClr val="accent1"/>
+          </a:lnRef>
+          <a:fillRef idx="3">
+            <a:schemeClr val="accent1"/>
+          </a:fillRef>
+          <a:effectRef idx="2">
+            <a:schemeClr val="accent1"/>
+          </a:effectRef>
+          <a:fontRef idx="minor">
+            <a:schemeClr val="lt1"/>
+          </a:fontRef>
+        </p:style>
+        <p:txBody>
+          <a:bodyPr rtlCol="0" anchor="ctr"/>
+          <a:lstStyle/>
+          <a:p>
+            <a:pPr algn="ctr"/>
+          </a:p>
+        </p:txBody>
+      </p:sp>
+      <p:sp>
+        <p:nvSpPr>
+          <p:cNvPr id="9" name="Rectangle 8"/>
+          <p:cNvSpPr/>
+          <p:nvPr/>
+        </p:nvSpPr>
+        <p:spPr>
+          <a:xfrm>
+            <a:off x="457200" y="2478024"/>
+            <a:ext cx="128016" cy="1051560"/>
+          </a:xfrm>
+          <a:prstGeom prst="rect">
+            <a:avLst/>
+          </a:prstGeom>
+          <a:solidFill>
+            <a:srgbClr val="FFD000"/>
+          </a:solidFill>
+          <a:ln>
+            <a:noFill/>
+          </a:ln>
+        </p:spPr>
+        <p:style>
+          <a:lnRef idx="1">
+            <a:schemeClr val="accent1"/>
+          </a:lnRef>
+          <a:fillRef idx="3">
+            <a:schemeClr val="accent1"/>
+          </a:fillRef>
+          <a:effectRef idx="2">
+            <a:schemeClr val="accent1"/>
+          </a:effectRef>
+          <a:fontRef idx="minor">
+            <a:schemeClr val="lt1"/>
+          </a:fontRef>
+        </p:style>
+        <p:txBody>
+          <a:bodyPr rtlCol="0" anchor="ctr"/>
+          <a:lstStyle/>
+          <a:p>
+            <a:pPr algn="ctr"/>
+          </a:p>
+        </p:txBody>
+      </p:sp>
+      <p:sp>
+        <p:nvSpPr>
+          <p:cNvPr id="10" name="TextBox 9"/>
+          <p:cNvSpPr txBox="1"/>
+          <p:nvPr/>
+        </p:nvSpPr>
+        <p:spPr>
+          <a:xfrm>
+            <a:off x="777240" y="2615184"/>
+            <a:ext cx="10774375" cy="822959"/>
+          </a:xfrm>
+          <a:prstGeom prst="rect">
+            <a:avLst/>
+          </a:prstGeom>
+          <a:noFill/>
+        </p:spPr>
+        <p:txBody>
+          <a:bodyPr wrap="square">
+            <a:spAutoFit/>
+          </a:bodyPr>
+          <a:lstStyle/>
+          <a:p>
+            <a:r>
+              <a:rPr sz="1200" b="1" i="0">
+                <a:solidFill>
+                  <a:srgbClr val="FFD000"/>
+                </a:solidFill>
+                <a:latin typeface="Calibri"/>
+              </a:rPr>
+              <a:t>Aclaración</a:t>
+            </a:r>
+          </a:p>
+          <a:p>
+            <a:pPr>
+              <a:spcBef>
+                <a:spcPts val="400"/>
+              </a:spcBef>
+            </a:pPr>
+            <a:r>
+              <a:rPr sz="1400" b="0" i="0">
+                <a:solidFill>
+                  <a:srgbClr val="333333"/>
+                </a:solidFill>
+                <a:latin typeface="Calibri"/>
+              </a:rPr>
+              <a:t>Enunciado completo: Clases/Proyecto Integrador/ (VetCare DB).</a:t>
+            </a:r>
+          </a:p>
+        </p:txBody>
+      </p:sp>
+      <p:sp>
+        <p:nvSpPr>
+          <p:cNvPr id="11" name="Rounded Rectangle 10"/>
+          <p:cNvSpPr/>
+          <p:nvPr/>
+        </p:nvSpPr>
+        <p:spPr>
+          <a:xfrm>
+            <a:off x="457200" y="3694176"/>
+            <a:ext cx="11277295" cy="1051560"/>
+          </a:xfrm>
+          <a:prstGeom prst="roundRect">
+            <a:avLst>
+              <a:gd name="adj" fmla="val 12000"/>
+            </a:avLst>
+          </a:prstGeom>
+          <a:solidFill>
+            <a:srgbClr val="FBE4E4"/>
+          </a:solidFill>
+          <a:ln>
+            <a:noFill/>
+          </a:ln>
+        </p:spPr>
+        <p:style>
+          <a:lnRef idx="1">
+            <a:schemeClr val="accent1"/>
+          </a:lnRef>
+          <a:fillRef idx="3">
+            <a:schemeClr val="accent1"/>
+          </a:fillRef>
+          <a:effectRef idx="2">
+            <a:schemeClr val="accent1"/>
+          </a:effectRef>
+          <a:fontRef idx="minor">
+            <a:schemeClr val="lt1"/>
+          </a:fontRef>
+        </p:style>
+        <p:txBody>
+          <a:bodyPr rtlCol="0" anchor="ctr"/>
+          <a:lstStyle/>
+          <a:p>
+            <a:pPr algn="ctr"/>
+          </a:p>
+        </p:txBody>
+      </p:sp>
+      <p:sp>
+        <p:nvSpPr>
+          <p:cNvPr id="12" name="Rectangle 11"/>
+          <p:cNvSpPr/>
+          <p:nvPr/>
+        </p:nvSpPr>
+        <p:spPr>
+          <a:xfrm>
+            <a:off x="457200" y="3694176"/>
+            <a:ext cx="128016" cy="1051560"/>
+          </a:xfrm>
+          <a:prstGeom prst="rect">
+            <a:avLst/>
+          </a:prstGeom>
+          <a:solidFill>
+            <a:srgbClr val="A02030"/>
+          </a:solidFill>
+          <a:ln>
+            <a:noFill/>
+          </a:ln>
+        </p:spPr>
+        <p:style>
+          <a:lnRef idx="1">
+            <a:schemeClr val="accent1"/>
+          </a:lnRef>
+          <a:fillRef idx="3">
+            <a:schemeClr val="accent1"/>
+          </a:fillRef>
+          <a:effectRef idx="2">
+            <a:schemeClr val="accent1"/>
+          </a:effectRef>
+          <a:fontRef idx="minor">
+            <a:schemeClr val="lt1"/>
+          </a:fontRef>
+        </p:style>
+        <p:txBody>
+          <a:bodyPr rtlCol="0" anchor="ctr"/>
+          <a:lstStyle/>
+          <a:p>
+            <a:pPr algn="ctr"/>
+          </a:p>
+        </p:txBody>
+      </p:sp>
+      <p:sp>
+        <p:nvSpPr>
+          <p:cNvPr id="13" name="TextBox 12"/>
+          <p:cNvSpPr txBox="1"/>
+          <p:nvPr/>
+        </p:nvSpPr>
+        <p:spPr>
+          <a:xfrm>
+            <a:off x="777240" y="3831336"/>
+            <a:ext cx="10774375" cy="822959"/>
+          </a:xfrm>
+          <a:prstGeom prst="rect">
+            <a:avLst/>
+          </a:prstGeom>
+          <a:noFill/>
+        </p:spPr>
+        <p:txBody>
+          <a:bodyPr wrap="square">
+            <a:spAutoFit/>
+          </a:bodyPr>
+          <a:lstStyle/>
+          <a:p>
+            <a:r>
+              <a:rPr sz="1200" b="1" i="0">
+                <a:solidFill>
+                  <a:srgbClr val="A02030"/>
+                </a:solidFill>
+                <a:latin typeface="Calibri"/>
+              </a:rPr>
+              <a:t>Atención</a:t>
+            </a:r>
+          </a:p>
+          <a:p>
+            <a:pPr>
+              <a:spcBef>
+                <a:spcPts val="400"/>
+              </a:spcBef>
+            </a:pPr>
+            <a:r>
+              <a:rPr sz="1400" b="0" i="0">
+                <a:solidFill>
+                  <a:srgbClr val="333333"/>
+                </a:solidFill>
+                <a:latin typeface="Calibri"/>
+              </a:rPr>
+              <a:t>Taller de la semana en ExamLab (https://uniaj.examlab.workers.dev/): domingo 23:59 (regla del Acuerdo) cuando aplique.</a:t>
+            </a:r>
+          </a:p>
+        </p:txBody>
+      </p:sp>
+      <p:sp>
+        <p:nvSpPr>
+          <p:cNvPr id="14" name="TextBox 13"/>
+          <p:cNvSpPr txBox="1"/>
+          <p:nvPr/>
+        </p:nvSpPr>
+        <p:spPr>
+          <a:xfrm>
+            <a:off x="11185855" y="6473952"/>
+            <a:ext cx="640080" cy="274320"/>
+          </a:xfrm>
+          <a:prstGeom prst="rect">
+            <a:avLst/>
+          </a:prstGeom>
+          <a:noFill/>
+        </p:spPr>
+        <p:txBody>
+          <a:bodyPr wrap="square">
+            <a:spAutoFit/>
+          </a:bodyPr>
+          <a:lstStyle/>
+          <a:p>
+            <a:pPr algn="r"/>
+            <a:r>
+              <a:rPr sz="1100" b="0" i="0">
+                <a:solidFill>
+                  <a:srgbClr val="666666"/>
+                </a:solidFill>
+                <a:latin typeface="Calibri"/>
+              </a:rPr>
+              <a:t>15</a:t>
+            </a:r>
+          </a:p>
+        </p:txBody>
+      </p:sp>
+    </p:spTree>
+  </p:cSld>
+  <p:clrMapOvr>
+    <a:masterClrMapping/>
+  </p:clrMapOvr>
+</p:sld>
+</file>
+
+<file path=ppt/slides/slide16.xml><?xml version="1.0" encoding="utf-8"?>
+<p:sld xmlns:a="http://schemas.openxmlformats.org/drawingml/2006/main" xmlns:p="http://schemas.openxmlformats.org/presentationml/2006/main" xmlns:r="http://schemas.openxmlformats.org/officeDocument/2006/relationships">
+  <p:cSld>
+    <p:bg>
+      <p:bgPr>
+        <a:solidFill>
+          <a:srgbClr val="FFFFFF"/>
+        </a:solidFill>
+        <a:effectLst/>
+      </p:bgPr>
+    </p:bg>
+    <p:spTree>
+      <p:nvGrpSpPr>
+        <p:cNvPr id="1" name=""/>
+        <p:cNvGrpSpPr/>
+        <p:nvPr/>
+      </p:nvGrpSpPr>
+      <p:grpSpPr/>
+      <p:sp>
+        <p:nvSpPr>
+          <p:cNvPr id="2" name="Rectangle 1"/>
+          <p:cNvSpPr/>
+          <p:nvPr/>
+        </p:nvSpPr>
+        <p:spPr>
+          <a:xfrm>
+            <a:off x="0" y="0"/>
             <a:ext cx="12191695" cy="164592"/>
           </a:xfrm>
           <a:prstGeom prst="rect">
@@ -6267,7 +6676,7 @@
                 </a:solidFill>
                 <a:latin typeface="Calibri"/>
               </a:rPr>
-              <a:t>Entregable: Documento Roles_VetCare + script GRANT/REVOKE (o plan equivalente)</a:t>
+              <a:t>Entregable: Documento Roles_VetCare + script GRANT/REVOKE ejecutado en ExamLab</a:t>
             </a:r>
           </a:p>
           <a:p>
@@ -6546,7 +6955,7 @@
                 </a:solidFill>
                 <a:latin typeface="Calibri"/>
               </a:rPr>
-              <a:t>Oracle Live SQL / DB Fiddle + Google Docs</a:t>
+              <a:t>ExamLab (PostgreSQL) + Google Docs</a:t>
             </a:r>
             <a:r>
               <a:rPr sz="1600" b="0" i="0">
@@ -6607,7 +7016,7 @@
                 </a:solidFill>
                 <a:latin typeface="Calibri"/>
               </a:rPr>
-              <a:t> Documento Roles_VetCare + script GRANT/REVOKE (o plan equivalente)</a:t>
+              <a:t> Documento Roles_VetCare + script GRANT/REVOKE ejecutado en ExamLab</a:t>
             </a:r>
           </a:p>
           <a:p>
@@ -7791,7 +8200,7 @@
                 </a:solidFill>
                 <a:latin typeface="Calibri"/>
               </a:rPr>
-              <a:t>–   Error de docente que no domina el tema: crear un unico usuario 'admin' que todos comparten (rompe la…</a:t>
+              <a:t>–   Un GRANT no es todo-o-nada: se puede recortar la superficie con una vista (CREATE VIEW deja fuera filas y…</a:t>
             </a:r>
           </a:p>
         </p:txBody>
@@ -8340,7 +8749,7 @@
                 </a:solidFill>
                 <a:latin typeface="Calibri"/>
               </a:rPr>
-              <a:t>–   4 roles: ADMIN_BD · RECEPCION · VETERINARIO · AUDITOR</a:t>
+              <a:t>–   4 roles: admin_bd · recepcion · veterinario_rol · auditor</a:t>
             </a:r>
           </a:p>
           <a:p>
@@ -8372,7 +8781,7 @@
                 </a:solidFill>
                 <a:latin typeface="Calibri"/>
               </a:rPr>
-              <a:t>–   RECEPCION nunca hace DELETE sobre historial</a:t>
+              <a:t>–   recepcion nunca hace DELETE: cancelar es UPDATE</a:t>
             </a:r>
           </a:p>
           <a:p>
@@ -8388,7 +8797,7 @@
                 </a:solidFill>
                 <a:latin typeface="Calibri"/>
               </a:rPr>
-              <a:t>–   Politica de baja: revocacion inmediata</a:t>
+              <a:t>–   Politica de baja: revocacion el mismo dia</a:t>
             </a:r>
           </a:p>
         </p:txBody>
@@ -8569,21 +8978,141 @@
                 </a:solidFill>
                 <a:latin typeface="Calibri"/>
               </a:rPr>
-              <a:t>Demo del dia</a:t>
-            </a:r>
-          </a:p>
-        </p:txBody>
-      </p:sp>
-      <p:sp>
-        <p:nvSpPr>
-          <p:cNvPr id="5" name="TextBox 4"/>
+              <a:t>Reducir la superficie: vista y privilegio por columna</a:t>
+            </a:r>
+          </a:p>
+        </p:txBody>
+      </p:sp>
+      <p:sp>
+        <p:nvSpPr>
+          <p:cNvPr id="5" name="Rounded Rectangle 4"/>
+          <p:cNvSpPr/>
+          <p:nvPr/>
+        </p:nvSpPr>
+        <p:spPr>
+          <a:xfrm>
+            <a:off x="457200" y="1261872"/>
+            <a:ext cx="11277295" cy="4773168"/>
+          </a:xfrm>
+          <a:prstGeom prst="roundRect">
+            <a:avLst>
+              <a:gd name="adj" fmla="val 12000"/>
+            </a:avLst>
+          </a:prstGeom>
+          <a:solidFill>
+            <a:srgbClr val="1E2A38"/>
+          </a:solidFill>
+          <a:ln>
+            <a:noFill/>
+          </a:ln>
+        </p:spPr>
+        <p:style>
+          <a:lnRef idx="1">
+            <a:schemeClr val="accent1"/>
+          </a:lnRef>
+          <a:fillRef idx="3">
+            <a:schemeClr val="accent1"/>
+          </a:fillRef>
+          <a:effectRef idx="2">
+            <a:schemeClr val="accent1"/>
+          </a:effectRef>
+          <a:fontRef idx="minor">
+            <a:schemeClr val="lt1"/>
+          </a:fontRef>
+        </p:style>
+        <p:txBody>
+          <a:bodyPr rtlCol="0" anchor="ctr"/>
+          <a:lstStyle/>
+          <a:p>
+            <a:pPr algn="ctr"/>
+          </a:p>
+        </p:txBody>
+      </p:sp>
+      <p:sp>
+        <p:nvSpPr>
+          <p:cNvPr id="6" name="Rectangle 5"/>
+          <p:cNvSpPr/>
+          <p:nvPr/>
+        </p:nvSpPr>
+        <p:spPr>
+          <a:xfrm>
+            <a:off x="457200" y="1261872"/>
+            <a:ext cx="11277295" cy="320040"/>
+          </a:xfrm>
+          <a:prstGeom prst="rect">
+            <a:avLst/>
+          </a:prstGeom>
+          <a:solidFill>
+            <a:srgbClr val="095292"/>
+          </a:solidFill>
+          <a:ln>
+            <a:noFill/>
+          </a:ln>
+        </p:spPr>
+        <p:style>
+          <a:lnRef idx="1">
+            <a:schemeClr val="accent1"/>
+          </a:lnRef>
+          <a:fillRef idx="3">
+            <a:schemeClr val="accent1"/>
+          </a:fillRef>
+          <a:effectRef idx="2">
+            <a:schemeClr val="accent1"/>
+          </a:effectRef>
+          <a:fontRef idx="minor">
+            <a:schemeClr val="lt1"/>
+          </a:fontRef>
+        </p:style>
+        <p:txBody>
+          <a:bodyPr rtlCol="0" anchor="ctr"/>
+          <a:lstStyle/>
+          <a:p>
+            <a:pPr algn="ctr"/>
+          </a:p>
+        </p:txBody>
+      </p:sp>
+      <p:sp>
+        <p:nvSpPr>
+          <p:cNvPr id="7" name="TextBox 6"/>
           <p:cNvSpPr txBox="1"/>
           <p:nvPr/>
         </p:nvSpPr>
         <p:spPr>
           <a:xfrm>
-            <a:off x="457200" y="1170432"/>
-            <a:ext cx="11277295" cy="5230368"/>
+            <a:off x="685800" y="1307592"/>
+            <a:ext cx="10820095" cy="256032"/>
+          </a:xfrm>
+          <a:prstGeom prst="rect">
+            <a:avLst/>
+          </a:prstGeom>
+          <a:noFill/>
+        </p:spPr>
+        <p:txBody>
+          <a:bodyPr wrap="square" anchor="ctr"/>
+          <a:lstStyle/>
+          <a:p>
+            <a:r>
+              <a:rPr sz="1000" b="1" i="0">
+                <a:solidFill>
+                  <a:srgbClr val="269CCB"/>
+                </a:solidFill>
+                <a:latin typeface="Calibri"/>
+              </a:rPr>
+              <a:t>● ● ●</a:t>
+            </a:r>
+          </a:p>
+        </p:txBody>
+      </p:sp>
+      <p:sp>
+        <p:nvSpPr>
+          <p:cNvPr id="8" name="TextBox 7"/>
+          <p:cNvSpPr txBox="1"/>
+          <p:nvPr/>
+        </p:nvSpPr>
+        <p:spPr>
+          <a:xfrm>
+            <a:off x="777240" y="1719072"/>
+            <a:ext cx="10637215" cy="4133087"/>
           </a:xfrm>
           <a:prstGeom prst="rect">
             <a:avLst/>
@@ -8598,108 +9127,219 @@
           <a:p>
             <a:pPr>
               <a:spcAft>
-                <a:spcPts val="800"/>
+                <a:spcPts val="400"/>
               </a:spcAft>
             </a:pPr>
             <a:r>
-              <a:rPr sz="1600" b="0" i="0">
-                <a:solidFill>
-                  <a:srgbClr val="333333"/>
-                </a:solidFill>
-                <a:latin typeface="Calibri"/>
-              </a:rPr>
-              <a:t>–   </a:t>
-            </a:r>
-            <a:r>
-              <a:rPr sz="1600" b="1" i="0">
-                <a:solidFill>
-                  <a:srgbClr val="333333"/>
-                </a:solidFill>
-                <a:latin typeface="Calibri"/>
-              </a:rPr>
-              <a:t>Herramienta:</a:t>
-            </a:r>
-            <a:r>
-              <a:rPr sz="1600" b="0" i="0">
-                <a:solidFill>
-                  <a:srgbClr val="333333"/>
-                </a:solidFill>
-                <a:latin typeface="Calibri"/>
-              </a:rPr>
-              <a:t> Oracle Live SQL / DB Fiddle + Google Docs</a:t>
+              <a:rPr sz="1400" b="0" i="0">
+                <a:solidFill>
+                  <a:srgbClr val="FFFFFF"/>
+                </a:solidFill>
+                <a:latin typeface="Calibri"/>
+              </a:rPr>
+              <a:t>-- 1) La vista deja fuera el email y las citas canceladas</a:t>
             </a:r>
           </a:p>
           <a:p>
             <a:pPr>
               <a:spcAft>
-                <a:spcPts val="800"/>
+                <a:spcPts val="400"/>
               </a:spcAft>
             </a:pPr>
             <a:r>
-              <a:rPr sz="1600" b="0" i="0">
-                <a:solidFill>
-                  <a:srgbClr val="333333"/>
-                </a:solidFill>
-                <a:latin typeface="Calibri"/>
-              </a:rPr>
-              <a:t>–   </a:t>
-            </a:r>
-            <a:r>
-              <a:rPr sz="1600" b="1" i="0">
-                <a:solidFill>
-                  <a:srgbClr val="333333"/>
-                </a:solidFill>
-                <a:latin typeface="Calibri"/>
-              </a:rPr>
-              <a:t>Demo:</a:t>
-            </a:r>
-            <a:r>
-              <a:rPr sz="1600" b="0" i="0">
-                <a:solidFill>
-                  <a:srgbClr val="333333"/>
-                </a:solidFill>
-                <a:latin typeface="Calibri"/>
-              </a:rPr>
-              <a:t> Matriz rol x objeto x privilegio sobre tablas VetCare.</a:t>
+              <a:rPr sz="1400" b="0" i="0">
+                <a:solidFill>
+                  <a:srgbClr val="FFFFFF"/>
+                </a:solidFill>
+                <a:latin typeface="Calibri"/>
+              </a:rPr>
+              <a:t>CREATE VIEW v_agenda_recepcion AS</a:t>
             </a:r>
           </a:p>
           <a:p>
             <a:pPr>
               <a:spcAft>
-                <a:spcPts val="800"/>
+                <a:spcPts val="400"/>
               </a:spcAft>
             </a:pPr>
             <a:r>
-              <a:rPr sz="1600" b="0" i="0">
-                <a:solidFill>
-                  <a:srgbClr val="333333"/>
-                </a:solidFill>
-                <a:latin typeface="Calibri"/>
-              </a:rPr>
-              <a:t>–   Sigan el mismo dominio VetCare (no inventen otro caso).</a:t>
+              <a:rPr sz="1400" b="0" i="0">
+                <a:solidFill>
+                  <a:srgbClr val="FFFFFF"/>
+                </a:solidFill>
+                <a:latin typeface="Calibri"/>
+              </a:rPr>
+              <a:t>SELECT c.id_cita, c.fecha_hora, d.nombre AS dueno, d.telefono</a:t>
             </a:r>
           </a:p>
           <a:p>
             <a:pPr>
               <a:spcAft>
-                <a:spcPts val="800"/>
+                <a:spcPts val="400"/>
               </a:spcAft>
             </a:pPr>
             <a:r>
-              <a:rPr sz="1600" b="0" i="0">
-                <a:solidFill>
-                  <a:srgbClr val="333333"/>
-                </a:solidFill>
-                <a:latin typeface="Calibri"/>
-              </a:rPr>
-              <a:t>–   Al final de la demo: dejar enlace/script compartible al grupo.</a:t>
-            </a:r>
-          </a:p>
-        </p:txBody>
-      </p:sp>
-      <p:sp>
-        <p:nvSpPr>
-          <p:cNvPr id="6" name="TextBox 5"/>
+              <a:rPr sz="1400" b="0" i="0">
+                <a:solidFill>
+                  <a:srgbClr val="FFFFFF"/>
+                </a:solidFill>
+                <a:latin typeface="Calibri"/>
+              </a:rPr>
+              <a:t>  FROM cita c JOIN mascota m ON m.id_mascota = c.id_mascota</a:t>
+            </a:r>
+          </a:p>
+          <a:p>
+            <a:pPr>
+              <a:spcAft>
+                <a:spcPts val="400"/>
+              </a:spcAft>
+            </a:pPr>
+            <a:r>
+              <a:rPr sz="1400" b="0" i="0">
+                <a:solidFill>
+                  <a:srgbClr val="FFFFFF"/>
+                </a:solidFill>
+                <a:latin typeface="Calibri"/>
+              </a:rPr>
+              <a:t>  JOIN dueno d ON d.id_dueno = m.id_dueno</a:t>
+            </a:r>
+          </a:p>
+          <a:p>
+            <a:pPr>
+              <a:spcAft>
+                <a:spcPts val="400"/>
+              </a:spcAft>
+            </a:pPr>
+            <a:r>
+              <a:rPr sz="1400" b="0" i="0">
+                <a:solidFill>
+                  <a:srgbClr val="FFFFFF"/>
+                </a:solidFill>
+                <a:latin typeface="Calibri"/>
+              </a:rPr>
+              <a:t> WHERE c.estado &lt;&gt; 'CANCELADA';</a:t>
+            </a:r>
+          </a:p>
+          <a:p>
+            <a:pPr>
+              <a:spcAft>
+                <a:spcPts val="400"/>
+              </a:spcAft>
+            </a:pPr>
+            <a:r>
+              <a:rPr sz="1400" b="0" i="0">
+                <a:solidFill>
+                  <a:srgbClr val="FFFFFF"/>
+                </a:solidFill>
+                <a:latin typeface="Calibri"/>
+              </a:rPr>
+              <a:t>GRANT SELECT ON v_agenda_recepcion TO recepcion;</a:t>
+            </a:r>
+          </a:p>
+          <a:p>
+            <a:pPr>
+              <a:spcAft>
+                <a:spcPts val="400"/>
+              </a:spcAft>
+            </a:pPr>
+            <a:r>
+              <a:rPr sz="1400" b="0" i="0">
+                <a:solidFill>
+                  <a:srgbClr val="FFFFFF"/>
+                </a:solidFill>
+                <a:latin typeface="Calibri"/>
+              </a:rPr>
+              <a:t>REVOKE SELECT ON dueno FROM recepcion;   -- solo llega por la vista</a:t>
+            </a:r>
+          </a:p>
+          <a:p>
+            <a:pPr>
+              <a:spcAft>
+                <a:spcPts val="400"/>
+              </a:spcAft>
+            </a:pPr>
+            <a:r>
+              <a:rPr sz="1400" b="0" i="0">
+                <a:solidFill>
+                  <a:srgbClr val="FFFFFF"/>
+                </a:solidFill>
+                <a:latin typeface="Calibri"/>
+              </a:rPr>
+              <a:t/>
+            </a:r>
+          </a:p>
+          <a:p>
+            <a:pPr>
+              <a:spcAft>
+                <a:spcPts val="400"/>
+              </a:spcAft>
+            </a:pPr>
+            <a:r>
+              <a:rPr sz="1400" b="0" i="0">
+                <a:solidFill>
+                  <a:srgbClr val="FFFFFF"/>
+                </a:solidFill>
+                <a:latin typeface="Calibri"/>
+              </a:rPr>
+              <a:t>-- 2) O se recorta la tabla columna por columna</a:t>
+            </a:r>
+          </a:p>
+          <a:p>
+            <a:pPr>
+              <a:spcAft>
+                <a:spcPts val="400"/>
+              </a:spcAft>
+            </a:pPr>
+            <a:r>
+              <a:rPr sz="1400" b="0" i="0">
+                <a:solidFill>
+                  <a:srgbClr val="FFFFFF"/>
+                </a:solidFill>
+                <a:latin typeface="Calibri"/>
+              </a:rPr>
+              <a:t>GRANT SELECT (id_dueno, nombre) ON dueno TO veterinario_rol;</a:t>
+            </a:r>
+          </a:p>
+        </p:txBody>
+      </p:sp>
+      <p:sp>
+        <p:nvSpPr>
+          <p:cNvPr id="9" name="TextBox 8"/>
+          <p:cNvSpPr txBox="1"/>
+          <p:nvPr/>
+        </p:nvSpPr>
+        <p:spPr>
+          <a:xfrm>
+            <a:off x="457200" y="6080760"/>
+            <a:ext cx="11277295" cy="320040"/>
+          </a:xfrm>
+          <a:prstGeom prst="rect">
+            <a:avLst/>
+          </a:prstGeom>
+          <a:noFill/>
+        </p:spPr>
+        <p:txBody>
+          <a:bodyPr wrap="square">
+            <a:spAutoFit/>
+          </a:bodyPr>
+          <a:lstStyle/>
+          <a:p>
+            <a:pPr algn="ctr"/>
+            <a:r>
+              <a:rPr sz="1200" b="0" i="1">
+                <a:solidFill>
+                  <a:srgbClr val="666666"/>
+                </a:solidFill>
+                <a:latin typeface="Calibri"/>
+              </a:rPr>
+              <a:t>Un GRANT no es todo-o-nada: la vista recorta filas y columnas, y el privilegio por columna recorta columnas sin crear objeto nuevo.</a:t>
+            </a:r>
+          </a:p>
+        </p:txBody>
+      </p:sp>
+      <p:sp>
+        <p:nvSpPr>
+          <p:cNvPr id="10" name="TextBox 9"/>
           <p:cNvSpPr txBox="1"/>
           <p:nvPr/>
         </p:nvSpPr>
@@ -8767,7 +9407,7 @@
         <p:spPr>
           <a:xfrm>
             <a:off x="0" y="0"/>
-            <a:ext cx="12191695" cy="1170432"/>
+            <a:ext cx="12191695" cy="960120"/>
           </a:xfrm>
           <a:prstGeom prst="rect">
             <a:avLst/>
@@ -8809,7 +9449,7 @@
         </p:nvSpPr>
         <p:spPr>
           <a:xfrm>
-            <a:off x="0" y="1170432"/>
+            <a:off x="0" y="960120"/>
             <a:ext cx="12191695" cy="41148"/>
           </a:xfrm>
           <a:prstGeom prst="rect">
@@ -8853,7 +9493,7 @@
         <p:spPr>
           <a:xfrm>
             <a:off x="457200" y="164592"/>
-            <a:ext cx="11277295" cy="384048"/>
+            <a:ext cx="11277295" cy="502920"/>
           </a:xfrm>
           <a:prstGeom prst="rect">
             <a:avLst/>
@@ -8873,7 +9513,7 @@
                 </a:solidFill>
                 <a:latin typeface="Calibri"/>
               </a:rPr>
-              <a:t>Herramientas de hoy</a:t>
+              <a:t>Demo del dia</a:t>
             </a:r>
           </a:p>
         </p:txBody>
@@ -8886,8 +9526,8 @@
         </p:nvSpPr>
         <p:spPr>
           <a:xfrm>
-            <a:off x="457200" y="566928"/>
-            <a:ext cx="11277295" cy="411480"/>
+            <a:off x="457200" y="1170432"/>
+            <a:ext cx="11277295" cy="5230368"/>
           </a:xfrm>
           <a:prstGeom prst="rect">
             <a:avLst/>
@@ -8900,633 +9540,110 @@
           </a:bodyPr>
           <a:lstStyle/>
           <a:p>
-            <a:r>
-              <a:rPr sz="1400" b="0" i="0">
-                <a:solidFill>
-                  <a:srgbClr val="B8D8EE"/>
-                </a:solidFill>
-                <a:latin typeface="Calibri"/>
-              </a:rPr>
-              <a:t>Gratis · navegador o free tier</a:t>
-            </a:r>
-          </a:p>
-        </p:txBody>
-      </p:sp>
-      <p:sp>
-        <p:nvSpPr>
-          <p:cNvPr id="6" name="Rounded Rectangle 5"/>
-          <p:cNvSpPr/>
-          <p:nvPr/>
-        </p:nvSpPr>
-        <p:spPr>
-          <a:xfrm>
-            <a:off x="457200" y="1591056"/>
-            <a:ext cx="3624986" cy="2331720"/>
-          </a:xfrm>
-          <a:prstGeom prst="roundRect">
-            <a:avLst>
-              <a:gd name="adj" fmla="val 12000"/>
-            </a:avLst>
-          </a:prstGeom>
-          <a:solidFill>
-            <a:srgbClr val="F2F2F2"/>
-          </a:solidFill>
-          <a:ln>
-            <a:noFill/>
-          </a:ln>
-        </p:spPr>
-        <p:style>
-          <a:lnRef idx="1">
-            <a:schemeClr val="accent1"/>
-          </a:lnRef>
-          <a:fillRef idx="3">
-            <a:schemeClr val="accent1"/>
-          </a:fillRef>
-          <a:effectRef idx="2">
-            <a:schemeClr val="accent1"/>
-          </a:effectRef>
-          <a:fontRef idx="minor">
-            <a:schemeClr val="lt1"/>
-          </a:fontRef>
-        </p:style>
-        <p:txBody>
-          <a:bodyPr rtlCol="0" anchor="ctr"/>
-          <a:lstStyle/>
-          <a:p>
-            <a:pPr algn="ctr"/>
-          </a:p>
-        </p:txBody>
-      </p:sp>
-      <p:sp>
-        <p:nvSpPr>
-          <p:cNvPr id="7" name="Rectangle 6"/>
-          <p:cNvSpPr/>
-          <p:nvPr/>
-        </p:nvSpPr>
-        <p:spPr>
-          <a:xfrm>
-            <a:off x="457200" y="1591056"/>
-            <a:ext cx="3624986" cy="64008"/>
-          </a:xfrm>
-          <a:prstGeom prst="rect">
-            <a:avLst/>
-          </a:prstGeom>
-          <a:solidFill>
-            <a:srgbClr val="095292"/>
-          </a:solidFill>
-          <a:ln>
-            <a:noFill/>
-          </a:ln>
-        </p:spPr>
-        <p:style>
-          <a:lnRef idx="1">
-            <a:schemeClr val="accent1"/>
-          </a:lnRef>
-          <a:fillRef idx="3">
-            <a:schemeClr val="accent1"/>
-          </a:fillRef>
-          <a:effectRef idx="2">
-            <a:schemeClr val="accent1"/>
-          </a:effectRef>
-          <a:fontRef idx="minor">
-            <a:schemeClr val="lt1"/>
-          </a:fontRef>
-        </p:style>
-        <p:txBody>
-          <a:bodyPr rtlCol="0" anchor="ctr"/>
-          <a:lstStyle/>
-          <a:p>
-            <a:pPr algn="ctr"/>
-          </a:p>
-        </p:txBody>
-      </p:sp>
-      <p:sp>
-        <p:nvSpPr>
-          <p:cNvPr id="8" name="Rectangle 7"/>
-          <p:cNvSpPr/>
-          <p:nvPr/>
-        </p:nvSpPr>
-        <p:spPr>
-          <a:xfrm>
-            <a:off x="457200" y="1655064"/>
-            <a:ext cx="3624986" cy="27432"/>
-          </a:xfrm>
-          <a:prstGeom prst="rect">
-            <a:avLst/>
-          </a:prstGeom>
-          <a:solidFill>
-            <a:srgbClr val="FFD000"/>
-          </a:solidFill>
-          <a:ln>
-            <a:noFill/>
-          </a:ln>
-        </p:spPr>
-        <p:style>
-          <a:lnRef idx="1">
-            <a:schemeClr val="accent1"/>
-          </a:lnRef>
-          <a:fillRef idx="3">
-            <a:schemeClr val="accent1"/>
-          </a:fillRef>
-          <a:effectRef idx="2">
-            <a:schemeClr val="accent1"/>
-          </a:effectRef>
-          <a:fontRef idx="minor">
-            <a:schemeClr val="lt1"/>
-          </a:fontRef>
-        </p:style>
-        <p:txBody>
-          <a:bodyPr rtlCol="0" anchor="ctr"/>
-          <a:lstStyle/>
-          <a:p>
-            <a:pPr algn="ctr"/>
-          </a:p>
-        </p:txBody>
-      </p:sp>
-      <p:pic>
-        <p:nvPicPr>
-          <p:cNvPr id="9" name="Picture 8" descr="oracle_livesql.png"/>
-          <p:cNvPicPr>
-            <a:picLocks noChangeAspect="1"/>
-          </p:cNvPicPr>
-          <p:nvPr/>
-        </p:nvPicPr>
-        <p:blipFill>
-          <a:blip r:embed="rId2"/>
-          <a:stretch>
-            <a:fillRect/>
-          </a:stretch>
-        </p:blipFill>
-        <p:spPr>
-          <a:xfrm>
-            <a:off x="1643329" y="1847087"/>
-            <a:ext cx="1252728" cy="1252728"/>
-          </a:xfrm>
-          <a:prstGeom prst="rect">
-            <a:avLst/>
-          </a:prstGeom>
-        </p:spPr>
-      </p:pic>
-      <p:sp>
-        <p:nvSpPr>
-          <p:cNvPr id="10" name="TextBox 9"/>
-          <p:cNvSpPr txBox="1"/>
-          <p:nvPr/>
-        </p:nvSpPr>
-        <p:spPr>
-          <a:xfrm>
-            <a:off x="530352" y="3191256"/>
-            <a:ext cx="3478682" cy="621792"/>
-          </a:xfrm>
-          <a:prstGeom prst="rect">
-            <a:avLst/>
-          </a:prstGeom>
-          <a:noFill/>
-        </p:spPr>
-        <p:txBody>
-          <a:bodyPr wrap="square" anchor="t"/>
-          <a:lstStyle/>
-          <a:p>
-            <a:pPr algn="ctr"/>
-            <a:r>
-              <a:rPr sz="1300" b="1" i="0">
-                <a:solidFill>
-                  <a:srgbClr val="095292"/>
-                </a:solidFill>
-                <a:latin typeface="Calibri"/>
-              </a:rPr>
-              <a:t>Oracle Live SQL</a:t>
-            </a:r>
-          </a:p>
-          <a:p>
-            <a:pPr algn="ctr">
-              <a:spcBef>
-                <a:spcPts val="200"/>
-              </a:spcBef>
+            <a:pPr>
+              <a:spcAft>
+                <a:spcPts val="800"/>
+              </a:spcAft>
             </a:pPr>
             <a:r>
-              <a:rPr sz="1000" b="0" i="0">
-                <a:solidFill>
-                  <a:srgbClr val="666666"/>
-                </a:solidFill>
-                <a:latin typeface="Calibri"/>
-              </a:rPr>
-              <a:t>GRANT/roles</a:t>
-            </a:r>
-          </a:p>
-        </p:txBody>
-      </p:sp>
-      <p:sp>
-        <p:nvSpPr>
-          <p:cNvPr id="11" name="Rounded Rectangle 10"/>
-          <p:cNvSpPr/>
-          <p:nvPr/>
-        </p:nvSpPr>
-        <p:spPr>
-          <a:xfrm>
-            <a:off x="4283354" y="1591056"/>
-            <a:ext cx="3624986" cy="2331720"/>
-          </a:xfrm>
-          <a:prstGeom prst="roundRect">
-            <a:avLst>
-              <a:gd name="adj" fmla="val 12000"/>
-            </a:avLst>
-          </a:prstGeom>
-          <a:solidFill>
-            <a:srgbClr val="F2F2F2"/>
-          </a:solidFill>
-          <a:ln>
-            <a:noFill/>
-          </a:ln>
-        </p:spPr>
-        <p:style>
-          <a:lnRef idx="1">
-            <a:schemeClr val="accent1"/>
-          </a:lnRef>
-          <a:fillRef idx="3">
-            <a:schemeClr val="accent1"/>
-          </a:fillRef>
-          <a:effectRef idx="2">
-            <a:schemeClr val="accent1"/>
-          </a:effectRef>
-          <a:fontRef idx="minor">
-            <a:schemeClr val="lt1"/>
-          </a:fontRef>
-        </p:style>
-        <p:txBody>
-          <a:bodyPr rtlCol="0" anchor="ctr"/>
-          <a:lstStyle/>
-          <a:p>
-            <a:pPr algn="ctr"/>
-          </a:p>
-        </p:txBody>
-      </p:sp>
-      <p:sp>
-        <p:nvSpPr>
-          <p:cNvPr id="12" name="Rectangle 11"/>
-          <p:cNvSpPr/>
-          <p:nvPr/>
-        </p:nvSpPr>
-        <p:spPr>
-          <a:xfrm>
-            <a:off x="4283354" y="1591056"/>
-            <a:ext cx="3624986" cy="64008"/>
-          </a:xfrm>
-          <a:prstGeom prst="rect">
-            <a:avLst/>
-          </a:prstGeom>
-          <a:solidFill>
-            <a:srgbClr val="095292"/>
-          </a:solidFill>
-          <a:ln>
-            <a:noFill/>
-          </a:ln>
-        </p:spPr>
-        <p:style>
-          <a:lnRef idx="1">
-            <a:schemeClr val="accent1"/>
-          </a:lnRef>
-          <a:fillRef idx="3">
-            <a:schemeClr val="accent1"/>
-          </a:fillRef>
-          <a:effectRef idx="2">
-            <a:schemeClr val="accent1"/>
-          </a:effectRef>
-          <a:fontRef idx="minor">
-            <a:schemeClr val="lt1"/>
-          </a:fontRef>
-        </p:style>
-        <p:txBody>
-          <a:bodyPr rtlCol="0" anchor="ctr"/>
-          <a:lstStyle/>
-          <a:p>
-            <a:pPr algn="ctr"/>
-          </a:p>
-        </p:txBody>
-      </p:sp>
-      <p:sp>
-        <p:nvSpPr>
-          <p:cNvPr id="13" name="Rectangle 12"/>
-          <p:cNvSpPr/>
-          <p:nvPr/>
-        </p:nvSpPr>
-        <p:spPr>
-          <a:xfrm>
-            <a:off x="4283354" y="1655064"/>
-            <a:ext cx="3624986" cy="27432"/>
-          </a:xfrm>
-          <a:prstGeom prst="rect">
-            <a:avLst/>
-          </a:prstGeom>
-          <a:solidFill>
-            <a:srgbClr val="FFD000"/>
-          </a:solidFill>
-          <a:ln>
-            <a:noFill/>
-          </a:ln>
-        </p:spPr>
-        <p:style>
-          <a:lnRef idx="1">
-            <a:schemeClr val="accent1"/>
-          </a:lnRef>
-          <a:fillRef idx="3">
-            <a:schemeClr val="accent1"/>
-          </a:fillRef>
-          <a:effectRef idx="2">
-            <a:schemeClr val="accent1"/>
-          </a:effectRef>
-          <a:fontRef idx="minor">
-            <a:schemeClr val="lt1"/>
-          </a:fontRef>
-        </p:style>
-        <p:txBody>
-          <a:bodyPr rtlCol="0" anchor="ctr"/>
-          <a:lstStyle/>
-          <a:p>
-            <a:pPr algn="ctr"/>
-          </a:p>
-        </p:txBody>
-      </p:sp>
-      <p:pic>
-        <p:nvPicPr>
-          <p:cNvPr id="14" name="Picture 13" descr="dbfiddle.png"/>
-          <p:cNvPicPr>
-            <a:picLocks noChangeAspect="1"/>
-          </p:cNvPicPr>
-          <p:nvPr/>
-        </p:nvPicPr>
-        <p:blipFill>
-          <a:blip r:embed="rId3"/>
-          <a:stretch>
-            <a:fillRect/>
-          </a:stretch>
-        </p:blipFill>
-        <p:spPr>
-          <a:xfrm>
-            <a:off x="5469483" y="1847087"/>
-            <a:ext cx="1252728" cy="1252728"/>
-          </a:xfrm>
-          <a:prstGeom prst="rect">
-            <a:avLst/>
-          </a:prstGeom>
-        </p:spPr>
-      </p:pic>
-      <p:sp>
-        <p:nvSpPr>
-          <p:cNvPr id="15" name="TextBox 14"/>
-          <p:cNvSpPr txBox="1"/>
-          <p:nvPr/>
-        </p:nvSpPr>
-        <p:spPr>
-          <a:xfrm>
-            <a:off x="4356506" y="3191256"/>
-            <a:ext cx="3478682" cy="621792"/>
-          </a:xfrm>
-          <a:prstGeom prst="rect">
-            <a:avLst/>
-          </a:prstGeom>
-          <a:noFill/>
-        </p:spPr>
-        <p:txBody>
-          <a:bodyPr wrap="square" anchor="t"/>
-          <a:lstStyle/>
-          <a:p>
-            <a:pPr algn="ctr"/>
-            <a:r>
-              <a:rPr sz="1300" b="1" i="0">
-                <a:solidFill>
-                  <a:srgbClr val="095292"/>
-                </a:solidFill>
-                <a:latin typeface="Calibri"/>
-              </a:rPr>
-              <a:t>DB Fiddle</a:t>
-            </a:r>
-          </a:p>
-          <a:p>
-            <a:pPr algn="ctr">
-              <a:spcBef>
-                <a:spcPts val="200"/>
-              </a:spcBef>
+              <a:rPr sz="1600" b="0" i="0">
+                <a:solidFill>
+                  <a:srgbClr val="333333"/>
+                </a:solidFill>
+                <a:latin typeface="Calibri"/>
+              </a:rPr>
+              <a:t>–   </a:t>
+            </a:r>
+            <a:r>
+              <a:rPr sz="1600" b="1" i="0">
+                <a:solidFill>
+                  <a:srgbClr val="333333"/>
+                </a:solidFill>
+                <a:latin typeface="Calibri"/>
+              </a:rPr>
+              <a:t>Herramienta:</a:t>
+            </a:r>
+            <a:r>
+              <a:rPr sz="1600" b="0" i="0">
+                <a:solidFill>
+                  <a:srgbClr val="333333"/>
+                </a:solidFill>
+                <a:latin typeface="Calibri"/>
+              </a:rPr>
+              <a:t> ExamLab (PostgreSQL) + Google Docs</a:t>
+            </a:r>
+          </a:p>
+          <a:p>
+            <a:pPr>
+              <a:spcAft>
+                <a:spcPts val="800"/>
+              </a:spcAft>
             </a:pPr>
             <a:r>
-              <a:rPr sz="1000" b="0" i="0">
-                <a:solidFill>
-                  <a:srgbClr val="666666"/>
-                </a:solidFill>
-                <a:latin typeface="Calibri"/>
-              </a:rPr>
-              <a:t>SQL demo</a:t>
-            </a:r>
-          </a:p>
-        </p:txBody>
-      </p:sp>
-      <p:sp>
-        <p:nvSpPr>
-          <p:cNvPr id="16" name="Rounded Rectangle 15"/>
-          <p:cNvSpPr/>
-          <p:nvPr/>
-        </p:nvSpPr>
-        <p:spPr>
-          <a:xfrm>
-            <a:off x="8109508" y="1591056"/>
-            <a:ext cx="3624986" cy="2331720"/>
-          </a:xfrm>
-          <a:prstGeom prst="roundRect">
-            <a:avLst>
-              <a:gd name="adj" fmla="val 12000"/>
-            </a:avLst>
-          </a:prstGeom>
-          <a:solidFill>
-            <a:srgbClr val="F2F2F2"/>
-          </a:solidFill>
-          <a:ln>
-            <a:noFill/>
-          </a:ln>
-        </p:spPr>
-        <p:style>
-          <a:lnRef idx="1">
-            <a:schemeClr val="accent1"/>
-          </a:lnRef>
-          <a:fillRef idx="3">
-            <a:schemeClr val="accent1"/>
-          </a:fillRef>
-          <a:effectRef idx="2">
-            <a:schemeClr val="accent1"/>
-          </a:effectRef>
-          <a:fontRef idx="minor">
-            <a:schemeClr val="lt1"/>
-          </a:fontRef>
-        </p:style>
-        <p:txBody>
-          <a:bodyPr rtlCol="0" anchor="ctr"/>
-          <a:lstStyle/>
-          <a:p>
-            <a:pPr algn="ctr"/>
-          </a:p>
-        </p:txBody>
-      </p:sp>
-      <p:sp>
-        <p:nvSpPr>
-          <p:cNvPr id="17" name="Rectangle 16"/>
-          <p:cNvSpPr/>
-          <p:nvPr/>
-        </p:nvSpPr>
-        <p:spPr>
-          <a:xfrm>
-            <a:off x="8109508" y="1591056"/>
-            <a:ext cx="3624986" cy="64008"/>
-          </a:xfrm>
-          <a:prstGeom prst="rect">
-            <a:avLst/>
-          </a:prstGeom>
-          <a:solidFill>
-            <a:srgbClr val="095292"/>
-          </a:solidFill>
-          <a:ln>
-            <a:noFill/>
-          </a:ln>
-        </p:spPr>
-        <p:style>
-          <a:lnRef idx="1">
-            <a:schemeClr val="accent1"/>
-          </a:lnRef>
-          <a:fillRef idx="3">
-            <a:schemeClr val="accent1"/>
-          </a:fillRef>
-          <a:effectRef idx="2">
-            <a:schemeClr val="accent1"/>
-          </a:effectRef>
-          <a:fontRef idx="minor">
-            <a:schemeClr val="lt1"/>
-          </a:fontRef>
-        </p:style>
-        <p:txBody>
-          <a:bodyPr rtlCol="0" anchor="ctr"/>
-          <a:lstStyle/>
-          <a:p>
-            <a:pPr algn="ctr"/>
-          </a:p>
-        </p:txBody>
-      </p:sp>
-      <p:sp>
-        <p:nvSpPr>
-          <p:cNvPr id="18" name="Rectangle 17"/>
-          <p:cNvSpPr/>
-          <p:nvPr/>
-        </p:nvSpPr>
-        <p:spPr>
-          <a:xfrm>
-            <a:off x="8109508" y="1655064"/>
-            <a:ext cx="3624986" cy="27432"/>
-          </a:xfrm>
-          <a:prstGeom prst="rect">
-            <a:avLst/>
-          </a:prstGeom>
-          <a:solidFill>
-            <a:srgbClr val="FFD000"/>
-          </a:solidFill>
-          <a:ln>
-            <a:noFill/>
-          </a:ln>
-        </p:spPr>
-        <p:style>
-          <a:lnRef idx="1">
-            <a:schemeClr val="accent1"/>
-          </a:lnRef>
-          <a:fillRef idx="3">
-            <a:schemeClr val="accent1"/>
-          </a:fillRef>
-          <a:effectRef idx="2">
-            <a:schemeClr val="accent1"/>
-          </a:effectRef>
-          <a:fontRef idx="minor">
-            <a:schemeClr val="lt1"/>
-          </a:fontRef>
-        </p:style>
-        <p:txBody>
-          <a:bodyPr rtlCol="0" anchor="ctr"/>
-          <a:lstStyle/>
-          <a:p>
-            <a:pPr algn="ctr"/>
-          </a:p>
-        </p:txBody>
-      </p:sp>
-      <p:pic>
-        <p:nvPicPr>
-          <p:cNvPr id="19" name="Picture 18" descr="google_docs.png"/>
-          <p:cNvPicPr>
-            <a:picLocks noChangeAspect="1"/>
-          </p:cNvPicPr>
-          <p:nvPr/>
-        </p:nvPicPr>
-        <p:blipFill>
-          <a:blip r:embed="rId4"/>
-          <a:stretch>
-            <a:fillRect/>
-          </a:stretch>
-        </p:blipFill>
-        <p:spPr>
-          <a:xfrm>
-            <a:off x="9295638" y="1847087"/>
-            <a:ext cx="1252728" cy="1252728"/>
-          </a:xfrm>
-          <a:prstGeom prst="rect">
-            <a:avLst/>
-          </a:prstGeom>
-        </p:spPr>
-      </p:pic>
-      <p:sp>
-        <p:nvSpPr>
-          <p:cNvPr id="20" name="TextBox 19"/>
-          <p:cNvSpPr txBox="1"/>
-          <p:nvPr/>
-        </p:nvSpPr>
-        <p:spPr>
-          <a:xfrm>
-            <a:off x="8182660" y="3191256"/>
-            <a:ext cx="3478682" cy="621792"/>
-          </a:xfrm>
-          <a:prstGeom prst="rect">
-            <a:avLst/>
-          </a:prstGeom>
-          <a:noFill/>
-        </p:spPr>
-        <p:txBody>
-          <a:bodyPr wrap="square" anchor="t"/>
-          <a:lstStyle/>
-          <a:p>
-            <a:pPr algn="ctr"/>
-            <a:r>
-              <a:rPr sz="1300" b="1" i="0">
-                <a:solidFill>
-                  <a:srgbClr val="095292"/>
-                </a:solidFill>
-                <a:latin typeface="Calibri"/>
-              </a:rPr>
-              <a:t>Google Docs</a:t>
-            </a:r>
-          </a:p>
-          <a:p>
-            <a:pPr algn="ctr">
-              <a:spcBef>
-                <a:spcPts val="200"/>
-              </a:spcBef>
+              <a:rPr sz="1600" b="0" i="0">
+                <a:solidFill>
+                  <a:srgbClr val="333333"/>
+                </a:solidFill>
+                <a:latin typeface="Calibri"/>
+              </a:rPr>
+              <a:t>–   </a:t>
+            </a:r>
+            <a:r>
+              <a:rPr sz="1600" b="1" i="0">
+                <a:solidFill>
+                  <a:srgbClr val="333333"/>
+                </a:solidFill>
+                <a:latin typeface="Calibri"/>
+              </a:rPr>
+              <a:t>Demo:</a:t>
+            </a:r>
+            <a:r>
+              <a:rPr sz="1600" b="0" i="0">
+                <a:solidFill>
+                  <a:srgbClr val="333333"/>
+                </a:solidFill>
+                <a:latin typeface="Calibri"/>
+              </a:rPr>
+              <a:t> Los 4 roles de VetCare con CREATE ROLE/GRANT/REVOKE en ExamLab, verificados con information_schema.role_table_grants.</a:t>
+            </a:r>
+          </a:p>
+          <a:p>
+            <a:pPr>
+              <a:spcAft>
+                <a:spcPts val="800"/>
+              </a:spcAft>
             </a:pPr>
             <a:r>
-              <a:rPr sz="1000" b="0" i="0">
-                <a:solidFill>
-                  <a:srgbClr val="666666"/>
-                </a:solidFill>
-                <a:latin typeface="Calibri"/>
-              </a:rPr>
-              <a:t>Matriz roles</a:t>
-            </a:r>
-          </a:p>
-        </p:txBody>
-      </p:sp>
-      <p:sp>
-        <p:nvSpPr>
-          <p:cNvPr id="21" name="TextBox 20"/>
+              <a:rPr sz="1600" b="0" i="0">
+                <a:solidFill>
+                  <a:srgbClr val="333333"/>
+                </a:solidFill>
+                <a:latin typeface="Calibri"/>
+              </a:rPr>
+              <a:t>–   Sigan el mismo dominio VetCare (no inventen otro caso).</a:t>
+            </a:r>
+          </a:p>
+          <a:p>
+            <a:pPr>
+              <a:spcAft>
+                <a:spcPts val="800"/>
+              </a:spcAft>
+            </a:pPr>
+            <a:r>
+              <a:rPr sz="1600" b="0" i="0">
+                <a:solidFill>
+                  <a:srgbClr val="333333"/>
+                </a:solidFill>
+                <a:latin typeface="Calibri"/>
+              </a:rPr>
+              <a:t>–   Al final de la demo: dejar enlace/script compartible al grupo.</a:t>
+            </a:r>
+          </a:p>
+        </p:txBody>
+      </p:sp>
+      <p:sp>
+        <p:nvSpPr>
+          <p:cNvPr id="6" name="TextBox 5"/>
           <p:cNvSpPr txBox="1"/>
           <p:nvPr/>
         </p:nvSpPr>
@@ -9594,7 +9711,7 @@
         <p:spPr>
           <a:xfrm>
             <a:off x="0" y="0"/>
-            <a:ext cx="12191695" cy="960120"/>
+            <a:ext cx="12191695" cy="1170432"/>
           </a:xfrm>
           <a:prstGeom prst="rect">
             <a:avLst/>
@@ -9636,7 +9753,7 @@
         </p:nvSpPr>
         <p:spPr>
           <a:xfrm>
-            <a:off x="0" y="960120"/>
+            <a:off x="0" y="1170432"/>
             <a:ext cx="12191695" cy="41148"/>
           </a:xfrm>
           <a:prstGeom prst="rect">
@@ -9680,7 +9797,7 @@
         <p:spPr>
           <a:xfrm>
             <a:off x="457200" y="164592"/>
-            <a:ext cx="11277295" cy="502920"/>
+            <a:ext cx="11277295" cy="384048"/>
           </a:xfrm>
           <a:prstGeom prst="rect">
             <a:avLst/>
@@ -9700,7 +9817,7 @@
                 </a:solidFill>
                 <a:latin typeface="Calibri"/>
               </a:rPr>
-              <a:t>Taller PI VetCare — contexto / por que importa</a:t>
+              <a:t>Herramientas de hoy</a:t>
             </a:r>
           </a:p>
         </p:txBody>
@@ -9713,8 +9830,8 @@
         </p:nvSpPr>
         <p:spPr>
           <a:xfrm>
-            <a:off x="457200" y="1170432"/>
-            <a:ext cx="11277295" cy="5230368"/>
+            <a:off x="457200" y="566928"/>
+            <a:ext cx="11277295" cy="411480"/>
           </a:xfrm>
           <a:prstGeom prst="rect">
             <a:avLst/>
@@ -9727,76 +9844,837 @@
           </a:bodyPr>
           <a:lstStyle/>
           <a:p>
-            <a:pPr>
-              <a:spcAft>
-                <a:spcPts val="800"/>
-              </a:spcAft>
+            <a:r>
+              <a:rPr sz="1400" b="0" i="0">
+                <a:solidFill>
+                  <a:srgbClr val="B8D8EE"/>
+                </a:solidFill>
+                <a:latin typeface="Calibri"/>
+              </a:rPr>
+              <a:t>Gratis · navegador o free tier</a:t>
+            </a:r>
+          </a:p>
+        </p:txBody>
+      </p:sp>
+      <p:sp>
+        <p:nvSpPr>
+          <p:cNvPr id="6" name="Rounded Rectangle 5"/>
+          <p:cNvSpPr/>
+          <p:nvPr/>
+        </p:nvSpPr>
+        <p:spPr>
+          <a:xfrm>
+            <a:off x="457200" y="1591056"/>
+            <a:ext cx="3624986" cy="2299716"/>
+          </a:xfrm>
+          <a:prstGeom prst="roundRect">
+            <a:avLst>
+              <a:gd name="adj" fmla="val 12000"/>
+            </a:avLst>
+          </a:prstGeom>
+          <a:solidFill>
+            <a:srgbClr val="F2F2F2"/>
+          </a:solidFill>
+          <a:ln>
+            <a:noFill/>
+          </a:ln>
+        </p:spPr>
+        <p:style>
+          <a:lnRef idx="1">
+            <a:schemeClr val="accent1"/>
+          </a:lnRef>
+          <a:fillRef idx="3">
+            <a:schemeClr val="accent1"/>
+          </a:fillRef>
+          <a:effectRef idx="2">
+            <a:schemeClr val="accent1"/>
+          </a:effectRef>
+          <a:fontRef idx="minor">
+            <a:schemeClr val="lt1"/>
+          </a:fontRef>
+        </p:style>
+        <p:txBody>
+          <a:bodyPr rtlCol="0" anchor="ctr"/>
+          <a:lstStyle/>
+          <a:p>
+            <a:pPr algn="ctr"/>
+          </a:p>
+        </p:txBody>
+      </p:sp>
+      <p:sp>
+        <p:nvSpPr>
+          <p:cNvPr id="7" name="Rectangle 6"/>
+          <p:cNvSpPr/>
+          <p:nvPr/>
+        </p:nvSpPr>
+        <p:spPr>
+          <a:xfrm>
+            <a:off x="457200" y="1591056"/>
+            <a:ext cx="3624986" cy="64008"/>
+          </a:xfrm>
+          <a:prstGeom prst="rect">
+            <a:avLst/>
+          </a:prstGeom>
+          <a:solidFill>
+            <a:srgbClr val="095292"/>
+          </a:solidFill>
+          <a:ln>
+            <a:noFill/>
+          </a:ln>
+        </p:spPr>
+        <p:style>
+          <a:lnRef idx="1">
+            <a:schemeClr val="accent1"/>
+          </a:lnRef>
+          <a:fillRef idx="3">
+            <a:schemeClr val="accent1"/>
+          </a:fillRef>
+          <a:effectRef idx="2">
+            <a:schemeClr val="accent1"/>
+          </a:effectRef>
+          <a:fontRef idx="minor">
+            <a:schemeClr val="lt1"/>
+          </a:fontRef>
+        </p:style>
+        <p:txBody>
+          <a:bodyPr rtlCol="0" anchor="ctr"/>
+          <a:lstStyle/>
+          <a:p>
+            <a:pPr algn="ctr"/>
+          </a:p>
+        </p:txBody>
+      </p:sp>
+      <p:sp>
+        <p:nvSpPr>
+          <p:cNvPr id="8" name="Rectangle 7"/>
+          <p:cNvSpPr/>
+          <p:nvPr/>
+        </p:nvSpPr>
+        <p:spPr>
+          <a:xfrm>
+            <a:off x="457200" y="1655064"/>
+            <a:ext cx="3624986" cy="27432"/>
+          </a:xfrm>
+          <a:prstGeom prst="rect">
+            <a:avLst/>
+          </a:prstGeom>
+          <a:solidFill>
+            <a:srgbClr val="FFD000"/>
+          </a:solidFill>
+          <a:ln>
+            <a:noFill/>
+          </a:ln>
+        </p:spPr>
+        <p:style>
+          <a:lnRef idx="1">
+            <a:schemeClr val="accent1"/>
+          </a:lnRef>
+          <a:fillRef idx="3">
+            <a:schemeClr val="accent1"/>
+          </a:fillRef>
+          <a:effectRef idx="2">
+            <a:schemeClr val="accent1"/>
+          </a:effectRef>
+          <a:fontRef idx="minor">
+            <a:schemeClr val="lt1"/>
+          </a:fontRef>
+        </p:style>
+        <p:txBody>
+          <a:bodyPr rtlCol="0" anchor="ctr"/>
+          <a:lstStyle/>
+          <a:p>
+            <a:pPr algn="ctr"/>
+          </a:p>
+        </p:txBody>
+      </p:sp>
+      <p:pic>
+        <p:nvPicPr>
+          <p:cNvPr id="9" name="Picture 8" descr="examlab.png"/>
+          <p:cNvPicPr>
+            <a:picLocks noChangeAspect="1"/>
+          </p:cNvPicPr>
+          <p:nvPr/>
+        </p:nvPicPr>
+        <p:blipFill>
+          <a:blip r:embed="rId2"/>
+          <a:stretch>
+            <a:fillRect/>
+          </a:stretch>
+        </p:blipFill>
+        <p:spPr>
+          <a:xfrm>
+            <a:off x="1659331" y="1847087"/>
+            <a:ext cx="1220724" cy="1220724"/>
+          </a:xfrm>
+          <a:prstGeom prst="rect">
+            <a:avLst/>
+          </a:prstGeom>
+        </p:spPr>
+      </p:pic>
+      <p:sp>
+        <p:nvSpPr>
+          <p:cNvPr id="10" name="TextBox 9"/>
+          <p:cNvSpPr txBox="1"/>
+          <p:nvPr/>
+        </p:nvSpPr>
+        <p:spPr>
+          <a:xfrm>
+            <a:off x="530352" y="3159251"/>
+            <a:ext cx="3478682" cy="621792"/>
+          </a:xfrm>
+          <a:prstGeom prst="rect">
+            <a:avLst/>
+          </a:prstGeom>
+          <a:noFill/>
+        </p:spPr>
+        <p:txBody>
+          <a:bodyPr wrap="square" anchor="t"/>
+          <a:lstStyle/>
+          <a:p>
+            <a:pPr algn="ctr"/>
+            <a:r>
+              <a:rPr sz="1300" b="1" i="0">
+                <a:solidFill>
+                  <a:srgbClr val="095292"/>
+                </a:solidFill>
+                <a:latin typeface="Calibri"/>
+              </a:rPr>
+              <a:t>ExamLab</a:t>
+            </a:r>
+          </a:p>
+          <a:p>
+            <a:pPr algn="ctr">
+              <a:spcBef>
+                <a:spcPts val="200"/>
+              </a:spcBef>
             </a:pPr>
             <a:r>
-              <a:rPr sz="1600" b="0" i="0">
-                <a:solidFill>
-                  <a:srgbClr val="333333"/>
-                </a:solidFill>
-                <a:latin typeface="Calibri"/>
-              </a:rPr>
-              <a:t>–   </a:t>
-            </a:r>
-            <a:r>
-              <a:rPr sz="1600" b="1" i="0">
-                <a:solidFill>
-                  <a:srgbClr val="333333"/>
-                </a:solidFill>
-                <a:latin typeface="Calibri"/>
-              </a:rPr>
-              <a:t>Por qué importa al PI:</a:t>
-            </a:r>
-            <a:r>
-              <a:rPr sz="1600" b="0" i="0">
-                <a:solidFill>
-                  <a:srgbClr val="333333"/>
-                </a:solidFill>
-                <a:latin typeface="Calibri"/>
-              </a:rPr>
-              <a:t> roles son evidencia de administración.</a:t>
-            </a:r>
-          </a:p>
-          <a:p>
-            <a:pPr>
-              <a:spcAft>
-                <a:spcPts val="800"/>
-              </a:spcAft>
+              <a:rPr sz="1000" b="0" i="0">
+                <a:solidFill>
+                  <a:srgbClr val="666666"/>
+                </a:solidFill>
+                <a:latin typeface="Calibri"/>
+              </a:rPr>
+              <a:t>PostgreSQL: aqui corre</a:t>
+            </a:r>
+          </a:p>
+        </p:txBody>
+      </p:sp>
+      <p:sp>
+        <p:nvSpPr>
+          <p:cNvPr id="11" name="Rounded Rectangle 10"/>
+          <p:cNvSpPr/>
+          <p:nvPr/>
+        </p:nvSpPr>
+        <p:spPr>
+          <a:xfrm>
+            <a:off x="4283354" y="1591056"/>
+            <a:ext cx="3624986" cy="2299716"/>
+          </a:xfrm>
+          <a:prstGeom prst="roundRect">
+            <a:avLst>
+              <a:gd name="adj" fmla="val 12000"/>
+            </a:avLst>
+          </a:prstGeom>
+          <a:solidFill>
+            <a:srgbClr val="F2F2F2"/>
+          </a:solidFill>
+          <a:ln>
+            <a:noFill/>
+          </a:ln>
+        </p:spPr>
+        <p:style>
+          <a:lnRef idx="1">
+            <a:schemeClr val="accent1"/>
+          </a:lnRef>
+          <a:fillRef idx="3">
+            <a:schemeClr val="accent1"/>
+          </a:fillRef>
+          <a:effectRef idx="2">
+            <a:schemeClr val="accent1"/>
+          </a:effectRef>
+          <a:fontRef idx="minor">
+            <a:schemeClr val="lt1"/>
+          </a:fontRef>
+        </p:style>
+        <p:txBody>
+          <a:bodyPr rtlCol="0" anchor="ctr"/>
+          <a:lstStyle/>
+          <a:p>
+            <a:pPr algn="ctr"/>
+          </a:p>
+        </p:txBody>
+      </p:sp>
+      <p:sp>
+        <p:nvSpPr>
+          <p:cNvPr id="12" name="Rectangle 11"/>
+          <p:cNvSpPr/>
+          <p:nvPr/>
+        </p:nvSpPr>
+        <p:spPr>
+          <a:xfrm>
+            <a:off x="4283354" y="1591056"/>
+            <a:ext cx="3624986" cy="64008"/>
+          </a:xfrm>
+          <a:prstGeom prst="rect">
+            <a:avLst/>
+          </a:prstGeom>
+          <a:solidFill>
+            <a:srgbClr val="095292"/>
+          </a:solidFill>
+          <a:ln>
+            <a:noFill/>
+          </a:ln>
+        </p:spPr>
+        <p:style>
+          <a:lnRef idx="1">
+            <a:schemeClr val="accent1"/>
+          </a:lnRef>
+          <a:fillRef idx="3">
+            <a:schemeClr val="accent1"/>
+          </a:fillRef>
+          <a:effectRef idx="2">
+            <a:schemeClr val="accent1"/>
+          </a:effectRef>
+          <a:fontRef idx="minor">
+            <a:schemeClr val="lt1"/>
+          </a:fontRef>
+        </p:style>
+        <p:txBody>
+          <a:bodyPr rtlCol="0" anchor="ctr"/>
+          <a:lstStyle/>
+          <a:p>
+            <a:pPr algn="ctr"/>
+          </a:p>
+        </p:txBody>
+      </p:sp>
+      <p:sp>
+        <p:nvSpPr>
+          <p:cNvPr id="13" name="Rectangle 12"/>
+          <p:cNvSpPr/>
+          <p:nvPr/>
+        </p:nvSpPr>
+        <p:spPr>
+          <a:xfrm>
+            <a:off x="4283354" y="1655064"/>
+            <a:ext cx="3624986" cy="27432"/>
+          </a:xfrm>
+          <a:prstGeom prst="rect">
+            <a:avLst/>
+          </a:prstGeom>
+          <a:solidFill>
+            <a:srgbClr val="FFD000"/>
+          </a:solidFill>
+          <a:ln>
+            <a:noFill/>
+          </a:ln>
+        </p:spPr>
+        <p:style>
+          <a:lnRef idx="1">
+            <a:schemeClr val="accent1"/>
+          </a:lnRef>
+          <a:fillRef idx="3">
+            <a:schemeClr val="accent1"/>
+          </a:fillRef>
+          <a:effectRef idx="2">
+            <a:schemeClr val="accent1"/>
+          </a:effectRef>
+          <a:fontRef idx="minor">
+            <a:schemeClr val="lt1"/>
+          </a:fontRef>
+        </p:style>
+        <p:txBody>
+          <a:bodyPr rtlCol="0" anchor="ctr"/>
+          <a:lstStyle/>
+          <a:p>
+            <a:pPr algn="ctr"/>
+          </a:p>
+        </p:txBody>
+      </p:sp>
+      <p:pic>
+        <p:nvPicPr>
+          <p:cNvPr id="14" name="Picture 13" descr="google_docs.png"/>
+          <p:cNvPicPr>
+            <a:picLocks noChangeAspect="1"/>
+          </p:cNvPicPr>
+          <p:nvPr/>
+        </p:nvPicPr>
+        <p:blipFill>
+          <a:blip r:embed="rId3"/>
+          <a:stretch>
+            <a:fillRect/>
+          </a:stretch>
+        </p:blipFill>
+        <p:spPr>
+          <a:xfrm>
+            <a:off x="5485485" y="1847087"/>
+            <a:ext cx="1220724" cy="1220724"/>
+          </a:xfrm>
+          <a:prstGeom prst="rect">
+            <a:avLst/>
+          </a:prstGeom>
+        </p:spPr>
+      </p:pic>
+      <p:sp>
+        <p:nvSpPr>
+          <p:cNvPr id="15" name="TextBox 14"/>
+          <p:cNvSpPr txBox="1"/>
+          <p:nvPr/>
+        </p:nvSpPr>
+        <p:spPr>
+          <a:xfrm>
+            <a:off x="4356506" y="3159251"/>
+            <a:ext cx="3478682" cy="621792"/>
+          </a:xfrm>
+          <a:prstGeom prst="rect">
+            <a:avLst/>
+          </a:prstGeom>
+          <a:noFill/>
+        </p:spPr>
+        <p:txBody>
+          <a:bodyPr wrap="square" anchor="t"/>
+          <a:lstStyle/>
+          <a:p>
+            <a:pPr algn="ctr"/>
+            <a:r>
+              <a:rPr sz="1300" b="1" i="0">
+                <a:solidFill>
+                  <a:srgbClr val="095292"/>
+                </a:solidFill>
+                <a:latin typeface="Calibri"/>
+              </a:rPr>
+              <a:t>Google Docs</a:t>
+            </a:r>
+          </a:p>
+          <a:p>
+            <a:pPr algn="ctr">
+              <a:spcBef>
+                <a:spcPts val="200"/>
+              </a:spcBef>
             </a:pPr>
             <a:r>
-              <a:rPr sz="1600" b="0" i="0">
-                <a:solidFill>
-                  <a:srgbClr val="333333"/>
-                </a:solidFill>
-                <a:latin typeface="Calibri"/>
-              </a:rPr>
-              <a:t>–   Least privilege evita que Recepción borre historial.</a:t>
-            </a:r>
-          </a:p>
-          <a:p>
-            <a:pPr>
-              <a:spcAft>
-                <a:spcPts val="800"/>
-              </a:spcAft>
+              <a:rPr sz="1000" b="0" i="0">
+                <a:solidFill>
+                  <a:srgbClr val="666666"/>
+                </a:solidFill>
+                <a:latin typeface="Calibri"/>
+              </a:rPr>
+              <a:t>Matriz y politica</a:t>
+            </a:r>
+          </a:p>
+        </p:txBody>
+      </p:sp>
+      <p:sp>
+        <p:nvSpPr>
+          <p:cNvPr id="16" name="Rounded Rectangle 15"/>
+          <p:cNvSpPr/>
+          <p:nvPr/>
+        </p:nvSpPr>
+        <p:spPr>
+          <a:xfrm>
+            <a:off x="8109508" y="1591056"/>
+            <a:ext cx="3624986" cy="2299716"/>
+          </a:xfrm>
+          <a:prstGeom prst="roundRect">
+            <a:avLst>
+              <a:gd name="adj" fmla="val 12000"/>
+            </a:avLst>
+          </a:prstGeom>
+          <a:solidFill>
+            <a:srgbClr val="F2F2F2"/>
+          </a:solidFill>
+          <a:ln>
+            <a:noFill/>
+          </a:ln>
+        </p:spPr>
+        <p:style>
+          <a:lnRef idx="1">
+            <a:schemeClr val="accent1"/>
+          </a:lnRef>
+          <a:fillRef idx="3">
+            <a:schemeClr val="accent1"/>
+          </a:fillRef>
+          <a:effectRef idx="2">
+            <a:schemeClr val="accent1"/>
+          </a:effectRef>
+          <a:fontRef idx="minor">
+            <a:schemeClr val="lt1"/>
+          </a:fontRef>
+        </p:style>
+        <p:txBody>
+          <a:bodyPr rtlCol="0" anchor="ctr"/>
+          <a:lstStyle/>
+          <a:p>
+            <a:pPr algn="ctr"/>
+          </a:p>
+        </p:txBody>
+      </p:sp>
+      <p:sp>
+        <p:nvSpPr>
+          <p:cNvPr id="17" name="Rectangle 16"/>
+          <p:cNvSpPr/>
+          <p:nvPr/>
+        </p:nvSpPr>
+        <p:spPr>
+          <a:xfrm>
+            <a:off x="8109508" y="1591056"/>
+            <a:ext cx="3624986" cy="64008"/>
+          </a:xfrm>
+          <a:prstGeom prst="rect">
+            <a:avLst/>
+          </a:prstGeom>
+          <a:solidFill>
+            <a:srgbClr val="095292"/>
+          </a:solidFill>
+          <a:ln>
+            <a:noFill/>
+          </a:ln>
+        </p:spPr>
+        <p:style>
+          <a:lnRef idx="1">
+            <a:schemeClr val="accent1"/>
+          </a:lnRef>
+          <a:fillRef idx="3">
+            <a:schemeClr val="accent1"/>
+          </a:fillRef>
+          <a:effectRef idx="2">
+            <a:schemeClr val="accent1"/>
+          </a:effectRef>
+          <a:fontRef idx="minor">
+            <a:schemeClr val="lt1"/>
+          </a:fontRef>
+        </p:style>
+        <p:txBody>
+          <a:bodyPr rtlCol="0" anchor="ctr"/>
+          <a:lstStyle/>
+          <a:p>
+            <a:pPr algn="ctr"/>
+          </a:p>
+        </p:txBody>
+      </p:sp>
+      <p:sp>
+        <p:nvSpPr>
+          <p:cNvPr id="18" name="Rectangle 17"/>
+          <p:cNvSpPr/>
+          <p:nvPr/>
+        </p:nvSpPr>
+        <p:spPr>
+          <a:xfrm>
+            <a:off x="8109508" y="1655064"/>
+            <a:ext cx="3624986" cy="27432"/>
+          </a:xfrm>
+          <a:prstGeom prst="rect">
+            <a:avLst/>
+          </a:prstGeom>
+          <a:solidFill>
+            <a:srgbClr val="FFD000"/>
+          </a:solidFill>
+          <a:ln>
+            <a:noFill/>
+          </a:ln>
+        </p:spPr>
+        <p:style>
+          <a:lnRef idx="1">
+            <a:schemeClr val="accent1"/>
+          </a:lnRef>
+          <a:fillRef idx="3">
+            <a:schemeClr val="accent1"/>
+          </a:fillRef>
+          <a:effectRef idx="2">
+            <a:schemeClr val="accent1"/>
+          </a:effectRef>
+          <a:fontRef idx="minor">
+            <a:schemeClr val="lt1"/>
+          </a:fontRef>
+        </p:style>
+        <p:txBody>
+          <a:bodyPr rtlCol="0" anchor="ctr"/>
+          <a:lstStyle/>
+          <a:p>
+            <a:pPr algn="ctr"/>
+          </a:p>
+        </p:txBody>
+      </p:sp>
+      <p:pic>
+        <p:nvPicPr>
+          <p:cNvPr id="19" name="Picture 18" descr="dbfiddle.png"/>
+          <p:cNvPicPr>
+            <a:picLocks noChangeAspect="1"/>
+          </p:cNvPicPr>
+          <p:nvPr/>
+        </p:nvPicPr>
+        <p:blipFill>
+          <a:blip r:embed="rId4"/>
+          <a:stretch>
+            <a:fillRect/>
+          </a:stretch>
+        </p:blipFill>
+        <p:spPr>
+          <a:xfrm>
+            <a:off x="9311640" y="1847087"/>
+            <a:ext cx="1220724" cy="1220724"/>
+          </a:xfrm>
+          <a:prstGeom prst="rect">
+            <a:avLst/>
+          </a:prstGeom>
+        </p:spPr>
+      </p:pic>
+      <p:sp>
+        <p:nvSpPr>
+          <p:cNvPr id="20" name="TextBox 19"/>
+          <p:cNvSpPr txBox="1"/>
+          <p:nvPr/>
+        </p:nvSpPr>
+        <p:spPr>
+          <a:xfrm>
+            <a:off x="8182660" y="3159251"/>
+            <a:ext cx="3478682" cy="621792"/>
+          </a:xfrm>
+          <a:prstGeom prst="rect">
+            <a:avLst/>
+          </a:prstGeom>
+          <a:noFill/>
+        </p:spPr>
+        <p:txBody>
+          <a:bodyPr wrap="square" anchor="t"/>
+          <a:lstStyle/>
+          <a:p>
+            <a:pPr algn="ctr"/>
+            <a:r>
+              <a:rPr sz="1300" b="1" i="0">
+                <a:solidFill>
+                  <a:srgbClr val="095292"/>
+                </a:solidFill>
+                <a:latin typeface="Calibri"/>
+              </a:rPr>
+              <a:t>DB Fiddle</a:t>
+            </a:r>
+          </a:p>
+          <a:p>
+            <a:pPr algn="ctr">
+              <a:spcBef>
+                <a:spcPts val="200"/>
+              </a:spcBef>
             </a:pPr>
             <a:r>
-              <a:rPr sz="1600" b="0" i="0">
-                <a:solidFill>
-                  <a:srgbClr val="333333"/>
-                </a:solidFill>
-                <a:latin typeface="Calibri"/>
-              </a:rPr>
-              <a:t>–   Si el playground no persiste usuarios, la matriz igual se documenta: es el entregable.</a:t>
-            </a:r>
-          </a:p>
-        </p:txBody>
-      </p:sp>
-      <p:sp>
-        <p:nvSpPr>
-          <p:cNvPr id="6" name="TextBox 5"/>
+              <a:rPr sz="1000" b="0" i="0">
+                <a:solidFill>
+                  <a:srgbClr val="666666"/>
+                </a:solidFill>
+                <a:latin typeface="Calibri"/>
+              </a:rPr>
+              <a:t>Alterno: SQL suelto</a:t>
+            </a:r>
+          </a:p>
+        </p:txBody>
+      </p:sp>
+      <p:sp>
+        <p:nvSpPr>
+          <p:cNvPr id="21" name="Rounded Rectangle 20"/>
+          <p:cNvSpPr/>
+          <p:nvPr/>
+        </p:nvSpPr>
+        <p:spPr>
+          <a:xfrm>
+            <a:off x="4283354" y="4055364"/>
+            <a:ext cx="3624986" cy="2299716"/>
+          </a:xfrm>
+          <a:prstGeom prst="roundRect">
+            <a:avLst>
+              <a:gd name="adj" fmla="val 12000"/>
+            </a:avLst>
+          </a:prstGeom>
+          <a:solidFill>
+            <a:srgbClr val="F2F2F2"/>
+          </a:solidFill>
+          <a:ln>
+            <a:noFill/>
+          </a:ln>
+        </p:spPr>
+        <p:style>
+          <a:lnRef idx="1">
+            <a:schemeClr val="accent1"/>
+          </a:lnRef>
+          <a:fillRef idx="3">
+            <a:schemeClr val="accent1"/>
+          </a:fillRef>
+          <a:effectRef idx="2">
+            <a:schemeClr val="accent1"/>
+          </a:effectRef>
+          <a:fontRef idx="minor">
+            <a:schemeClr val="lt1"/>
+          </a:fontRef>
+        </p:style>
+        <p:txBody>
+          <a:bodyPr rtlCol="0" anchor="ctr"/>
+          <a:lstStyle/>
+          <a:p>
+            <a:pPr algn="ctr"/>
+          </a:p>
+        </p:txBody>
+      </p:sp>
+      <p:sp>
+        <p:nvSpPr>
+          <p:cNvPr id="22" name="Rectangle 21"/>
+          <p:cNvSpPr/>
+          <p:nvPr/>
+        </p:nvSpPr>
+        <p:spPr>
+          <a:xfrm>
+            <a:off x="4283354" y="4055364"/>
+            <a:ext cx="3624986" cy="64008"/>
+          </a:xfrm>
+          <a:prstGeom prst="rect">
+            <a:avLst/>
+          </a:prstGeom>
+          <a:solidFill>
+            <a:srgbClr val="095292"/>
+          </a:solidFill>
+          <a:ln>
+            <a:noFill/>
+          </a:ln>
+        </p:spPr>
+        <p:style>
+          <a:lnRef idx="1">
+            <a:schemeClr val="accent1"/>
+          </a:lnRef>
+          <a:fillRef idx="3">
+            <a:schemeClr val="accent1"/>
+          </a:fillRef>
+          <a:effectRef idx="2">
+            <a:schemeClr val="accent1"/>
+          </a:effectRef>
+          <a:fontRef idx="minor">
+            <a:schemeClr val="lt1"/>
+          </a:fontRef>
+        </p:style>
+        <p:txBody>
+          <a:bodyPr rtlCol="0" anchor="ctr"/>
+          <a:lstStyle/>
+          <a:p>
+            <a:pPr algn="ctr"/>
+          </a:p>
+        </p:txBody>
+      </p:sp>
+      <p:sp>
+        <p:nvSpPr>
+          <p:cNvPr id="23" name="Rectangle 22"/>
+          <p:cNvSpPr/>
+          <p:nvPr/>
+        </p:nvSpPr>
+        <p:spPr>
+          <a:xfrm>
+            <a:off x="4283354" y="4119372"/>
+            <a:ext cx="3624986" cy="27432"/>
+          </a:xfrm>
+          <a:prstGeom prst="rect">
+            <a:avLst/>
+          </a:prstGeom>
+          <a:solidFill>
+            <a:srgbClr val="FFD000"/>
+          </a:solidFill>
+          <a:ln>
+            <a:noFill/>
+          </a:ln>
+        </p:spPr>
+        <p:style>
+          <a:lnRef idx="1">
+            <a:schemeClr val="accent1"/>
+          </a:lnRef>
+          <a:fillRef idx="3">
+            <a:schemeClr val="accent1"/>
+          </a:fillRef>
+          <a:effectRef idx="2">
+            <a:schemeClr val="accent1"/>
+          </a:effectRef>
+          <a:fontRef idx="minor">
+            <a:schemeClr val="lt1"/>
+          </a:fontRef>
+        </p:style>
+        <p:txBody>
+          <a:bodyPr rtlCol="0" anchor="ctr"/>
+          <a:lstStyle/>
+          <a:p>
+            <a:pPr algn="ctr"/>
+          </a:p>
+        </p:txBody>
+      </p:sp>
+      <p:pic>
+        <p:nvPicPr>
+          <p:cNvPr id="24" name="Picture 23" descr="oracle_livesql.png"/>
+          <p:cNvPicPr>
+            <a:picLocks noChangeAspect="1"/>
+          </p:cNvPicPr>
+          <p:nvPr/>
+        </p:nvPicPr>
+        <p:blipFill>
+          <a:blip r:embed="rId5"/>
+          <a:stretch>
+            <a:fillRect/>
+          </a:stretch>
+        </p:blipFill>
+        <p:spPr>
+          <a:xfrm>
+            <a:off x="5485485" y="4311396"/>
+            <a:ext cx="1220724" cy="1220724"/>
+          </a:xfrm>
+          <a:prstGeom prst="rect">
+            <a:avLst/>
+          </a:prstGeom>
+        </p:spPr>
+      </p:pic>
+      <p:sp>
+        <p:nvSpPr>
+          <p:cNvPr id="25" name="TextBox 24"/>
+          <p:cNvSpPr txBox="1"/>
+          <p:nvPr/>
+        </p:nvSpPr>
+        <p:spPr>
+          <a:xfrm>
+            <a:off x="4356506" y="5623560"/>
+            <a:ext cx="3478682" cy="621792"/>
+          </a:xfrm>
+          <a:prstGeom prst="rect">
+            <a:avLst/>
+          </a:prstGeom>
+          <a:noFill/>
+        </p:spPr>
+        <p:txBody>
+          <a:bodyPr wrap="square" anchor="t"/>
+          <a:lstStyle/>
+          <a:p>
+            <a:pPr algn="ctr"/>
+            <a:r>
+              <a:rPr sz="1300" b="1" i="0">
+                <a:solidFill>
+                  <a:srgbClr val="095292"/>
+                </a:solidFill>
+                <a:latin typeface="Calibri"/>
+              </a:rPr>
+              <a:t>Oracle Live SQL</a:t>
+            </a:r>
+          </a:p>
+          <a:p>
+            <a:pPr algn="ctr">
+              <a:spcBef>
+                <a:spcPts val="200"/>
+              </a:spcBef>
+            </a:pPr>
+            <a:r>
+              <a:rPr sz="1000" b="0" i="0">
+                <a:solidFill>
+                  <a:srgbClr val="666666"/>
+                </a:solidFill>
+                <a:latin typeface="Calibri"/>
+              </a:rPr>
+              <a:t>Solo contraste</a:t>
+            </a:r>
+          </a:p>
+        </p:txBody>
+      </p:sp>
+      <p:sp>
+        <p:nvSpPr>
+          <p:cNvPr id="26" name="TextBox 25"/>
           <p:cNvSpPr txBox="1"/>
           <p:nvPr/>
         </p:nvSpPr>
@@ -9970,7 +10848,7 @@
                 </a:solidFill>
                 <a:latin typeface="Calibri"/>
               </a:rPr>
-              <a:t>Taller PI VetCare — objetivo y criterios</a:t>
+              <a:t>Taller PI VetCare — contexto / por que importa</a:t>
             </a:r>
           </a:p>
         </p:txBody>
@@ -10003,7 +10881,7 @@
               </a:spcAft>
             </a:pPr>
             <a:r>
-              <a:rPr sz="1500" b="0" i="0">
+              <a:rPr sz="1600" b="0" i="0">
                 <a:solidFill>
                   <a:srgbClr val="333333"/>
                 </a:solidFill>
@@ -10012,22 +10890,22 @@
               <a:t>–   </a:t>
             </a:r>
             <a:r>
-              <a:rPr sz="1500" b="1" i="0">
+              <a:rPr sz="1600" b="1" i="0">
                 <a:solidFill>
                   <a:srgbClr val="333333"/>
                 </a:solidFill>
                 <a:latin typeface="Calibri"/>
               </a:rPr>
-              <a:t>Objetivo:</a:t>
-            </a:r>
-            <a:r>
-              <a:rPr sz="1500" b="0" i="0">
+              <a:t>Por qué importa al PI:</a:t>
+            </a:r>
+            <a:r>
+              <a:rPr sz="1600" b="0" i="0">
                 <a:solidFill>
                   <a:srgbClr val="333333"/>
                 </a:solidFill>
                 <a:latin typeface="Calibri"/>
               </a:rPr>
-              <a:t> Plan de roles/privilegios VetCare (&gt;=4 roles).</a:t>
+              <a:t> roles son evidencia de administración.</a:t>
             </a:r>
           </a:p>
           <a:p>
@@ -10037,31 +10915,13 @@
               </a:spcAft>
             </a:pPr>
             <a:r>
-              <a:rPr sz="1500" b="0" i="0">
+              <a:rPr sz="1600" b="0" i="0">
                 <a:solidFill>
                   <a:srgbClr val="333333"/>
                 </a:solidFill>
                 <a:latin typeface="Calibri"/>
               </a:rPr>
-              <a:t>–   </a:t>
-            </a:r>
-            <a:r>
-              <a:rPr sz="1500" b="1" i="0">
-                <a:solidFill>
-                  <a:srgbClr val="333333"/>
-                </a:solidFill>
-                <a:latin typeface="Calibri"/>
-              </a:rPr>
-              <a:t>Exito:</a:t>
-            </a:r>
-            <a:r>
-              <a:rPr sz="1500" b="0" i="0">
-                <a:solidFill>
-                  <a:srgbClr val="333333"/>
-                </a:solidFill>
-                <a:latin typeface="Calibri"/>
-              </a:rPr>
-              <a:t> &gt;=4 roles.</a:t>
+              <a:t>–   Least privilege evita que Recepción borre historial.</a:t>
             </a:r>
           </a:p>
           <a:p>
@@ -10071,133 +10931,13 @@
               </a:spcAft>
             </a:pPr>
             <a:r>
-              <a:rPr sz="1500" b="0" i="0">
+              <a:rPr sz="1600" b="0" i="0">
                 <a:solidFill>
                   <a:srgbClr val="333333"/>
                 </a:solidFill>
                 <a:latin typeface="Calibri"/>
               </a:rPr>
-              <a:t>–   </a:t>
-            </a:r>
-            <a:r>
-              <a:rPr sz="1500" b="1" i="0">
-                <a:solidFill>
-                  <a:srgbClr val="333333"/>
-                </a:solidFill>
-                <a:latin typeface="Calibri"/>
-              </a:rPr>
-              <a:t>Exito:</a:t>
-            </a:r>
-            <a:r>
-              <a:rPr sz="1500" b="0" i="0">
-                <a:solidFill>
-                  <a:srgbClr val="333333"/>
-                </a:solidFill>
-                <a:latin typeface="Calibri"/>
-              </a:rPr>
-              <a:t> Matriz privilegio x objeto.</a:t>
-            </a:r>
-          </a:p>
-          <a:p>
-            <a:pPr>
-              <a:spcAft>
-                <a:spcPts val="800"/>
-              </a:spcAft>
-            </a:pPr>
-            <a:r>
-              <a:rPr sz="1500" b="0" i="0">
-                <a:solidFill>
-                  <a:srgbClr val="333333"/>
-                </a:solidFill>
-                <a:latin typeface="Calibri"/>
-              </a:rPr>
-              <a:t>–   </a:t>
-            </a:r>
-            <a:r>
-              <a:rPr sz="1500" b="1" i="0">
-                <a:solidFill>
-                  <a:srgbClr val="333333"/>
-                </a:solidFill>
-                <a:latin typeface="Calibri"/>
-              </a:rPr>
-              <a:t>Exito:</a:t>
-            </a:r>
-            <a:r>
-              <a:rPr sz="1500" b="0" i="0">
-                <a:solidFill>
-                  <a:srgbClr val="333333"/>
-                </a:solidFill>
-                <a:latin typeface="Calibri"/>
-              </a:rPr>
-              <a:t> Justificación least privilege.</a:t>
-            </a:r>
-          </a:p>
-          <a:p>
-            <a:pPr>
-              <a:spcAft>
-                <a:spcPts val="800"/>
-              </a:spcAft>
-            </a:pPr>
-            <a:r>
-              <a:rPr sz="1500" b="0" i="0">
-                <a:solidFill>
-                  <a:srgbClr val="333333"/>
-                </a:solidFill>
-                <a:latin typeface="Calibri"/>
-              </a:rPr>
-              <a:t>–   </a:t>
-            </a:r>
-            <a:r>
-              <a:rPr sz="1500" b="1" i="0">
-                <a:solidFill>
-                  <a:srgbClr val="333333"/>
-                </a:solidFill>
-                <a:latin typeface="Calibri"/>
-              </a:rPr>
-              <a:t>Exito:</a:t>
-            </a:r>
-            <a:r>
-              <a:rPr sz="1500" b="0" i="0">
-                <a:solidFill>
-                  <a:srgbClr val="333333"/>
-                </a:solidFill>
-                <a:latin typeface="Calibri"/>
-              </a:rPr>
-              <a:t> 1 página política.</a:t>
-            </a:r>
-          </a:p>
-          <a:p>
-            <a:pPr>
-              <a:spcAft>
-                <a:spcPts val="800"/>
-              </a:spcAft>
-            </a:pPr>
-            <a:r>
-              <a:rPr sz="1500" b="0" i="0">
-                <a:solidFill>
-                  <a:srgbClr val="333333"/>
-                </a:solidFill>
-                <a:latin typeface="Calibri"/>
-              </a:rPr>
-              <a:t>–   </a:t>
-            </a:r>
-            <a:r>
-              <a:rPr sz="1500" b="1" i="0">
-                <a:solidFill>
-                  <a:srgbClr val="333333"/>
-                </a:solidFill>
-                <a:latin typeface="Calibri"/>
-              </a:rPr>
-              <a:t>Exito:</a:t>
-            </a:r>
-            <a:r>
-              <a:rPr sz="1500" b="0" i="0">
-                <a:solidFill>
-                  <a:srgbClr val="333333"/>
-                </a:solidFill>
-                <a:latin typeface="Calibri"/>
-              </a:rPr>
-              <a:t> Domingo 23:59.</a:t>
+              <a:t>–   Si el playground no persiste usuarios, la matriz igual se documenta: es el entregable.</a:t>
             </a:r>
           </a:p>
         </p:txBody>

--- a/Bases de Datos II/Clases/Clase 2 - Administracion de bases de datos/Presentacion.pptx
+++ b/Bases de Datos II/Clases/Clase 2 - Administracion de bases de datos/Presentacion.pptx
@@ -21,6 +21,7 @@
     <p:sldId id="269" r:id="rId20"/>
     <p:sldId id="270" r:id="rId21"/>
     <p:sldId id="271" r:id="rId22"/>
+    <p:sldId id="272" r:id="rId23"/>
   </p:sldIdLst>
   <p:sldSz cx="12191695" cy="6858000" type="screen4x3"/>
   <p:notesSz cx="6858000" cy="9144000"/>
@@ -3621,7 +3622,7 @@
                 </a:solidFill>
                 <a:latin typeface="Calibri"/>
               </a:rPr>
-              <a:t>Taller PI VetCare — objetivo y criterios</a:t>
+              <a:t>Taller PI VetCare — contexto / por que importa</a:t>
             </a:r>
           </a:p>
         </p:txBody>
@@ -3654,7 +3655,7 @@
               </a:spcAft>
             </a:pPr>
             <a:r>
-              <a:rPr sz="1500" b="0" i="0">
+              <a:rPr sz="1600" b="0" i="0">
                 <a:solidFill>
                   <a:srgbClr val="333333"/>
                 </a:solidFill>
@@ -3663,22 +3664,22 @@
               <a:t>–   </a:t>
             </a:r>
             <a:r>
-              <a:rPr sz="1500" b="1" i="0">
+              <a:rPr sz="1600" b="1" i="0">
                 <a:solidFill>
                   <a:srgbClr val="333333"/>
                 </a:solidFill>
                 <a:latin typeface="Calibri"/>
               </a:rPr>
-              <a:t>Objetivo:</a:t>
-            </a:r>
-            <a:r>
-              <a:rPr sz="1500" b="0" i="0">
+              <a:t>Por qué importa al PI:</a:t>
+            </a:r>
+            <a:r>
+              <a:rPr sz="1600" b="0" i="0">
                 <a:solidFill>
                   <a:srgbClr val="333333"/>
                 </a:solidFill>
                 <a:latin typeface="Calibri"/>
               </a:rPr>
-              <a:t> Plan de roles/privilegios VetCare (&gt;=4 roles).</a:t>
+              <a:t> la seguridad de VetCare DB es un criterio de la rúbrica, y la evidencia son los roles y su matriz — no una promesa.</a:t>
             </a:r>
           </a:p>
           <a:p>
@@ -3688,31 +3689,31 @@
               </a:spcAft>
             </a:pPr>
             <a:r>
-              <a:rPr sz="1500" b="0" i="0">
+              <a:rPr sz="1600" b="0" i="0">
                 <a:solidFill>
                   <a:srgbClr val="333333"/>
                 </a:solidFill>
                 <a:latin typeface="Calibri"/>
               </a:rPr>
-              <a:t>–   </a:t>
-            </a:r>
-            <a:r>
-              <a:rPr sz="1500" b="1" i="0">
+              <a:t>–   Mínimo privilegio evita que Recepción borre historia clínica: cancelar una cita es un </a:t>
+            </a:r>
+            <a:r>
+              <a:rPr sz="1600" b="1" i="0">
                 <a:solidFill>
                   <a:srgbClr val="333333"/>
                 </a:solidFill>
                 <a:latin typeface="Calibri"/>
               </a:rPr>
-              <a:t>Exito:</a:t>
-            </a:r>
-            <a:r>
-              <a:rPr sz="1500" b="0" i="0">
+              <a:t>UPDATE de estado</a:t>
+            </a:r>
+            <a:r>
+              <a:rPr sz="1600" b="0" i="0">
                 <a:solidFill>
                   <a:srgbClr val="333333"/>
                 </a:solidFill>
                 <a:latin typeface="Calibri"/>
               </a:rPr>
-              <a:t> &gt;=4 roles.</a:t>
+              <a:t>, nunca un DELETE.</a:t>
             </a:r>
           </a:p>
           <a:p>
@@ -3722,133 +3723,13 @@
               </a:spcAft>
             </a:pPr>
             <a:r>
-              <a:rPr sz="1500" b="0" i="0">
+              <a:rPr sz="1600" b="0" i="0">
                 <a:solidFill>
                   <a:srgbClr val="333333"/>
                 </a:solidFill>
                 <a:latin typeface="Calibri"/>
               </a:rPr>
-              <a:t>–   </a:t>
-            </a:r>
-            <a:r>
-              <a:rPr sz="1500" b="1" i="0">
-                <a:solidFill>
-                  <a:srgbClr val="333333"/>
-                </a:solidFill>
-                <a:latin typeface="Calibri"/>
-              </a:rPr>
-              <a:t>Exito:</a:t>
-            </a:r>
-            <a:r>
-              <a:rPr sz="1500" b="0" i="0">
-                <a:solidFill>
-                  <a:srgbClr val="333333"/>
-                </a:solidFill>
-                <a:latin typeface="Calibri"/>
-              </a:rPr>
-              <a:t> Matriz privilegio x objeto.</a:t>
-            </a:r>
-          </a:p>
-          <a:p>
-            <a:pPr>
-              <a:spcAft>
-                <a:spcPts val="800"/>
-              </a:spcAft>
-            </a:pPr>
-            <a:r>
-              <a:rPr sz="1500" b="0" i="0">
-                <a:solidFill>
-                  <a:srgbClr val="333333"/>
-                </a:solidFill>
-                <a:latin typeface="Calibri"/>
-              </a:rPr>
-              <a:t>–   </a:t>
-            </a:r>
-            <a:r>
-              <a:rPr sz="1500" b="1" i="0">
-                <a:solidFill>
-                  <a:srgbClr val="333333"/>
-                </a:solidFill>
-                <a:latin typeface="Calibri"/>
-              </a:rPr>
-              <a:t>Exito:</a:t>
-            </a:r>
-            <a:r>
-              <a:rPr sz="1500" b="0" i="0">
-                <a:solidFill>
-                  <a:srgbClr val="333333"/>
-                </a:solidFill>
-                <a:latin typeface="Calibri"/>
-              </a:rPr>
-              <a:t> Justificación least privilege.</a:t>
-            </a:r>
-          </a:p>
-          <a:p>
-            <a:pPr>
-              <a:spcAft>
-                <a:spcPts val="800"/>
-              </a:spcAft>
-            </a:pPr>
-            <a:r>
-              <a:rPr sz="1500" b="0" i="0">
-                <a:solidFill>
-                  <a:srgbClr val="333333"/>
-                </a:solidFill>
-                <a:latin typeface="Calibri"/>
-              </a:rPr>
-              <a:t>–   </a:t>
-            </a:r>
-            <a:r>
-              <a:rPr sz="1500" b="1" i="0">
-                <a:solidFill>
-                  <a:srgbClr val="333333"/>
-                </a:solidFill>
-                <a:latin typeface="Calibri"/>
-              </a:rPr>
-              <a:t>Exito:</a:t>
-            </a:r>
-            <a:r>
-              <a:rPr sz="1500" b="0" i="0">
-                <a:solidFill>
-                  <a:srgbClr val="333333"/>
-                </a:solidFill>
-                <a:latin typeface="Calibri"/>
-              </a:rPr>
-              <a:t> 1 página política.</a:t>
-            </a:r>
-          </a:p>
-          <a:p>
-            <a:pPr>
-              <a:spcAft>
-                <a:spcPts val="800"/>
-              </a:spcAft>
-            </a:pPr>
-            <a:r>
-              <a:rPr sz="1500" b="0" i="0">
-                <a:solidFill>
-                  <a:srgbClr val="333333"/>
-                </a:solidFill>
-                <a:latin typeface="Calibri"/>
-              </a:rPr>
-              <a:t>–   </a:t>
-            </a:r>
-            <a:r>
-              <a:rPr sz="1500" b="1" i="0">
-                <a:solidFill>
-                  <a:srgbClr val="333333"/>
-                </a:solidFill>
-                <a:latin typeface="Calibri"/>
-              </a:rPr>
-              <a:t>Exito:</a:t>
-            </a:r>
-            <a:r>
-              <a:rPr sz="1500" b="0" i="0">
-                <a:solidFill>
-                  <a:srgbClr val="333333"/>
-                </a:solidFill>
-                <a:latin typeface="Calibri"/>
-              </a:rPr>
-              <a:t> Domingo 23:59.</a:t>
+              <a:t>–   Los «GRANT» de hoy corren de verdad y se auditan con «information_schema»: la matriz que entregas tiene que decir lo mismo que ejecutó el motor.</a:t>
             </a:r>
           </a:p>
         </p:txBody>
@@ -4029,7 +3910,7 @@
                 </a:solidFill>
                 <a:latin typeface="Calibri"/>
               </a:rPr>
-              <a:t>Taller PI VetCare — escenario / datos de partida</a:t>
+              <a:t>Taller PI VetCare — objetivo y criterios</a:t>
             </a:r>
           </a:p>
         </p:txBody>
@@ -4062,13 +3943,31 @@
               </a:spcAft>
             </a:pPr>
             <a:r>
-              <a:rPr sz="1600" b="0" i="0">
+              <a:rPr sz="1500" b="0" i="0">
                 <a:solidFill>
                   <a:srgbClr val="333333"/>
                 </a:solidFill>
                 <a:latin typeface="Calibri"/>
               </a:rPr>
-              <a:t>–   Roles: ADMIN_BD, RECEPCION, VETERINARIO, AUDITOR.</a:t>
+              <a:t>–   </a:t>
+            </a:r>
+            <a:r>
+              <a:rPr sz="1500" b="1" i="0">
+                <a:solidFill>
+                  <a:srgbClr val="333333"/>
+                </a:solidFill>
+                <a:latin typeface="Calibri"/>
+              </a:rPr>
+              <a:t>Objetivo:</a:t>
+            </a:r>
+            <a:r>
+              <a:rPr sz="1500" b="0" i="0">
+                <a:solidFill>
+                  <a:srgbClr val="333333"/>
+                </a:solidFill>
+                <a:latin typeface="Calibri"/>
+              </a:rPr>
+              <a:t> Los 4 roles de VetCare creados y verificados, más la matriz rol x objeto y la política de altas y bajas.</a:t>
             </a:r>
           </a:p>
           <a:p>
@@ -4078,13 +3977,201 @@
               </a:spcAft>
             </a:pPr>
             <a:r>
-              <a:rPr sz="1600" b="0" i="0">
+              <a:rPr sz="1500" b="0" i="0">
                 <a:solidFill>
                   <a:srgbClr val="333333"/>
                 </a:solidFill>
                 <a:latin typeface="Calibri"/>
               </a:rPr>
-              <a:t>–   Live SQL / Docs.</a:t>
+              <a:t>–   </a:t>
+            </a:r>
+            <a:r>
+              <a:rPr sz="1500" b="1" i="0">
+                <a:solidFill>
+                  <a:srgbClr val="333333"/>
+                </a:solidFill>
+                <a:latin typeface="Calibri"/>
+              </a:rPr>
+              <a:t>Exito:</a:t>
+            </a:r>
+            <a:r>
+              <a:rPr sz="1500" b="0" i="0">
+                <a:solidFill>
+                  <a:srgbClr val="333333"/>
+                </a:solidFill>
+                <a:latin typeface="Calibri"/>
+              </a:rPr>
+              <a:t> Los 4 roles creados, con sus GRANT y el REVOKE explícito de DELETE.</a:t>
+            </a:r>
+          </a:p>
+          <a:p>
+            <a:pPr>
+              <a:spcAft>
+                <a:spcPts val="800"/>
+              </a:spcAft>
+            </a:pPr>
+            <a:r>
+              <a:rPr sz="1500" b="0" i="0">
+                <a:solidFill>
+                  <a:srgbClr val="333333"/>
+                </a:solidFill>
+                <a:latin typeface="Calibri"/>
+              </a:rPr>
+              <a:t>–   </a:t>
+            </a:r>
+            <a:r>
+              <a:rPr sz="1500" b="1" i="0">
+                <a:solidFill>
+                  <a:srgbClr val="333333"/>
+                </a:solidFill>
+                <a:latin typeface="Calibri"/>
+              </a:rPr>
+              <a:t>Exito:</a:t>
+            </a:r>
+            <a:r>
+              <a:rPr sz="1500" b="0" i="0">
+                <a:solidFill>
+                  <a:srgbClr val="333333"/>
+                </a:solidFill>
+                <a:latin typeface="Calibri"/>
+              </a:rPr>
+              <a:t> La matriz real consultada con «information_schema.role_table_grants».</a:t>
+            </a:r>
+          </a:p>
+          <a:p>
+            <a:pPr>
+              <a:spcAft>
+                <a:spcPts val="800"/>
+              </a:spcAft>
+            </a:pPr>
+            <a:r>
+              <a:rPr sz="1500" b="0" i="0">
+                <a:solidFill>
+                  <a:srgbClr val="333333"/>
+                </a:solidFill>
+                <a:latin typeface="Calibri"/>
+              </a:rPr>
+              <a:t>–   </a:t>
+            </a:r>
+            <a:r>
+              <a:rPr sz="1500" b="1" i="0">
+                <a:solidFill>
+                  <a:srgbClr val="333333"/>
+                </a:solidFill>
+                <a:latin typeface="Calibri"/>
+              </a:rPr>
+              <a:t>Exito:</a:t>
+            </a:r>
+            <a:r>
+              <a:rPr sz="1500" b="0" i="0">
+                <a:solidFill>
+                  <a:srgbClr val="333333"/>
+                </a:solidFill>
+                <a:latin typeface="Calibri"/>
+              </a:rPr>
+              <a:t> Vista «v_agenda_recepcion» sin el email + «GRANT SELECT (id_dueno, nombre)».</a:t>
+            </a:r>
+          </a:p>
+          <a:p>
+            <a:pPr>
+              <a:spcAft>
+                <a:spcPts val="800"/>
+              </a:spcAft>
+            </a:pPr>
+            <a:r>
+              <a:rPr sz="1500" b="0" i="0">
+                <a:solidFill>
+                  <a:srgbClr val="333333"/>
+                </a:solidFill>
+                <a:latin typeface="Calibri"/>
+              </a:rPr>
+              <a:t>–   </a:t>
+            </a:r>
+            <a:r>
+              <a:rPr sz="1500" b="1" i="0">
+                <a:solidFill>
+                  <a:srgbClr val="333333"/>
+                </a:solidFill>
+                <a:latin typeface="Calibri"/>
+              </a:rPr>
+              <a:t>Exito:</a:t>
+            </a:r>
+            <a:r>
+              <a:rPr sz="1500" b="0" i="0">
+                <a:solidFill>
+                  <a:srgbClr val="333333"/>
+                </a:solidFill>
+                <a:latin typeface="Calibri"/>
+              </a:rPr>
+              <a:t> Matriz de 10 objetos x 4 roles, sin celdas vacías y consistente con los GRANT.</a:t>
+            </a:r>
+          </a:p>
+          <a:p>
+            <a:pPr>
+              <a:spcAft>
+                <a:spcPts val="800"/>
+              </a:spcAft>
+            </a:pPr>
+            <a:r>
+              <a:rPr sz="1500" b="0" i="0">
+                <a:solidFill>
+                  <a:srgbClr val="333333"/>
+                </a:solidFill>
+                <a:latin typeface="Calibri"/>
+              </a:rPr>
+              <a:t>–   </a:t>
+            </a:r>
+            <a:r>
+              <a:rPr sz="1500" b="1" i="0">
+                <a:solidFill>
+                  <a:srgbClr val="333333"/>
+                </a:solidFill>
+                <a:latin typeface="Calibri"/>
+              </a:rPr>
+              <a:t>Exito:</a:t>
+            </a:r>
+            <a:r>
+              <a:rPr sz="1500" b="0" i="0">
+                <a:solidFill>
+                  <a:srgbClr val="333333"/>
+                </a:solidFill>
+                <a:latin typeface="Calibri"/>
+              </a:rPr>
+              <a:t> Política de 1 página con las 5 secciones, cada una con responsable y plazo.</a:t>
+            </a:r>
+          </a:p>
+          <a:p>
+            <a:pPr>
+              <a:spcAft>
+                <a:spcPts val="800"/>
+              </a:spcAft>
+            </a:pPr>
+            <a:r>
+              <a:rPr sz="1500" b="0" i="0">
+                <a:solidFill>
+                  <a:srgbClr val="333333"/>
+                </a:solidFill>
+                <a:latin typeface="Calibri"/>
+              </a:rPr>
+              <a:t>–   </a:t>
+            </a:r>
+            <a:r>
+              <a:rPr sz="1500" b="1" i="0">
+                <a:solidFill>
+                  <a:srgbClr val="333333"/>
+                </a:solidFill>
+                <a:latin typeface="Calibri"/>
+              </a:rPr>
+              <a:t>Exito:</a:t>
+            </a:r>
+            <a:r>
+              <a:rPr sz="1500" b="0" i="0">
+                <a:solidFill>
+                  <a:srgbClr val="333333"/>
+                </a:solidFill>
+                <a:latin typeface="Calibri"/>
+              </a:rPr>
+              <a:t> Entrega domingo 23:59.</a:t>
             </a:r>
           </a:p>
         </p:txBody>
@@ -4265,111 +4352,21 @@
                 </a:solidFill>
                 <a:latin typeface="Calibri"/>
               </a:rPr>
-              <a:t>Taller PI VetCare — pasos guiados</a:t>
-            </a:r>
-          </a:p>
-        </p:txBody>
-      </p:sp>
-      <p:sp>
-        <p:nvSpPr>
-          <p:cNvPr id="5" name="Rounded Rectangle 4"/>
-          <p:cNvSpPr/>
-          <p:nvPr/>
-        </p:nvSpPr>
-        <p:spPr>
-          <a:xfrm>
-            <a:off x="457200" y="1554480"/>
-            <a:ext cx="11277295" cy="1051560"/>
-          </a:xfrm>
-          <a:prstGeom prst="roundRect">
-            <a:avLst>
-              <a:gd name="adj" fmla="val 12000"/>
-            </a:avLst>
-          </a:prstGeom>
-          <a:solidFill>
-            <a:srgbClr val="F2F2F2"/>
-          </a:solidFill>
-          <a:ln>
-            <a:noFill/>
-          </a:ln>
-        </p:spPr>
-        <p:style>
-          <a:lnRef idx="1">
-            <a:schemeClr val="accent1"/>
-          </a:lnRef>
-          <a:fillRef idx="3">
-            <a:schemeClr val="accent1"/>
-          </a:fillRef>
-          <a:effectRef idx="2">
-            <a:schemeClr val="accent1"/>
-          </a:effectRef>
-          <a:fontRef idx="minor">
-            <a:schemeClr val="lt1"/>
-          </a:fontRef>
-        </p:style>
-        <p:txBody>
-          <a:bodyPr rtlCol="0" anchor="ctr"/>
-          <a:lstStyle/>
-          <a:p>
-            <a:pPr algn="ctr"/>
-          </a:p>
-        </p:txBody>
-      </p:sp>
-      <p:sp>
-        <p:nvSpPr>
-          <p:cNvPr id="6" name="Rounded Rectangle 5"/>
-          <p:cNvSpPr/>
-          <p:nvPr/>
-        </p:nvSpPr>
-        <p:spPr>
-          <a:xfrm>
-            <a:off x="594360" y="1860804"/>
-            <a:ext cx="438912" cy="438912"/>
-          </a:xfrm>
-          <a:prstGeom prst="roundRect">
-            <a:avLst>
-              <a:gd name="adj" fmla="val 12000"/>
-            </a:avLst>
-          </a:prstGeom>
-          <a:solidFill>
-            <a:srgbClr val="095292"/>
-          </a:solidFill>
-          <a:ln>
-            <a:noFill/>
-          </a:ln>
-        </p:spPr>
-        <p:style>
-          <a:lnRef idx="1">
-            <a:schemeClr val="accent1"/>
-          </a:lnRef>
-          <a:fillRef idx="3">
-            <a:schemeClr val="accent1"/>
-          </a:fillRef>
-          <a:effectRef idx="2">
-            <a:schemeClr val="accent1"/>
-          </a:effectRef>
-          <a:fontRef idx="minor">
-            <a:schemeClr val="lt1"/>
-          </a:fontRef>
-        </p:style>
-        <p:txBody>
-          <a:bodyPr rtlCol="0" anchor="ctr"/>
-          <a:lstStyle/>
-          <a:p>
-            <a:pPr algn="ctr"/>
-          </a:p>
-        </p:txBody>
-      </p:sp>
-      <p:sp>
-        <p:nvSpPr>
-          <p:cNvPr id="7" name="TextBox 6"/>
+              <a:t>Taller PI VetCare — escenario / datos de partida</a:t>
+            </a:r>
+          </a:p>
+        </p:txBody>
+      </p:sp>
+      <p:sp>
+        <p:nvSpPr>
+          <p:cNvPr id="5" name="TextBox 4"/>
           <p:cNvSpPr txBox="1"/>
           <p:nvPr/>
         </p:nvSpPr>
         <p:spPr>
           <a:xfrm>
-            <a:off x="594360" y="1860804"/>
-            <a:ext cx="438912" cy="438912"/>
+            <a:off x="457200" y="1170432"/>
+            <a:ext cx="11277295" cy="5230368"/>
           </a:xfrm>
           <a:prstGeom prst="rect">
             <a:avLst/>
@@ -4377,522 +4374,97 @@
           <a:noFill/>
         </p:spPr>
         <p:txBody>
-          <a:bodyPr wrap="square" anchor="ctr"/>
-          <a:lstStyle/>
-          <a:p>
-            <a:pPr algn="ctr"/>
+          <a:bodyPr wrap="square">
+            <a:spAutoFit/>
+          </a:bodyPr>
+          <a:lstStyle/>
+          <a:p>
+            <a:pPr>
+              <a:spcAft>
+                <a:spcPts val="800"/>
+              </a:spcAft>
+            </a:pPr>
+            <a:r>
+              <a:rPr sz="1600" b="0" i="0">
+                <a:solidFill>
+                  <a:srgbClr val="333333"/>
+                </a:solidFill>
+                <a:latin typeface="Calibri"/>
+              </a:rPr>
+              <a:t>–   Esquema de VetCare ya creado y poblado: 8 tablas, y los dos procedimientos («sp_agendar_cita», «sp_facturar») como objetos de la matriz.</a:t>
+            </a:r>
+          </a:p>
+          <a:p>
+            <a:pPr>
+              <a:spcAft>
+                <a:spcPts val="800"/>
+              </a:spcAft>
+            </a:pPr>
+            <a:r>
+              <a:rPr sz="1600" b="0" i="0">
+                <a:solidFill>
+                  <a:srgbClr val="333333"/>
+                </a:solidFill>
+                <a:latin typeface="Calibri"/>
+              </a:rPr>
+              <a:t>–   Roles a crear: «admin_bd» · «recepcion» · «veterinario_rol» · «auditor» (minúsculas; el del veterinario lleva «_rol» porque «veterinario» ya es una tabla).</a:t>
+            </a:r>
+          </a:p>
+          <a:p>
+            <a:pPr>
+              <a:spcAft>
+                <a:spcPts val="800"/>
+              </a:spcAft>
+            </a:pPr>
+            <a:r>
+              <a:rPr sz="1600" b="0" i="0">
+                <a:solidFill>
+                  <a:srgbClr val="333333"/>
+                </a:solidFill>
+                <a:latin typeface="Calibri"/>
+              </a:rPr>
+              <a:t>–   </a:t>
+            </a:r>
             <a:r>
               <a:rPr sz="1600" b="1" i="0">
                 <a:solidFill>
-                  <a:srgbClr val="FFFFFF"/>
-                </a:solidFill>
-                <a:latin typeface="Calibri"/>
-              </a:rPr>
-              <a:t>1</a:t>
-            </a:r>
-          </a:p>
-        </p:txBody>
-      </p:sp>
-      <p:sp>
-        <p:nvSpPr>
-          <p:cNvPr id="8" name="TextBox 7"/>
-          <p:cNvSpPr txBox="1"/>
-          <p:nvPr/>
-        </p:nvSpPr>
-        <p:spPr>
-          <a:xfrm>
-            <a:off x="1188720" y="1645920"/>
-            <a:ext cx="10271455" cy="886968"/>
-          </a:xfrm>
-          <a:prstGeom prst="rect">
-            <a:avLst/>
-          </a:prstGeom>
-          <a:noFill/>
-        </p:spPr>
-        <p:txBody>
-          <a:bodyPr wrap="square" anchor="ctr"/>
-          <a:lstStyle/>
-          <a:p>
-            <a:r>
-              <a:rPr sz="1500" b="1" i="0">
-                <a:solidFill>
-                  <a:srgbClr val="095292"/>
-                </a:solidFill>
-                <a:latin typeface="Calibri"/>
-              </a:rPr>
-              <a:t>Crear los 4 roles (admin_bd, recepcion, veterinario_rol, auditor) con GRANT/REVOKE que corran.</a:t>
-            </a:r>
-          </a:p>
-        </p:txBody>
-      </p:sp>
-      <p:sp>
-        <p:nvSpPr>
-          <p:cNvPr id="9" name="Rounded Rectangle 8"/>
-          <p:cNvSpPr/>
-          <p:nvPr/>
-        </p:nvSpPr>
-        <p:spPr>
-          <a:xfrm>
-            <a:off x="457200" y="2697480"/>
-            <a:ext cx="11277295" cy="1051560"/>
-          </a:xfrm>
-          <a:prstGeom prst="roundRect">
-            <a:avLst>
-              <a:gd name="adj" fmla="val 12000"/>
-            </a:avLst>
-          </a:prstGeom>
-          <a:solidFill>
-            <a:srgbClr val="E8F4FA"/>
-          </a:solidFill>
-          <a:ln>
-            <a:noFill/>
-          </a:ln>
-        </p:spPr>
-        <p:style>
-          <a:lnRef idx="1">
-            <a:schemeClr val="accent1"/>
-          </a:lnRef>
-          <a:fillRef idx="3">
-            <a:schemeClr val="accent1"/>
-          </a:fillRef>
-          <a:effectRef idx="2">
-            <a:schemeClr val="accent1"/>
-          </a:effectRef>
-          <a:fontRef idx="minor">
-            <a:schemeClr val="lt1"/>
-          </a:fontRef>
-        </p:style>
-        <p:txBody>
-          <a:bodyPr rtlCol="0" anchor="ctr"/>
-          <a:lstStyle/>
-          <a:p>
-            <a:pPr algn="ctr"/>
-          </a:p>
-        </p:txBody>
-      </p:sp>
-      <p:sp>
-        <p:nvSpPr>
-          <p:cNvPr id="10" name="Rounded Rectangle 9"/>
-          <p:cNvSpPr/>
-          <p:nvPr/>
-        </p:nvSpPr>
-        <p:spPr>
-          <a:xfrm>
-            <a:off x="594360" y="3003804"/>
-            <a:ext cx="438912" cy="438912"/>
-          </a:xfrm>
-          <a:prstGeom prst="roundRect">
-            <a:avLst>
-              <a:gd name="adj" fmla="val 12000"/>
-            </a:avLst>
-          </a:prstGeom>
-          <a:solidFill>
-            <a:srgbClr val="095292"/>
-          </a:solidFill>
-          <a:ln>
-            <a:noFill/>
-          </a:ln>
-        </p:spPr>
-        <p:style>
-          <a:lnRef idx="1">
-            <a:schemeClr val="accent1"/>
-          </a:lnRef>
-          <a:fillRef idx="3">
-            <a:schemeClr val="accent1"/>
-          </a:fillRef>
-          <a:effectRef idx="2">
-            <a:schemeClr val="accent1"/>
-          </a:effectRef>
-          <a:fontRef idx="minor">
-            <a:schemeClr val="lt1"/>
-          </a:fontRef>
-        </p:style>
-        <p:txBody>
-          <a:bodyPr rtlCol="0" anchor="ctr"/>
-          <a:lstStyle/>
-          <a:p>
-            <a:pPr algn="ctr"/>
-          </a:p>
-        </p:txBody>
-      </p:sp>
-      <p:sp>
-        <p:nvSpPr>
-          <p:cNvPr id="11" name="TextBox 10"/>
-          <p:cNvSpPr txBox="1"/>
-          <p:nvPr/>
-        </p:nvSpPr>
-        <p:spPr>
-          <a:xfrm>
-            <a:off x="594360" y="3003804"/>
-            <a:ext cx="438912" cy="438912"/>
-          </a:xfrm>
-          <a:prstGeom prst="rect">
-            <a:avLst/>
-          </a:prstGeom>
-          <a:noFill/>
-        </p:spPr>
-        <p:txBody>
-          <a:bodyPr wrap="square" anchor="ctr"/>
-          <a:lstStyle/>
-          <a:p>
-            <a:pPr algn="ctr"/>
-            <a:r>
-              <a:rPr sz="1600" b="1" i="0">
-                <a:solidFill>
-                  <a:srgbClr val="FFFFFF"/>
-                </a:solidFill>
-                <a:latin typeface="Calibri"/>
-              </a:rPr>
-              <a:t>2</a:t>
-            </a:r>
-          </a:p>
-        </p:txBody>
-      </p:sp>
-      <p:sp>
-        <p:nvSpPr>
-          <p:cNvPr id="12" name="TextBox 11"/>
-          <p:cNvSpPr txBox="1"/>
-          <p:nvPr/>
-        </p:nvSpPr>
-        <p:spPr>
-          <a:xfrm>
-            <a:off x="1188720" y="2788920"/>
-            <a:ext cx="10271455" cy="886968"/>
-          </a:xfrm>
-          <a:prstGeom prst="rect">
-            <a:avLst/>
-          </a:prstGeom>
-          <a:noFill/>
-        </p:spPr>
-        <p:txBody>
-          <a:bodyPr wrap="square" anchor="ctr"/>
-          <a:lstStyle/>
-          <a:p>
-            <a:r>
-              <a:rPr sz="1500" b="1" i="0">
-                <a:solidFill>
-                  <a:srgbClr val="095292"/>
-                </a:solidFill>
-                <a:latin typeface="Calibri"/>
-              </a:rPr>
-              <a:t>Recortar la superficie: vista v_agenda_recepcion + privilegio por columna sobre dueno.</a:t>
-            </a:r>
-          </a:p>
-        </p:txBody>
-      </p:sp>
-      <p:sp>
-        <p:nvSpPr>
-          <p:cNvPr id="13" name="Rounded Rectangle 12"/>
-          <p:cNvSpPr/>
-          <p:nvPr/>
-        </p:nvSpPr>
-        <p:spPr>
-          <a:xfrm>
-            <a:off x="457200" y="3840480"/>
-            <a:ext cx="11277295" cy="1051560"/>
-          </a:xfrm>
-          <a:prstGeom prst="roundRect">
-            <a:avLst>
-              <a:gd name="adj" fmla="val 12000"/>
-            </a:avLst>
-          </a:prstGeom>
-          <a:solidFill>
-            <a:srgbClr val="F2F2F2"/>
-          </a:solidFill>
-          <a:ln>
-            <a:noFill/>
-          </a:ln>
-        </p:spPr>
-        <p:style>
-          <a:lnRef idx="1">
-            <a:schemeClr val="accent1"/>
-          </a:lnRef>
-          <a:fillRef idx="3">
-            <a:schemeClr val="accent1"/>
-          </a:fillRef>
-          <a:effectRef idx="2">
-            <a:schemeClr val="accent1"/>
-          </a:effectRef>
-          <a:fontRef idx="minor">
-            <a:schemeClr val="lt1"/>
-          </a:fontRef>
-        </p:style>
-        <p:txBody>
-          <a:bodyPr rtlCol="0" anchor="ctr"/>
-          <a:lstStyle/>
-          <a:p>
-            <a:pPr algn="ctr"/>
-          </a:p>
-        </p:txBody>
-      </p:sp>
-      <p:sp>
-        <p:nvSpPr>
-          <p:cNvPr id="14" name="Rounded Rectangle 13"/>
-          <p:cNvSpPr/>
-          <p:nvPr/>
-        </p:nvSpPr>
-        <p:spPr>
-          <a:xfrm>
-            <a:off x="594360" y="4146804"/>
-            <a:ext cx="438912" cy="438912"/>
-          </a:xfrm>
-          <a:prstGeom prst="roundRect">
-            <a:avLst>
-              <a:gd name="adj" fmla="val 12000"/>
-            </a:avLst>
-          </a:prstGeom>
-          <a:solidFill>
-            <a:srgbClr val="095292"/>
-          </a:solidFill>
-          <a:ln>
-            <a:noFill/>
-          </a:ln>
-        </p:spPr>
-        <p:style>
-          <a:lnRef idx="1">
-            <a:schemeClr val="accent1"/>
-          </a:lnRef>
-          <a:fillRef idx="3">
-            <a:schemeClr val="accent1"/>
-          </a:fillRef>
-          <a:effectRef idx="2">
-            <a:schemeClr val="accent1"/>
-          </a:effectRef>
-          <a:fontRef idx="minor">
-            <a:schemeClr val="lt1"/>
-          </a:fontRef>
-        </p:style>
-        <p:txBody>
-          <a:bodyPr rtlCol="0" anchor="ctr"/>
-          <a:lstStyle/>
-          <a:p>
-            <a:pPr algn="ctr"/>
-          </a:p>
-        </p:txBody>
-      </p:sp>
-      <p:sp>
-        <p:nvSpPr>
-          <p:cNvPr id="15" name="TextBox 14"/>
-          <p:cNvSpPr txBox="1"/>
-          <p:nvPr/>
-        </p:nvSpPr>
-        <p:spPr>
-          <a:xfrm>
-            <a:off x="594360" y="4146804"/>
-            <a:ext cx="438912" cy="438912"/>
-          </a:xfrm>
-          <a:prstGeom prst="rect">
-            <a:avLst/>
-          </a:prstGeom>
-          <a:noFill/>
-        </p:spPr>
-        <p:txBody>
-          <a:bodyPr wrap="square" anchor="ctr"/>
-          <a:lstStyle/>
-          <a:p>
-            <a:pPr algn="ctr"/>
-            <a:r>
-              <a:rPr sz="1600" b="1" i="0">
-                <a:solidFill>
-                  <a:srgbClr val="FFFFFF"/>
-                </a:solidFill>
-                <a:latin typeface="Calibri"/>
-              </a:rPr>
-              <a:t>3</a:t>
-            </a:r>
-          </a:p>
-        </p:txBody>
-      </p:sp>
-      <p:sp>
-        <p:nvSpPr>
-          <p:cNvPr id="16" name="TextBox 15"/>
-          <p:cNvSpPr txBox="1"/>
-          <p:nvPr/>
-        </p:nvSpPr>
-        <p:spPr>
-          <a:xfrm>
-            <a:off x="1188720" y="3931920"/>
-            <a:ext cx="10271455" cy="886968"/>
-          </a:xfrm>
-          <a:prstGeom prst="rect">
-            <a:avLst/>
-          </a:prstGeom>
-          <a:noFill/>
-        </p:spPr>
-        <p:txBody>
-          <a:bodyPr wrap="square" anchor="ctr"/>
-          <a:lstStyle/>
-          <a:p>
-            <a:r>
-              <a:rPr sz="1500" b="1" i="0">
-                <a:solidFill>
-                  <a:srgbClr val="095292"/>
-                </a:solidFill>
-                <a:latin typeface="Calibri"/>
-              </a:rPr>
-              <a:t>Matriz rol x objeto x privilegio de los 10 objetos, justificando privilegio minimo.</a:t>
-            </a:r>
-          </a:p>
-        </p:txBody>
-      </p:sp>
-      <p:sp>
-        <p:nvSpPr>
-          <p:cNvPr id="17" name="Rounded Rectangle 16"/>
-          <p:cNvSpPr/>
-          <p:nvPr/>
-        </p:nvSpPr>
-        <p:spPr>
-          <a:xfrm>
-            <a:off x="457200" y="4983480"/>
-            <a:ext cx="11277295" cy="1051560"/>
-          </a:xfrm>
-          <a:prstGeom prst="roundRect">
-            <a:avLst>
-              <a:gd name="adj" fmla="val 12000"/>
-            </a:avLst>
-          </a:prstGeom>
-          <a:solidFill>
-            <a:srgbClr val="E8F4FA"/>
-          </a:solidFill>
-          <a:ln>
-            <a:noFill/>
-          </a:ln>
-        </p:spPr>
-        <p:style>
-          <a:lnRef idx="1">
-            <a:schemeClr val="accent1"/>
-          </a:lnRef>
-          <a:fillRef idx="3">
-            <a:schemeClr val="accent1"/>
-          </a:fillRef>
-          <a:effectRef idx="2">
-            <a:schemeClr val="accent1"/>
-          </a:effectRef>
-          <a:fontRef idx="minor">
-            <a:schemeClr val="lt1"/>
-          </a:fontRef>
-        </p:style>
-        <p:txBody>
-          <a:bodyPr rtlCol="0" anchor="ctr"/>
-          <a:lstStyle/>
-          <a:p>
-            <a:pPr algn="ctr"/>
-          </a:p>
-        </p:txBody>
-      </p:sp>
-      <p:sp>
-        <p:nvSpPr>
-          <p:cNvPr id="18" name="Rounded Rectangle 17"/>
-          <p:cNvSpPr/>
-          <p:nvPr/>
-        </p:nvSpPr>
-        <p:spPr>
-          <a:xfrm>
-            <a:off x="594360" y="5289804"/>
-            <a:ext cx="438912" cy="438912"/>
-          </a:xfrm>
-          <a:prstGeom prst="roundRect">
-            <a:avLst>
-              <a:gd name="adj" fmla="val 12000"/>
-            </a:avLst>
-          </a:prstGeom>
-          <a:solidFill>
-            <a:srgbClr val="095292"/>
-          </a:solidFill>
-          <a:ln>
-            <a:noFill/>
-          </a:ln>
-        </p:spPr>
-        <p:style>
-          <a:lnRef idx="1">
-            <a:schemeClr val="accent1"/>
-          </a:lnRef>
-          <a:fillRef idx="3">
-            <a:schemeClr val="accent1"/>
-          </a:fillRef>
-          <a:effectRef idx="2">
-            <a:schemeClr val="accent1"/>
-          </a:effectRef>
-          <a:fontRef idx="minor">
-            <a:schemeClr val="lt1"/>
-          </a:fontRef>
-        </p:style>
-        <p:txBody>
-          <a:bodyPr rtlCol="0" anchor="ctr"/>
-          <a:lstStyle/>
-          <a:p>
-            <a:pPr algn="ctr"/>
-          </a:p>
-        </p:txBody>
-      </p:sp>
-      <p:sp>
-        <p:nvSpPr>
-          <p:cNvPr id="19" name="TextBox 18"/>
-          <p:cNvSpPr txBox="1"/>
-          <p:nvPr/>
-        </p:nvSpPr>
-        <p:spPr>
-          <a:xfrm>
-            <a:off x="594360" y="5289804"/>
-            <a:ext cx="438912" cy="438912"/>
-          </a:xfrm>
-          <a:prstGeom prst="rect">
-            <a:avLst/>
-          </a:prstGeom>
-          <a:noFill/>
-        </p:spPr>
-        <p:txBody>
-          <a:bodyPr wrap="square" anchor="ctr"/>
-          <a:lstStyle/>
-          <a:p>
-            <a:pPr algn="ctr"/>
-            <a:r>
-              <a:rPr sz="1600" b="1" i="0">
-                <a:solidFill>
-                  <a:srgbClr val="FFFFFF"/>
-                </a:solidFill>
-                <a:latin typeface="Calibri"/>
-              </a:rPr>
-              <a:t>4</a:t>
-            </a:r>
-          </a:p>
-        </p:txBody>
-      </p:sp>
-      <p:sp>
-        <p:nvSpPr>
-          <p:cNvPr id="20" name="TextBox 19"/>
-          <p:cNvSpPr txBox="1"/>
-          <p:nvPr/>
-        </p:nvSpPr>
-        <p:spPr>
-          <a:xfrm>
-            <a:off x="1188720" y="5074920"/>
-            <a:ext cx="10271455" cy="886968"/>
-          </a:xfrm>
-          <a:prstGeom prst="rect">
-            <a:avLst/>
-          </a:prstGeom>
-          <a:noFill/>
-        </p:spPr>
-        <p:txBody>
-          <a:bodyPr wrap="square" anchor="ctr"/>
-          <a:lstStyle/>
-          <a:p>
-            <a:r>
-              <a:rPr sz="1500" b="1" i="0">
-                <a:solidFill>
-                  <a:srgbClr val="095292"/>
-                </a:solidFill>
-                <a:latin typeface="Calibri"/>
-              </a:rPr>
-              <a:t>Redactar 1 pagina: politica de altas/bajas de usuarios y limite del entorno.</a:t>
-            </a:r>
-          </a:p>
-        </p:txBody>
-      </p:sp>
-      <p:sp>
-        <p:nvSpPr>
-          <p:cNvPr id="21" name="TextBox 20"/>
+                  <a:srgbClr val="333333"/>
+                </a:solidFill>
+                <a:latin typeface="Calibri"/>
+              </a:rPr>
+              <a:t>Motor:</a:t>
+            </a:r>
+            <a:r>
+              <a:rPr sz="1600" b="0" i="0">
+                <a:solidFill>
+                  <a:srgbClr val="333333"/>
+                </a:solidFill>
+                <a:latin typeface="Calibri"/>
+              </a:rPr>
+              <a:t> PostgreSQL dentro de ExamLab. Los GRANT son reales, y el permiso negado se comprueba con «SET ROLE» en la misma sesión: no hay una segunda conexión.</a:t>
+            </a:r>
+          </a:p>
+          <a:p>
+            <a:pPr>
+              <a:spcAft>
+                <a:spcPts val="800"/>
+              </a:spcAft>
+            </a:pPr>
+            <a:r>
+              <a:rPr sz="1600" b="0" i="0">
+                <a:solidFill>
+                  <a:srgbClr val="333333"/>
+                </a:solidFill>
+                <a:latin typeface="Calibri"/>
+              </a:rPr>
+              <a:t>–   La matriz y la política se escriben en Google Docs y se pegan en ExamLab; la plantilla en blanco de las dos está en este documento.</a:t>
+            </a:r>
+          </a:p>
+        </p:txBody>
+      </p:sp>
+      <p:sp>
+        <p:nvSpPr>
+          <p:cNvPr id="6" name="TextBox 5"/>
           <p:cNvSpPr txBox="1"/>
           <p:nvPr/>
         </p:nvSpPr>
@@ -5066,7 +4638,7 @@
                 </a:solidFill>
                 <a:latin typeface="Calibri"/>
               </a:rPr>
-              <a:t>Taller PI VetCare — pistas (checklist vacio)</a:t>
+              <a:t>Taller PI VetCare — pasos guiados</a:t>
             </a:r>
           </a:p>
         </p:txBody>
@@ -5079,8 +4651,8 @@
         </p:nvSpPr>
         <p:spPr>
           <a:xfrm>
-            <a:off x="457200" y="1261872"/>
-            <a:ext cx="11277295" cy="566928"/>
+            <a:off x="457200" y="1554480"/>
+            <a:ext cx="11277295" cy="1051560"/>
           </a:xfrm>
           <a:prstGeom prst="roundRect">
             <a:avLst>
@@ -5118,25 +4690,25 @@
       </p:sp>
       <p:sp>
         <p:nvSpPr>
-          <p:cNvPr id="6" name="Rectangle 5"/>
+          <p:cNvPr id="6" name="Rounded Rectangle 5"/>
           <p:cNvSpPr/>
           <p:nvPr/>
         </p:nvSpPr>
         <p:spPr>
           <a:xfrm>
-            <a:off x="640080" y="1408175"/>
-            <a:ext cx="274320" cy="274320"/>
-          </a:xfrm>
-          <a:prstGeom prst="rect">
-            <a:avLst/>
+            <a:off x="594360" y="1860804"/>
+            <a:ext cx="438912" cy="438912"/>
+          </a:xfrm>
+          <a:prstGeom prst="roundRect">
+            <a:avLst>
+              <a:gd name="adj" fmla="val 12000"/>
+            </a:avLst>
           </a:prstGeom>
           <a:solidFill>
-            <a:srgbClr val="FFFFFF"/>
+            <a:srgbClr val="095292"/>
           </a:solidFill>
           <a:ln>
-            <a:solidFill>
-              <a:srgbClr val="333333"/>
-            </a:solidFill>
+            <a:noFill/>
           </a:ln>
         </p:spPr>
         <p:style>
@@ -5163,20 +4735,87 @@
       </p:sp>
       <p:sp>
         <p:nvSpPr>
-          <p:cNvPr id="7" name="Rectangle 6"/>
+          <p:cNvPr id="7" name="TextBox 6"/>
+          <p:cNvSpPr txBox="1"/>
+          <p:nvPr/>
+        </p:nvSpPr>
+        <p:spPr>
+          <a:xfrm>
+            <a:off x="594360" y="1860804"/>
+            <a:ext cx="438912" cy="438912"/>
+          </a:xfrm>
+          <a:prstGeom prst="rect">
+            <a:avLst/>
+          </a:prstGeom>
+          <a:noFill/>
+        </p:spPr>
+        <p:txBody>
+          <a:bodyPr wrap="square" anchor="ctr"/>
+          <a:lstStyle/>
+          <a:p>
+            <a:pPr algn="ctr"/>
+            <a:r>
+              <a:rPr sz="1600" b="1" i="0">
+                <a:solidFill>
+                  <a:srgbClr val="FFFFFF"/>
+                </a:solidFill>
+                <a:latin typeface="Calibri"/>
+              </a:rPr>
+              <a:t>1</a:t>
+            </a:r>
+          </a:p>
+        </p:txBody>
+      </p:sp>
+      <p:sp>
+        <p:nvSpPr>
+          <p:cNvPr id="8" name="TextBox 7"/>
+          <p:cNvSpPr txBox="1"/>
+          <p:nvPr/>
+        </p:nvSpPr>
+        <p:spPr>
+          <a:xfrm>
+            <a:off x="1188720" y="1645920"/>
+            <a:ext cx="10271455" cy="886968"/>
+          </a:xfrm>
+          <a:prstGeom prst="rect">
+            <a:avLst/>
+          </a:prstGeom>
+          <a:noFill/>
+        </p:spPr>
+        <p:txBody>
+          <a:bodyPr wrap="square" anchor="ctr"/>
+          <a:lstStyle/>
+          <a:p>
+            <a:r>
+              <a:rPr sz="1500" b="1" i="0">
+                <a:solidFill>
+                  <a:srgbClr val="095292"/>
+                </a:solidFill>
+                <a:latin typeface="Calibri"/>
+              </a:rPr>
+              <a:t>Crear los 4 roles (admin_bd, recepcion, veterinario_rol, auditor) con GRANT/REVOKE que corran.</a:t>
+            </a:r>
+          </a:p>
+        </p:txBody>
+      </p:sp>
+      <p:sp>
+        <p:nvSpPr>
+          <p:cNvPr id="9" name="Rounded Rectangle 8"/>
           <p:cNvSpPr/>
           <p:nvPr/>
         </p:nvSpPr>
         <p:spPr>
           <a:xfrm>
-            <a:off x="640080" y="1408175"/>
-            <a:ext cx="73152" cy="274320"/>
-          </a:xfrm>
-          <a:prstGeom prst="rect">
-            <a:avLst/>
+            <a:off x="457200" y="2697480"/>
+            <a:ext cx="11277295" cy="1051560"/>
+          </a:xfrm>
+          <a:prstGeom prst="roundRect">
+            <a:avLst>
+              <a:gd name="adj" fmla="val 12000"/>
+            </a:avLst>
           </a:prstGeom>
           <a:solidFill>
-            <a:srgbClr val="269CCB"/>
+            <a:srgbClr val="E8F4FA"/>
           </a:solidFill>
           <a:ln>
             <a:noFill/>
@@ -5206,14 +4845,59 @@
       </p:sp>
       <p:sp>
         <p:nvSpPr>
-          <p:cNvPr id="8" name="TextBox 7"/>
+          <p:cNvPr id="10" name="Rounded Rectangle 9"/>
+          <p:cNvSpPr/>
+          <p:nvPr/>
+        </p:nvSpPr>
+        <p:spPr>
+          <a:xfrm>
+            <a:off x="594360" y="3003804"/>
+            <a:ext cx="438912" cy="438912"/>
+          </a:xfrm>
+          <a:prstGeom prst="roundRect">
+            <a:avLst>
+              <a:gd name="adj" fmla="val 12000"/>
+            </a:avLst>
+          </a:prstGeom>
+          <a:solidFill>
+            <a:srgbClr val="095292"/>
+          </a:solidFill>
+          <a:ln>
+            <a:noFill/>
+          </a:ln>
+        </p:spPr>
+        <p:style>
+          <a:lnRef idx="1">
+            <a:schemeClr val="accent1"/>
+          </a:lnRef>
+          <a:fillRef idx="3">
+            <a:schemeClr val="accent1"/>
+          </a:fillRef>
+          <a:effectRef idx="2">
+            <a:schemeClr val="accent1"/>
+          </a:effectRef>
+          <a:fontRef idx="minor">
+            <a:schemeClr val="lt1"/>
+          </a:fontRef>
+        </p:style>
+        <p:txBody>
+          <a:bodyPr rtlCol="0" anchor="ctr"/>
+          <a:lstStyle/>
+          <a:p>
+            <a:pPr algn="ctr"/>
+          </a:p>
+        </p:txBody>
+      </p:sp>
+      <p:sp>
+        <p:nvSpPr>
+          <p:cNvPr id="11" name="TextBox 10"/>
           <p:cNvSpPr txBox="1"/>
           <p:nvPr/>
         </p:nvSpPr>
         <p:spPr>
           <a:xfrm>
-            <a:off x="1097280" y="1353312"/>
-            <a:ext cx="10362895" cy="402336"/>
+            <a:off x="594360" y="3003804"/>
+            <a:ext cx="438912" cy="438912"/>
           </a:xfrm>
           <a:prstGeom prst="rect">
             <a:avLst/>
@@ -5224,28 +4908,61 @@
           <a:bodyPr wrap="square" anchor="ctr"/>
           <a:lstStyle/>
           <a:p>
-            <a:r>
-              <a:rPr sz="1500" b="0" i="0">
-                <a:solidFill>
-                  <a:srgbClr val="333333"/>
-                </a:solidFill>
-                <a:latin typeface="Calibri"/>
-              </a:rPr>
-              <a:t>□ Recepción con DELETE historial? (no)</a:t>
-            </a:r>
-          </a:p>
-        </p:txBody>
-      </p:sp>
-      <p:sp>
-        <p:nvSpPr>
-          <p:cNvPr id="9" name="Rounded Rectangle 8"/>
+            <a:pPr algn="ctr"/>
+            <a:r>
+              <a:rPr sz="1600" b="1" i="0">
+                <a:solidFill>
+                  <a:srgbClr val="FFFFFF"/>
+                </a:solidFill>
+                <a:latin typeface="Calibri"/>
+              </a:rPr>
+              <a:t>2</a:t>
+            </a:r>
+          </a:p>
+        </p:txBody>
+      </p:sp>
+      <p:sp>
+        <p:nvSpPr>
+          <p:cNvPr id="12" name="TextBox 11"/>
+          <p:cNvSpPr txBox="1"/>
+          <p:nvPr/>
+        </p:nvSpPr>
+        <p:spPr>
+          <a:xfrm>
+            <a:off x="1188720" y="2788920"/>
+            <a:ext cx="10271455" cy="886968"/>
+          </a:xfrm>
+          <a:prstGeom prst="rect">
+            <a:avLst/>
+          </a:prstGeom>
+          <a:noFill/>
+        </p:spPr>
+        <p:txBody>
+          <a:bodyPr wrap="square" anchor="ctr"/>
+          <a:lstStyle/>
+          <a:p>
+            <a:r>
+              <a:rPr sz="1500" b="1" i="0">
+                <a:solidFill>
+                  <a:srgbClr val="095292"/>
+                </a:solidFill>
+                <a:latin typeface="Calibri"/>
+              </a:rPr>
+              <a:t>Recortar la superficie: vista v_agenda_recepcion + privilegio por columna sobre dueno.</a:t>
+            </a:r>
+          </a:p>
+        </p:txBody>
+      </p:sp>
+      <p:sp>
+        <p:nvSpPr>
+          <p:cNvPr id="13" name="Rounded Rectangle 12"/>
           <p:cNvSpPr/>
           <p:nvPr/>
         </p:nvSpPr>
         <p:spPr>
           <a:xfrm>
-            <a:off x="457200" y="1938528"/>
-            <a:ext cx="11277295" cy="566928"/>
+            <a:off x="457200" y="3840480"/>
+            <a:ext cx="11277295" cy="1051560"/>
           </a:xfrm>
           <a:prstGeom prst="roundRect">
             <a:avLst>
@@ -5283,25 +5000,25 @@
       </p:sp>
       <p:sp>
         <p:nvSpPr>
-          <p:cNvPr id="10" name="Rectangle 9"/>
+          <p:cNvPr id="14" name="Rounded Rectangle 13"/>
           <p:cNvSpPr/>
           <p:nvPr/>
         </p:nvSpPr>
         <p:spPr>
           <a:xfrm>
-            <a:off x="640080" y="2084832"/>
-            <a:ext cx="274320" cy="274320"/>
-          </a:xfrm>
-          <a:prstGeom prst="rect">
-            <a:avLst/>
+            <a:off x="594360" y="4146804"/>
+            <a:ext cx="438912" cy="438912"/>
+          </a:xfrm>
+          <a:prstGeom prst="roundRect">
+            <a:avLst>
+              <a:gd name="adj" fmla="val 12000"/>
+            </a:avLst>
           </a:prstGeom>
           <a:solidFill>
-            <a:srgbClr val="FFFFFF"/>
+            <a:srgbClr val="095292"/>
           </a:solidFill>
           <a:ln>
-            <a:solidFill>
-              <a:srgbClr val="333333"/>
-            </a:solidFill>
+            <a:noFill/>
           </a:ln>
         </p:spPr>
         <p:style>
@@ -5328,20 +5045,87 @@
       </p:sp>
       <p:sp>
         <p:nvSpPr>
-          <p:cNvPr id="11" name="Rectangle 10"/>
+          <p:cNvPr id="15" name="TextBox 14"/>
+          <p:cNvSpPr txBox="1"/>
+          <p:nvPr/>
+        </p:nvSpPr>
+        <p:spPr>
+          <a:xfrm>
+            <a:off x="594360" y="4146804"/>
+            <a:ext cx="438912" cy="438912"/>
+          </a:xfrm>
+          <a:prstGeom prst="rect">
+            <a:avLst/>
+          </a:prstGeom>
+          <a:noFill/>
+        </p:spPr>
+        <p:txBody>
+          <a:bodyPr wrap="square" anchor="ctr"/>
+          <a:lstStyle/>
+          <a:p>
+            <a:pPr algn="ctr"/>
+            <a:r>
+              <a:rPr sz="1600" b="1" i="0">
+                <a:solidFill>
+                  <a:srgbClr val="FFFFFF"/>
+                </a:solidFill>
+                <a:latin typeface="Calibri"/>
+              </a:rPr>
+              <a:t>3</a:t>
+            </a:r>
+          </a:p>
+        </p:txBody>
+      </p:sp>
+      <p:sp>
+        <p:nvSpPr>
+          <p:cNvPr id="16" name="TextBox 15"/>
+          <p:cNvSpPr txBox="1"/>
+          <p:nvPr/>
+        </p:nvSpPr>
+        <p:spPr>
+          <a:xfrm>
+            <a:off x="1188720" y="3931920"/>
+            <a:ext cx="10271455" cy="886968"/>
+          </a:xfrm>
+          <a:prstGeom prst="rect">
+            <a:avLst/>
+          </a:prstGeom>
+          <a:noFill/>
+        </p:spPr>
+        <p:txBody>
+          <a:bodyPr wrap="square" anchor="ctr"/>
+          <a:lstStyle/>
+          <a:p>
+            <a:r>
+              <a:rPr sz="1500" b="1" i="0">
+                <a:solidFill>
+                  <a:srgbClr val="095292"/>
+                </a:solidFill>
+                <a:latin typeface="Calibri"/>
+              </a:rPr>
+              <a:t>Matriz rol x objeto x privilegio de los 10 objetos, justificando privilegio minimo.</a:t>
+            </a:r>
+          </a:p>
+        </p:txBody>
+      </p:sp>
+      <p:sp>
+        <p:nvSpPr>
+          <p:cNvPr id="17" name="Rounded Rectangle 16"/>
           <p:cNvSpPr/>
           <p:nvPr/>
         </p:nvSpPr>
         <p:spPr>
           <a:xfrm>
-            <a:off x="640080" y="2084832"/>
-            <a:ext cx="73152" cy="274320"/>
-          </a:xfrm>
-          <a:prstGeom prst="rect">
-            <a:avLst/>
+            <a:off x="457200" y="4983480"/>
+            <a:ext cx="11277295" cy="1051560"/>
+          </a:xfrm>
+          <a:prstGeom prst="roundRect">
+            <a:avLst>
+              <a:gd name="adj" fmla="val 12000"/>
+            </a:avLst>
           </a:prstGeom>
           <a:solidFill>
-            <a:srgbClr val="269CCB"/>
+            <a:srgbClr val="E8F4FA"/>
           </a:solidFill>
           <a:ln>
             <a:noFill/>
@@ -5371,46 +5155,14 @@
       </p:sp>
       <p:sp>
         <p:nvSpPr>
-          <p:cNvPr id="12" name="TextBox 11"/>
-          <p:cNvSpPr txBox="1"/>
-          <p:nvPr/>
-        </p:nvSpPr>
-        <p:spPr>
-          <a:xfrm>
-            <a:off x="1097280" y="2029968"/>
-            <a:ext cx="10362895" cy="402336"/>
-          </a:xfrm>
-          <a:prstGeom prst="rect">
-            <a:avLst/>
-          </a:prstGeom>
-          <a:noFill/>
-        </p:spPr>
-        <p:txBody>
-          <a:bodyPr wrap="square" anchor="ctr"/>
-          <a:lstStyle/>
-          <a:p>
-            <a:r>
-              <a:rPr sz="1500" b="0" i="0">
-                <a:solidFill>
-                  <a:srgbClr val="333333"/>
-                </a:solidFill>
-                <a:latin typeface="Calibri"/>
-              </a:rPr>
-              <a:t>□ Auditor solo SELECT?</a:t>
-            </a:r>
-          </a:p>
-        </p:txBody>
-      </p:sp>
-      <p:sp>
-        <p:nvSpPr>
-          <p:cNvPr id="13" name="Rounded Rectangle 12"/>
+          <p:cNvPr id="18" name="Rounded Rectangle 17"/>
           <p:cNvSpPr/>
           <p:nvPr/>
         </p:nvSpPr>
         <p:spPr>
           <a:xfrm>
-            <a:off x="457200" y="2615184"/>
-            <a:ext cx="11277295" cy="566928"/>
+            <a:off x="594360" y="5289804"/>
+            <a:ext cx="438912" cy="438912"/>
           </a:xfrm>
           <a:prstGeom prst="roundRect">
             <a:avLst>
@@ -5418,7 +5170,7 @@
             </a:avLst>
           </a:prstGeom>
           <a:solidFill>
-            <a:srgbClr val="F2F2F2"/>
+            <a:srgbClr val="095292"/>
           </a:solidFill>
           <a:ln>
             <a:noFill/>
@@ -5448,102 +5200,47 @@
       </p:sp>
       <p:sp>
         <p:nvSpPr>
-          <p:cNvPr id="14" name="Rectangle 13"/>
-          <p:cNvSpPr/>
-          <p:nvPr/>
-        </p:nvSpPr>
-        <p:spPr>
-          <a:xfrm>
-            <a:off x="640080" y="2761488"/>
-            <a:ext cx="274320" cy="274320"/>
-          </a:xfrm>
-          <a:prstGeom prst="rect">
-            <a:avLst/>
-          </a:prstGeom>
-          <a:solidFill>
-            <a:srgbClr val="FFFFFF"/>
-          </a:solidFill>
-          <a:ln>
-            <a:solidFill>
-              <a:srgbClr val="333333"/>
-            </a:solidFill>
-          </a:ln>
-        </p:spPr>
-        <p:style>
-          <a:lnRef idx="1">
-            <a:schemeClr val="accent1"/>
-          </a:lnRef>
-          <a:fillRef idx="3">
-            <a:schemeClr val="accent1"/>
-          </a:fillRef>
-          <a:effectRef idx="2">
-            <a:schemeClr val="accent1"/>
-          </a:effectRef>
-          <a:fontRef idx="minor">
-            <a:schemeClr val="lt1"/>
-          </a:fontRef>
-        </p:style>
-        <p:txBody>
-          <a:bodyPr rtlCol="0" anchor="ctr"/>
+          <p:cNvPr id="19" name="TextBox 18"/>
+          <p:cNvSpPr txBox="1"/>
+          <p:nvPr/>
+        </p:nvSpPr>
+        <p:spPr>
+          <a:xfrm>
+            <a:off x="594360" y="5289804"/>
+            <a:ext cx="438912" cy="438912"/>
+          </a:xfrm>
+          <a:prstGeom prst="rect">
+            <a:avLst/>
+          </a:prstGeom>
+          <a:noFill/>
+        </p:spPr>
+        <p:txBody>
+          <a:bodyPr wrap="square" anchor="ctr"/>
           <a:lstStyle/>
           <a:p>
             <a:pPr algn="ctr"/>
-          </a:p>
-        </p:txBody>
-      </p:sp>
-      <p:sp>
-        <p:nvSpPr>
-          <p:cNvPr id="15" name="Rectangle 14"/>
-          <p:cNvSpPr/>
-          <p:nvPr/>
-        </p:nvSpPr>
-        <p:spPr>
-          <a:xfrm>
-            <a:off x="640080" y="2761488"/>
-            <a:ext cx="73152" cy="274320"/>
-          </a:xfrm>
-          <a:prstGeom prst="rect">
-            <a:avLst/>
-          </a:prstGeom>
-          <a:solidFill>
-            <a:srgbClr val="269CCB"/>
-          </a:solidFill>
-          <a:ln>
-            <a:noFill/>
-          </a:ln>
-        </p:spPr>
-        <p:style>
-          <a:lnRef idx="1">
-            <a:schemeClr val="accent1"/>
-          </a:lnRef>
-          <a:fillRef idx="3">
-            <a:schemeClr val="accent1"/>
-          </a:fillRef>
-          <a:effectRef idx="2">
-            <a:schemeClr val="accent1"/>
-          </a:effectRef>
-          <a:fontRef idx="minor">
-            <a:schemeClr val="lt1"/>
-          </a:fontRef>
-        </p:style>
-        <p:txBody>
-          <a:bodyPr rtlCol="0" anchor="ctr"/>
-          <a:lstStyle/>
-          <a:p>
-            <a:pPr algn="ctr"/>
-          </a:p>
-        </p:txBody>
-      </p:sp>
-      <p:sp>
-        <p:nvSpPr>
-          <p:cNvPr id="16" name="TextBox 15"/>
+            <a:r>
+              <a:rPr sz="1600" b="1" i="0">
+                <a:solidFill>
+                  <a:srgbClr val="FFFFFF"/>
+                </a:solidFill>
+                <a:latin typeface="Calibri"/>
+              </a:rPr>
+              <a:t>4</a:t>
+            </a:r>
+          </a:p>
+        </p:txBody>
+      </p:sp>
+      <p:sp>
+        <p:nvSpPr>
+          <p:cNvPr id="20" name="TextBox 19"/>
           <p:cNvSpPr txBox="1"/>
           <p:nvPr/>
         </p:nvSpPr>
         <p:spPr>
           <a:xfrm>
-            <a:off x="1097280" y="2706624"/>
-            <a:ext cx="10362895" cy="402336"/>
+            <a:off x="1188720" y="5074920"/>
+            <a:ext cx="10271455" cy="886968"/>
           </a:xfrm>
           <a:prstGeom prst="rect">
             <a:avLst/>
@@ -5555,20 +5252,20 @@
           <a:lstStyle/>
           <a:p>
             <a:r>
-              <a:rPr sz="1500" b="0" i="0">
-                <a:solidFill>
-                  <a:srgbClr val="333333"/>
-                </a:solidFill>
-                <a:latin typeface="Calibri"/>
-              </a:rPr>
-              <a:t>□ DDL separado?</a:t>
-            </a:r>
-          </a:p>
-        </p:txBody>
-      </p:sp>
-      <p:sp>
-        <p:nvSpPr>
-          <p:cNvPr id="17" name="TextBox 16"/>
+              <a:rPr sz="1500" b="1" i="0">
+                <a:solidFill>
+                  <a:srgbClr val="095292"/>
+                </a:solidFill>
+                <a:latin typeface="Calibri"/>
+              </a:rPr>
+              <a:t>Redactar 1 pagina: politica de altas/bajas de usuarios, con la prueba negativa (SET ROLE) corrida y su mensaje de error.</a:t>
+            </a:r>
+          </a:p>
+        </p:txBody>
+      </p:sp>
+      <p:sp>
+        <p:nvSpPr>
+          <p:cNvPr id="21" name="TextBox 20"/>
           <p:cNvSpPr txBox="1"/>
           <p:nvPr/>
         </p:nvSpPr>
@@ -5742,21 +5439,154 @@
                 </a:solidFill>
                 <a:latin typeface="Calibri"/>
               </a:rPr>
-              <a:t>Criterios de exito / entregable</a:t>
-            </a:r>
-          </a:p>
-        </p:txBody>
-      </p:sp>
-      <p:sp>
-        <p:nvSpPr>
-          <p:cNvPr id="5" name="TextBox 4"/>
+              <a:t>Taller PI VetCare — pistas (checklist vacio)</a:t>
+            </a:r>
+          </a:p>
+        </p:txBody>
+      </p:sp>
+      <p:sp>
+        <p:nvSpPr>
+          <p:cNvPr id="5" name="Rounded Rectangle 4"/>
+          <p:cNvSpPr/>
+          <p:nvPr/>
+        </p:nvSpPr>
+        <p:spPr>
+          <a:xfrm>
+            <a:off x="457200" y="1261872"/>
+            <a:ext cx="11277295" cy="566928"/>
+          </a:xfrm>
+          <a:prstGeom prst="roundRect">
+            <a:avLst>
+              <a:gd name="adj" fmla="val 12000"/>
+            </a:avLst>
+          </a:prstGeom>
+          <a:solidFill>
+            <a:srgbClr val="F2F2F2"/>
+          </a:solidFill>
+          <a:ln>
+            <a:noFill/>
+          </a:ln>
+        </p:spPr>
+        <p:style>
+          <a:lnRef idx="1">
+            <a:schemeClr val="accent1"/>
+          </a:lnRef>
+          <a:fillRef idx="3">
+            <a:schemeClr val="accent1"/>
+          </a:fillRef>
+          <a:effectRef idx="2">
+            <a:schemeClr val="accent1"/>
+          </a:effectRef>
+          <a:fontRef idx="minor">
+            <a:schemeClr val="lt1"/>
+          </a:fontRef>
+        </p:style>
+        <p:txBody>
+          <a:bodyPr rtlCol="0" anchor="ctr"/>
+          <a:lstStyle/>
+          <a:p>
+            <a:pPr algn="ctr"/>
+          </a:p>
+        </p:txBody>
+      </p:sp>
+      <p:sp>
+        <p:nvSpPr>
+          <p:cNvPr id="6" name="Rectangle 5"/>
+          <p:cNvSpPr/>
+          <p:nvPr/>
+        </p:nvSpPr>
+        <p:spPr>
+          <a:xfrm>
+            <a:off x="640080" y="1408175"/>
+            <a:ext cx="274320" cy="274320"/>
+          </a:xfrm>
+          <a:prstGeom prst="rect">
+            <a:avLst/>
+          </a:prstGeom>
+          <a:solidFill>
+            <a:srgbClr val="FFFFFF"/>
+          </a:solidFill>
+          <a:ln>
+            <a:solidFill>
+              <a:srgbClr val="333333"/>
+            </a:solidFill>
+          </a:ln>
+        </p:spPr>
+        <p:style>
+          <a:lnRef idx="1">
+            <a:schemeClr val="accent1"/>
+          </a:lnRef>
+          <a:fillRef idx="3">
+            <a:schemeClr val="accent1"/>
+          </a:fillRef>
+          <a:effectRef idx="2">
+            <a:schemeClr val="accent1"/>
+          </a:effectRef>
+          <a:fontRef idx="minor">
+            <a:schemeClr val="lt1"/>
+          </a:fontRef>
+        </p:style>
+        <p:txBody>
+          <a:bodyPr rtlCol="0" anchor="ctr"/>
+          <a:lstStyle/>
+          <a:p>
+            <a:pPr algn="ctr"/>
+          </a:p>
+        </p:txBody>
+      </p:sp>
+      <p:sp>
+        <p:nvSpPr>
+          <p:cNvPr id="7" name="Rectangle 6"/>
+          <p:cNvSpPr/>
+          <p:nvPr/>
+        </p:nvSpPr>
+        <p:spPr>
+          <a:xfrm>
+            <a:off x="640080" y="1408175"/>
+            <a:ext cx="73152" cy="274320"/>
+          </a:xfrm>
+          <a:prstGeom prst="rect">
+            <a:avLst/>
+          </a:prstGeom>
+          <a:solidFill>
+            <a:srgbClr val="269CCB"/>
+          </a:solidFill>
+          <a:ln>
+            <a:noFill/>
+          </a:ln>
+        </p:spPr>
+        <p:style>
+          <a:lnRef idx="1">
+            <a:schemeClr val="accent1"/>
+          </a:lnRef>
+          <a:fillRef idx="3">
+            <a:schemeClr val="accent1"/>
+          </a:fillRef>
+          <a:effectRef idx="2">
+            <a:schemeClr val="accent1"/>
+          </a:effectRef>
+          <a:fontRef idx="minor">
+            <a:schemeClr val="lt1"/>
+          </a:fontRef>
+        </p:style>
+        <p:txBody>
+          <a:bodyPr rtlCol="0" anchor="ctr"/>
+          <a:lstStyle/>
+          <a:p>
+            <a:pPr algn="ctr"/>
+          </a:p>
+        </p:txBody>
+      </p:sp>
+      <p:sp>
+        <p:nvSpPr>
+          <p:cNvPr id="8" name="TextBox 7"/>
           <p:cNvSpPr txBox="1"/>
           <p:nvPr/>
         </p:nvSpPr>
         <p:spPr>
           <a:xfrm>
-            <a:off x="457200" y="1170432"/>
-            <a:ext cx="11277295" cy="5230368"/>
+            <a:off x="1097280" y="1353312"/>
+            <a:ext cx="10362895" cy="402336"/>
           </a:xfrm>
           <a:prstGeom prst="rect">
             <a:avLst/>
@@ -5764,115 +5594,849 @@
           <a:noFill/>
         </p:spPr>
         <p:txBody>
-          <a:bodyPr wrap="square">
-            <a:spAutoFit/>
-          </a:bodyPr>
-          <a:lstStyle/>
-          <a:p>
-            <a:pPr>
-              <a:spcAft>
-                <a:spcPts val="800"/>
-              </a:spcAft>
-            </a:pPr>
-            <a:r>
-              <a:rPr sz="1600" b="0" i="0">
+          <a:bodyPr wrap="square" anchor="ctr"/>
+          <a:lstStyle/>
+          <a:p>
+            <a:r>
+              <a:rPr sz="1500" b="0" i="0">
                 <a:solidFill>
                   <a:srgbClr val="333333"/>
                 </a:solidFill>
                 <a:latin typeface="Calibri"/>
               </a:rPr>
-              <a:t>–   </a:t>
-            </a:r>
-            <a:r>
-              <a:rPr sz="1600" b="1" i="0">
+              <a:t>□ ¿Los 4 roles con el nombre exacto, en minúscula y con «veterinario_rol»?</a:t>
+            </a:r>
+          </a:p>
+        </p:txBody>
+      </p:sp>
+      <p:sp>
+        <p:nvSpPr>
+          <p:cNvPr id="9" name="Rounded Rectangle 8"/>
+          <p:cNvSpPr/>
+          <p:nvPr/>
+        </p:nvSpPr>
+        <p:spPr>
+          <a:xfrm>
+            <a:off x="457200" y="1938528"/>
+            <a:ext cx="11277295" cy="566928"/>
+          </a:xfrm>
+          <a:prstGeom prst="roundRect">
+            <a:avLst>
+              <a:gd name="adj" fmla="val 12000"/>
+            </a:avLst>
+          </a:prstGeom>
+          <a:solidFill>
+            <a:srgbClr val="F2F2F2"/>
+          </a:solidFill>
+          <a:ln>
+            <a:noFill/>
+          </a:ln>
+        </p:spPr>
+        <p:style>
+          <a:lnRef idx="1">
+            <a:schemeClr val="accent1"/>
+          </a:lnRef>
+          <a:fillRef idx="3">
+            <a:schemeClr val="accent1"/>
+          </a:fillRef>
+          <a:effectRef idx="2">
+            <a:schemeClr val="accent1"/>
+          </a:effectRef>
+          <a:fontRef idx="minor">
+            <a:schemeClr val="lt1"/>
+          </a:fontRef>
+        </p:style>
+        <p:txBody>
+          <a:bodyPr rtlCol="0" anchor="ctr"/>
+          <a:lstStyle/>
+          <a:p>
+            <a:pPr algn="ctr"/>
+          </a:p>
+        </p:txBody>
+      </p:sp>
+      <p:sp>
+        <p:nvSpPr>
+          <p:cNvPr id="10" name="Rectangle 9"/>
+          <p:cNvSpPr/>
+          <p:nvPr/>
+        </p:nvSpPr>
+        <p:spPr>
+          <a:xfrm>
+            <a:off x="640080" y="2084832"/>
+            <a:ext cx="274320" cy="274320"/>
+          </a:xfrm>
+          <a:prstGeom prst="rect">
+            <a:avLst/>
+          </a:prstGeom>
+          <a:solidFill>
+            <a:srgbClr val="FFFFFF"/>
+          </a:solidFill>
+          <a:ln>
+            <a:solidFill>
+              <a:srgbClr val="333333"/>
+            </a:solidFill>
+          </a:ln>
+        </p:spPr>
+        <p:style>
+          <a:lnRef idx="1">
+            <a:schemeClr val="accent1"/>
+          </a:lnRef>
+          <a:fillRef idx="3">
+            <a:schemeClr val="accent1"/>
+          </a:fillRef>
+          <a:effectRef idx="2">
+            <a:schemeClr val="accent1"/>
+          </a:effectRef>
+          <a:fontRef idx="minor">
+            <a:schemeClr val="lt1"/>
+          </a:fontRef>
+        </p:style>
+        <p:txBody>
+          <a:bodyPr rtlCol="0" anchor="ctr"/>
+          <a:lstStyle/>
+          <a:p>
+            <a:pPr algn="ctr"/>
+          </a:p>
+        </p:txBody>
+      </p:sp>
+      <p:sp>
+        <p:nvSpPr>
+          <p:cNvPr id="11" name="Rectangle 10"/>
+          <p:cNvSpPr/>
+          <p:nvPr/>
+        </p:nvSpPr>
+        <p:spPr>
+          <a:xfrm>
+            <a:off x="640080" y="2084832"/>
+            <a:ext cx="73152" cy="274320"/>
+          </a:xfrm>
+          <a:prstGeom prst="rect">
+            <a:avLst/>
+          </a:prstGeom>
+          <a:solidFill>
+            <a:srgbClr val="269CCB"/>
+          </a:solidFill>
+          <a:ln>
+            <a:noFill/>
+          </a:ln>
+        </p:spPr>
+        <p:style>
+          <a:lnRef idx="1">
+            <a:schemeClr val="accent1"/>
+          </a:lnRef>
+          <a:fillRef idx="3">
+            <a:schemeClr val="accent1"/>
+          </a:fillRef>
+          <a:effectRef idx="2">
+            <a:schemeClr val="accent1"/>
+          </a:effectRef>
+          <a:fontRef idx="minor">
+            <a:schemeClr val="lt1"/>
+          </a:fontRef>
+        </p:style>
+        <p:txBody>
+          <a:bodyPr rtlCol="0" anchor="ctr"/>
+          <a:lstStyle/>
+          <a:p>
+            <a:pPr algn="ctr"/>
+          </a:p>
+        </p:txBody>
+      </p:sp>
+      <p:sp>
+        <p:nvSpPr>
+          <p:cNvPr id="12" name="TextBox 11"/>
+          <p:cNvSpPr txBox="1"/>
+          <p:nvPr/>
+        </p:nvSpPr>
+        <p:spPr>
+          <a:xfrm>
+            <a:off x="1097280" y="2029968"/>
+            <a:ext cx="10362895" cy="402336"/>
+          </a:xfrm>
+          <a:prstGeom prst="rect">
+            <a:avLst/>
+          </a:prstGeom>
+          <a:noFill/>
+        </p:spPr>
+        <p:txBody>
+          <a:bodyPr wrap="square" anchor="ctr"/>
+          <a:lstStyle/>
+          <a:p>
+            <a:r>
+              <a:rPr sz="1500" b="0" i="0">
                 <a:solidFill>
                   <a:srgbClr val="333333"/>
                 </a:solidFill>
                 <a:latin typeface="Calibri"/>
               </a:rPr>
-              <a:t>Entregable:</a:t>
-            </a:r>
-            <a:r>
-              <a:rPr sz="1600" b="0" i="0">
+              <a:t>□ ¿«recepcion» sin DELETE en ninguna tabla, y el REVOKE escrito aunque sea redundante?</a:t>
+            </a:r>
+          </a:p>
+        </p:txBody>
+      </p:sp>
+      <p:sp>
+        <p:nvSpPr>
+          <p:cNvPr id="13" name="Rounded Rectangle 12"/>
+          <p:cNvSpPr/>
+          <p:nvPr/>
+        </p:nvSpPr>
+        <p:spPr>
+          <a:xfrm>
+            <a:off x="457200" y="2615184"/>
+            <a:ext cx="11277295" cy="566928"/>
+          </a:xfrm>
+          <a:prstGeom prst="roundRect">
+            <a:avLst>
+              <a:gd name="adj" fmla="val 12000"/>
+            </a:avLst>
+          </a:prstGeom>
+          <a:solidFill>
+            <a:srgbClr val="F2F2F2"/>
+          </a:solidFill>
+          <a:ln>
+            <a:noFill/>
+          </a:ln>
+        </p:spPr>
+        <p:style>
+          <a:lnRef idx="1">
+            <a:schemeClr val="accent1"/>
+          </a:lnRef>
+          <a:fillRef idx="3">
+            <a:schemeClr val="accent1"/>
+          </a:fillRef>
+          <a:effectRef idx="2">
+            <a:schemeClr val="accent1"/>
+          </a:effectRef>
+          <a:fontRef idx="minor">
+            <a:schemeClr val="lt1"/>
+          </a:fontRef>
+        </p:style>
+        <p:txBody>
+          <a:bodyPr rtlCol="0" anchor="ctr"/>
+          <a:lstStyle/>
+          <a:p>
+            <a:pPr algn="ctr"/>
+          </a:p>
+        </p:txBody>
+      </p:sp>
+      <p:sp>
+        <p:nvSpPr>
+          <p:cNvPr id="14" name="Rectangle 13"/>
+          <p:cNvSpPr/>
+          <p:nvPr/>
+        </p:nvSpPr>
+        <p:spPr>
+          <a:xfrm>
+            <a:off x="640080" y="2761488"/>
+            <a:ext cx="274320" cy="274320"/>
+          </a:xfrm>
+          <a:prstGeom prst="rect">
+            <a:avLst/>
+          </a:prstGeom>
+          <a:solidFill>
+            <a:srgbClr val="FFFFFF"/>
+          </a:solidFill>
+          <a:ln>
+            <a:solidFill>
+              <a:srgbClr val="333333"/>
+            </a:solidFill>
+          </a:ln>
+        </p:spPr>
+        <p:style>
+          <a:lnRef idx="1">
+            <a:schemeClr val="accent1"/>
+          </a:lnRef>
+          <a:fillRef idx="3">
+            <a:schemeClr val="accent1"/>
+          </a:fillRef>
+          <a:effectRef idx="2">
+            <a:schemeClr val="accent1"/>
+          </a:effectRef>
+          <a:fontRef idx="minor">
+            <a:schemeClr val="lt1"/>
+          </a:fontRef>
+        </p:style>
+        <p:txBody>
+          <a:bodyPr rtlCol="0" anchor="ctr"/>
+          <a:lstStyle/>
+          <a:p>
+            <a:pPr algn="ctr"/>
+          </a:p>
+        </p:txBody>
+      </p:sp>
+      <p:sp>
+        <p:nvSpPr>
+          <p:cNvPr id="15" name="Rectangle 14"/>
+          <p:cNvSpPr/>
+          <p:nvPr/>
+        </p:nvSpPr>
+        <p:spPr>
+          <a:xfrm>
+            <a:off x="640080" y="2761488"/>
+            <a:ext cx="73152" cy="274320"/>
+          </a:xfrm>
+          <a:prstGeom prst="rect">
+            <a:avLst/>
+          </a:prstGeom>
+          <a:solidFill>
+            <a:srgbClr val="269CCB"/>
+          </a:solidFill>
+          <a:ln>
+            <a:noFill/>
+          </a:ln>
+        </p:spPr>
+        <p:style>
+          <a:lnRef idx="1">
+            <a:schemeClr val="accent1"/>
+          </a:lnRef>
+          <a:fillRef idx="3">
+            <a:schemeClr val="accent1"/>
+          </a:fillRef>
+          <a:effectRef idx="2">
+            <a:schemeClr val="accent1"/>
+          </a:effectRef>
+          <a:fontRef idx="minor">
+            <a:schemeClr val="lt1"/>
+          </a:fontRef>
+        </p:style>
+        <p:txBody>
+          <a:bodyPr rtlCol="0" anchor="ctr"/>
+          <a:lstStyle/>
+          <a:p>
+            <a:pPr algn="ctr"/>
+          </a:p>
+        </p:txBody>
+      </p:sp>
+      <p:sp>
+        <p:nvSpPr>
+          <p:cNvPr id="16" name="TextBox 15"/>
+          <p:cNvSpPr txBox="1"/>
+          <p:nvPr/>
+        </p:nvSpPr>
+        <p:spPr>
+          <a:xfrm>
+            <a:off x="1097280" y="2706624"/>
+            <a:ext cx="10362895" cy="402336"/>
+          </a:xfrm>
+          <a:prstGeom prst="rect">
+            <a:avLst/>
+          </a:prstGeom>
+          <a:noFill/>
+        </p:spPr>
+        <p:txBody>
+          <a:bodyPr wrap="square" anchor="ctr"/>
+          <a:lstStyle/>
+          <a:p>
+            <a:r>
+              <a:rPr sz="1500" b="0" i="0">
                 <a:solidFill>
                   <a:srgbClr val="333333"/>
                 </a:solidFill>
                 <a:latin typeface="Calibri"/>
               </a:rPr>
-              <a:t> Documento Roles_VetCare + script GRANT/REVOKE ejecutado en ExamLab</a:t>
-            </a:r>
-          </a:p>
-          <a:p>
-            <a:pPr>
-              <a:spcAft>
-                <a:spcPts val="800"/>
-              </a:spcAft>
-            </a:pPr>
-            <a:r>
-              <a:rPr sz="1600" b="0" i="0">
+              <a:t>□ ¿«auditor» solo con SELECT?</a:t>
+            </a:r>
+          </a:p>
+        </p:txBody>
+      </p:sp>
+      <p:sp>
+        <p:nvSpPr>
+          <p:cNvPr id="17" name="Rounded Rectangle 16"/>
+          <p:cNvSpPr/>
+          <p:nvPr/>
+        </p:nvSpPr>
+        <p:spPr>
+          <a:xfrm>
+            <a:off x="457200" y="3291840"/>
+            <a:ext cx="11277295" cy="566928"/>
+          </a:xfrm>
+          <a:prstGeom prst="roundRect">
+            <a:avLst>
+              <a:gd name="adj" fmla="val 12000"/>
+            </a:avLst>
+          </a:prstGeom>
+          <a:solidFill>
+            <a:srgbClr val="F2F2F2"/>
+          </a:solidFill>
+          <a:ln>
+            <a:noFill/>
+          </a:ln>
+        </p:spPr>
+        <p:style>
+          <a:lnRef idx="1">
+            <a:schemeClr val="accent1"/>
+          </a:lnRef>
+          <a:fillRef idx="3">
+            <a:schemeClr val="accent1"/>
+          </a:fillRef>
+          <a:effectRef idx="2">
+            <a:schemeClr val="accent1"/>
+          </a:effectRef>
+          <a:fontRef idx="minor">
+            <a:schemeClr val="lt1"/>
+          </a:fontRef>
+        </p:style>
+        <p:txBody>
+          <a:bodyPr rtlCol="0" anchor="ctr"/>
+          <a:lstStyle/>
+          <a:p>
+            <a:pPr algn="ctr"/>
+          </a:p>
+        </p:txBody>
+      </p:sp>
+      <p:sp>
+        <p:nvSpPr>
+          <p:cNvPr id="18" name="Rectangle 17"/>
+          <p:cNvSpPr/>
+          <p:nvPr/>
+        </p:nvSpPr>
+        <p:spPr>
+          <a:xfrm>
+            <a:off x="640080" y="3438144"/>
+            <a:ext cx="274320" cy="274320"/>
+          </a:xfrm>
+          <a:prstGeom prst="rect">
+            <a:avLst/>
+          </a:prstGeom>
+          <a:solidFill>
+            <a:srgbClr val="FFFFFF"/>
+          </a:solidFill>
+          <a:ln>
+            <a:solidFill>
+              <a:srgbClr val="333333"/>
+            </a:solidFill>
+          </a:ln>
+        </p:spPr>
+        <p:style>
+          <a:lnRef idx="1">
+            <a:schemeClr val="accent1"/>
+          </a:lnRef>
+          <a:fillRef idx="3">
+            <a:schemeClr val="accent1"/>
+          </a:fillRef>
+          <a:effectRef idx="2">
+            <a:schemeClr val="accent1"/>
+          </a:effectRef>
+          <a:fontRef idx="minor">
+            <a:schemeClr val="lt1"/>
+          </a:fontRef>
+        </p:style>
+        <p:txBody>
+          <a:bodyPr rtlCol="0" anchor="ctr"/>
+          <a:lstStyle/>
+          <a:p>
+            <a:pPr algn="ctr"/>
+          </a:p>
+        </p:txBody>
+      </p:sp>
+      <p:sp>
+        <p:nvSpPr>
+          <p:cNvPr id="19" name="Rectangle 18"/>
+          <p:cNvSpPr/>
+          <p:nvPr/>
+        </p:nvSpPr>
+        <p:spPr>
+          <a:xfrm>
+            <a:off x="640080" y="3438144"/>
+            <a:ext cx="73152" cy="274320"/>
+          </a:xfrm>
+          <a:prstGeom prst="rect">
+            <a:avLst/>
+          </a:prstGeom>
+          <a:solidFill>
+            <a:srgbClr val="269CCB"/>
+          </a:solidFill>
+          <a:ln>
+            <a:noFill/>
+          </a:ln>
+        </p:spPr>
+        <p:style>
+          <a:lnRef idx="1">
+            <a:schemeClr val="accent1"/>
+          </a:lnRef>
+          <a:fillRef idx="3">
+            <a:schemeClr val="accent1"/>
+          </a:fillRef>
+          <a:effectRef idx="2">
+            <a:schemeClr val="accent1"/>
+          </a:effectRef>
+          <a:fontRef idx="minor">
+            <a:schemeClr val="lt1"/>
+          </a:fontRef>
+        </p:style>
+        <p:txBody>
+          <a:bodyPr rtlCol="0" anchor="ctr"/>
+          <a:lstStyle/>
+          <a:p>
+            <a:pPr algn="ctr"/>
+          </a:p>
+        </p:txBody>
+      </p:sp>
+      <p:sp>
+        <p:nvSpPr>
+          <p:cNvPr id="20" name="TextBox 19"/>
+          <p:cNvSpPr txBox="1"/>
+          <p:nvPr/>
+        </p:nvSpPr>
+        <p:spPr>
+          <a:xfrm>
+            <a:off x="1097280" y="3383280"/>
+            <a:ext cx="10362895" cy="402336"/>
+          </a:xfrm>
+          <a:prstGeom prst="rect">
+            <a:avLst/>
+          </a:prstGeom>
+          <a:noFill/>
+        </p:spPr>
+        <p:txBody>
+          <a:bodyPr wrap="square" anchor="ctr"/>
+          <a:lstStyle/>
+          <a:p>
+            <a:r>
+              <a:rPr sz="1500" b="0" i="0">
                 <a:solidFill>
                   <a:srgbClr val="333333"/>
                 </a:solidFill>
                 <a:latin typeface="Calibri"/>
               </a:rPr>
-              <a:t>–   Evidencia en playground (enlace) o archivo SQL/PNG propio.</a:t>
-            </a:r>
-          </a:p>
-          <a:p>
-            <a:pPr>
-              <a:spcAft>
-                <a:spcPts val="800"/>
-              </a:spcAft>
-            </a:pPr>
-            <a:r>
-              <a:rPr sz="1600" b="0" i="0">
+              <a:t>□ ¿La vista deja fuera el email, y «column_privileges» devuelve exactamente 2 filas?</a:t>
+            </a:r>
+          </a:p>
+        </p:txBody>
+      </p:sp>
+      <p:sp>
+        <p:nvSpPr>
+          <p:cNvPr id="21" name="Rounded Rectangle 20"/>
+          <p:cNvSpPr/>
+          <p:nvPr/>
+        </p:nvSpPr>
+        <p:spPr>
+          <a:xfrm>
+            <a:off x="457200" y="3968496"/>
+            <a:ext cx="11277295" cy="566928"/>
+          </a:xfrm>
+          <a:prstGeom prst="roundRect">
+            <a:avLst>
+              <a:gd name="adj" fmla="val 12000"/>
+            </a:avLst>
+          </a:prstGeom>
+          <a:solidFill>
+            <a:srgbClr val="F2F2F2"/>
+          </a:solidFill>
+          <a:ln>
+            <a:noFill/>
+          </a:ln>
+        </p:spPr>
+        <p:style>
+          <a:lnRef idx="1">
+            <a:schemeClr val="accent1"/>
+          </a:lnRef>
+          <a:fillRef idx="3">
+            <a:schemeClr val="accent1"/>
+          </a:fillRef>
+          <a:effectRef idx="2">
+            <a:schemeClr val="accent1"/>
+          </a:effectRef>
+          <a:fontRef idx="minor">
+            <a:schemeClr val="lt1"/>
+          </a:fontRef>
+        </p:style>
+        <p:txBody>
+          <a:bodyPr rtlCol="0" anchor="ctr"/>
+          <a:lstStyle/>
+          <a:p>
+            <a:pPr algn="ctr"/>
+          </a:p>
+        </p:txBody>
+      </p:sp>
+      <p:sp>
+        <p:nvSpPr>
+          <p:cNvPr id="22" name="Rectangle 21"/>
+          <p:cNvSpPr/>
+          <p:nvPr/>
+        </p:nvSpPr>
+        <p:spPr>
+          <a:xfrm>
+            <a:off x="640080" y="4114800"/>
+            <a:ext cx="274320" cy="274320"/>
+          </a:xfrm>
+          <a:prstGeom prst="rect">
+            <a:avLst/>
+          </a:prstGeom>
+          <a:solidFill>
+            <a:srgbClr val="FFFFFF"/>
+          </a:solidFill>
+          <a:ln>
+            <a:solidFill>
+              <a:srgbClr val="333333"/>
+            </a:solidFill>
+          </a:ln>
+        </p:spPr>
+        <p:style>
+          <a:lnRef idx="1">
+            <a:schemeClr val="accent1"/>
+          </a:lnRef>
+          <a:fillRef idx="3">
+            <a:schemeClr val="accent1"/>
+          </a:fillRef>
+          <a:effectRef idx="2">
+            <a:schemeClr val="accent1"/>
+          </a:effectRef>
+          <a:fontRef idx="minor">
+            <a:schemeClr val="lt1"/>
+          </a:fontRef>
+        </p:style>
+        <p:txBody>
+          <a:bodyPr rtlCol="0" anchor="ctr"/>
+          <a:lstStyle/>
+          <a:p>
+            <a:pPr algn="ctr"/>
+          </a:p>
+        </p:txBody>
+      </p:sp>
+      <p:sp>
+        <p:nvSpPr>
+          <p:cNvPr id="23" name="Rectangle 22"/>
+          <p:cNvSpPr/>
+          <p:nvPr/>
+        </p:nvSpPr>
+        <p:spPr>
+          <a:xfrm>
+            <a:off x="640080" y="4114800"/>
+            <a:ext cx="73152" cy="274320"/>
+          </a:xfrm>
+          <a:prstGeom prst="rect">
+            <a:avLst/>
+          </a:prstGeom>
+          <a:solidFill>
+            <a:srgbClr val="269CCB"/>
+          </a:solidFill>
+          <a:ln>
+            <a:noFill/>
+          </a:ln>
+        </p:spPr>
+        <p:style>
+          <a:lnRef idx="1">
+            <a:schemeClr val="accent1"/>
+          </a:lnRef>
+          <a:fillRef idx="3">
+            <a:schemeClr val="accent1"/>
+          </a:fillRef>
+          <a:effectRef idx="2">
+            <a:schemeClr val="accent1"/>
+          </a:effectRef>
+          <a:fontRef idx="minor">
+            <a:schemeClr val="lt1"/>
+          </a:fontRef>
+        </p:style>
+        <p:txBody>
+          <a:bodyPr rtlCol="0" anchor="ctr"/>
+          <a:lstStyle/>
+          <a:p>
+            <a:pPr algn="ctr"/>
+          </a:p>
+        </p:txBody>
+      </p:sp>
+      <p:sp>
+        <p:nvSpPr>
+          <p:cNvPr id="24" name="TextBox 23"/>
+          <p:cNvSpPr txBox="1"/>
+          <p:nvPr/>
+        </p:nvSpPr>
+        <p:spPr>
+          <a:xfrm>
+            <a:off x="1097280" y="4059936"/>
+            <a:ext cx="10362895" cy="402336"/>
+          </a:xfrm>
+          <a:prstGeom prst="rect">
+            <a:avLst/>
+          </a:prstGeom>
+          <a:noFill/>
+        </p:spPr>
+        <p:txBody>
+          <a:bodyPr wrap="square" anchor="ctr"/>
+          <a:lstStyle/>
+          <a:p>
+            <a:r>
+              <a:rPr sz="1500" b="0" i="0">
                 <a:solidFill>
                   <a:srgbClr val="333333"/>
                 </a:solidFill>
                 <a:latin typeface="Calibri"/>
               </a:rPr>
-              <a:t>–   Actualizar checklist PI (que criterio de rubrica avanzo).</a:t>
-            </a:r>
-          </a:p>
-          <a:p>
-            <a:pPr>
-              <a:spcAft>
-                <a:spcPts val="800"/>
-              </a:spcAft>
-            </a:pPr>
-            <a:r>
-              <a:rPr sz="1600" b="0" i="0">
+              <a:t>□ ¿La matriz tiene las 10 filas llenas y los «sp_» con E, no con S ni I?</a:t>
+            </a:r>
+          </a:p>
+        </p:txBody>
+      </p:sp>
+      <p:sp>
+        <p:nvSpPr>
+          <p:cNvPr id="25" name="Rounded Rectangle 24"/>
+          <p:cNvSpPr/>
+          <p:nvPr/>
+        </p:nvSpPr>
+        <p:spPr>
+          <a:xfrm>
+            <a:off x="457200" y="4645152"/>
+            <a:ext cx="11277295" cy="566928"/>
+          </a:xfrm>
+          <a:prstGeom prst="roundRect">
+            <a:avLst>
+              <a:gd name="adj" fmla="val 12000"/>
+            </a:avLst>
+          </a:prstGeom>
+          <a:solidFill>
+            <a:srgbClr val="F2F2F2"/>
+          </a:solidFill>
+          <a:ln>
+            <a:noFill/>
+          </a:ln>
+        </p:spPr>
+        <p:style>
+          <a:lnRef idx="1">
+            <a:schemeClr val="accent1"/>
+          </a:lnRef>
+          <a:fillRef idx="3">
+            <a:schemeClr val="accent1"/>
+          </a:fillRef>
+          <a:effectRef idx="2">
+            <a:schemeClr val="accent1"/>
+          </a:effectRef>
+          <a:fontRef idx="minor">
+            <a:schemeClr val="lt1"/>
+          </a:fontRef>
+        </p:style>
+        <p:txBody>
+          <a:bodyPr rtlCol="0" anchor="ctr"/>
+          <a:lstStyle/>
+          <a:p>
+            <a:pPr algn="ctr"/>
+          </a:p>
+        </p:txBody>
+      </p:sp>
+      <p:sp>
+        <p:nvSpPr>
+          <p:cNvPr id="26" name="Rectangle 25"/>
+          <p:cNvSpPr/>
+          <p:nvPr/>
+        </p:nvSpPr>
+        <p:spPr>
+          <a:xfrm>
+            <a:off x="640080" y="4791456"/>
+            <a:ext cx="274320" cy="274320"/>
+          </a:xfrm>
+          <a:prstGeom prst="rect">
+            <a:avLst/>
+          </a:prstGeom>
+          <a:solidFill>
+            <a:srgbClr val="FFFFFF"/>
+          </a:solidFill>
+          <a:ln>
+            <a:solidFill>
+              <a:srgbClr val="333333"/>
+            </a:solidFill>
+          </a:ln>
+        </p:spPr>
+        <p:style>
+          <a:lnRef idx="1">
+            <a:schemeClr val="accent1"/>
+          </a:lnRef>
+          <a:fillRef idx="3">
+            <a:schemeClr val="accent1"/>
+          </a:fillRef>
+          <a:effectRef idx="2">
+            <a:schemeClr val="accent1"/>
+          </a:effectRef>
+          <a:fontRef idx="minor">
+            <a:schemeClr val="lt1"/>
+          </a:fontRef>
+        </p:style>
+        <p:txBody>
+          <a:bodyPr rtlCol="0" anchor="ctr"/>
+          <a:lstStyle/>
+          <a:p>
+            <a:pPr algn="ctr"/>
+          </a:p>
+        </p:txBody>
+      </p:sp>
+      <p:sp>
+        <p:nvSpPr>
+          <p:cNvPr id="27" name="Rectangle 26"/>
+          <p:cNvSpPr/>
+          <p:nvPr/>
+        </p:nvSpPr>
+        <p:spPr>
+          <a:xfrm>
+            <a:off x="640080" y="4791456"/>
+            <a:ext cx="73152" cy="274320"/>
+          </a:xfrm>
+          <a:prstGeom prst="rect">
+            <a:avLst/>
+          </a:prstGeom>
+          <a:solidFill>
+            <a:srgbClr val="269CCB"/>
+          </a:solidFill>
+          <a:ln>
+            <a:noFill/>
+          </a:ln>
+        </p:spPr>
+        <p:style>
+          <a:lnRef idx="1">
+            <a:schemeClr val="accent1"/>
+          </a:lnRef>
+          <a:fillRef idx="3">
+            <a:schemeClr val="accent1"/>
+          </a:fillRef>
+          <a:effectRef idx="2">
+            <a:schemeClr val="accent1"/>
+          </a:effectRef>
+          <a:fontRef idx="minor">
+            <a:schemeClr val="lt1"/>
+          </a:fontRef>
+        </p:style>
+        <p:txBody>
+          <a:bodyPr rtlCol="0" anchor="ctr"/>
+          <a:lstStyle/>
+          <a:p>
+            <a:pPr algn="ctr"/>
+          </a:p>
+        </p:txBody>
+      </p:sp>
+      <p:sp>
+        <p:nvSpPr>
+          <p:cNvPr id="28" name="TextBox 27"/>
+          <p:cNvSpPr txBox="1"/>
+          <p:nvPr/>
+        </p:nvSpPr>
+        <p:spPr>
+          <a:xfrm>
+            <a:off x="1097280" y="4736592"/>
+            <a:ext cx="10362895" cy="402336"/>
+          </a:xfrm>
+          <a:prstGeom prst="rect">
+            <a:avLst/>
+          </a:prstGeom>
+          <a:noFill/>
+        </p:spPr>
+        <p:txBody>
+          <a:bodyPr wrap="square" anchor="ctr"/>
+          <a:lstStyle/>
+          <a:p>
+            <a:r>
+              <a:rPr sz="1500" b="0" i="0">
                 <a:solidFill>
                   <a:srgbClr val="333333"/>
                 </a:solidFill>
                 <a:latin typeface="Calibri"/>
               </a:rPr>
-              <a:t>–   </a:t>
-            </a:r>
-            <a:r>
-              <a:rPr sz="1600" b="1" i="0">
-                <a:solidFill>
-                  <a:srgbClr val="333333"/>
-                </a:solidFill>
-                <a:latin typeface="Calibri"/>
-              </a:rPr>
-              <a:t>Entrega en ExamLab</a:t>
-            </a:r>
-            <a:r>
-              <a:rPr sz="1600" b="0" i="0">
-                <a:solidFill>
-                  <a:srgbClr val="333333"/>
-                </a:solidFill>
-                <a:latin typeface="Calibri"/>
-              </a:rPr>
-              <a:t> (https://uniaj.examlab.workers.dev/) — domingo 23:59 cuando aplique taller.</a:t>
-            </a:r>
-          </a:p>
-        </p:txBody>
-      </p:sp>
-      <p:sp>
-        <p:nvSpPr>
-          <p:cNvPr id="6" name="TextBox 5"/>
+              <a:t>□ ¿La política dice quién aprueba y en cuánto tiempo, y trae la prueba negativa con «SET ROLE»?</a:t>
+            </a:r>
+          </a:p>
+        </p:txBody>
+      </p:sp>
+      <p:sp>
+        <p:nvSpPr>
+          <p:cNvPr id="29" name="TextBox 28"/>
           <p:cNvSpPr txBox="1"/>
           <p:nvPr/>
         </p:nvSpPr>
@@ -6046,109 +6610,21 @@
                 </a:solidFill>
                 <a:latin typeface="Calibri"/>
               </a:rPr>
-              <a:t>Para el PI esta semana</a:t>
-            </a:r>
-          </a:p>
-        </p:txBody>
-      </p:sp>
-      <p:sp>
-        <p:nvSpPr>
-          <p:cNvPr id="5" name="Rounded Rectangle 4"/>
-          <p:cNvSpPr/>
-          <p:nvPr/>
-        </p:nvSpPr>
-        <p:spPr>
-          <a:xfrm>
-            <a:off x="457200" y="1261872"/>
-            <a:ext cx="11277295" cy="1051560"/>
-          </a:xfrm>
-          <a:prstGeom prst="roundRect">
-            <a:avLst>
-              <a:gd name="adj" fmla="val 12000"/>
-            </a:avLst>
-          </a:prstGeom>
-          <a:solidFill>
-            <a:srgbClr val="E8F4FA"/>
-          </a:solidFill>
-          <a:ln>
-            <a:noFill/>
-          </a:ln>
-        </p:spPr>
-        <p:style>
-          <a:lnRef idx="1">
-            <a:schemeClr val="accent1"/>
-          </a:lnRef>
-          <a:fillRef idx="3">
-            <a:schemeClr val="accent1"/>
-          </a:fillRef>
-          <a:effectRef idx="2">
-            <a:schemeClr val="accent1"/>
-          </a:effectRef>
-          <a:fontRef idx="minor">
-            <a:schemeClr val="lt1"/>
-          </a:fontRef>
-        </p:style>
-        <p:txBody>
-          <a:bodyPr rtlCol="0" anchor="ctr"/>
-          <a:lstStyle/>
-          <a:p>
-            <a:pPr algn="ctr"/>
-          </a:p>
-        </p:txBody>
-      </p:sp>
-      <p:sp>
-        <p:nvSpPr>
-          <p:cNvPr id="6" name="Rectangle 5"/>
-          <p:cNvSpPr/>
-          <p:nvPr/>
-        </p:nvSpPr>
-        <p:spPr>
-          <a:xfrm>
-            <a:off x="457200" y="1261872"/>
-            <a:ext cx="128016" cy="1051560"/>
-          </a:xfrm>
-          <a:prstGeom prst="rect">
-            <a:avLst/>
-          </a:prstGeom>
-          <a:solidFill>
-            <a:srgbClr val="269CCB"/>
-          </a:solidFill>
-          <a:ln>
-            <a:noFill/>
-          </a:ln>
-        </p:spPr>
-        <p:style>
-          <a:lnRef idx="1">
-            <a:schemeClr val="accent1"/>
-          </a:lnRef>
-          <a:fillRef idx="3">
-            <a:schemeClr val="accent1"/>
-          </a:fillRef>
-          <a:effectRef idx="2">
-            <a:schemeClr val="accent1"/>
-          </a:effectRef>
-          <a:fontRef idx="minor">
-            <a:schemeClr val="lt1"/>
-          </a:fontRef>
-        </p:style>
-        <p:txBody>
-          <a:bodyPr rtlCol="0" anchor="ctr"/>
-          <a:lstStyle/>
-          <a:p>
-            <a:pPr algn="ctr"/>
-          </a:p>
-        </p:txBody>
-      </p:sp>
-      <p:sp>
-        <p:nvSpPr>
-          <p:cNvPr id="7" name="TextBox 6"/>
+              <a:t>Criterios de exito / entregable</a:t>
+            </a:r>
+          </a:p>
+        </p:txBody>
+      </p:sp>
+      <p:sp>
+        <p:nvSpPr>
+          <p:cNvPr id="5" name="TextBox 4"/>
           <p:cNvSpPr txBox="1"/>
           <p:nvPr/>
         </p:nvSpPr>
         <p:spPr>
           <a:xfrm>
-            <a:off x="777240" y="1399031"/>
-            <a:ext cx="10774375" cy="822959"/>
+            <a:off x="457200" y="1170432"/>
+            <a:ext cx="11277295" cy="5230368"/>
           </a:xfrm>
           <a:prstGeom prst="rect">
             <a:avLst/>
@@ -6161,313 +6637,110 @@
           </a:bodyPr>
           <a:lstStyle/>
           <a:p>
-            <a:r>
-              <a:rPr sz="1200" b="1" i="0">
-                <a:solidFill>
-                  <a:srgbClr val="269CCB"/>
-                </a:solidFill>
-                <a:latin typeface="Calibri"/>
-              </a:rPr>
-              <a:t>Info</a:t>
-            </a:r>
-          </a:p>
-          <a:p>
             <a:pPr>
-              <a:spcBef>
-                <a:spcPts val="400"/>
-              </a:spcBef>
+              <a:spcAft>
+                <a:spcPts val="800"/>
+              </a:spcAft>
             </a:pPr>
             <a:r>
-              <a:rPr sz="1400" b="0" i="0">
+              <a:rPr sz="1600" b="0" i="0">
                 <a:solidFill>
                   <a:srgbClr val="333333"/>
                 </a:solidFill>
                 <a:latin typeface="Calibri"/>
               </a:rPr>
-              <a:t>Hito: Plan de roles/privilegios de VetCare</a:t>
-            </a:r>
-          </a:p>
-        </p:txBody>
-      </p:sp>
-      <p:sp>
-        <p:nvSpPr>
-          <p:cNvPr id="8" name="Rounded Rectangle 7"/>
-          <p:cNvSpPr/>
-          <p:nvPr/>
-        </p:nvSpPr>
-        <p:spPr>
-          <a:xfrm>
-            <a:off x="457200" y="2478024"/>
-            <a:ext cx="11277295" cy="1051560"/>
-          </a:xfrm>
-          <a:prstGeom prst="roundRect">
-            <a:avLst>
-              <a:gd name="adj" fmla="val 12000"/>
-            </a:avLst>
-          </a:prstGeom>
-          <a:solidFill>
-            <a:srgbClr val="FFF8E1"/>
-          </a:solidFill>
-          <a:ln>
-            <a:noFill/>
-          </a:ln>
-        </p:spPr>
-        <p:style>
-          <a:lnRef idx="1">
-            <a:schemeClr val="accent1"/>
-          </a:lnRef>
-          <a:fillRef idx="3">
-            <a:schemeClr val="accent1"/>
-          </a:fillRef>
-          <a:effectRef idx="2">
-            <a:schemeClr val="accent1"/>
-          </a:effectRef>
-          <a:fontRef idx="minor">
-            <a:schemeClr val="lt1"/>
-          </a:fontRef>
-        </p:style>
-        <p:txBody>
-          <a:bodyPr rtlCol="0" anchor="ctr"/>
-          <a:lstStyle/>
-          <a:p>
-            <a:pPr algn="ctr"/>
-          </a:p>
-        </p:txBody>
-      </p:sp>
-      <p:sp>
-        <p:nvSpPr>
-          <p:cNvPr id="9" name="Rectangle 8"/>
-          <p:cNvSpPr/>
-          <p:nvPr/>
-        </p:nvSpPr>
-        <p:spPr>
-          <a:xfrm>
-            <a:off x="457200" y="2478024"/>
-            <a:ext cx="128016" cy="1051560"/>
-          </a:xfrm>
-          <a:prstGeom prst="rect">
-            <a:avLst/>
-          </a:prstGeom>
-          <a:solidFill>
-            <a:srgbClr val="FFD000"/>
-          </a:solidFill>
-          <a:ln>
-            <a:noFill/>
-          </a:ln>
-        </p:spPr>
-        <p:style>
-          <a:lnRef idx="1">
-            <a:schemeClr val="accent1"/>
-          </a:lnRef>
-          <a:fillRef idx="3">
-            <a:schemeClr val="accent1"/>
-          </a:fillRef>
-          <a:effectRef idx="2">
-            <a:schemeClr val="accent1"/>
-          </a:effectRef>
-          <a:fontRef idx="minor">
-            <a:schemeClr val="lt1"/>
-          </a:fontRef>
-        </p:style>
-        <p:txBody>
-          <a:bodyPr rtlCol="0" anchor="ctr"/>
-          <a:lstStyle/>
-          <a:p>
-            <a:pPr algn="ctr"/>
-          </a:p>
-        </p:txBody>
-      </p:sp>
-      <p:sp>
-        <p:nvSpPr>
-          <p:cNvPr id="10" name="TextBox 9"/>
-          <p:cNvSpPr txBox="1"/>
-          <p:nvPr/>
-        </p:nvSpPr>
-        <p:spPr>
-          <a:xfrm>
-            <a:off x="777240" y="2615184"/>
-            <a:ext cx="10774375" cy="822959"/>
-          </a:xfrm>
-          <a:prstGeom prst="rect">
-            <a:avLst/>
-          </a:prstGeom>
-          <a:noFill/>
-        </p:spPr>
-        <p:txBody>
-          <a:bodyPr wrap="square">
-            <a:spAutoFit/>
-          </a:bodyPr>
-          <a:lstStyle/>
-          <a:p>
-            <a:r>
-              <a:rPr sz="1200" b="1" i="0">
-                <a:solidFill>
-                  <a:srgbClr val="FFD000"/>
-                </a:solidFill>
-                <a:latin typeface="Calibri"/>
-              </a:rPr>
-              <a:t>Aclaración</a:t>
+              <a:t>–   </a:t>
+            </a:r>
+            <a:r>
+              <a:rPr sz="1600" b="1" i="0">
+                <a:solidFill>
+                  <a:srgbClr val="333333"/>
+                </a:solidFill>
+                <a:latin typeface="Calibri"/>
+              </a:rPr>
+              <a:t>Entregable:</a:t>
+            </a:r>
+            <a:r>
+              <a:rPr sz="1600" b="0" i="0">
+                <a:solidFill>
+                  <a:srgbClr val="333333"/>
+                </a:solidFill>
+                <a:latin typeface="Calibri"/>
+              </a:rPr>
+              <a:t> Documento Roles_VetCare + script GRANT/REVOKE ejecutado en ExamLab</a:t>
             </a:r>
           </a:p>
           <a:p>
             <a:pPr>
-              <a:spcBef>
-                <a:spcPts val="400"/>
-              </a:spcBef>
+              <a:spcAft>
+                <a:spcPts val="800"/>
+              </a:spcAft>
             </a:pPr>
             <a:r>
-              <a:rPr sz="1400" b="0" i="0">
+              <a:rPr sz="1600" b="0" i="0">
                 <a:solidFill>
                   <a:srgbClr val="333333"/>
                 </a:solidFill>
                 <a:latin typeface="Calibri"/>
               </a:rPr>
-              <a:t>Enunciado completo: Clases/Proyecto Integrador/ (VetCare DB).</a:t>
-            </a:r>
-          </a:p>
-        </p:txBody>
-      </p:sp>
-      <p:sp>
-        <p:nvSpPr>
-          <p:cNvPr id="11" name="Rounded Rectangle 10"/>
-          <p:cNvSpPr/>
-          <p:nvPr/>
-        </p:nvSpPr>
-        <p:spPr>
-          <a:xfrm>
-            <a:off x="457200" y="3694176"/>
-            <a:ext cx="11277295" cy="1051560"/>
-          </a:xfrm>
-          <a:prstGeom prst="roundRect">
-            <a:avLst>
-              <a:gd name="adj" fmla="val 12000"/>
-            </a:avLst>
-          </a:prstGeom>
-          <a:solidFill>
-            <a:srgbClr val="FBE4E4"/>
-          </a:solidFill>
-          <a:ln>
-            <a:noFill/>
-          </a:ln>
-        </p:spPr>
-        <p:style>
-          <a:lnRef idx="1">
-            <a:schemeClr val="accent1"/>
-          </a:lnRef>
-          <a:fillRef idx="3">
-            <a:schemeClr val="accent1"/>
-          </a:fillRef>
-          <a:effectRef idx="2">
-            <a:schemeClr val="accent1"/>
-          </a:effectRef>
-          <a:fontRef idx="minor">
-            <a:schemeClr val="lt1"/>
-          </a:fontRef>
-        </p:style>
-        <p:txBody>
-          <a:bodyPr rtlCol="0" anchor="ctr"/>
-          <a:lstStyle/>
-          <a:p>
-            <a:pPr algn="ctr"/>
-          </a:p>
-        </p:txBody>
-      </p:sp>
-      <p:sp>
-        <p:nvSpPr>
-          <p:cNvPr id="12" name="Rectangle 11"/>
-          <p:cNvSpPr/>
-          <p:nvPr/>
-        </p:nvSpPr>
-        <p:spPr>
-          <a:xfrm>
-            <a:off x="457200" y="3694176"/>
-            <a:ext cx="128016" cy="1051560"/>
-          </a:xfrm>
-          <a:prstGeom prst="rect">
-            <a:avLst/>
-          </a:prstGeom>
-          <a:solidFill>
-            <a:srgbClr val="A02030"/>
-          </a:solidFill>
-          <a:ln>
-            <a:noFill/>
-          </a:ln>
-        </p:spPr>
-        <p:style>
-          <a:lnRef idx="1">
-            <a:schemeClr val="accent1"/>
-          </a:lnRef>
-          <a:fillRef idx="3">
-            <a:schemeClr val="accent1"/>
-          </a:fillRef>
-          <a:effectRef idx="2">
-            <a:schemeClr val="accent1"/>
-          </a:effectRef>
-          <a:fontRef idx="minor">
-            <a:schemeClr val="lt1"/>
-          </a:fontRef>
-        </p:style>
-        <p:txBody>
-          <a:bodyPr rtlCol="0" anchor="ctr"/>
-          <a:lstStyle/>
-          <a:p>
-            <a:pPr algn="ctr"/>
-          </a:p>
-        </p:txBody>
-      </p:sp>
-      <p:sp>
-        <p:nvSpPr>
-          <p:cNvPr id="13" name="TextBox 12"/>
-          <p:cNvSpPr txBox="1"/>
-          <p:nvPr/>
-        </p:nvSpPr>
-        <p:spPr>
-          <a:xfrm>
-            <a:off x="777240" y="3831336"/>
-            <a:ext cx="10774375" cy="822959"/>
-          </a:xfrm>
-          <a:prstGeom prst="rect">
-            <a:avLst/>
-          </a:prstGeom>
-          <a:noFill/>
-        </p:spPr>
-        <p:txBody>
-          <a:bodyPr wrap="square">
-            <a:spAutoFit/>
-          </a:bodyPr>
-          <a:lstStyle/>
-          <a:p>
-            <a:r>
-              <a:rPr sz="1200" b="1" i="0">
-                <a:solidFill>
-                  <a:srgbClr val="A02030"/>
-                </a:solidFill>
-                <a:latin typeface="Calibri"/>
-              </a:rPr>
-              <a:t>Atención</a:t>
+              <a:t>–   Evidencia en playground (enlace) o archivo SQL/PNG propio.</a:t>
             </a:r>
           </a:p>
           <a:p>
             <a:pPr>
-              <a:spcBef>
-                <a:spcPts val="400"/>
-              </a:spcBef>
+              <a:spcAft>
+                <a:spcPts val="800"/>
+              </a:spcAft>
             </a:pPr>
             <a:r>
-              <a:rPr sz="1400" b="0" i="0">
+              <a:rPr sz="1600" b="0" i="0">
                 <a:solidFill>
                   <a:srgbClr val="333333"/>
                 </a:solidFill>
                 <a:latin typeface="Calibri"/>
               </a:rPr>
-              <a:t>Taller de la semana en ExamLab (https://uniaj.examlab.workers.dev/): domingo 23:59 (regla del Acuerdo) cuando aplique.</a:t>
-            </a:r>
-          </a:p>
-        </p:txBody>
-      </p:sp>
-      <p:sp>
-        <p:nvSpPr>
-          <p:cNvPr id="14" name="TextBox 13"/>
+              <a:t>–   Actualizar checklist PI (que criterio de rubrica avanzo).</a:t>
+            </a:r>
+          </a:p>
+          <a:p>
+            <a:pPr>
+              <a:spcAft>
+                <a:spcPts val="800"/>
+              </a:spcAft>
+            </a:pPr>
+            <a:r>
+              <a:rPr sz="1600" b="0" i="0">
+                <a:solidFill>
+                  <a:srgbClr val="333333"/>
+                </a:solidFill>
+                <a:latin typeface="Calibri"/>
+              </a:rPr>
+              <a:t>–   </a:t>
+            </a:r>
+            <a:r>
+              <a:rPr sz="1600" b="1" i="0">
+                <a:solidFill>
+                  <a:srgbClr val="333333"/>
+                </a:solidFill>
+                <a:latin typeface="Calibri"/>
+              </a:rPr>
+              <a:t>Entrega en ExamLab</a:t>
+            </a:r>
+            <a:r>
+              <a:rPr sz="1600" b="0" i="0">
+                <a:solidFill>
+                  <a:srgbClr val="333333"/>
+                </a:solidFill>
+                <a:latin typeface="Calibri"/>
+              </a:rPr>
+              <a:t> (https://uniaj.examlab.workers.dev/) — domingo 23:59 cuando aplique taller.</a:t>
+            </a:r>
+          </a:p>
+        </p:txBody>
+      </p:sp>
+      <p:sp>
+        <p:nvSpPr>
+          <p:cNvPr id="6" name="TextBox 5"/>
           <p:cNvSpPr txBox="1"/>
           <p:nvPr/>
         </p:nvSpPr>
@@ -6535,6 +6808,601 @@
         <p:spPr>
           <a:xfrm>
             <a:off x="0" y="0"/>
+            <a:ext cx="12191695" cy="960120"/>
+          </a:xfrm>
+          <a:prstGeom prst="rect">
+            <a:avLst/>
+          </a:prstGeom>
+          <a:solidFill>
+            <a:srgbClr val="095292"/>
+          </a:solidFill>
+          <a:ln>
+            <a:noFill/>
+          </a:ln>
+        </p:spPr>
+        <p:style>
+          <a:lnRef idx="1">
+            <a:schemeClr val="accent1"/>
+          </a:lnRef>
+          <a:fillRef idx="3">
+            <a:schemeClr val="accent1"/>
+          </a:fillRef>
+          <a:effectRef idx="2">
+            <a:schemeClr val="accent1"/>
+          </a:effectRef>
+          <a:fontRef idx="minor">
+            <a:schemeClr val="lt1"/>
+          </a:fontRef>
+        </p:style>
+        <p:txBody>
+          <a:bodyPr rtlCol="0" anchor="ctr"/>
+          <a:lstStyle/>
+          <a:p>
+            <a:pPr algn="ctr"/>
+          </a:p>
+        </p:txBody>
+      </p:sp>
+      <p:sp>
+        <p:nvSpPr>
+          <p:cNvPr id="3" name="Rectangle 2"/>
+          <p:cNvSpPr/>
+          <p:nvPr/>
+        </p:nvSpPr>
+        <p:spPr>
+          <a:xfrm>
+            <a:off x="0" y="960120"/>
+            <a:ext cx="12191695" cy="41148"/>
+          </a:xfrm>
+          <a:prstGeom prst="rect">
+            <a:avLst/>
+          </a:prstGeom>
+          <a:solidFill>
+            <a:srgbClr val="FFD000"/>
+          </a:solidFill>
+          <a:ln>
+            <a:noFill/>
+          </a:ln>
+        </p:spPr>
+        <p:style>
+          <a:lnRef idx="1">
+            <a:schemeClr val="accent1"/>
+          </a:lnRef>
+          <a:fillRef idx="3">
+            <a:schemeClr val="accent1"/>
+          </a:fillRef>
+          <a:effectRef idx="2">
+            <a:schemeClr val="accent1"/>
+          </a:effectRef>
+          <a:fontRef idx="minor">
+            <a:schemeClr val="lt1"/>
+          </a:fontRef>
+        </p:style>
+        <p:txBody>
+          <a:bodyPr rtlCol="0" anchor="ctr"/>
+          <a:lstStyle/>
+          <a:p>
+            <a:pPr algn="ctr"/>
+          </a:p>
+        </p:txBody>
+      </p:sp>
+      <p:sp>
+        <p:nvSpPr>
+          <p:cNvPr id="4" name="TextBox 3"/>
+          <p:cNvSpPr txBox="1"/>
+          <p:nvPr/>
+        </p:nvSpPr>
+        <p:spPr>
+          <a:xfrm>
+            <a:off x="457200" y="164592"/>
+            <a:ext cx="11277295" cy="502920"/>
+          </a:xfrm>
+          <a:prstGeom prst="rect">
+            <a:avLst/>
+          </a:prstGeom>
+          <a:noFill/>
+        </p:spPr>
+        <p:txBody>
+          <a:bodyPr wrap="square">
+            <a:spAutoFit/>
+          </a:bodyPr>
+          <a:lstStyle/>
+          <a:p>
+            <a:r>
+              <a:rPr sz="2600" b="1" i="0">
+                <a:solidFill>
+                  <a:srgbClr val="FFFFFF"/>
+                </a:solidFill>
+                <a:latin typeface="Calibri"/>
+              </a:rPr>
+              <a:t>Para el PI esta semana</a:t>
+            </a:r>
+          </a:p>
+        </p:txBody>
+      </p:sp>
+      <p:sp>
+        <p:nvSpPr>
+          <p:cNvPr id="5" name="Rounded Rectangle 4"/>
+          <p:cNvSpPr/>
+          <p:nvPr/>
+        </p:nvSpPr>
+        <p:spPr>
+          <a:xfrm>
+            <a:off x="457200" y="1261872"/>
+            <a:ext cx="11277295" cy="1051560"/>
+          </a:xfrm>
+          <a:prstGeom prst="roundRect">
+            <a:avLst>
+              <a:gd name="adj" fmla="val 12000"/>
+            </a:avLst>
+          </a:prstGeom>
+          <a:solidFill>
+            <a:srgbClr val="E8F4FA"/>
+          </a:solidFill>
+          <a:ln>
+            <a:noFill/>
+          </a:ln>
+        </p:spPr>
+        <p:style>
+          <a:lnRef idx="1">
+            <a:schemeClr val="accent1"/>
+          </a:lnRef>
+          <a:fillRef idx="3">
+            <a:schemeClr val="accent1"/>
+          </a:fillRef>
+          <a:effectRef idx="2">
+            <a:schemeClr val="accent1"/>
+          </a:effectRef>
+          <a:fontRef idx="minor">
+            <a:schemeClr val="lt1"/>
+          </a:fontRef>
+        </p:style>
+        <p:txBody>
+          <a:bodyPr rtlCol="0" anchor="ctr"/>
+          <a:lstStyle/>
+          <a:p>
+            <a:pPr algn="ctr"/>
+          </a:p>
+        </p:txBody>
+      </p:sp>
+      <p:sp>
+        <p:nvSpPr>
+          <p:cNvPr id="6" name="Rectangle 5"/>
+          <p:cNvSpPr/>
+          <p:nvPr/>
+        </p:nvSpPr>
+        <p:spPr>
+          <a:xfrm>
+            <a:off x="457200" y="1261872"/>
+            <a:ext cx="128016" cy="1051560"/>
+          </a:xfrm>
+          <a:prstGeom prst="rect">
+            <a:avLst/>
+          </a:prstGeom>
+          <a:solidFill>
+            <a:srgbClr val="269CCB"/>
+          </a:solidFill>
+          <a:ln>
+            <a:noFill/>
+          </a:ln>
+        </p:spPr>
+        <p:style>
+          <a:lnRef idx="1">
+            <a:schemeClr val="accent1"/>
+          </a:lnRef>
+          <a:fillRef idx="3">
+            <a:schemeClr val="accent1"/>
+          </a:fillRef>
+          <a:effectRef idx="2">
+            <a:schemeClr val="accent1"/>
+          </a:effectRef>
+          <a:fontRef idx="minor">
+            <a:schemeClr val="lt1"/>
+          </a:fontRef>
+        </p:style>
+        <p:txBody>
+          <a:bodyPr rtlCol="0" anchor="ctr"/>
+          <a:lstStyle/>
+          <a:p>
+            <a:pPr algn="ctr"/>
+          </a:p>
+        </p:txBody>
+      </p:sp>
+      <p:sp>
+        <p:nvSpPr>
+          <p:cNvPr id="7" name="TextBox 6"/>
+          <p:cNvSpPr txBox="1"/>
+          <p:nvPr/>
+        </p:nvSpPr>
+        <p:spPr>
+          <a:xfrm>
+            <a:off x="777240" y="1399031"/>
+            <a:ext cx="10774375" cy="822959"/>
+          </a:xfrm>
+          <a:prstGeom prst="rect">
+            <a:avLst/>
+          </a:prstGeom>
+          <a:noFill/>
+        </p:spPr>
+        <p:txBody>
+          <a:bodyPr wrap="square">
+            <a:spAutoFit/>
+          </a:bodyPr>
+          <a:lstStyle/>
+          <a:p>
+            <a:r>
+              <a:rPr sz="1200" b="1" i="0">
+                <a:solidFill>
+                  <a:srgbClr val="269CCB"/>
+                </a:solidFill>
+                <a:latin typeface="Calibri"/>
+              </a:rPr>
+              <a:t>Info</a:t>
+            </a:r>
+          </a:p>
+          <a:p>
+            <a:pPr>
+              <a:spcBef>
+                <a:spcPts val="400"/>
+              </a:spcBef>
+            </a:pPr>
+            <a:r>
+              <a:rPr sz="1400" b="0" i="0">
+                <a:solidFill>
+                  <a:srgbClr val="333333"/>
+                </a:solidFill>
+                <a:latin typeface="Calibri"/>
+              </a:rPr>
+              <a:t>Hito: Plan de roles/privilegios de VetCare</a:t>
+            </a:r>
+          </a:p>
+        </p:txBody>
+      </p:sp>
+      <p:sp>
+        <p:nvSpPr>
+          <p:cNvPr id="8" name="Rounded Rectangle 7"/>
+          <p:cNvSpPr/>
+          <p:nvPr/>
+        </p:nvSpPr>
+        <p:spPr>
+          <a:xfrm>
+            <a:off x="457200" y="2478024"/>
+            <a:ext cx="11277295" cy="1051560"/>
+          </a:xfrm>
+          <a:prstGeom prst="roundRect">
+            <a:avLst>
+              <a:gd name="adj" fmla="val 12000"/>
+            </a:avLst>
+          </a:prstGeom>
+          <a:solidFill>
+            <a:srgbClr val="FFF8E1"/>
+          </a:solidFill>
+          <a:ln>
+            <a:noFill/>
+          </a:ln>
+        </p:spPr>
+        <p:style>
+          <a:lnRef idx="1">
+            <a:schemeClr val="accent1"/>
+          </a:lnRef>
+          <a:fillRef idx="3">
+            <a:schemeClr val="accent1"/>
+          </a:fillRef>
+          <a:effectRef idx="2">
+            <a:schemeClr val="accent1"/>
+          </a:effectRef>
+          <a:fontRef idx="minor">
+            <a:schemeClr val="lt1"/>
+          </a:fontRef>
+        </p:style>
+        <p:txBody>
+          <a:bodyPr rtlCol="0" anchor="ctr"/>
+          <a:lstStyle/>
+          <a:p>
+            <a:pPr algn="ctr"/>
+          </a:p>
+        </p:txBody>
+      </p:sp>
+      <p:sp>
+        <p:nvSpPr>
+          <p:cNvPr id="9" name="Rectangle 8"/>
+          <p:cNvSpPr/>
+          <p:nvPr/>
+        </p:nvSpPr>
+        <p:spPr>
+          <a:xfrm>
+            <a:off x="457200" y="2478024"/>
+            <a:ext cx="128016" cy="1051560"/>
+          </a:xfrm>
+          <a:prstGeom prst="rect">
+            <a:avLst/>
+          </a:prstGeom>
+          <a:solidFill>
+            <a:srgbClr val="FFD000"/>
+          </a:solidFill>
+          <a:ln>
+            <a:noFill/>
+          </a:ln>
+        </p:spPr>
+        <p:style>
+          <a:lnRef idx="1">
+            <a:schemeClr val="accent1"/>
+          </a:lnRef>
+          <a:fillRef idx="3">
+            <a:schemeClr val="accent1"/>
+          </a:fillRef>
+          <a:effectRef idx="2">
+            <a:schemeClr val="accent1"/>
+          </a:effectRef>
+          <a:fontRef idx="minor">
+            <a:schemeClr val="lt1"/>
+          </a:fontRef>
+        </p:style>
+        <p:txBody>
+          <a:bodyPr rtlCol="0" anchor="ctr"/>
+          <a:lstStyle/>
+          <a:p>
+            <a:pPr algn="ctr"/>
+          </a:p>
+        </p:txBody>
+      </p:sp>
+      <p:sp>
+        <p:nvSpPr>
+          <p:cNvPr id="10" name="TextBox 9"/>
+          <p:cNvSpPr txBox="1"/>
+          <p:nvPr/>
+        </p:nvSpPr>
+        <p:spPr>
+          <a:xfrm>
+            <a:off x="777240" y="2615184"/>
+            <a:ext cx="10774375" cy="822959"/>
+          </a:xfrm>
+          <a:prstGeom prst="rect">
+            <a:avLst/>
+          </a:prstGeom>
+          <a:noFill/>
+        </p:spPr>
+        <p:txBody>
+          <a:bodyPr wrap="square">
+            <a:spAutoFit/>
+          </a:bodyPr>
+          <a:lstStyle/>
+          <a:p>
+            <a:r>
+              <a:rPr sz="1200" b="1" i="0">
+                <a:solidFill>
+                  <a:srgbClr val="FFD000"/>
+                </a:solidFill>
+                <a:latin typeface="Calibri"/>
+              </a:rPr>
+              <a:t>Aclaración</a:t>
+            </a:r>
+          </a:p>
+          <a:p>
+            <a:pPr>
+              <a:spcBef>
+                <a:spcPts val="400"/>
+              </a:spcBef>
+            </a:pPr>
+            <a:r>
+              <a:rPr sz="1400" b="0" i="0">
+                <a:solidFill>
+                  <a:srgbClr val="333333"/>
+                </a:solidFill>
+                <a:latin typeface="Calibri"/>
+              </a:rPr>
+              <a:t>Enunciado completo: Clases/Proyecto Integrador/ (VetCare DB).</a:t>
+            </a:r>
+          </a:p>
+        </p:txBody>
+      </p:sp>
+      <p:sp>
+        <p:nvSpPr>
+          <p:cNvPr id="11" name="Rounded Rectangle 10"/>
+          <p:cNvSpPr/>
+          <p:nvPr/>
+        </p:nvSpPr>
+        <p:spPr>
+          <a:xfrm>
+            <a:off x="457200" y="3694176"/>
+            <a:ext cx="11277295" cy="1051560"/>
+          </a:xfrm>
+          <a:prstGeom prst="roundRect">
+            <a:avLst>
+              <a:gd name="adj" fmla="val 12000"/>
+            </a:avLst>
+          </a:prstGeom>
+          <a:solidFill>
+            <a:srgbClr val="FBE4E4"/>
+          </a:solidFill>
+          <a:ln>
+            <a:noFill/>
+          </a:ln>
+        </p:spPr>
+        <p:style>
+          <a:lnRef idx="1">
+            <a:schemeClr val="accent1"/>
+          </a:lnRef>
+          <a:fillRef idx="3">
+            <a:schemeClr val="accent1"/>
+          </a:fillRef>
+          <a:effectRef idx="2">
+            <a:schemeClr val="accent1"/>
+          </a:effectRef>
+          <a:fontRef idx="minor">
+            <a:schemeClr val="lt1"/>
+          </a:fontRef>
+        </p:style>
+        <p:txBody>
+          <a:bodyPr rtlCol="0" anchor="ctr"/>
+          <a:lstStyle/>
+          <a:p>
+            <a:pPr algn="ctr"/>
+          </a:p>
+        </p:txBody>
+      </p:sp>
+      <p:sp>
+        <p:nvSpPr>
+          <p:cNvPr id="12" name="Rectangle 11"/>
+          <p:cNvSpPr/>
+          <p:nvPr/>
+        </p:nvSpPr>
+        <p:spPr>
+          <a:xfrm>
+            <a:off x="457200" y="3694176"/>
+            <a:ext cx="128016" cy="1051560"/>
+          </a:xfrm>
+          <a:prstGeom prst="rect">
+            <a:avLst/>
+          </a:prstGeom>
+          <a:solidFill>
+            <a:srgbClr val="A02030"/>
+          </a:solidFill>
+          <a:ln>
+            <a:noFill/>
+          </a:ln>
+        </p:spPr>
+        <p:style>
+          <a:lnRef idx="1">
+            <a:schemeClr val="accent1"/>
+          </a:lnRef>
+          <a:fillRef idx="3">
+            <a:schemeClr val="accent1"/>
+          </a:fillRef>
+          <a:effectRef idx="2">
+            <a:schemeClr val="accent1"/>
+          </a:effectRef>
+          <a:fontRef idx="minor">
+            <a:schemeClr val="lt1"/>
+          </a:fontRef>
+        </p:style>
+        <p:txBody>
+          <a:bodyPr rtlCol="0" anchor="ctr"/>
+          <a:lstStyle/>
+          <a:p>
+            <a:pPr algn="ctr"/>
+          </a:p>
+        </p:txBody>
+      </p:sp>
+      <p:sp>
+        <p:nvSpPr>
+          <p:cNvPr id="13" name="TextBox 12"/>
+          <p:cNvSpPr txBox="1"/>
+          <p:nvPr/>
+        </p:nvSpPr>
+        <p:spPr>
+          <a:xfrm>
+            <a:off x="777240" y="3831336"/>
+            <a:ext cx="10774375" cy="822959"/>
+          </a:xfrm>
+          <a:prstGeom prst="rect">
+            <a:avLst/>
+          </a:prstGeom>
+          <a:noFill/>
+        </p:spPr>
+        <p:txBody>
+          <a:bodyPr wrap="square">
+            <a:spAutoFit/>
+          </a:bodyPr>
+          <a:lstStyle/>
+          <a:p>
+            <a:r>
+              <a:rPr sz="1200" b="1" i="0">
+                <a:solidFill>
+                  <a:srgbClr val="A02030"/>
+                </a:solidFill>
+                <a:latin typeface="Calibri"/>
+              </a:rPr>
+              <a:t>Atención</a:t>
+            </a:r>
+          </a:p>
+          <a:p>
+            <a:pPr>
+              <a:spcBef>
+                <a:spcPts val="400"/>
+              </a:spcBef>
+            </a:pPr>
+            <a:r>
+              <a:rPr sz="1400" b="0" i="0">
+                <a:solidFill>
+                  <a:srgbClr val="333333"/>
+                </a:solidFill>
+                <a:latin typeface="Calibri"/>
+              </a:rPr>
+              <a:t>Taller de la semana en ExamLab (https://uniaj.examlab.workers.dev/): domingo 23:59 (regla del Acuerdo) cuando aplique.</a:t>
+            </a:r>
+          </a:p>
+        </p:txBody>
+      </p:sp>
+      <p:sp>
+        <p:nvSpPr>
+          <p:cNvPr id="14" name="TextBox 13"/>
+          <p:cNvSpPr txBox="1"/>
+          <p:nvPr/>
+        </p:nvSpPr>
+        <p:spPr>
+          <a:xfrm>
+            <a:off x="11185855" y="6473952"/>
+            <a:ext cx="640080" cy="274320"/>
+          </a:xfrm>
+          <a:prstGeom prst="rect">
+            <a:avLst/>
+          </a:prstGeom>
+          <a:noFill/>
+        </p:spPr>
+        <p:txBody>
+          <a:bodyPr wrap="square">
+            <a:spAutoFit/>
+          </a:bodyPr>
+          <a:lstStyle/>
+          <a:p>
+            <a:pPr algn="r"/>
+            <a:r>
+              <a:rPr sz="1100" b="0" i="0">
+                <a:solidFill>
+                  <a:srgbClr val="666666"/>
+                </a:solidFill>
+                <a:latin typeface="Calibri"/>
+              </a:rPr>
+              <a:t>16</a:t>
+            </a:r>
+          </a:p>
+        </p:txBody>
+      </p:sp>
+    </p:spTree>
+  </p:cSld>
+  <p:clrMapOvr>
+    <a:masterClrMapping/>
+  </p:clrMapOvr>
+</p:sld>
+</file>
+
+<file path=ppt/slides/slide17.xml><?xml version="1.0" encoding="utf-8"?>
+<p:sld xmlns:a="http://schemas.openxmlformats.org/drawingml/2006/main" xmlns:p="http://schemas.openxmlformats.org/presentationml/2006/main" xmlns:r="http://schemas.openxmlformats.org/officeDocument/2006/relationships">
+  <p:cSld>
+    <p:bg>
+      <p:bgPr>
+        <a:solidFill>
+          <a:srgbClr val="FFFFFF"/>
+        </a:solidFill>
+        <a:effectLst/>
+      </p:bgPr>
+    </p:bg>
+    <p:spTree>
+      <p:nvGrpSpPr>
+        <p:cNvPr id="1" name=""/>
+        <p:cNvGrpSpPr/>
+        <p:nvPr/>
+      </p:nvGrpSpPr>
+      <p:grpSpPr/>
+      <p:sp>
+        <p:nvSpPr>
+          <p:cNvPr id="2" name="Rectangle 1"/>
+          <p:cNvSpPr/>
+          <p:nvPr/>
+        </p:nvSpPr>
+        <p:spPr>
+          <a:xfrm>
+            <a:off x="0" y="0"/>
             <a:ext cx="12191695" cy="164592"/>
           </a:xfrm>
           <a:prstGeom prst="rect">
@@ -8541,7 +9409,7 @@
                 </a:solidFill>
                 <a:latin typeface="Calibri"/>
               </a:rPr>
-              <a:t>–   Un solo usuario `admin` que todos comparten</a:t>
+              <a:t>–   Un solo usuario «admin» que todos comparten</a:t>
             </a:r>
           </a:p>
           <a:p>
@@ -9407,7 +10275,7 @@
         <p:spPr>
           <a:xfrm>
             <a:off x="0" y="0"/>
-            <a:ext cx="12191695" cy="960120"/>
+            <a:ext cx="12191695" cy="1170432"/>
           </a:xfrm>
           <a:prstGeom prst="rect">
             <a:avLst/>
@@ -9449,7 +10317,7 @@
         </p:nvSpPr>
         <p:spPr>
           <a:xfrm>
-            <a:off x="0" y="960120"/>
+            <a:off x="0" y="1170432"/>
             <a:ext cx="12191695" cy="41148"/>
           </a:xfrm>
           <a:prstGeom prst="rect">
@@ -9493,7 +10361,7 @@
         <p:spPr>
           <a:xfrm>
             <a:off x="457200" y="164592"/>
-            <a:ext cx="11277295" cy="502920"/>
+            <a:ext cx="11277295" cy="384048"/>
           </a:xfrm>
           <a:prstGeom prst="rect">
             <a:avLst/>
@@ -9513,7 +10381,7 @@
                 </a:solidFill>
                 <a:latin typeface="Calibri"/>
               </a:rPr>
-              <a:t>Demo del dia</a:t>
+              <a:t>Ciclo de vida de una cuenta: alta, cambio, baja, revision</a:t>
             </a:r>
           </a:p>
         </p:txBody>
@@ -9526,8 +10394,42 @@
         </p:nvSpPr>
         <p:spPr>
           <a:xfrm>
-            <a:off x="457200" y="1170432"/>
-            <a:ext cx="11277295" cy="5230368"/>
+            <a:off x="457200" y="566928"/>
+            <a:ext cx="11277295" cy="411480"/>
+          </a:xfrm>
+          <a:prstGeom prst="rect">
+            <a:avLst/>
+          </a:prstGeom>
+          <a:noFill/>
+        </p:spPr>
+        <p:txBody>
+          <a:bodyPr wrap="square">
+            <a:spAutoFit/>
+          </a:bodyPr>
+          <a:lstStyle/>
+          <a:p>
+            <a:r>
+              <a:rPr sz="1400" b="0" i="0">
+                <a:solidFill>
+                  <a:srgbClr val="B8D8EE"/>
+                </a:solidFill>
+                <a:latin typeface="Calibri"/>
+              </a:rPr>
+              <a:t>Cada flecha del ciclo es un GRANT o un REVOKE. La politica es lo que le pone responsable y plazo a cada uno: son las 5 secciones del entregable</a:t>
+            </a:r>
+          </a:p>
+        </p:txBody>
+      </p:sp>
+      <p:sp>
+        <p:nvSpPr>
+          <p:cNvPr id="6" name="TextBox 5"/>
+          <p:cNvSpPr txBox="1"/>
+          <p:nvPr/>
+        </p:nvSpPr>
+        <p:spPr>
+          <a:xfrm>
+            <a:off x="457200" y="1380744"/>
+            <a:ext cx="11277295" cy="5020056"/>
           </a:xfrm>
           <a:prstGeom prst="rect">
             <a:avLst/>
@@ -9546,7 +10448,7 @@
               </a:spcAft>
             </a:pPr>
             <a:r>
-              <a:rPr sz="1600" b="0" i="0">
+              <a:rPr sz="1300" b="0" i="0">
                 <a:solidFill>
                   <a:srgbClr val="333333"/>
                 </a:solidFill>
@@ -9555,22 +10457,40 @@
               <a:t>–   </a:t>
             </a:r>
             <a:r>
-              <a:rPr sz="1600" b="1" i="0">
+              <a:rPr sz="1300" b="1" i="0">
                 <a:solidFill>
                   <a:srgbClr val="333333"/>
                 </a:solidFill>
                 <a:latin typeface="Calibri"/>
               </a:rPr>
-              <a:t>Herramienta:</a:t>
-            </a:r>
-            <a:r>
-              <a:rPr sz="1600" b="0" i="0">
+              <a:t>1. Alta.</a:t>
+            </a:r>
+            <a:r>
+              <a:rPr sz="1300" b="0" i="0">
                 <a:solidFill>
                   <a:srgbClr val="333333"/>
                 </a:solidFill>
                 <a:latin typeface="Calibri"/>
               </a:rPr>
-              <a:t> ExamLab (PostgreSQL) + Google Docs</a:t>
+              <a:t> Quien solicita y quien aprueba; la cuenta nace con </a:t>
+            </a:r>
+            <a:r>
+              <a:rPr sz="1300" b="1" i="0">
+                <a:solidFill>
+                  <a:srgbClr val="333333"/>
+                </a:solidFill>
+                <a:latin typeface="Calibri"/>
+              </a:rPr>
+              <a:t>un solo rol</a:t>
+            </a:r>
+            <a:r>
+              <a:rPr sz="1300" b="0" i="0">
+                <a:solidFill>
+                  <a:srgbClr val="333333"/>
+                </a:solidFill>
+                <a:latin typeface="Calibri"/>
+              </a:rPr>
+              <a:t> y con credencial temporal que caduca en el primer ingreso.</a:t>
             </a:r>
           </a:p>
           <a:p>
@@ -9580,7 +10500,7 @@
               </a:spcAft>
             </a:pPr>
             <a:r>
-              <a:rPr sz="1600" b="0" i="0">
+              <a:rPr sz="1300" b="0" i="0">
                 <a:solidFill>
                   <a:srgbClr val="333333"/>
                 </a:solidFill>
@@ -9589,22 +10509,58 @@
               <a:t>–   </a:t>
             </a:r>
             <a:r>
-              <a:rPr sz="1600" b="1" i="0">
+              <a:rPr sz="1300" b="1" i="0">
                 <a:solidFill>
                   <a:srgbClr val="333333"/>
                 </a:solidFill>
                 <a:latin typeface="Calibri"/>
               </a:rPr>
-              <a:t>Demo:</a:t>
-            </a:r>
-            <a:r>
-              <a:rPr sz="1600" b="0" i="0">
+              <a:t>2. Cambio de rol.</a:t>
+            </a:r>
+            <a:r>
+              <a:rPr sz="1300" b="0" i="0">
                 <a:solidFill>
                   <a:srgbClr val="333333"/>
                 </a:solidFill>
                 <a:latin typeface="Calibri"/>
               </a:rPr>
-              <a:t> Los 4 roles de VetCare con CREATE ROLE/GRANT/REVOKE en ExamLab, verificados con information_schema.role_table_grants.</a:t>
+              <a:t> «GRANT» del nuevo y </a:t>
+            </a:r>
+            <a:r>
+              <a:rPr sz="1300" b="1" i="0">
+                <a:solidFill>
+                  <a:srgbClr val="333333"/>
+                </a:solidFill>
+                <a:latin typeface="Calibri"/>
+              </a:rPr>
+              <a:t>«REVOKE» del anterior</a:t>
+            </a:r>
+            <a:r>
+              <a:rPr sz="1300" b="0" i="0">
+                <a:solidFill>
+                  <a:srgbClr val="333333"/>
+                </a:solidFill>
+                <a:latin typeface="Calibri"/>
+              </a:rPr>
+              <a:t>: los permisos </a:t>
+            </a:r>
+            <a:r>
+              <a:rPr sz="1300" b="1" i="0">
+                <a:solidFill>
+                  <a:srgbClr val="333333"/>
+                </a:solidFill>
+                <a:latin typeface="Calibri"/>
+              </a:rPr>
+              <a:t>no se acumulan</a:t>
+            </a:r>
+            <a:r>
+              <a:rPr sz="1300" b="0" i="0">
+                <a:solidFill>
+                  <a:srgbClr val="333333"/>
+                </a:solidFill>
+                <a:latin typeface="Calibri"/>
+              </a:rPr>
+              <a:t>. Quien pasa de recepcion a auditoria y conserva los dos termina auditando lo que el mismo modifica.</a:t>
             </a:r>
           </a:p>
           <a:p>
@@ -9614,13 +10570,67 @@
               </a:spcAft>
             </a:pPr>
             <a:r>
-              <a:rPr sz="1600" b="0" i="0">
+              <a:rPr sz="1300" b="0" i="0">
                 <a:solidFill>
                   <a:srgbClr val="333333"/>
                 </a:solidFill>
                 <a:latin typeface="Calibri"/>
               </a:rPr>
-              <a:t>–   Sigan el mismo dominio VetCare (no inventen otro caso).</a:t>
+              <a:t>–   </a:t>
+            </a:r>
+            <a:r>
+              <a:rPr sz="1300" b="1" i="0">
+                <a:solidFill>
+                  <a:srgbClr val="333333"/>
+                </a:solidFill>
+                <a:latin typeface="Calibri"/>
+              </a:rPr>
+              <a:t>3. Baja: el mismo dia.</a:t>
+            </a:r>
+            <a:r>
+              <a:rPr sz="1300" b="0" i="0">
+                <a:solidFill>
+                  <a:srgbClr val="333333"/>
+                </a:solidFill>
+                <a:latin typeface="Calibri"/>
+              </a:rPr>
+              <a:t> Revocar los roles, dejar la cuenta sin login y </a:t>
+            </a:r>
+            <a:r>
+              <a:rPr sz="1300" b="1" i="0">
+                <a:solidFill>
+                  <a:srgbClr val="333333"/>
+                </a:solidFill>
+                <a:latin typeface="Calibri"/>
+              </a:rPr>
+              <a:t>reasignar los objetos antes de borrar el rol</a:t>
+            </a:r>
+            <a:r>
+              <a:rPr sz="1300" b="0" i="0">
+                <a:solidFill>
+                  <a:srgbClr val="333333"/>
+                </a:solidFill>
+                <a:latin typeface="Calibri"/>
+              </a:rPr>
+              <a:t> («REASSIGN OWNED BY ... TO admin_bd»): PostgreSQL no deja hacer «DROP ROLE» de un rol que todavia posee objetos. Lo que esto evita es la </a:t>
+            </a:r>
+            <a:r>
+              <a:rPr sz="1300" b="1" i="0">
+                <a:solidFill>
+                  <a:srgbClr val="333333"/>
+                </a:solidFill>
+                <a:latin typeface="Calibri"/>
+              </a:rPr>
+              <a:t>cuenta huerfana</a:t>
+            </a:r>
+            <a:r>
+              <a:rPr sz="1300" b="0" i="0">
+                <a:solidFill>
+                  <a:srgbClr val="333333"/>
+                </a:solidFill>
+                <a:latin typeface="Calibri"/>
+              </a:rPr>
+              <a:t>.</a:t>
             </a:r>
           </a:p>
           <a:p>
@@ -9630,20 +10640,126 @@
               </a:spcAft>
             </a:pPr>
             <a:r>
-              <a:rPr sz="1600" b="0" i="0">
+              <a:rPr sz="1300" b="0" i="0">
                 <a:solidFill>
                   <a:srgbClr val="333333"/>
                 </a:solidFill>
                 <a:latin typeface="Calibri"/>
               </a:rPr>
-              <a:t>–   Al final de la demo: dejar enlace/script compartible al grupo.</a:t>
-            </a:r>
-          </a:p>
-        </p:txBody>
-      </p:sp>
-      <p:sp>
-        <p:nvSpPr>
-          <p:cNvPr id="6" name="TextBox 5"/>
+              <a:t>–   </a:t>
+            </a:r>
+            <a:r>
+              <a:rPr sz="1300" b="1" i="0">
+                <a:solidFill>
+                  <a:srgbClr val="333333"/>
+                </a:solidFill>
+                <a:latin typeface="Calibri"/>
+              </a:rPr>
+              <a:t>4. Revision periodica.</a:t>
+            </a:r>
+            <a:r>
+              <a:rPr sz="1300" b="0" i="0">
+                <a:solidFill>
+                  <a:srgbClr val="333333"/>
+                </a:solidFill>
+                <a:latin typeface="Calibri"/>
+              </a:rPr>
+              <a:t> Cada 3 a 6 meses se audita la matriz con «information_schema.role_table_grants», y </a:t>
+            </a:r>
+            <a:r>
+              <a:rPr sz="1300" b="1" i="0">
+                <a:solidFill>
+                  <a:srgbClr val="333333"/>
+                </a:solidFill>
+                <a:latin typeface="Calibri"/>
+              </a:rPr>
+              <a:t>alguien firma</a:t>
+            </a:r>
+            <a:r>
+              <a:rPr sz="1300" b="0" i="0">
+                <a:solidFill>
+                  <a:srgbClr val="333333"/>
+                </a:solidFill>
+                <a:latin typeface="Calibri"/>
+              </a:rPr>
+              <a:t> la evidencia. Sin cuentas compartidas: si tres personas entran como «recepcion1», la auditoria no puede decir quien cancelo la cita.</a:t>
+            </a:r>
+          </a:p>
+          <a:p>
+            <a:pPr>
+              <a:spcAft>
+                <a:spcPts val="800"/>
+              </a:spcAft>
+            </a:pPr>
+            <a:r>
+              <a:rPr sz="1300" b="0" i="0">
+                <a:solidFill>
+                  <a:srgbClr val="333333"/>
+                </a:solidFill>
+                <a:latin typeface="Calibri"/>
+              </a:rPr>
+              <a:t>–   </a:t>
+            </a:r>
+            <a:r>
+              <a:rPr sz="1300" b="1" i="0">
+                <a:solidFill>
+                  <a:srgbClr val="333333"/>
+                </a:solidFill>
+                <a:latin typeface="Calibri"/>
+              </a:rPr>
+              <a:t>5. Probar que el permiso NO esta.</a:t>
+            </a:r>
+            <a:r>
+              <a:rPr sz="1300" b="0" i="0">
+                <a:solidFill>
+                  <a:srgbClr val="333333"/>
+                </a:solidFill>
+                <a:latin typeface="Calibri"/>
+              </a:rPr>
+              <a:t> No hace falta otra conexion (aqui hay un solo usuario con login): «SET ROLE recepcion;» cambia el rol efectivo, y ahi «DELETE FROM cita ...» debe responder </a:t>
+            </a:r>
+            <a:r>
+              <a:rPr sz="1300" b="1" i="0">
+                <a:solidFill>
+                  <a:srgbClr val="333333"/>
+                </a:solidFill>
+                <a:latin typeface="Calibri"/>
+              </a:rPr>
+              <a:t>permission denied</a:t>
+            </a:r>
+            <a:r>
+              <a:rPr sz="1300" b="0" i="0">
+                <a:solidFill>
+                  <a:srgbClr val="333333"/>
+                </a:solidFill>
+                <a:latin typeface="Calibri"/>
+              </a:rPr>
+              <a:t>. Se cierra con «RESET ROLE;». Si el entorno no deja cambiar de rol, se documenta el intento: eso es una </a:t>
+            </a:r>
+            <a:r>
+              <a:rPr sz="1300" b="1" i="0">
+                <a:solidFill>
+                  <a:srgbClr val="333333"/>
+                </a:solidFill>
+                <a:latin typeface="Calibri"/>
+              </a:rPr>
+              <a:t>brecha de verificacion</a:t>
+            </a:r>
+            <a:r>
+              <a:rPr sz="1300" b="0" i="0">
+                <a:solidFill>
+                  <a:srgbClr val="333333"/>
+                </a:solidFill>
+                <a:latin typeface="Calibri"/>
+              </a:rPr>
+              <a:t> del entregable.</a:t>
+            </a:r>
+          </a:p>
+        </p:txBody>
+      </p:sp>
+      <p:sp>
+        <p:nvSpPr>
+          <p:cNvPr id="7" name="TextBox 6"/>
           <p:cNvSpPr txBox="1"/>
           <p:nvPr/>
         </p:nvSpPr>
@@ -9711,7 +10827,7 @@
         <p:spPr>
           <a:xfrm>
             <a:off x="0" y="0"/>
-            <a:ext cx="12191695" cy="1170432"/>
+            <a:ext cx="12191695" cy="960120"/>
           </a:xfrm>
           <a:prstGeom prst="rect">
             <a:avLst/>
@@ -9753,7 +10869,7 @@
         </p:nvSpPr>
         <p:spPr>
           <a:xfrm>
-            <a:off x="0" y="1170432"/>
+            <a:off x="0" y="960120"/>
             <a:ext cx="12191695" cy="41148"/>
           </a:xfrm>
           <a:prstGeom prst="rect">
@@ -9797,7 +10913,7 @@
         <p:spPr>
           <a:xfrm>
             <a:off x="457200" y="164592"/>
-            <a:ext cx="11277295" cy="384048"/>
+            <a:ext cx="11277295" cy="502920"/>
           </a:xfrm>
           <a:prstGeom prst="rect">
             <a:avLst/>
@@ -9817,7 +10933,7 @@
                 </a:solidFill>
                 <a:latin typeface="Calibri"/>
               </a:rPr>
-              <a:t>Herramientas de hoy</a:t>
+              <a:t>Demo del dia</a:t>
             </a:r>
           </a:p>
         </p:txBody>
@@ -9830,8 +10946,8 @@
         </p:nvSpPr>
         <p:spPr>
           <a:xfrm>
-            <a:off x="457200" y="566928"/>
-            <a:ext cx="11277295" cy="411480"/>
+            <a:off x="457200" y="1170432"/>
+            <a:ext cx="11277295" cy="5230368"/>
           </a:xfrm>
           <a:prstGeom prst="rect">
             <a:avLst/>
@@ -9844,837 +10960,110 @@
           </a:bodyPr>
           <a:lstStyle/>
           <a:p>
-            <a:r>
-              <a:rPr sz="1400" b="0" i="0">
-                <a:solidFill>
-                  <a:srgbClr val="B8D8EE"/>
-                </a:solidFill>
-                <a:latin typeface="Calibri"/>
-              </a:rPr>
-              <a:t>Gratis · navegador o free tier</a:t>
-            </a:r>
-          </a:p>
-        </p:txBody>
-      </p:sp>
-      <p:sp>
-        <p:nvSpPr>
-          <p:cNvPr id="6" name="Rounded Rectangle 5"/>
-          <p:cNvSpPr/>
-          <p:nvPr/>
-        </p:nvSpPr>
-        <p:spPr>
-          <a:xfrm>
-            <a:off x="457200" y="1591056"/>
-            <a:ext cx="3624986" cy="2299716"/>
-          </a:xfrm>
-          <a:prstGeom prst="roundRect">
-            <a:avLst>
-              <a:gd name="adj" fmla="val 12000"/>
-            </a:avLst>
-          </a:prstGeom>
-          <a:solidFill>
-            <a:srgbClr val="F2F2F2"/>
-          </a:solidFill>
-          <a:ln>
-            <a:noFill/>
-          </a:ln>
-        </p:spPr>
-        <p:style>
-          <a:lnRef idx="1">
-            <a:schemeClr val="accent1"/>
-          </a:lnRef>
-          <a:fillRef idx="3">
-            <a:schemeClr val="accent1"/>
-          </a:fillRef>
-          <a:effectRef idx="2">
-            <a:schemeClr val="accent1"/>
-          </a:effectRef>
-          <a:fontRef idx="minor">
-            <a:schemeClr val="lt1"/>
-          </a:fontRef>
-        </p:style>
-        <p:txBody>
-          <a:bodyPr rtlCol="0" anchor="ctr"/>
-          <a:lstStyle/>
-          <a:p>
-            <a:pPr algn="ctr"/>
-          </a:p>
-        </p:txBody>
-      </p:sp>
-      <p:sp>
-        <p:nvSpPr>
-          <p:cNvPr id="7" name="Rectangle 6"/>
-          <p:cNvSpPr/>
-          <p:nvPr/>
-        </p:nvSpPr>
-        <p:spPr>
-          <a:xfrm>
-            <a:off x="457200" y="1591056"/>
-            <a:ext cx="3624986" cy="64008"/>
-          </a:xfrm>
-          <a:prstGeom prst="rect">
-            <a:avLst/>
-          </a:prstGeom>
-          <a:solidFill>
-            <a:srgbClr val="095292"/>
-          </a:solidFill>
-          <a:ln>
-            <a:noFill/>
-          </a:ln>
-        </p:spPr>
-        <p:style>
-          <a:lnRef idx="1">
-            <a:schemeClr val="accent1"/>
-          </a:lnRef>
-          <a:fillRef idx="3">
-            <a:schemeClr val="accent1"/>
-          </a:fillRef>
-          <a:effectRef idx="2">
-            <a:schemeClr val="accent1"/>
-          </a:effectRef>
-          <a:fontRef idx="minor">
-            <a:schemeClr val="lt1"/>
-          </a:fontRef>
-        </p:style>
-        <p:txBody>
-          <a:bodyPr rtlCol="0" anchor="ctr"/>
-          <a:lstStyle/>
-          <a:p>
-            <a:pPr algn="ctr"/>
-          </a:p>
-        </p:txBody>
-      </p:sp>
-      <p:sp>
-        <p:nvSpPr>
-          <p:cNvPr id="8" name="Rectangle 7"/>
-          <p:cNvSpPr/>
-          <p:nvPr/>
-        </p:nvSpPr>
-        <p:spPr>
-          <a:xfrm>
-            <a:off x="457200" y="1655064"/>
-            <a:ext cx="3624986" cy="27432"/>
-          </a:xfrm>
-          <a:prstGeom prst="rect">
-            <a:avLst/>
-          </a:prstGeom>
-          <a:solidFill>
-            <a:srgbClr val="FFD000"/>
-          </a:solidFill>
-          <a:ln>
-            <a:noFill/>
-          </a:ln>
-        </p:spPr>
-        <p:style>
-          <a:lnRef idx="1">
-            <a:schemeClr val="accent1"/>
-          </a:lnRef>
-          <a:fillRef idx="3">
-            <a:schemeClr val="accent1"/>
-          </a:fillRef>
-          <a:effectRef idx="2">
-            <a:schemeClr val="accent1"/>
-          </a:effectRef>
-          <a:fontRef idx="minor">
-            <a:schemeClr val="lt1"/>
-          </a:fontRef>
-        </p:style>
-        <p:txBody>
-          <a:bodyPr rtlCol="0" anchor="ctr"/>
-          <a:lstStyle/>
-          <a:p>
-            <a:pPr algn="ctr"/>
-          </a:p>
-        </p:txBody>
-      </p:sp>
-      <p:pic>
-        <p:nvPicPr>
-          <p:cNvPr id="9" name="Picture 8" descr="examlab.png"/>
-          <p:cNvPicPr>
-            <a:picLocks noChangeAspect="1"/>
-          </p:cNvPicPr>
-          <p:nvPr/>
-        </p:nvPicPr>
-        <p:blipFill>
-          <a:blip r:embed="rId2"/>
-          <a:stretch>
-            <a:fillRect/>
-          </a:stretch>
-        </p:blipFill>
-        <p:spPr>
-          <a:xfrm>
-            <a:off x="1659331" y="1847087"/>
-            <a:ext cx="1220724" cy="1220724"/>
-          </a:xfrm>
-          <a:prstGeom prst="rect">
-            <a:avLst/>
-          </a:prstGeom>
-        </p:spPr>
-      </p:pic>
-      <p:sp>
-        <p:nvSpPr>
-          <p:cNvPr id="10" name="TextBox 9"/>
-          <p:cNvSpPr txBox="1"/>
-          <p:nvPr/>
-        </p:nvSpPr>
-        <p:spPr>
-          <a:xfrm>
-            <a:off x="530352" y="3159251"/>
-            <a:ext cx="3478682" cy="621792"/>
-          </a:xfrm>
-          <a:prstGeom prst="rect">
-            <a:avLst/>
-          </a:prstGeom>
-          <a:noFill/>
-        </p:spPr>
-        <p:txBody>
-          <a:bodyPr wrap="square" anchor="t"/>
-          <a:lstStyle/>
-          <a:p>
-            <a:pPr algn="ctr"/>
-            <a:r>
-              <a:rPr sz="1300" b="1" i="0">
-                <a:solidFill>
-                  <a:srgbClr val="095292"/>
-                </a:solidFill>
-                <a:latin typeface="Calibri"/>
-              </a:rPr>
-              <a:t>ExamLab</a:t>
-            </a:r>
-          </a:p>
-          <a:p>
-            <a:pPr algn="ctr">
-              <a:spcBef>
-                <a:spcPts val="200"/>
-              </a:spcBef>
+            <a:pPr>
+              <a:spcAft>
+                <a:spcPts val="800"/>
+              </a:spcAft>
             </a:pPr>
             <a:r>
-              <a:rPr sz="1000" b="0" i="0">
-                <a:solidFill>
-                  <a:srgbClr val="666666"/>
-                </a:solidFill>
-                <a:latin typeface="Calibri"/>
-              </a:rPr>
-              <a:t>PostgreSQL: aqui corre</a:t>
-            </a:r>
-          </a:p>
-        </p:txBody>
-      </p:sp>
-      <p:sp>
-        <p:nvSpPr>
-          <p:cNvPr id="11" name="Rounded Rectangle 10"/>
-          <p:cNvSpPr/>
-          <p:nvPr/>
-        </p:nvSpPr>
-        <p:spPr>
-          <a:xfrm>
-            <a:off x="4283354" y="1591056"/>
-            <a:ext cx="3624986" cy="2299716"/>
-          </a:xfrm>
-          <a:prstGeom prst="roundRect">
-            <a:avLst>
-              <a:gd name="adj" fmla="val 12000"/>
-            </a:avLst>
-          </a:prstGeom>
-          <a:solidFill>
-            <a:srgbClr val="F2F2F2"/>
-          </a:solidFill>
-          <a:ln>
-            <a:noFill/>
-          </a:ln>
-        </p:spPr>
-        <p:style>
-          <a:lnRef idx="1">
-            <a:schemeClr val="accent1"/>
-          </a:lnRef>
-          <a:fillRef idx="3">
-            <a:schemeClr val="accent1"/>
-          </a:fillRef>
-          <a:effectRef idx="2">
-            <a:schemeClr val="accent1"/>
-          </a:effectRef>
-          <a:fontRef idx="minor">
-            <a:schemeClr val="lt1"/>
-          </a:fontRef>
-        </p:style>
-        <p:txBody>
-          <a:bodyPr rtlCol="0" anchor="ctr"/>
-          <a:lstStyle/>
-          <a:p>
-            <a:pPr algn="ctr"/>
-          </a:p>
-        </p:txBody>
-      </p:sp>
-      <p:sp>
-        <p:nvSpPr>
-          <p:cNvPr id="12" name="Rectangle 11"/>
-          <p:cNvSpPr/>
-          <p:nvPr/>
-        </p:nvSpPr>
-        <p:spPr>
-          <a:xfrm>
-            <a:off x="4283354" y="1591056"/>
-            <a:ext cx="3624986" cy="64008"/>
-          </a:xfrm>
-          <a:prstGeom prst="rect">
-            <a:avLst/>
-          </a:prstGeom>
-          <a:solidFill>
-            <a:srgbClr val="095292"/>
-          </a:solidFill>
-          <a:ln>
-            <a:noFill/>
-          </a:ln>
-        </p:spPr>
-        <p:style>
-          <a:lnRef idx="1">
-            <a:schemeClr val="accent1"/>
-          </a:lnRef>
-          <a:fillRef idx="3">
-            <a:schemeClr val="accent1"/>
-          </a:fillRef>
-          <a:effectRef idx="2">
-            <a:schemeClr val="accent1"/>
-          </a:effectRef>
-          <a:fontRef idx="minor">
-            <a:schemeClr val="lt1"/>
-          </a:fontRef>
-        </p:style>
-        <p:txBody>
-          <a:bodyPr rtlCol="0" anchor="ctr"/>
-          <a:lstStyle/>
-          <a:p>
-            <a:pPr algn="ctr"/>
-          </a:p>
-        </p:txBody>
-      </p:sp>
-      <p:sp>
-        <p:nvSpPr>
-          <p:cNvPr id="13" name="Rectangle 12"/>
-          <p:cNvSpPr/>
-          <p:nvPr/>
-        </p:nvSpPr>
-        <p:spPr>
-          <a:xfrm>
-            <a:off x="4283354" y="1655064"/>
-            <a:ext cx="3624986" cy="27432"/>
-          </a:xfrm>
-          <a:prstGeom prst="rect">
-            <a:avLst/>
-          </a:prstGeom>
-          <a:solidFill>
-            <a:srgbClr val="FFD000"/>
-          </a:solidFill>
-          <a:ln>
-            <a:noFill/>
-          </a:ln>
-        </p:spPr>
-        <p:style>
-          <a:lnRef idx="1">
-            <a:schemeClr val="accent1"/>
-          </a:lnRef>
-          <a:fillRef idx="3">
-            <a:schemeClr val="accent1"/>
-          </a:fillRef>
-          <a:effectRef idx="2">
-            <a:schemeClr val="accent1"/>
-          </a:effectRef>
-          <a:fontRef idx="minor">
-            <a:schemeClr val="lt1"/>
-          </a:fontRef>
-        </p:style>
-        <p:txBody>
-          <a:bodyPr rtlCol="0" anchor="ctr"/>
-          <a:lstStyle/>
-          <a:p>
-            <a:pPr algn="ctr"/>
-          </a:p>
-        </p:txBody>
-      </p:sp>
-      <p:pic>
-        <p:nvPicPr>
-          <p:cNvPr id="14" name="Picture 13" descr="google_docs.png"/>
-          <p:cNvPicPr>
-            <a:picLocks noChangeAspect="1"/>
-          </p:cNvPicPr>
-          <p:nvPr/>
-        </p:nvPicPr>
-        <p:blipFill>
-          <a:blip r:embed="rId3"/>
-          <a:stretch>
-            <a:fillRect/>
-          </a:stretch>
-        </p:blipFill>
-        <p:spPr>
-          <a:xfrm>
-            <a:off x="5485485" y="1847087"/>
-            <a:ext cx="1220724" cy="1220724"/>
-          </a:xfrm>
-          <a:prstGeom prst="rect">
-            <a:avLst/>
-          </a:prstGeom>
-        </p:spPr>
-      </p:pic>
-      <p:sp>
-        <p:nvSpPr>
-          <p:cNvPr id="15" name="TextBox 14"/>
-          <p:cNvSpPr txBox="1"/>
-          <p:nvPr/>
-        </p:nvSpPr>
-        <p:spPr>
-          <a:xfrm>
-            <a:off x="4356506" y="3159251"/>
-            <a:ext cx="3478682" cy="621792"/>
-          </a:xfrm>
-          <a:prstGeom prst="rect">
-            <a:avLst/>
-          </a:prstGeom>
-          <a:noFill/>
-        </p:spPr>
-        <p:txBody>
-          <a:bodyPr wrap="square" anchor="t"/>
-          <a:lstStyle/>
-          <a:p>
-            <a:pPr algn="ctr"/>
-            <a:r>
-              <a:rPr sz="1300" b="1" i="0">
-                <a:solidFill>
-                  <a:srgbClr val="095292"/>
-                </a:solidFill>
-                <a:latin typeface="Calibri"/>
-              </a:rPr>
-              <a:t>Google Docs</a:t>
-            </a:r>
-          </a:p>
-          <a:p>
-            <a:pPr algn="ctr">
-              <a:spcBef>
-                <a:spcPts val="200"/>
-              </a:spcBef>
+              <a:rPr sz="1600" b="0" i="0">
+                <a:solidFill>
+                  <a:srgbClr val="333333"/>
+                </a:solidFill>
+                <a:latin typeface="Calibri"/>
+              </a:rPr>
+              <a:t>–   </a:t>
+            </a:r>
+            <a:r>
+              <a:rPr sz="1600" b="1" i="0">
+                <a:solidFill>
+                  <a:srgbClr val="333333"/>
+                </a:solidFill>
+                <a:latin typeface="Calibri"/>
+              </a:rPr>
+              <a:t>Herramienta:</a:t>
+            </a:r>
+            <a:r>
+              <a:rPr sz="1600" b="0" i="0">
+                <a:solidFill>
+                  <a:srgbClr val="333333"/>
+                </a:solidFill>
+                <a:latin typeface="Calibri"/>
+              </a:rPr>
+              <a:t> ExamLab (PostgreSQL) + Google Docs</a:t>
+            </a:r>
+          </a:p>
+          <a:p>
+            <a:pPr>
+              <a:spcAft>
+                <a:spcPts val="800"/>
+              </a:spcAft>
             </a:pPr>
             <a:r>
-              <a:rPr sz="1000" b="0" i="0">
-                <a:solidFill>
-                  <a:srgbClr val="666666"/>
-                </a:solidFill>
-                <a:latin typeface="Calibri"/>
-              </a:rPr>
-              <a:t>Matriz y politica</a:t>
-            </a:r>
-          </a:p>
-        </p:txBody>
-      </p:sp>
-      <p:sp>
-        <p:nvSpPr>
-          <p:cNvPr id="16" name="Rounded Rectangle 15"/>
-          <p:cNvSpPr/>
-          <p:nvPr/>
-        </p:nvSpPr>
-        <p:spPr>
-          <a:xfrm>
-            <a:off x="8109508" y="1591056"/>
-            <a:ext cx="3624986" cy="2299716"/>
-          </a:xfrm>
-          <a:prstGeom prst="roundRect">
-            <a:avLst>
-              <a:gd name="adj" fmla="val 12000"/>
-            </a:avLst>
-          </a:prstGeom>
-          <a:solidFill>
-            <a:srgbClr val="F2F2F2"/>
-          </a:solidFill>
-          <a:ln>
-            <a:noFill/>
-          </a:ln>
-        </p:spPr>
-        <p:style>
-          <a:lnRef idx="1">
-            <a:schemeClr val="accent1"/>
-          </a:lnRef>
-          <a:fillRef idx="3">
-            <a:schemeClr val="accent1"/>
-          </a:fillRef>
-          <a:effectRef idx="2">
-            <a:schemeClr val="accent1"/>
-          </a:effectRef>
-          <a:fontRef idx="minor">
-            <a:schemeClr val="lt1"/>
-          </a:fontRef>
-        </p:style>
-        <p:txBody>
-          <a:bodyPr rtlCol="0" anchor="ctr"/>
-          <a:lstStyle/>
-          <a:p>
-            <a:pPr algn="ctr"/>
-          </a:p>
-        </p:txBody>
-      </p:sp>
-      <p:sp>
-        <p:nvSpPr>
-          <p:cNvPr id="17" name="Rectangle 16"/>
-          <p:cNvSpPr/>
-          <p:nvPr/>
-        </p:nvSpPr>
-        <p:spPr>
-          <a:xfrm>
-            <a:off x="8109508" y="1591056"/>
-            <a:ext cx="3624986" cy="64008"/>
-          </a:xfrm>
-          <a:prstGeom prst="rect">
-            <a:avLst/>
-          </a:prstGeom>
-          <a:solidFill>
-            <a:srgbClr val="095292"/>
-          </a:solidFill>
-          <a:ln>
-            <a:noFill/>
-          </a:ln>
-        </p:spPr>
-        <p:style>
-          <a:lnRef idx="1">
-            <a:schemeClr val="accent1"/>
-          </a:lnRef>
-          <a:fillRef idx="3">
-            <a:schemeClr val="accent1"/>
-          </a:fillRef>
-          <a:effectRef idx="2">
-            <a:schemeClr val="accent1"/>
-          </a:effectRef>
-          <a:fontRef idx="minor">
-            <a:schemeClr val="lt1"/>
-          </a:fontRef>
-        </p:style>
-        <p:txBody>
-          <a:bodyPr rtlCol="0" anchor="ctr"/>
-          <a:lstStyle/>
-          <a:p>
-            <a:pPr algn="ctr"/>
-          </a:p>
-        </p:txBody>
-      </p:sp>
-      <p:sp>
-        <p:nvSpPr>
-          <p:cNvPr id="18" name="Rectangle 17"/>
-          <p:cNvSpPr/>
-          <p:nvPr/>
-        </p:nvSpPr>
-        <p:spPr>
-          <a:xfrm>
-            <a:off x="8109508" y="1655064"/>
-            <a:ext cx="3624986" cy="27432"/>
-          </a:xfrm>
-          <a:prstGeom prst="rect">
-            <a:avLst/>
-          </a:prstGeom>
-          <a:solidFill>
-            <a:srgbClr val="FFD000"/>
-          </a:solidFill>
-          <a:ln>
-            <a:noFill/>
-          </a:ln>
-        </p:spPr>
-        <p:style>
-          <a:lnRef idx="1">
-            <a:schemeClr val="accent1"/>
-          </a:lnRef>
-          <a:fillRef idx="3">
-            <a:schemeClr val="accent1"/>
-          </a:fillRef>
-          <a:effectRef idx="2">
-            <a:schemeClr val="accent1"/>
-          </a:effectRef>
-          <a:fontRef idx="minor">
-            <a:schemeClr val="lt1"/>
-          </a:fontRef>
-        </p:style>
-        <p:txBody>
-          <a:bodyPr rtlCol="0" anchor="ctr"/>
-          <a:lstStyle/>
-          <a:p>
-            <a:pPr algn="ctr"/>
-          </a:p>
-        </p:txBody>
-      </p:sp>
-      <p:pic>
-        <p:nvPicPr>
-          <p:cNvPr id="19" name="Picture 18" descr="dbfiddle.png"/>
-          <p:cNvPicPr>
-            <a:picLocks noChangeAspect="1"/>
-          </p:cNvPicPr>
-          <p:nvPr/>
-        </p:nvPicPr>
-        <p:blipFill>
-          <a:blip r:embed="rId4"/>
-          <a:stretch>
-            <a:fillRect/>
-          </a:stretch>
-        </p:blipFill>
-        <p:spPr>
-          <a:xfrm>
-            <a:off x="9311640" y="1847087"/>
-            <a:ext cx="1220724" cy="1220724"/>
-          </a:xfrm>
-          <a:prstGeom prst="rect">
-            <a:avLst/>
-          </a:prstGeom>
-        </p:spPr>
-      </p:pic>
-      <p:sp>
-        <p:nvSpPr>
-          <p:cNvPr id="20" name="TextBox 19"/>
-          <p:cNvSpPr txBox="1"/>
-          <p:nvPr/>
-        </p:nvSpPr>
-        <p:spPr>
-          <a:xfrm>
-            <a:off x="8182660" y="3159251"/>
-            <a:ext cx="3478682" cy="621792"/>
-          </a:xfrm>
-          <a:prstGeom prst="rect">
-            <a:avLst/>
-          </a:prstGeom>
-          <a:noFill/>
-        </p:spPr>
-        <p:txBody>
-          <a:bodyPr wrap="square" anchor="t"/>
-          <a:lstStyle/>
-          <a:p>
-            <a:pPr algn="ctr"/>
-            <a:r>
-              <a:rPr sz="1300" b="1" i="0">
-                <a:solidFill>
-                  <a:srgbClr val="095292"/>
-                </a:solidFill>
-                <a:latin typeface="Calibri"/>
-              </a:rPr>
-              <a:t>DB Fiddle</a:t>
-            </a:r>
-          </a:p>
-          <a:p>
-            <a:pPr algn="ctr">
-              <a:spcBef>
-                <a:spcPts val="200"/>
-              </a:spcBef>
+              <a:rPr sz="1600" b="0" i="0">
+                <a:solidFill>
+                  <a:srgbClr val="333333"/>
+                </a:solidFill>
+                <a:latin typeface="Calibri"/>
+              </a:rPr>
+              <a:t>–   </a:t>
+            </a:r>
+            <a:r>
+              <a:rPr sz="1600" b="1" i="0">
+                <a:solidFill>
+                  <a:srgbClr val="333333"/>
+                </a:solidFill>
+                <a:latin typeface="Calibri"/>
+              </a:rPr>
+              <a:t>Demo:</a:t>
+            </a:r>
+            <a:r>
+              <a:rPr sz="1600" b="0" i="0">
+                <a:solidFill>
+                  <a:srgbClr val="333333"/>
+                </a:solidFill>
+                <a:latin typeface="Calibri"/>
+              </a:rPr>
+              <a:t> Los 4 roles de VetCare con CREATE ROLE/GRANT/REVOKE en ExamLab, verificados con information_schema.role_table_grants.</a:t>
+            </a:r>
+          </a:p>
+          <a:p>
+            <a:pPr>
+              <a:spcAft>
+                <a:spcPts val="800"/>
+              </a:spcAft>
             </a:pPr>
             <a:r>
-              <a:rPr sz="1000" b="0" i="0">
-                <a:solidFill>
-                  <a:srgbClr val="666666"/>
-                </a:solidFill>
-                <a:latin typeface="Calibri"/>
-              </a:rPr>
-              <a:t>Alterno: SQL suelto</a:t>
-            </a:r>
-          </a:p>
-        </p:txBody>
-      </p:sp>
-      <p:sp>
-        <p:nvSpPr>
-          <p:cNvPr id="21" name="Rounded Rectangle 20"/>
-          <p:cNvSpPr/>
-          <p:nvPr/>
-        </p:nvSpPr>
-        <p:spPr>
-          <a:xfrm>
-            <a:off x="4283354" y="4055364"/>
-            <a:ext cx="3624986" cy="2299716"/>
-          </a:xfrm>
-          <a:prstGeom prst="roundRect">
-            <a:avLst>
-              <a:gd name="adj" fmla="val 12000"/>
-            </a:avLst>
-          </a:prstGeom>
-          <a:solidFill>
-            <a:srgbClr val="F2F2F2"/>
-          </a:solidFill>
-          <a:ln>
-            <a:noFill/>
-          </a:ln>
-        </p:spPr>
-        <p:style>
-          <a:lnRef idx="1">
-            <a:schemeClr val="accent1"/>
-          </a:lnRef>
-          <a:fillRef idx="3">
-            <a:schemeClr val="accent1"/>
-          </a:fillRef>
-          <a:effectRef idx="2">
-            <a:schemeClr val="accent1"/>
-          </a:effectRef>
-          <a:fontRef idx="minor">
-            <a:schemeClr val="lt1"/>
-          </a:fontRef>
-        </p:style>
-        <p:txBody>
-          <a:bodyPr rtlCol="0" anchor="ctr"/>
-          <a:lstStyle/>
-          <a:p>
-            <a:pPr algn="ctr"/>
-          </a:p>
-        </p:txBody>
-      </p:sp>
-      <p:sp>
-        <p:nvSpPr>
-          <p:cNvPr id="22" name="Rectangle 21"/>
-          <p:cNvSpPr/>
-          <p:nvPr/>
-        </p:nvSpPr>
-        <p:spPr>
-          <a:xfrm>
-            <a:off x="4283354" y="4055364"/>
-            <a:ext cx="3624986" cy="64008"/>
-          </a:xfrm>
-          <a:prstGeom prst="rect">
-            <a:avLst/>
-          </a:prstGeom>
-          <a:solidFill>
-            <a:srgbClr val="095292"/>
-          </a:solidFill>
-          <a:ln>
-            <a:noFill/>
-          </a:ln>
-        </p:spPr>
-        <p:style>
-          <a:lnRef idx="1">
-            <a:schemeClr val="accent1"/>
-          </a:lnRef>
-          <a:fillRef idx="3">
-            <a:schemeClr val="accent1"/>
-          </a:fillRef>
-          <a:effectRef idx="2">
-            <a:schemeClr val="accent1"/>
-          </a:effectRef>
-          <a:fontRef idx="minor">
-            <a:schemeClr val="lt1"/>
-          </a:fontRef>
-        </p:style>
-        <p:txBody>
-          <a:bodyPr rtlCol="0" anchor="ctr"/>
-          <a:lstStyle/>
-          <a:p>
-            <a:pPr algn="ctr"/>
-          </a:p>
-        </p:txBody>
-      </p:sp>
-      <p:sp>
-        <p:nvSpPr>
-          <p:cNvPr id="23" name="Rectangle 22"/>
-          <p:cNvSpPr/>
-          <p:nvPr/>
-        </p:nvSpPr>
-        <p:spPr>
-          <a:xfrm>
-            <a:off x="4283354" y="4119372"/>
-            <a:ext cx="3624986" cy="27432"/>
-          </a:xfrm>
-          <a:prstGeom prst="rect">
-            <a:avLst/>
-          </a:prstGeom>
-          <a:solidFill>
-            <a:srgbClr val="FFD000"/>
-          </a:solidFill>
-          <a:ln>
-            <a:noFill/>
-          </a:ln>
-        </p:spPr>
-        <p:style>
-          <a:lnRef idx="1">
-            <a:schemeClr val="accent1"/>
-          </a:lnRef>
-          <a:fillRef idx="3">
-            <a:schemeClr val="accent1"/>
-          </a:fillRef>
-          <a:effectRef idx="2">
-            <a:schemeClr val="accent1"/>
-          </a:effectRef>
-          <a:fontRef idx="minor">
-            <a:schemeClr val="lt1"/>
-          </a:fontRef>
-        </p:style>
-        <p:txBody>
-          <a:bodyPr rtlCol="0" anchor="ctr"/>
-          <a:lstStyle/>
-          <a:p>
-            <a:pPr algn="ctr"/>
-          </a:p>
-        </p:txBody>
-      </p:sp>
-      <p:pic>
-        <p:nvPicPr>
-          <p:cNvPr id="24" name="Picture 23" descr="oracle_livesql.png"/>
-          <p:cNvPicPr>
-            <a:picLocks noChangeAspect="1"/>
-          </p:cNvPicPr>
-          <p:nvPr/>
-        </p:nvPicPr>
-        <p:blipFill>
-          <a:blip r:embed="rId5"/>
-          <a:stretch>
-            <a:fillRect/>
-          </a:stretch>
-        </p:blipFill>
-        <p:spPr>
-          <a:xfrm>
-            <a:off x="5485485" y="4311396"/>
-            <a:ext cx="1220724" cy="1220724"/>
-          </a:xfrm>
-          <a:prstGeom prst="rect">
-            <a:avLst/>
-          </a:prstGeom>
-        </p:spPr>
-      </p:pic>
-      <p:sp>
-        <p:nvSpPr>
-          <p:cNvPr id="25" name="TextBox 24"/>
-          <p:cNvSpPr txBox="1"/>
-          <p:nvPr/>
-        </p:nvSpPr>
-        <p:spPr>
-          <a:xfrm>
-            <a:off x="4356506" y="5623560"/>
-            <a:ext cx="3478682" cy="621792"/>
-          </a:xfrm>
-          <a:prstGeom prst="rect">
-            <a:avLst/>
-          </a:prstGeom>
-          <a:noFill/>
-        </p:spPr>
-        <p:txBody>
-          <a:bodyPr wrap="square" anchor="t"/>
-          <a:lstStyle/>
-          <a:p>
-            <a:pPr algn="ctr"/>
-            <a:r>
-              <a:rPr sz="1300" b="1" i="0">
-                <a:solidFill>
-                  <a:srgbClr val="095292"/>
-                </a:solidFill>
-                <a:latin typeface="Calibri"/>
-              </a:rPr>
-              <a:t>Oracle Live SQL</a:t>
-            </a:r>
-          </a:p>
-          <a:p>
-            <a:pPr algn="ctr">
-              <a:spcBef>
-                <a:spcPts val="200"/>
-              </a:spcBef>
+              <a:rPr sz="1600" b="0" i="0">
+                <a:solidFill>
+                  <a:srgbClr val="333333"/>
+                </a:solidFill>
+                <a:latin typeface="Calibri"/>
+              </a:rPr>
+              <a:t>–   Sigan el mismo dominio VetCare (no inventen otro caso).</a:t>
+            </a:r>
+          </a:p>
+          <a:p>
+            <a:pPr>
+              <a:spcAft>
+                <a:spcPts val="800"/>
+              </a:spcAft>
             </a:pPr>
             <a:r>
-              <a:rPr sz="1000" b="0" i="0">
-                <a:solidFill>
-                  <a:srgbClr val="666666"/>
-                </a:solidFill>
-                <a:latin typeface="Calibri"/>
-              </a:rPr>
-              <a:t>Solo contraste</a:t>
-            </a:r>
-          </a:p>
-        </p:txBody>
-      </p:sp>
-      <p:sp>
-        <p:nvSpPr>
-          <p:cNvPr id="26" name="TextBox 25"/>
+              <a:rPr sz="1600" b="0" i="0">
+                <a:solidFill>
+                  <a:srgbClr val="333333"/>
+                </a:solidFill>
+                <a:latin typeface="Calibri"/>
+              </a:rPr>
+              <a:t>–   Al final de la demo: dejar enlace/script compartible al grupo.</a:t>
+            </a:r>
+          </a:p>
+        </p:txBody>
+      </p:sp>
+      <p:sp>
+        <p:nvSpPr>
+          <p:cNvPr id="6" name="TextBox 5"/>
           <p:cNvSpPr txBox="1"/>
           <p:nvPr/>
         </p:nvSpPr>
@@ -10742,7 +11131,7 @@
         <p:spPr>
           <a:xfrm>
             <a:off x="0" y="0"/>
-            <a:ext cx="12191695" cy="960120"/>
+            <a:ext cx="12191695" cy="1170432"/>
           </a:xfrm>
           <a:prstGeom prst="rect">
             <a:avLst/>
@@ -10784,7 +11173,7 @@
         </p:nvSpPr>
         <p:spPr>
           <a:xfrm>
-            <a:off x="0" y="960120"/>
+            <a:off x="0" y="1170432"/>
             <a:ext cx="12191695" cy="41148"/>
           </a:xfrm>
           <a:prstGeom prst="rect">
@@ -10828,7 +11217,7 @@
         <p:spPr>
           <a:xfrm>
             <a:off x="457200" y="164592"/>
-            <a:ext cx="11277295" cy="502920"/>
+            <a:ext cx="11277295" cy="384048"/>
           </a:xfrm>
           <a:prstGeom prst="rect">
             <a:avLst/>
@@ -10848,7 +11237,7 @@
                 </a:solidFill>
                 <a:latin typeface="Calibri"/>
               </a:rPr>
-              <a:t>Taller PI VetCare — contexto / por que importa</a:t>
+              <a:t>Herramientas de hoy</a:t>
             </a:r>
           </a:p>
         </p:txBody>
@@ -10861,8 +11250,8 @@
         </p:nvSpPr>
         <p:spPr>
           <a:xfrm>
-            <a:off x="457200" y="1170432"/>
-            <a:ext cx="11277295" cy="5230368"/>
+            <a:off x="457200" y="566928"/>
+            <a:ext cx="11277295" cy="411480"/>
           </a:xfrm>
           <a:prstGeom prst="rect">
             <a:avLst/>
@@ -10875,76 +11264,837 @@
           </a:bodyPr>
           <a:lstStyle/>
           <a:p>
-            <a:pPr>
-              <a:spcAft>
-                <a:spcPts val="800"/>
-              </a:spcAft>
+            <a:r>
+              <a:rPr sz="1400" b="0" i="0">
+                <a:solidFill>
+                  <a:srgbClr val="B8D8EE"/>
+                </a:solidFill>
+                <a:latin typeface="Calibri"/>
+              </a:rPr>
+              <a:t>Gratis · navegador o free tier</a:t>
+            </a:r>
+          </a:p>
+        </p:txBody>
+      </p:sp>
+      <p:sp>
+        <p:nvSpPr>
+          <p:cNvPr id="6" name="Rounded Rectangle 5"/>
+          <p:cNvSpPr/>
+          <p:nvPr/>
+        </p:nvSpPr>
+        <p:spPr>
+          <a:xfrm>
+            <a:off x="457200" y="1591056"/>
+            <a:ext cx="3624986" cy="2299716"/>
+          </a:xfrm>
+          <a:prstGeom prst="roundRect">
+            <a:avLst>
+              <a:gd name="adj" fmla="val 12000"/>
+            </a:avLst>
+          </a:prstGeom>
+          <a:solidFill>
+            <a:srgbClr val="F2F2F2"/>
+          </a:solidFill>
+          <a:ln>
+            <a:noFill/>
+          </a:ln>
+        </p:spPr>
+        <p:style>
+          <a:lnRef idx="1">
+            <a:schemeClr val="accent1"/>
+          </a:lnRef>
+          <a:fillRef idx="3">
+            <a:schemeClr val="accent1"/>
+          </a:fillRef>
+          <a:effectRef idx="2">
+            <a:schemeClr val="accent1"/>
+          </a:effectRef>
+          <a:fontRef idx="minor">
+            <a:schemeClr val="lt1"/>
+          </a:fontRef>
+        </p:style>
+        <p:txBody>
+          <a:bodyPr rtlCol="0" anchor="ctr"/>
+          <a:lstStyle/>
+          <a:p>
+            <a:pPr algn="ctr"/>
+          </a:p>
+        </p:txBody>
+      </p:sp>
+      <p:sp>
+        <p:nvSpPr>
+          <p:cNvPr id="7" name="Rectangle 6"/>
+          <p:cNvSpPr/>
+          <p:nvPr/>
+        </p:nvSpPr>
+        <p:spPr>
+          <a:xfrm>
+            <a:off x="457200" y="1591056"/>
+            <a:ext cx="3624986" cy="64008"/>
+          </a:xfrm>
+          <a:prstGeom prst="rect">
+            <a:avLst/>
+          </a:prstGeom>
+          <a:solidFill>
+            <a:srgbClr val="095292"/>
+          </a:solidFill>
+          <a:ln>
+            <a:noFill/>
+          </a:ln>
+        </p:spPr>
+        <p:style>
+          <a:lnRef idx="1">
+            <a:schemeClr val="accent1"/>
+          </a:lnRef>
+          <a:fillRef idx="3">
+            <a:schemeClr val="accent1"/>
+          </a:fillRef>
+          <a:effectRef idx="2">
+            <a:schemeClr val="accent1"/>
+          </a:effectRef>
+          <a:fontRef idx="minor">
+            <a:schemeClr val="lt1"/>
+          </a:fontRef>
+        </p:style>
+        <p:txBody>
+          <a:bodyPr rtlCol="0" anchor="ctr"/>
+          <a:lstStyle/>
+          <a:p>
+            <a:pPr algn="ctr"/>
+          </a:p>
+        </p:txBody>
+      </p:sp>
+      <p:sp>
+        <p:nvSpPr>
+          <p:cNvPr id="8" name="Rectangle 7"/>
+          <p:cNvSpPr/>
+          <p:nvPr/>
+        </p:nvSpPr>
+        <p:spPr>
+          <a:xfrm>
+            <a:off x="457200" y="1655064"/>
+            <a:ext cx="3624986" cy="27432"/>
+          </a:xfrm>
+          <a:prstGeom prst="rect">
+            <a:avLst/>
+          </a:prstGeom>
+          <a:solidFill>
+            <a:srgbClr val="FFD000"/>
+          </a:solidFill>
+          <a:ln>
+            <a:noFill/>
+          </a:ln>
+        </p:spPr>
+        <p:style>
+          <a:lnRef idx="1">
+            <a:schemeClr val="accent1"/>
+          </a:lnRef>
+          <a:fillRef idx="3">
+            <a:schemeClr val="accent1"/>
+          </a:fillRef>
+          <a:effectRef idx="2">
+            <a:schemeClr val="accent1"/>
+          </a:effectRef>
+          <a:fontRef idx="minor">
+            <a:schemeClr val="lt1"/>
+          </a:fontRef>
+        </p:style>
+        <p:txBody>
+          <a:bodyPr rtlCol="0" anchor="ctr"/>
+          <a:lstStyle/>
+          <a:p>
+            <a:pPr algn="ctr"/>
+          </a:p>
+        </p:txBody>
+      </p:sp>
+      <p:pic>
+        <p:nvPicPr>
+          <p:cNvPr id="9" name="Picture 8" descr="examlab.png"/>
+          <p:cNvPicPr>
+            <a:picLocks noChangeAspect="1"/>
+          </p:cNvPicPr>
+          <p:nvPr/>
+        </p:nvPicPr>
+        <p:blipFill>
+          <a:blip r:embed="rId2"/>
+          <a:stretch>
+            <a:fillRect/>
+          </a:stretch>
+        </p:blipFill>
+        <p:spPr>
+          <a:xfrm>
+            <a:off x="1659331" y="1847087"/>
+            <a:ext cx="1220724" cy="1220724"/>
+          </a:xfrm>
+          <a:prstGeom prst="rect">
+            <a:avLst/>
+          </a:prstGeom>
+        </p:spPr>
+      </p:pic>
+      <p:sp>
+        <p:nvSpPr>
+          <p:cNvPr id="10" name="TextBox 9"/>
+          <p:cNvSpPr txBox="1"/>
+          <p:nvPr/>
+        </p:nvSpPr>
+        <p:spPr>
+          <a:xfrm>
+            <a:off x="530352" y="3159251"/>
+            <a:ext cx="3478682" cy="621792"/>
+          </a:xfrm>
+          <a:prstGeom prst="rect">
+            <a:avLst/>
+          </a:prstGeom>
+          <a:noFill/>
+        </p:spPr>
+        <p:txBody>
+          <a:bodyPr wrap="square" anchor="t"/>
+          <a:lstStyle/>
+          <a:p>
+            <a:pPr algn="ctr"/>
+            <a:r>
+              <a:rPr sz="1300" b="1" i="0">
+                <a:solidFill>
+                  <a:srgbClr val="095292"/>
+                </a:solidFill>
+                <a:latin typeface="Calibri"/>
+              </a:rPr>
+              <a:t>ExamLab</a:t>
+            </a:r>
+          </a:p>
+          <a:p>
+            <a:pPr algn="ctr">
+              <a:spcBef>
+                <a:spcPts val="200"/>
+              </a:spcBef>
             </a:pPr>
             <a:r>
-              <a:rPr sz="1600" b="0" i="0">
-                <a:solidFill>
-                  <a:srgbClr val="333333"/>
-                </a:solidFill>
-                <a:latin typeface="Calibri"/>
-              </a:rPr>
-              <a:t>–   </a:t>
-            </a:r>
-            <a:r>
-              <a:rPr sz="1600" b="1" i="0">
-                <a:solidFill>
-                  <a:srgbClr val="333333"/>
-                </a:solidFill>
-                <a:latin typeface="Calibri"/>
-              </a:rPr>
-              <a:t>Por qué importa al PI:</a:t>
-            </a:r>
-            <a:r>
-              <a:rPr sz="1600" b="0" i="0">
-                <a:solidFill>
-                  <a:srgbClr val="333333"/>
-                </a:solidFill>
-                <a:latin typeface="Calibri"/>
-              </a:rPr>
-              <a:t> roles son evidencia de administración.</a:t>
-            </a:r>
-          </a:p>
-          <a:p>
-            <a:pPr>
-              <a:spcAft>
-                <a:spcPts val="800"/>
-              </a:spcAft>
+              <a:rPr sz="1000" b="0" i="0">
+                <a:solidFill>
+                  <a:srgbClr val="666666"/>
+                </a:solidFill>
+                <a:latin typeface="Calibri"/>
+              </a:rPr>
+              <a:t>PostgreSQL: aqui corre</a:t>
+            </a:r>
+          </a:p>
+        </p:txBody>
+      </p:sp>
+      <p:sp>
+        <p:nvSpPr>
+          <p:cNvPr id="11" name="Rounded Rectangle 10"/>
+          <p:cNvSpPr/>
+          <p:nvPr/>
+        </p:nvSpPr>
+        <p:spPr>
+          <a:xfrm>
+            <a:off x="4283354" y="1591056"/>
+            <a:ext cx="3624986" cy="2299716"/>
+          </a:xfrm>
+          <a:prstGeom prst="roundRect">
+            <a:avLst>
+              <a:gd name="adj" fmla="val 12000"/>
+            </a:avLst>
+          </a:prstGeom>
+          <a:solidFill>
+            <a:srgbClr val="F2F2F2"/>
+          </a:solidFill>
+          <a:ln>
+            <a:noFill/>
+          </a:ln>
+        </p:spPr>
+        <p:style>
+          <a:lnRef idx="1">
+            <a:schemeClr val="accent1"/>
+          </a:lnRef>
+          <a:fillRef idx="3">
+            <a:schemeClr val="accent1"/>
+          </a:fillRef>
+          <a:effectRef idx="2">
+            <a:schemeClr val="accent1"/>
+          </a:effectRef>
+          <a:fontRef idx="minor">
+            <a:schemeClr val="lt1"/>
+          </a:fontRef>
+        </p:style>
+        <p:txBody>
+          <a:bodyPr rtlCol="0" anchor="ctr"/>
+          <a:lstStyle/>
+          <a:p>
+            <a:pPr algn="ctr"/>
+          </a:p>
+        </p:txBody>
+      </p:sp>
+      <p:sp>
+        <p:nvSpPr>
+          <p:cNvPr id="12" name="Rectangle 11"/>
+          <p:cNvSpPr/>
+          <p:nvPr/>
+        </p:nvSpPr>
+        <p:spPr>
+          <a:xfrm>
+            <a:off x="4283354" y="1591056"/>
+            <a:ext cx="3624986" cy="64008"/>
+          </a:xfrm>
+          <a:prstGeom prst="rect">
+            <a:avLst/>
+          </a:prstGeom>
+          <a:solidFill>
+            <a:srgbClr val="095292"/>
+          </a:solidFill>
+          <a:ln>
+            <a:noFill/>
+          </a:ln>
+        </p:spPr>
+        <p:style>
+          <a:lnRef idx="1">
+            <a:schemeClr val="accent1"/>
+          </a:lnRef>
+          <a:fillRef idx="3">
+            <a:schemeClr val="accent1"/>
+          </a:fillRef>
+          <a:effectRef idx="2">
+            <a:schemeClr val="accent1"/>
+          </a:effectRef>
+          <a:fontRef idx="minor">
+            <a:schemeClr val="lt1"/>
+          </a:fontRef>
+        </p:style>
+        <p:txBody>
+          <a:bodyPr rtlCol="0" anchor="ctr"/>
+          <a:lstStyle/>
+          <a:p>
+            <a:pPr algn="ctr"/>
+          </a:p>
+        </p:txBody>
+      </p:sp>
+      <p:sp>
+        <p:nvSpPr>
+          <p:cNvPr id="13" name="Rectangle 12"/>
+          <p:cNvSpPr/>
+          <p:nvPr/>
+        </p:nvSpPr>
+        <p:spPr>
+          <a:xfrm>
+            <a:off x="4283354" y="1655064"/>
+            <a:ext cx="3624986" cy="27432"/>
+          </a:xfrm>
+          <a:prstGeom prst="rect">
+            <a:avLst/>
+          </a:prstGeom>
+          <a:solidFill>
+            <a:srgbClr val="FFD000"/>
+          </a:solidFill>
+          <a:ln>
+            <a:noFill/>
+          </a:ln>
+        </p:spPr>
+        <p:style>
+          <a:lnRef idx="1">
+            <a:schemeClr val="accent1"/>
+          </a:lnRef>
+          <a:fillRef idx="3">
+            <a:schemeClr val="accent1"/>
+          </a:fillRef>
+          <a:effectRef idx="2">
+            <a:schemeClr val="accent1"/>
+          </a:effectRef>
+          <a:fontRef idx="minor">
+            <a:schemeClr val="lt1"/>
+          </a:fontRef>
+        </p:style>
+        <p:txBody>
+          <a:bodyPr rtlCol="0" anchor="ctr"/>
+          <a:lstStyle/>
+          <a:p>
+            <a:pPr algn="ctr"/>
+          </a:p>
+        </p:txBody>
+      </p:sp>
+      <p:pic>
+        <p:nvPicPr>
+          <p:cNvPr id="14" name="Picture 13" descr="google_docs.png"/>
+          <p:cNvPicPr>
+            <a:picLocks noChangeAspect="1"/>
+          </p:cNvPicPr>
+          <p:nvPr/>
+        </p:nvPicPr>
+        <p:blipFill>
+          <a:blip r:embed="rId3"/>
+          <a:stretch>
+            <a:fillRect/>
+          </a:stretch>
+        </p:blipFill>
+        <p:spPr>
+          <a:xfrm>
+            <a:off x="5485485" y="1847087"/>
+            <a:ext cx="1220724" cy="1220724"/>
+          </a:xfrm>
+          <a:prstGeom prst="rect">
+            <a:avLst/>
+          </a:prstGeom>
+        </p:spPr>
+      </p:pic>
+      <p:sp>
+        <p:nvSpPr>
+          <p:cNvPr id="15" name="TextBox 14"/>
+          <p:cNvSpPr txBox="1"/>
+          <p:nvPr/>
+        </p:nvSpPr>
+        <p:spPr>
+          <a:xfrm>
+            <a:off x="4356506" y="3159251"/>
+            <a:ext cx="3478682" cy="621792"/>
+          </a:xfrm>
+          <a:prstGeom prst="rect">
+            <a:avLst/>
+          </a:prstGeom>
+          <a:noFill/>
+        </p:spPr>
+        <p:txBody>
+          <a:bodyPr wrap="square" anchor="t"/>
+          <a:lstStyle/>
+          <a:p>
+            <a:pPr algn="ctr"/>
+            <a:r>
+              <a:rPr sz="1300" b="1" i="0">
+                <a:solidFill>
+                  <a:srgbClr val="095292"/>
+                </a:solidFill>
+                <a:latin typeface="Calibri"/>
+              </a:rPr>
+              <a:t>Google Docs</a:t>
+            </a:r>
+          </a:p>
+          <a:p>
+            <a:pPr algn="ctr">
+              <a:spcBef>
+                <a:spcPts val="200"/>
+              </a:spcBef>
             </a:pPr>
             <a:r>
-              <a:rPr sz="1600" b="0" i="0">
-                <a:solidFill>
-                  <a:srgbClr val="333333"/>
-                </a:solidFill>
-                <a:latin typeface="Calibri"/>
-              </a:rPr>
-              <a:t>–   Least privilege evita que Recepción borre historial.</a:t>
-            </a:r>
-          </a:p>
-          <a:p>
-            <a:pPr>
-              <a:spcAft>
-                <a:spcPts val="800"/>
-              </a:spcAft>
+              <a:rPr sz="1000" b="0" i="0">
+                <a:solidFill>
+                  <a:srgbClr val="666666"/>
+                </a:solidFill>
+                <a:latin typeface="Calibri"/>
+              </a:rPr>
+              <a:t>Matriz y politica</a:t>
+            </a:r>
+          </a:p>
+        </p:txBody>
+      </p:sp>
+      <p:sp>
+        <p:nvSpPr>
+          <p:cNvPr id="16" name="Rounded Rectangle 15"/>
+          <p:cNvSpPr/>
+          <p:nvPr/>
+        </p:nvSpPr>
+        <p:spPr>
+          <a:xfrm>
+            <a:off x="8109508" y="1591056"/>
+            <a:ext cx="3624986" cy="2299716"/>
+          </a:xfrm>
+          <a:prstGeom prst="roundRect">
+            <a:avLst>
+              <a:gd name="adj" fmla="val 12000"/>
+            </a:avLst>
+          </a:prstGeom>
+          <a:solidFill>
+            <a:srgbClr val="F2F2F2"/>
+          </a:solidFill>
+          <a:ln>
+            <a:noFill/>
+          </a:ln>
+        </p:spPr>
+        <p:style>
+          <a:lnRef idx="1">
+            <a:schemeClr val="accent1"/>
+          </a:lnRef>
+          <a:fillRef idx="3">
+            <a:schemeClr val="accent1"/>
+          </a:fillRef>
+          <a:effectRef idx="2">
+            <a:schemeClr val="accent1"/>
+          </a:effectRef>
+          <a:fontRef idx="minor">
+            <a:schemeClr val="lt1"/>
+          </a:fontRef>
+        </p:style>
+        <p:txBody>
+          <a:bodyPr rtlCol="0" anchor="ctr"/>
+          <a:lstStyle/>
+          <a:p>
+            <a:pPr algn="ctr"/>
+          </a:p>
+        </p:txBody>
+      </p:sp>
+      <p:sp>
+        <p:nvSpPr>
+          <p:cNvPr id="17" name="Rectangle 16"/>
+          <p:cNvSpPr/>
+          <p:nvPr/>
+        </p:nvSpPr>
+        <p:spPr>
+          <a:xfrm>
+            <a:off x="8109508" y="1591056"/>
+            <a:ext cx="3624986" cy="64008"/>
+          </a:xfrm>
+          <a:prstGeom prst="rect">
+            <a:avLst/>
+          </a:prstGeom>
+          <a:solidFill>
+            <a:srgbClr val="095292"/>
+          </a:solidFill>
+          <a:ln>
+            <a:noFill/>
+          </a:ln>
+        </p:spPr>
+        <p:style>
+          <a:lnRef idx="1">
+            <a:schemeClr val="accent1"/>
+          </a:lnRef>
+          <a:fillRef idx="3">
+            <a:schemeClr val="accent1"/>
+          </a:fillRef>
+          <a:effectRef idx="2">
+            <a:schemeClr val="accent1"/>
+          </a:effectRef>
+          <a:fontRef idx="minor">
+            <a:schemeClr val="lt1"/>
+          </a:fontRef>
+        </p:style>
+        <p:txBody>
+          <a:bodyPr rtlCol="0" anchor="ctr"/>
+          <a:lstStyle/>
+          <a:p>
+            <a:pPr algn="ctr"/>
+          </a:p>
+        </p:txBody>
+      </p:sp>
+      <p:sp>
+        <p:nvSpPr>
+          <p:cNvPr id="18" name="Rectangle 17"/>
+          <p:cNvSpPr/>
+          <p:nvPr/>
+        </p:nvSpPr>
+        <p:spPr>
+          <a:xfrm>
+            <a:off x="8109508" y="1655064"/>
+            <a:ext cx="3624986" cy="27432"/>
+          </a:xfrm>
+          <a:prstGeom prst="rect">
+            <a:avLst/>
+          </a:prstGeom>
+          <a:solidFill>
+            <a:srgbClr val="FFD000"/>
+          </a:solidFill>
+          <a:ln>
+            <a:noFill/>
+          </a:ln>
+        </p:spPr>
+        <p:style>
+          <a:lnRef idx="1">
+            <a:schemeClr val="accent1"/>
+          </a:lnRef>
+          <a:fillRef idx="3">
+            <a:schemeClr val="accent1"/>
+          </a:fillRef>
+          <a:effectRef idx="2">
+            <a:schemeClr val="accent1"/>
+          </a:effectRef>
+          <a:fontRef idx="minor">
+            <a:schemeClr val="lt1"/>
+          </a:fontRef>
+        </p:style>
+        <p:txBody>
+          <a:bodyPr rtlCol="0" anchor="ctr"/>
+          <a:lstStyle/>
+          <a:p>
+            <a:pPr algn="ctr"/>
+          </a:p>
+        </p:txBody>
+      </p:sp>
+      <p:pic>
+        <p:nvPicPr>
+          <p:cNvPr id="19" name="Picture 18" descr="dbfiddle.png"/>
+          <p:cNvPicPr>
+            <a:picLocks noChangeAspect="1"/>
+          </p:cNvPicPr>
+          <p:nvPr/>
+        </p:nvPicPr>
+        <p:blipFill>
+          <a:blip r:embed="rId4"/>
+          <a:stretch>
+            <a:fillRect/>
+          </a:stretch>
+        </p:blipFill>
+        <p:spPr>
+          <a:xfrm>
+            <a:off x="9311640" y="1847087"/>
+            <a:ext cx="1220724" cy="1220724"/>
+          </a:xfrm>
+          <a:prstGeom prst="rect">
+            <a:avLst/>
+          </a:prstGeom>
+        </p:spPr>
+      </p:pic>
+      <p:sp>
+        <p:nvSpPr>
+          <p:cNvPr id="20" name="TextBox 19"/>
+          <p:cNvSpPr txBox="1"/>
+          <p:nvPr/>
+        </p:nvSpPr>
+        <p:spPr>
+          <a:xfrm>
+            <a:off x="8182660" y="3159251"/>
+            <a:ext cx="3478682" cy="621792"/>
+          </a:xfrm>
+          <a:prstGeom prst="rect">
+            <a:avLst/>
+          </a:prstGeom>
+          <a:noFill/>
+        </p:spPr>
+        <p:txBody>
+          <a:bodyPr wrap="square" anchor="t"/>
+          <a:lstStyle/>
+          <a:p>
+            <a:pPr algn="ctr"/>
+            <a:r>
+              <a:rPr sz="1300" b="1" i="0">
+                <a:solidFill>
+                  <a:srgbClr val="095292"/>
+                </a:solidFill>
+                <a:latin typeface="Calibri"/>
+              </a:rPr>
+              <a:t>DB Fiddle</a:t>
+            </a:r>
+          </a:p>
+          <a:p>
+            <a:pPr algn="ctr">
+              <a:spcBef>
+                <a:spcPts val="200"/>
+              </a:spcBef>
             </a:pPr>
             <a:r>
-              <a:rPr sz="1600" b="0" i="0">
-                <a:solidFill>
-                  <a:srgbClr val="333333"/>
-                </a:solidFill>
-                <a:latin typeface="Calibri"/>
-              </a:rPr>
-              <a:t>–   Si el playground no persiste usuarios, la matriz igual se documenta: es el entregable.</a:t>
-            </a:r>
-          </a:p>
-        </p:txBody>
-      </p:sp>
-      <p:sp>
-        <p:nvSpPr>
-          <p:cNvPr id="6" name="TextBox 5"/>
+              <a:rPr sz="1000" b="0" i="0">
+                <a:solidFill>
+                  <a:srgbClr val="666666"/>
+                </a:solidFill>
+                <a:latin typeface="Calibri"/>
+              </a:rPr>
+              <a:t>Alterno: SQL suelto</a:t>
+            </a:r>
+          </a:p>
+        </p:txBody>
+      </p:sp>
+      <p:sp>
+        <p:nvSpPr>
+          <p:cNvPr id="21" name="Rounded Rectangle 20"/>
+          <p:cNvSpPr/>
+          <p:nvPr/>
+        </p:nvSpPr>
+        <p:spPr>
+          <a:xfrm>
+            <a:off x="4283354" y="4055364"/>
+            <a:ext cx="3624986" cy="2299716"/>
+          </a:xfrm>
+          <a:prstGeom prst="roundRect">
+            <a:avLst>
+              <a:gd name="adj" fmla="val 12000"/>
+            </a:avLst>
+          </a:prstGeom>
+          <a:solidFill>
+            <a:srgbClr val="F2F2F2"/>
+          </a:solidFill>
+          <a:ln>
+            <a:noFill/>
+          </a:ln>
+        </p:spPr>
+        <p:style>
+          <a:lnRef idx="1">
+            <a:schemeClr val="accent1"/>
+          </a:lnRef>
+          <a:fillRef idx="3">
+            <a:schemeClr val="accent1"/>
+          </a:fillRef>
+          <a:effectRef idx="2">
+            <a:schemeClr val="accent1"/>
+          </a:effectRef>
+          <a:fontRef idx="minor">
+            <a:schemeClr val="lt1"/>
+          </a:fontRef>
+        </p:style>
+        <p:txBody>
+          <a:bodyPr rtlCol="0" anchor="ctr"/>
+          <a:lstStyle/>
+          <a:p>
+            <a:pPr algn="ctr"/>
+          </a:p>
+        </p:txBody>
+      </p:sp>
+      <p:sp>
+        <p:nvSpPr>
+          <p:cNvPr id="22" name="Rectangle 21"/>
+          <p:cNvSpPr/>
+          <p:nvPr/>
+        </p:nvSpPr>
+        <p:spPr>
+          <a:xfrm>
+            <a:off x="4283354" y="4055364"/>
+            <a:ext cx="3624986" cy="64008"/>
+          </a:xfrm>
+          <a:prstGeom prst="rect">
+            <a:avLst/>
+          </a:prstGeom>
+          <a:solidFill>
+            <a:srgbClr val="095292"/>
+          </a:solidFill>
+          <a:ln>
+            <a:noFill/>
+          </a:ln>
+        </p:spPr>
+        <p:style>
+          <a:lnRef idx="1">
+            <a:schemeClr val="accent1"/>
+          </a:lnRef>
+          <a:fillRef idx="3">
+            <a:schemeClr val="accent1"/>
+          </a:fillRef>
+          <a:effectRef idx="2">
+            <a:schemeClr val="accent1"/>
+          </a:effectRef>
+          <a:fontRef idx="minor">
+            <a:schemeClr val="lt1"/>
+          </a:fontRef>
+        </p:style>
+        <p:txBody>
+          <a:bodyPr rtlCol="0" anchor="ctr"/>
+          <a:lstStyle/>
+          <a:p>
+            <a:pPr algn="ctr"/>
+          </a:p>
+        </p:txBody>
+      </p:sp>
+      <p:sp>
+        <p:nvSpPr>
+          <p:cNvPr id="23" name="Rectangle 22"/>
+          <p:cNvSpPr/>
+          <p:nvPr/>
+        </p:nvSpPr>
+        <p:spPr>
+          <a:xfrm>
+            <a:off x="4283354" y="4119372"/>
+            <a:ext cx="3624986" cy="27432"/>
+          </a:xfrm>
+          <a:prstGeom prst="rect">
+            <a:avLst/>
+          </a:prstGeom>
+          <a:solidFill>
+            <a:srgbClr val="FFD000"/>
+          </a:solidFill>
+          <a:ln>
+            <a:noFill/>
+          </a:ln>
+        </p:spPr>
+        <p:style>
+          <a:lnRef idx="1">
+            <a:schemeClr val="accent1"/>
+          </a:lnRef>
+          <a:fillRef idx="3">
+            <a:schemeClr val="accent1"/>
+          </a:fillRef>
+          <a:effectRef idx="2">
+            <a:schemeClr val="accent1"/>
+          </a:effectRef>
+          <a:fontRef idx="minor">
+            <a:schemeClr val="lt1"/>
+          </a:fontRef>
+        </p:style>
+        <p:txBody>
+          <a:bodyPr rtlCol="0" anchor="ctr"/>
+          <a:lstStyle/>
+          <a:p>
+            <a:pPr algn="ctr"/>
+          </a:p>
+        </p:txBody>
+      </p:sp>
+      <p:pic>
+        <p:nvPicPr>
+          <p:cNvPr id="24" name="Picture 23" descr="oracle_livesql.png"/>
+          <p:cNvPicPr>
+            <a:picLocks noChangeAspect="1"/>
+          </p:cNvPicPr>
+          <p:nvPr/>
+        </p:nvPicPr>
+        <p:blipFill>
+          <a:blip r:embed="rId5"/>
+          <a:stretch>
+            <a:fillRect/>
+          </a:stretch>
+        </p:blipFill>
+        <p:spPr>
+          <a:xfrm>
+            <a:off x="5485485" y="4311396"/>
+            <a:ext cx="1220724" cy="1220724"/>
+          </a:xfrm>
+          <a:prstGeom prst="rect">
+            <a:avLst/>
+          </a:prstGeom>
+        </p:spPr>
+      </p:pic>
+      <p:sp>
+        <p:nvSpPr>
+          <p:cNvPr id="25" name="TextBox 24"/>
+          <p:cNvSpPr txBox="1"/>
+          <p:nvPr/>
+        </p:nvSpPr>
+        <p:spPr>
+          <a:xfrm>
+            <a:off x="4356506" y="5623560"/>
+            <a:ext cx="3478682" cy="621792"/>
+          </a:xfrm>
+          <a:prstGeom prst="rect">
+            <a:avLst/>
+          </a:prstGeom>
+          <a:noFill/>
+        </p:spPr>
+        <p:txBody>
+          <a:bodyPr wrap="square" anchor="t"/>
+          <a:lstStyle/>
+          <a:p>
+            <a:pPr algn="ctr"/>
+            <a:r>
+              <a:rPr sz="1300" b="1" i="0">
+                <a:solidFill>
+                  <a:srgbClr val="095292"/>
+                </a:solidFill>
+                <a:latin typeface="Calibri"/>
+              </a:rPr>
+              <a:t>Oracle Live SQL</a:t>
+            </a:r>
+          </a:p>
+          <a:p>
+            <a:pPr algn="ctr">
+              <a:spcBef>
+                <a:spcPts val="200"/>
+              </a:spcBef>
+            </a:pPr>
+            <a:r>
+              <a:rPr sz="1000" b="0" i="0">
+                <a:solidFill>
+                  <a:srgbClr val="666666"/>
+                </a:solidFill>
+                <a:latin typeface="Calibri"/>
+              </a:rPr>
+              <a:t>Solo contraste</a:t>
+            </a:r>
+          </a:p>
+        </p:txBody>
+      </p:sp>
+      <p:sp>
+        <p:nvSpPr>
+          <p:cNvPr id="26" name="TextBox 25"/>
           <p:cNvSpPr txBox="1"/>
           <p:nvPr/>
         </p:nvSpPr>

--- a/Bases de Datos II/Clases/Clase 2 - Administracion de bases de datos/Presentacion.pptx
+++ b/Bases de Datos II/Clases/Clase 2 - Administracion de bases de datos/Presentacion.pptx
@@ -6683,7 +6683,23 @@
                 </a:solidFill>
                 <a:latin typeface="Calibri"/>
               </a:rPr>
-              <a:t>–   Evidencia en playground (enlace) o archivo SQL/PNG propio.</a:t>
+              <a:t>–   Evidencia: el SQL y su salida quedan guardados en cada pregunta de ExamLab.</a:t>
+            </a:r>
+          </a:p>
+          <a:p>
+            <a:pPr>
+              <a:spcAft>
+                <a:spcPts val="800"/>
+              </a:spcAft>
+            </a:pPr>
+            <a:r>
+              <a:rPr sz="1600" b="0" i="0">
+                <a:solidFill>
+                  <a:srgbClr val="333333"/>
+                </a:solidFill>
+                <a:latin typeface="Calibri"/>
+              </a:rPr>
+              <a:t>–   Conserva copia en tu carpeta del PI (los .sql que pide el entregable).</a:t>
             </a:r>
           </a:p>
           <a:p>

--- a/Bases de Datos II/Clases/Clase 2 - Administracion de bases de datos/Presentacion.pptx
+++ b/Bases de Datos II/Clases/Clase 2 - Administracion de bases de datos/Presentacion.pptx
@@ -3655,7 +3655,7 @@
               </a:spcAft>
             </a:pPr>
             <a:r>
-              <a:rPr sz="1600" b="0" i="0">
+              <a:rPr sz="2000" b="0" i="0">
                 <a:solidFill>
                   <a:srgbClr val="333333"/>
                 </a:solidFill>
@@ -3664,7 +3664,7 @@
               <a:t>–   </a:t>
             </a:r>
             <a:r>
-              <a:rPr sz="1600" b="1" i="0">
+              <a:rPr sz="2000" b="1" i="0">
                 <a:solidFill>
                   <a:srgbClr val="333333"/>
                 </a:solidFill>
@@ -3673,7 +3673,7 @@
               <a:t>Por qué importa al PI:</a:t>
             </a:r>
             <a:r>
-              <a:rPr sz="1600" b="0" i="0">
+              <a:rPr sz="2000" b="0" i="0">
                 <a:solidFill>
                   <a:srgbClr val="333333"/>
                 </a:solidFill>
@@ -3689,7 +3689,7 @@
               </a:spcAft>
             </a:pPr>
             <a:r>
-              <a:rPr sz="1600" b="0" i="0">
+              <a:rPr sz="2000" b="0" i="0">
                 <a:solidFill>
                   <a:srgbClr val="333333"/>
                 </a:solidFill>
@@ -3698,7 +3698,7 @@
               <a:t>–   Mínimo privilegio evita que Recepción borre historia clínica: cancelar una cita es un </a:t>
             </a:r>
             <a:r>
-              <a:rPr sz="1600" b="1" i="0">
+              <a:rPr sz="2000" b="1" i="0">
                 <a:solidFill>
                   <a:srgbClr val="333333"/>
                 </a:solidFill>
@@ -3707,7 +3707,7 @@
               <a:t>UPDATE de estado</a:t>
             </a:r>
             <a:r>
-              <a:rPr sz="1600" b="0" i="0">
+              <a:rPr sz="2000" b="0" i="0">
                 <a:solidFill>
                   <a:srgbClr val="333333"/>
                 </a:solidFill>
@@ -3723,7 +3723,7 @@
               </a:spcAft>
             </a:pPr>
             <a:r>
-              <a:rPr sz="1600" b="0" i="0">
+              <a:rPr sz="2000" b="0" i="0">
                 <a:solidFill>
                   <a:srgbClr val="333333"/>
                 </a:solidFill>
@@ -3943,7 +3943,7 @@
               </a:spcAft>
             </a:pPr>
             <a:r>
-              <a:rPr sz="1500" b="0" i="0">
+              <a:rPr sz="2000" b="0" i="0">
                 <a:solidFill>
                   <a:srgbClr val="333333"/>
                 </a:solidFill>
@@ -3952,7 +3952,7 @@
               <a:t>–   </a:t>
             </a:r>
             <a:r>
-              <a:rPr sz="1500" b="1" i="0">
+              <a:rPr sz="2000" b="1" i="0">
                 <a:solidFill>
                   <a:srgbClr val="333333"/>
                 </a:solidFill>
@@ -3961,7 +3961,7 @@
               <a:t>Objetivo:</a:t>
             </a:r>
             <a:r>
-              <a:rPr sz="1500" b="0" i="0">
+              <a:rPr sz="2000" b="0" i="0">
                 <a:solidFill>
                   <a:srgbClr val="333333"/>
                 </a:solidFill>
@@ -3977,7 +3977,7 @@
               </a:spcAft>
             </a:pPr>
             <a:r>
-              <a:rPr sz="1500" b="0" i="0">
+              <a:rPr sz="2000" b="0" i="0">
                 <a:solidFill>
                   <a:srgbClr val="333333"/>
                 </a:solidFill>
@@ -3986,7 +3986,7 @@
               <a:t>–   </a:t>
             </a:r>
             <a:r>
-              <a:rPr sz="1500" b="1" i="0">
+              <a:rPr sz="2000" b="1" i="0">
                 <a:solidFill>
                   <a:srgbClr val="333333"/>
                 </a:solidFill>
@@ -3995,7 +3995,7 @@
               <a:t>Exito:</a:t>
             </a:r>
             <a:r>
-              <a:rPr sz="1500" b="0" i="0">
+              <a:rPr sz="2000" b="0" i="0">
                 <a:solidFill>
                   <a:srgbClr val="333333"/>
                 </a:solidFill>
@@ -4011,7 +4011,7 @@
               </a:spcAft>
             </a:pPr>
             <a:r>
-              <a:rPr sz="1500" b="0" i="0">
+              <a:rPr sz="2000" b="0" i="0">
                 <a:solidFill>
                   <a:srgbClr val="333333"/>
                 </a:solidFill>
@@ -4020,7 +4020,7 @@
               <a:t>–   </a:t>
             </a:r>
             <a:r>
-              <a:rPr sz="1500" b="1" i="0">
+              <a:rPr sz="2000" b="1" i="0">
                 <a:solidFill>
                   <a:srgbClr val="333333"/>
                 </a:solidFill>
@@ -4029,7 +4029,7 @@
               <a:t>Exito:</a:t>
             </a:r>
             <a:r>
-              <a:rPr sz="1500" b="0" i="0">
+              <a:rPr sz="2000" b="0" i="0">
                 <a:solidFill>
                   <a:srgbClr val="333333"/>
                 </a:solidFill>
@@ -4045,7 +4045,7 @@
               </a:spcAft>
             </a:pPr>
             <a:r>
-              <a:rPr sz="1500" b="0" i="0">
+              <a:rPr sz="2000" b="0" i="0">
                 <a:solidFill>
                   <a:srgbClr val="333333"/>
                 </a:solidFill>
@@ -4054,7 +4054,7 @@
               <a:t>–   </a:t>
             </a:r>
             <a:r>
-              <a:rPr sz="1500" b="1" i="0">
+              <a:rPr sz="2000" b="1" i="0">
                 <a:solidFill>
                   <a:srgbClr val="333333"/>
                 </a:solidFill>
@@ -4063,7 +4063,7 @@
               <a:t>Exito:</a:t>
             </a:r>
             <a:r>
-              <a:rPr sz="1500" b="0" i="0">
+              <a:rPr sz="2000" b="0" i="0">
                 <a:solidFill>
                   <a:srgbClr val="333333"/>
                 </a:solidFill>
@@ -4079,7 +4079,7 @@
               </a:spcAft>
             </a:pPr>
             <a:r>
-              <a:rPr sz="1500" b="0" i="0">
+              <a:rPr sz="2000" b="0" i="0">
                 <a:solidFill>
                   <a:srgbClr val="333333"/>
                 </a:solidFill>
@@ -4088,7 +4088,7 @@
               <a:t>–   </a:t>
             </a:r>
             <a:r>
-              <a:rPr sz="1500" b="1" i="0">
+              <a:rPr sz="2000" b="1" i="0">
                 <a:solidFill>
                   <a:srgbClr val="333333"/>
                 </a:solidFill>
@@ -4097,7 +4097,7 @@
               <a:t>Exito:</a:t>
             </a:r>
             <a:r>
-              <a:rPr sz="1500" b="0" i="0">
+              <a:rPr sz="2000" b="0" i="0">
                 <a:solidFill>
                   <a:srgbClr val="333333"/>
                 </a:solidFill>
@@ -4113,7 +4113,7 @@
               </a:spcAft>
             </a:pPr>
             <a:r>
-              <a:rPr sz="1500" b="0" i="0">
+              <a:rPr sz="2000" b="0" i="0">
                 <a:solidFill>
                   <a:srgbClr val="333333"/>
                 </a:solidFill>
@@ -4122,7 +4122,7 @@
               <a:t>–   </a:t>
             </a:r>
             <a:r>
-              <a:rPr sz="1500" b="1" i="0">
+              <a:rPr sz="2000" b="1" i="0">
                 <a:solidFill>
                   <a:srgbClr val="333333"/>
                 </a:solidFill>
@@ -4131,7 +4131,7 @@
               <a:t>Exito:</a:t>
             </a:r>
             <a:r>
-              <a:rPr sz="1500" b="0" i="0">
+              <a:rPr sz="2000" b="0" i="0">
                 <a:solidFill>
                   <a:srgbClr val="333333"/>
                 </a:solidFill>
@@ -4147,7 +4147,7 @@
               </a:spcAft>
             </a:pPr>
             <a:r>
-              <a:rPr sz="1500" b="0" i="0">
+              <a:rPr sz="2000" b="0" i="0">
                 <a:solidFill>
                   <a:srgbClr val="333333"/>
                 </a:solidFill>
@@ -4156,7 +4156,7 @@
               <a:t>–   </a:t>
             </a:r>
             <a:r>
-              <a:rPr sz="1500" b="1" i="0">
+              <a:rPr sz="2000" b="1" i="0">
                 <a:solidFill>
                   <a:srgbClr val="333333"/>
                 </a:solidFill>
@@ -4165,7 +4165,7 @@
               <a:t>Exito:</a:t>
             </a:r>
             <a:r>
-              <a:rPr sz="1500" b="0" i="0">
+              <a:rPr sz="2000" b="0" i="0">
                 <a:solidFill>
                   <a:srgbClr val="333333"/>
                 </a:solidFill>
@@ -4385,7 +4385,7 @@
               </a:spcAft>
             </a:pPr>
             <a:r>
-              <a:rPr sz="1600" b="0" i="0">
+              <a:rPr sz="2000" b="0" i="0">
                 <a:solidFill>
                   <a:srgbClr val="333333"/>
                 </a:solidFill>
@@ -4401,7 +4401,7 @@
               </a:spcAft>
             </a:pPr>
             <a:r>
-              <a:rPr sz="1600" b="0" i="0">
+              <a:rPr sz="2000" b="0" i="0">
                 <a:solidFill>
                   <a:srgbClr val="333333"/>
                 </a:solidFill>
@@ -4417,7 +4417,7 @@
               </a:spcAft>
             </a:pPr>
             <a:r>
-              <a:rPr sz="1600" b="0" i="0">
+              <a:rPr sz="2000" b="0" i="0">
                 <a:solidFill>
                   <a:srgbClr val="333333"/>
                 </a:solidFill>
@@ -4426,7 +4426,7 @@
               <a:t>–   </a:t>
             </a:r>
             <a:r>
-              <a:rPr sz="1600" b="1" i="0">
+              <a:rPr sz="2000" b="1" i="0">
                 <a:solidFill>
                   <a:srgbClr val="333333"/>
                 </a:solidFill>
@@ -4435,7 +4435,7 @@
               <a:t>Motor:</a:t>
             </a:r>
             <a:r>
-              <a:rPr sz="1600" b="0" i="0">
+              <a:rPr sz="2000" b="0" i="0">
                 <a:solidFill>
                   <a:srgbClr val="333333"/>
                 </a:solidFill>
@@ -4451,7 +4451,7 @@
               </a:spcAft>
             </a:pPr>
             <a:r>
-              <a:rPr sz="1600" b="0" i="0">
+              <a:rPr sz="2000" b="0" i="0">
                 <a:solidFill>
                   <a:srgbClr val="333333"/>
                 </a:solidFill>
@@ -6643,7 +6643,7 @@
               </a:spcAft>
             </a:pPr>
             <a:r>
-              <a:rPr sz="1600" b="0" i="0">
+              <a:rPr sz="2000" b="0" i="0">
                 <a:solidFill>
                   <a:srgbClr val="333333"/>
                 </a:solidFill>
@@ -6652,7 +6652,7 @@
               <a:t>–   </a:t>
             </a:r>
             <a:r>
-              <a:rPr sz="1600" b="1" i="0">
+              <a:rPr sz="2000" b="1" i="0">
                 <a:solidFill>
                   <a:srgbClr val="333333"/>
                 </a:solidFill>
@@ -6661,7 +6661,7 @@
               <a:t>Entregable:</a:t>
             </a:r>
             <a:r>
-              <a:rPr sz="1600" b="0" i="0">
+              <a:rPr sz="2000" b="0" i="0">
                 <a:solidFill>
                   <a:srgbClr val="333333"/>
                 </a:solidFill>
@@ -6677,7 +6677,7 @@
               </a:spcAft>
             </a:pPr>
             <a:r>
-              <a:rPr sz="1600" b="0" i="0">
+              <a:rPr sz="2000" b="0" i="0">
                 <a:solidFill>
                   <a:srgbClr val="333333"/>
                 </a:solidFill>
@@ -6693,7 +6693,7 @@
               </a:spcAft>
             </a:pPr>
             <a:r>
-              <a:rPr sz="1600" b="0" i="0">
+              <a:rPr sz="2000" b="0" i="0">
                 <a:solidFill>
                   <a:srgbClr val="333333"/>
                 </a:solidFill>
@@ -6709,7 +6709,7 @@
               </a:spcAft>
             </a:pPr>
             <a:r>
-              <a:rPr sz="1600" b="0" i="0">
+              <a:rPr sz="2000" b="0" i="0">
                 <a:solidFill>
                   <a:srgbClr val="333333"/>
                 </a:solidFill>
@@ -6725,7 +6725,7 @@
               </a:spcAft>
             </a:pPr>
             <a:r>
-              <a:rPr sz="1600" b="0" i="0">
+              <a:rPr sz="2000" b="0" i="0">
                 <a:solidFill>
                   <a:srgbClr val="333333"/>
                 </a:solidFill>
@@ -6734,7 +6734,7 @@
               <a:t>–   </a:t>
             </a:r>
             <a:r>
-              <a:rPr sz="1600" b="1" i="0">
+              <a:rPr sz="2000" b="1" i="0">
                 <a:solidFill>
                   <a:srgbClr val="333333"/>
                 </a:solidFill>
@@ -6743,7 +6743,7 @@
               <a:t>Entrega en ExamLab</a:t>
             </a:r>
             <a:r>
-              <a:rPr sz="1600" b="0" i="0">
+              <a:rPr sz="2000" b="0" i="0">
                 <a:solidFill>
                   <a:srgbClr val="333333"/>
                 </a:solidFill>
@@ -7790,7 +7790,7 @@
               </a:spcAft>
             </a:pPr>
             <a:r>
-              <a:rPr sz="1600" b="0" i="0">
+              <a:rPr sz="2000" b="0" i="0">
                 <a:solidFill>
                   <a:srgbClr val="333333"/>
                 </a:solidFill>
@@ -7799,7 +7799,7 @@
               <a:t>–   </a:t>
             </a:r>
             <a:r>
-              <a:rPr sz="1600" b="1" i="0">
+              <a:rPr sz="2000" b="1" i="0">
                 <a:solidFill>
                   <a:srgbClr val="333333"/>
                 </a:solidFill>
@@ -7808,7 +7808,7 @@
               <a:t>Hoy avanzamos el PI en:</a:t>
             </a:r>
             <a:r>
-              <a:rPr sz="1600" b="0" i="0">
+              <a:rPr sz="2000" b="0" i="0">
                 <a:solidFill>
                   <a:srgbClr val="333333"/>
                 </a:solidFill>
@@ -7824,7 +7824,7 @@
               </a:spcAft>
             </a:pPr>
             <a:r>
-              <a:rPr sz="1600" b="0" i="0">
+              <a:rPr sz="2000" b="0" i="0">
                 <a:solidFill>
                   <a:srgbClr val="333333"/>
                 </a:solidFill>
@@ -7833,7 +7833,7 @@
               <a:t>–   Herramienta: </a:t>
             </a:r>
             <a:r>
-              <a:rPr sz="1600" b="1" i="0">
+              <a:rPr sz="2000" b="1" i="0">
                 <a:solidFill>
                   <a:srgbClr val="333333"/>
                 </a:solidFill>
@@ -7842,7 +7842,7 @@
               <a:t>ExamLab (PostgreSQL) + Google Docs</a:t>
             </a:r>
             <a:r>
-              <a:rPr sz="1600" b="0" i="0">
+              <a:rPr sz="2000" b="0" i="0">
                 <a:solidFill>
                   <a:srgbClr val="333333"/>
                 </a:solidFill>
@@ -7851,7 +7851,7 @@
               <a:t> · Bloque </a:t>
             </a:r>
             <a:r>
-              <a:rPr sz="1600" b="1" i="0">
+              <a:rPr sz="2000" b="1" i="0">
                 <a:solidFill>
                   <a:srgbClr val="333333"/>
                 </a:solidFill>
@@ -7860,7 +7860,7 @@
               <a:t>120 min</a:t>
             </a:r>
             <a:r>
-              <a:rPr sz="1600" b="0" i="0">
+              <a:rPr sz="2000" b="0" i="0">
                 <a:solidFill>
                   <a:srgbClr val="333333"/>
                 </a:solidFill>
@@ -7876,7 +7876,7 @@
               </a:spcAft>
             </a:pPr>
             <a:r>
-              <a:rPr sz="1600" b="0" i="0">
+              <a:rPr sz="2000" b="0" i="0">
                 <a:solidFill>
                   <a:srgbClr val="333333"/>
                 </a:solidFill>
@@ -7885,7 +7885,7 @@
               <a:t>–   </a:t>
             </a:r>
             <a:r>
-              <a:rPr sz="1600" b="1" i="0">
+              <a:rPr sz="2000" b="1" i="0">
                 <a:solidFill>
                   <a:srgbClr val="333333"/>
                 </a:solidFill>
@@ -7894,7 +7894,7 @@
               <a:t>Entregable de hoy:</a:t>
             </a:r>
             <a:r>
-              <a:rPr sz="1600" b="0" i="0">
+              <a:rPr sz="2000" b="0" i="0">
                 <a:solidFill>
                   <a:srgbClr val="333333"/>
                 </a:solidFill>
@@ -7910,7 +7910,7 @@
               </a:spcAft>
             </a:pPr>
             <a:r>
-              <a:rPr sz="1600" b="0" i="0">
+              <a:rPr sz="2000" b="0" i="0">
                 <a:solidFill>
                   <a:srgbClr val="333333"/>
                 </a:solidFill>
@@ -7926,7 +7926,7 @@
               </a:spcAft>
             </a:pPr>
             <a:r>
-              <a:rPr sz="1600" b="0" i="0">
+              <a:rPr sz="2000" b="0" i="0">
                 <a:solidFill>
                   <a:srgbClr val="333333"/>
                 </a:solidFill>
@@ -7942,7 +7942,7 @@
               </a:spcAft>
             </a:pPr>
             <a:r>
-              <a:rPr sz="1600" b="0" i="0">
+              <a:rPr sz="2000" b="0" i="0">
                 <a:solidFill>
                   <a:srgbClr val="333333"/>
                 </a:solidFill>
@@ -8266,7 +8266,7 @@
         <p:spPr>
           <a:xfrm>
             <a:off x="502920" y="2587752"/>
-            <a:ext cx="2164019" cy="2560320"/>
+            <a:ext cx="2164019" cy="3310128"/>
           </a:xfrm>
           <a:prstGeom prst="rect">
             <a:avLst/>
@@ -8381,7 +8381,7 @@
         <p:spPr>
           <a:xfrm>
             <a:off x="2758379" y="2587752"/>
-            <a:ext cx="2164019" cy="2560320"/>
+            <a:ext cx="2164019" cy="3310128"/>
           </a:xfrm>
           <a:prstGeom prst="rect">
             <a:avLst/>
@@ -8496,7 +8496,7 @@
         <p:spPr>
           <a:xfrm>
             <a:off x="5013838" y="2587752"/>
-            <a:ext cx="2164019" cy="2560320"/>
+            <a:ext cx="2164019" cy="3310128"/>
           </a:xfrm>
           <a:prstGeom prst="rect">
             <a:avLst/>
@@ -8611,7 +8611,7 @@
         <p:spPr>
           <a:xfrm>
             <a:off x="7269297" y="2587752"/>
-            <a:ext cx="2164019" cy="2560320"/>
+            <a:ext cx="2164019" cy="3310128"/>
           </a:xfrm>
           <a:prstGeom prst="rect">
             <a:avLst/>
@@ -8726,7 +8726,7 @@
         <p:spPr>
           <a:xfrm>
             <a:off x="9524756" y="2587752"/>
-            <a:ext cx="2164019" cy="2560320"/>
+            <a:ext cx="2164019" cy="3310128"/>
           </a:xfrm>
           <a:prstGeom prst="rect">
             <a:avLst/>
@@ -8760,8 +8760,8 @@
         </p:nvSpPr>
         <p:spPr>
           <a:xfrm>
-            <a:off x="457200" y="5943600"/>
-            <a:ext cx="11277295" cy="365760"/>
+            <a:off x="457200" y="5806440"/>
+            <a:ext cx="11277295" cy="640080"/>
           </a:xfrm>
           <a:prstGeom prst="rect">
             <a:avLst/>
@@ -9014,7 +9014,7 @@
               </a:spcAft>
             </a:pPr>
             <a:r>
-              <a:rPr sz="1500" b="0" i="0">
+              <a:rPr sz="2000" b="0" i="0">
                 <a:solidFill>
                   <a:srgbClr val="333333"/>
                 </a:solidFill>
@@ -9030,7 +9030,7 @@
               </a:spcAft>
             </a:pPr>
             <a:r>
-              <a:rPr sz="1500" b="0" i="0">
+              <a:rPr sz="2000" b="0" i="0">
                 <a:solidFill>
                   <a:srgbClr val="333333"/>
                 </a:solidFill>
@@ -9046,7 +9046,7 @@
               </a:spcAft>
             </a:pPr>
             <a:r>
-              <a:rPr sz="1500" b="0" i="0">
+              <a:rPr sz="2000" b="0" i="0">
                 <a:solidFill>
                   <a:srgbClr val="333333"/>
                 </a:solidFill>
@@ -9062,7 +9062,7 @@
               </a:spcAft>
             </a:pPr>
             <a:r>
-              <a:rPr sz="1500" b="0" i="0">
+              <a:rPr sz="2000" b="0" i="0">
                 <a:solidFill>
                   <a:srgbClr val="333333"/>
                 </a:solidFill>
@@ -9078,7 +9078,7 @@
               </a:spcAft>
             </a:pPr>
             <a:r>
-              <a:rPr sz="1500" b="0" i="0">
+              <a:rPr sz="2000" b="0" i="0">
                 <a:solidFill>
                   <a:srgbClr val="333333"/>
                 </a:solidFill>
@@ -10464,7 +10464,7 @@
               </a:spcAft>
             </a:pPr>
             <a:r>
-              <a:rPr sz="1300" b="0" i="0">
+              <a:rPr sz="2000" b="0" i="0">
                 <a:solidFill>
                   <a:srgbClr val="333333"/>
                 </a:solidFill>
@@ -10473,7 +10473,7 @@
               <a:t>–   </a:t>
             </a:r>
             <a:r>
-              <a:rPr sz="1300" b="1" i="0">
+              <a:rPr sz="2000" b="1" i="0">
                 <a:solidFill>
                   <a:srgbClr val="333333"/>
                 </a:solidFill>
@@ -10482,7 +10482,7 @@
               <a:t>1. Alta.</a:t>
             </a:r>
             <a:r>
-              <a:rPr sz="1300" b="0" i="0">
+              <a:rPr sz="2000" b="0" i="0">
                 <a:solidFill>
                   <a:srgbClr val="333333"/>
                 </a:solidFill>
@@ -10491,7 +10491,7 @@
               <a:t> Quien solicita y quien aprueba; la cuenta nace con </a:t>
             </a:r>
             <a:r>
-              <a:rPr sz="1300" b="1" i="0">
+              <a:rPr sz="2000" b="1" i="0">
                 <a:solidFill>
                   <a:srgbClr val="333333"/>
                 </a:solidFill>
@@ -10500,7 +10500,7 @@
               <a:t>un solo rol</a:t>
             </a:r>
             <a:r>
-              <a:rPr sz="1300" b="0" i="0">
+              <a:rPr sz="2000" b="0" i="0">
                 <a:solidFill>
                   <a:srgbClr val="333333"/>
                 </a:solidFill>
@@ -10516,7 +10516,7 @@
               </a:spcAft>
             </a:pPr>
             <a:r>
-              <a:rPr sz="1300" b="0" i="0">
+              <a:rPr sz="2000" b="0" i="0">
                 <a:solidFill>
                   <a:srgbClr val="333333"/>
                 </a:solidFill>
@@ -10525,7 +10525,7 @@
               <a:t>–   </a:t>
             </a:r>
             <a:r>
-              <a:rPr sz="1300" b="1" i="0">
+              <a:rPr sz="2000" b="1" i="0">
                 <a:solidFill>
                   <a:srgbClr val="333333"/>
                 </a:solidFill>
@@ -10534,7 +10534,7 @@
               <a:t>2. Cambio de rol.</a:t>
             </a:r>
             <a:r>
-              <a:rPr sz="1300" b="0" i="0">
+              <a:rPr sz="2000" b="0" i="0">
                 <a:solidFill>
                   <a:srgbClr val="333333"/>
                 </a:solidFill>
@@ -10543,7 +10543,7 @@
               <a:t> «GRANT» del nuevo y </a:t>
             </a:r>
             <a:r>
-              <a:rPr sz="1300" b="1" i="0">
+              <a:rPr sz="2000" b="1" i="0">
                 <a:solidFill>
                   <a:srgbClr val="333333"/>
                 </a:solidFill>
@@ -10552,7 +10552,7 @@
               <a:t>«REVOKE» del anterior</a:t>
             </a:r>
             <a:r>
-              <a:rPr sz="1300" b="0" i="0">
+              <a:rPr sz="2000" b="0" i="0">
                 <a:solidFill>
                   <a:srgbClr val="333333"/>
                 </a:solidFill>
@@ -10561,7 +10561,7 @@
               <a:t>: los permisos </a:t>
             </a:r>
             <a:r>
-              <a:rPr sz="1300" b="1" i="0">
+              <a:rPr sz="2000" b="1" i="0">
                 <a:solidFill>
                   <a:srgbClr val="333333"/>
                 </a:solidFill>
@@ -10570,7 +10570,7 @@
               <a:t>no se acumulan</a:t>
             </a:r>
             <a:r>
-              <a:rPr sz="1300" b="0" i="0">
+              <a:rPr sz="2000" b="0" i="0">
                 <a:solidFill>
                   <a:srgbClr val="333333"/>
                 </a:solidFill>
@@ -10586,7 +10586,7 @@
               </a:spcAft>
             </a:pPr>
             <a:r>
-              <a:rPr sz="1300" b="0" i="0">
+              <a:rPr sz="2000" b="0" i="0">
                 <a:solidFill>
                   <a:srgbClr val="333333"/>
                 </a:solidFill>
@@ -10595,7 +10595,7 @@
               <a:t>–   </a:t>
             </a:r>
             <a:r>
-              <a:rPr sz="1300" b="1" i="0">
+              <a:rPr sz="2000" b="1" i="0">
                 <a:solidFill>
                   <a:srgbClr val="333333"/>
                 </a:solidFill>
@@ -10604,7 +10604,7 @@
               <a:t>3. Baja: el mismo dia.</a:t>
             </a:r>
             <a:r>
-              <a:rPr sz="1300" b="0" i="0">
+              <a:rPr sz="2000" b="0" i="0">
                 <a:solidFill>
                   <a:srgbClr val="333333"/>
                 </a:solidFill>
@@ -10613,7 +10613,7 @@
               <a:t> Revocar los roles, dejar la cuenta sin login y </a:t>
             </a:r>
             <a:r>
-              <a:rPr sz="1300" b="1" i="0">
+              <a:rPr sz="2000" b="1" i="0">
                 <a:solidFill>
                   <a:srgbClr val="333333"/>
                 </a:solidFill>
@@ -10622,7 +10622,7 @@
               <a:t>reasignar los objetos antes de borrar el rol</a:t>
             </a:r>
             <a:r>
-              <a:rPr sz="1300" b="0" i="0">
+              <a:rPr sz="2000" b="0" i="0">
                 <a:solidFill>
                   <a:srgbClr val="333333"/>
                 </a:solidFill>
@@ -10631,7 +10631,7 @@
               <a:t> («REASSIGN OWNED BY ... TO admin_bd»): PostgreSQL no deja hacer «DROP ROLE» de un rol que todavia posee objetos. Lo que esto evita es la </a:t>
             </a:r>
             <a:r>
-              <a:rPr sz="1300" b="1" i="0">
+              <a:rPr sz="2000" b="1" i="0">
                 <a:solidFill>
                   <a:srgbClr val="333333"/>
                 </a:solidFill>
@@ -10640,7 +10640,7 @@
               <a:t>cuenta huerfana</a:t>
             </a:r>
             <a:r>
-              <a:rPr sz="1300" b="0" i="0">
+              <a:rPr sz="2000" b="0" i="0">
                 <a:solidFill>
                   <a:srgbClr val="333333"/>
                 </a:solidFill>
@@ -10656,7 +10656,7 @@
               </a:spcAft>
             </a:pPr>
             <a:r>
-              <a:rPr sz="1300" b="0" i="0">
+              <a:rPr sz="2000" b="0" i="0">
                 <a:solidFill>
                   <a:srgbClr val="333333"/>
                 </a:solidFill>
@@ -10665,7 +10665,7 @@
               <a:t>–   </a:t>
             </a:r>
             <a:r>
-              <a:rPr sz="1300" b="1" i="0">
+              <a:rPr sz="2000" b="1" i="0">
                 <a:solidFill>
                   <a:srgbClr val="333333"/>
                 </a:solidFill>
@@ -10674,7 +10674,7 @@
               <a:t>4. Revision periodica.</a:t>
             </a:r>
             <a:r>
-              <a:rPr sz="1300" b="0" i="0">
+              <a:rPr sz="2000" b="0" i="0">
                 <a:solidFill>
                   <a:srgbClr val="333333"/>
                 </a:solidFill>
@@ -10683,7 +10683,7 @@
               <a:t> Cada 3 a 6 meses se audita la matriz con «information_schema.role_table_grants», y </a:t>
             </a:r>
             <a:r>
-              <a:rPr sz="1300" b="1" i="0">
+              <a:rPr sz="2000" b="1" i="0">
                 <a:solidFill>
                   <a:srgbClr val="333333"/>
                 </a:solidFill>
@@ -10692,7 +10692,7 @@
               <a:t>alguien firma</a:t>
             </a:r>
             <a:r>
-              <a:rPr sz="1300" b="0" i="0">
+              <a:rPr sz="2000" b="0" i="0">
                 <a:solidFill>
                   <a:srgbClr val="333333"/>
                 </a:solidFill>
@@ -10708,7 +10708,7 @@
               </a:spcAft>
             </a:pPr>
             <a:r>
-              <a:rPr sz="1300" b="0" i="0">
+              <a:rPr sz="2000" b="0" i="0">
                 <a:solidFill>
                   <a:srgbClr val="333333"/>
                 </a:solidFill>
@@ -10717,7 +10717,7 @@
               <a:t>–   </a:t>
             </a:r>
             <a:r>
-              <a:rPr sz="1300" b="1" i="0">
+              <a:rPr sz="2000" b="1" i="0">
                 <a:solidFill>
                   <a:srgbClr val="333333"/>
                 </a:solidFill>
@@ -10726,7 +10726,7 @@
               <a:t>5. Probar que el permiso NO esta.</a:t>
             </a:r>
             <a:r>
-              <a:rPr sz="1300" b="0" i="0">
+              <a:rPr sz="2000" b="0" i="0">
                 <a:solidFill>
                   <a:srgbClr val="333333"/>
                 </a:solidFill>
@@ -10735,7 +10735,7 @@
               <a:t> No hace falta otra conexion (aqui hay un solo usuario con login): «SET ROLE recepcion;» cambia el rol efectivo, y ahi «DELETE FROM cita ...» debe responder </a:t>
             </a:r>
             <a:r>
-              <a:rPr sz="1300" b="1" i="0">
+              <a:rPr sz="2000" b="1" i="0">
                 <a:solidFill>
                   <a:srgbClr val="333333"/>
                 </a:solidFill>
@@ -10744,7 +10744,7 @@
               <a:t>permission denied</a:t>
             </a:r>
             <a:r>
-              <a:rPr sz="1300" b="0" i="0">
+              <a:rPr sz="2000" b="0" i="0">
                 <a:solidFill>
                   <a:srgbClr val="333333"/>
                 </a:solidFill>
@@ -10753,7 +10753,7 @@
               <a:t>. Se cierra con «RESET ROLE;». Si el entorno no deja cambiar de rol, se documenta el intento: eso es una </a:t>
             </a:r>
             <a:r>
-              <a:rPr sz="1300" b="1" i="0">
+              <a:rPr sz="2000" b="1" i="0">
                 <a:solidFill>
                   <a:srgbClr val="333333"/>
                 </a:solidFill>
@@ -10762,7 +10762,7 @@
               <a:t>brecha de verificacion</a:t>
             </a:r>
             <a:r>
-              <a:rPr sz="1300" b="0" i="0">
+              <a:rPr sz="2000" b="0" i="0">
                 <a:solidFill>
                   <a:srgbClr val="333333"/>
                 </a:solidFill>
@@ -10982,7 +10982,7 @@
               </a:spcAft>
             </a:pPr>
             <a:r>
-              <a:rPr sz="1600" b="0" i="0">
+              <a:rPr sz="2000" b="0" i="0">
                 <a:solidFill>
                   <a:srgbClr val="333333"/>
                 </a:solidFill>
@@ -10991,7 +10991,7 @@
               <a:t>–   </a:t>
             </a:r>
             <a:r>
-              <a:rPr sz="1600" b="1" i="0">
+              <a:rPr sz="2000" b="1" i="0">
                 <a:solidFill>
                   <a:srgbClr val="333333"/>
                 </a:solidFill>
@@ -11000,7 +11000,7 @@
               <a:t>Herramienta:</a:t>
             </a:r>
             <a:r>
-              <a:rPr sz="1600" b="0" i="0">
+              <a:rPr sz="2000" b="0" i="0">
                 <a:solidFill>
                   <a:srgbClr val="333333"/>
                 </a:solidFill>
@@ -11016,7 +11016,7 @@
               </a:spcAft>
             </a:pPr>
             <a:r>
-              <a:rPr sz="1600" b="0" i="0">
+              <a:rPr sz="2000" b="0" i="0">
                 <a:solidFill>
                   <a:srgbClr val="333333"/>
                 </a:solidFill>
@@ -11025,7 +11025,7 @@
               <a:t>–   </a:t>
             </a:r>
             <a:r>
-              <a:rPr sz="1600" b="1" i="0">
+              <a:rPr sz="2000" b="1" i="0">
                 <a:solidFill>
                   <a:srgbClr val="333333"/>
                 </a:solidFill>
@@ -11034,7 +11034,7 @@
               <a:t>Demo:</a:t>
             </a:r>
             <a:r>
-              <a:rPr sz="1600" b="0" i="0">
+              <a:rPr sz="2000" b="0" i="0">
                 <a:solidFill>
                   <a:srgbClr val="333333"/>
                 </a:solidFill>
@@ -11050,7 +11050,7 @@
               </a:spcAft>
             </a:pPr>
             <a:r>
-              <a:rPr sz="1600" b="0" i="0">
+              <a:rPr sz="2000" b="0" i="0">
                 <a:solidFill>
                   <a:srgbClr val="333333"/>
                 </a:solidFill>
@@ -11066,7 +11066,7 @@
               </a:spcAft>
             </a:pPr>
             <a:r>
-              <a:rPr sz="1600" b="0" i="0">
+              <a:rPr sz="2000" b="0" i="0">
                 <a:solidFill>
                   <a:srgbClr val="333333"/>
                 </a:solidFill>

--- a/Bases de Datos II/Clases/Clase 2 - Administracion de bases de datos/Presentacion.pptx
+++ b/Bases de Datos II/Clases/Clase 2 - Administracion de bases de datos/Presentacion.pptx
@@ -4171,7 +4171,7 @@
                 </a:solidFill>
                 <a:latin typeface="Calibri"/>
               </a:rPr>
-              <a:t> Entrega domingo 23:59.</a:t>
+              <a:t> Entrega en la fecha que indique el docente.</a:t>
             </a:r>
           </a:p>
         </p:txBody>
@@ -4441,7 +4441,7 @@
                 </a:solidFill>
                 <a:latin typeface="Calibri"/>
               </a:rPr>
-              <a:t> PostgreSQL dentro de ExamLab. Los GRANT son reales, y el permiso negado se comprueba con «SET ROLE» en la misma sesión: no hay una segunda conexión.</a:t>
+              <a:t> PostgreSQL dentro de la plataforma del curso. Los GRANT son reales, y el permiso negado se comprueba con «SET ROLE» en la misma sesión: no hay una segunda conexión.</a:t>
             </a:r>
           </a:p>
           <a:p>
@@ -4457,7 +4457,7 @@
                 </a:solidFill>
                 <a:latin typeface="Calibri"/>
               </a:rPr>
-              <a:t>–   La matriz y la política se escriben en Google Docs y se pegan en ExamLab; la plantilla en blanco de las dos está en este documento.</a:t>
+              <a:t>–   La matriz y la política se escriben en Google Docs y se pegan en la plataforma del curso; la plantilla en blanco de las dos está en este documento.</a:t>
             </a:r>
           </a:p>
         </p:txBody>
@@ -6667,7 +6667,7 @@
                 </a:solidFill>
                 <a:latin typeface="Calibri"/>
               </a:rPr>
-              <a:t> Documento Roles_VetCare + script GRANT/REVOKE ejecutado en ExamLab</a:t>
+              <a:t> Documento Roles_VetCare + script GRANT/REVOKE ejecutado en la plataforma del curso</a:t>
             </a:r>
           </a:p>
           <a:p>
@@ -6683,7 +6683,7 @@
                 </a:solidFill>
                 <a:latin typeface="Calibri"/>
               </a:rPr>
-              <a:t>–   Evidencia: el SQL y su salida quedan guardados en cada pregunta de ExamLab.</a:t>
+              <a:t>–   Evidencia: el SQL y su salida quedan guardados en cada pregunta de la plataforma del curso.</a:t>
             </a:r>
           </a:p>
           <a:p>
@@ -6740,7 +6740,7 @@
                 </a:solidFill>
                 <a:latin typeface="Calibri"/>
               </a:rPr>
-              <a:t>Entrega en ExamLab</a:t>
+              <a:t>Entrega en la plataforma del curso</a:t>
             </a:r>
             <a:r>
               <a:rPr sz="2000" b="0" i="0">
@@ -6749,7 +6749,7 @@
                 </a:solidFill>
                 <a:latin typeface="Calibri"/>
               </a:rPr>
-              <a:t> (https://uniaj.examlab.workers.dev/) — domingo 23:59 cuando aplique taller.</a:t>
+              <a:t> — en la fecha que indique el docente.</a:t>
             </a:r>
           </a:p>
         </p:txBody>
@@ -7344,7 +7344,7 @@
                 </a:solidFill>
                 <a:latin typeface="Calibri"/>
               </a:rPr>
-              <a:t>Taller de la semana en ExamLab (https://uniaj.examlab.workers.dev/): domingo 23:59 (regla del Acuerdo) cuando aplique.</a:t>
+              <a:t>Si el docente asigna taller esta semana, él indica el canal y la fecha.</a:t>
             </a:r>
           </a:p>
         </p:txBody>
@@ -7560,7 +7560,7 @@
                 </a:solidFill>
                 <a:latin typeface="Calibri"/>
               </a:rPr>
-              <a:t>Entregable: Documento Roles_VetCare + script GRANT/REVOKE ejecutado en ExamLab</a:t>
+              <a:t>Entregable: Documento Roles_VetCare + script GRANT/REVOKE ejecutado en la plataforma del curso</a:t>
             </a:r>
           </a:p>
           <a:p>
@@ -7839,7 +7839,7 @@
                 </a:solidFill>
                 <a:latin typeface="Calibri"/>
               </a:rPr>
-              <a:t>ExamLab (PostgreSQL) + Google Docs</a:t>
+              <a:t>PostgreSQL en el navegador + Google Docs</a:t>
             </a:r>
             <a:r>
               <a:rPr sz="2000" b="0" i="0">
@@ -7900,7 +7900,7 @@
                 </a:solidFill>
                 <a:latin typeface="Calibri"/>
               </a:rPr>
-              <a:t> Documento Roles_VetCare + script GRANT/REVOKE ejecutado en ExamLab</a:t>
+              <a:t> Documento Roles_VetCare + script GRANT/REVOKE ejecutado en la plataforma del curso</a:t>
             </a:r>
           </a:p>
           <a:p>
@@ -11006,7 +11006,7 @@
                 </a:solidFill>
                 <a:latin typeface="Calibri"/>
               </a:rPr>
-              <a:t> ExamLab (PostgreSQL) + Google Docs</a:t>
+              <a:t> PostgreSQL en el navegador + Google Docs</a:t>
             </a:r>
           </a:p>
           <a:p>
@@ -11040,7 +11040,7 @@
                 </a:solidFill>
                 <a:latin typeface="Calibri"/>
               </a:rPr>
-              <a:t> Los 4 roles de VetCare con CREATE ROLE/GRANT/REVOKE en ExamLab, verificados con information_schema.role_table_grants.</a:t>
+              <a:t> Los 4 roles de VetCare con CREATE ROLE/GRANT/REVOKE en la plataforma del curso, verificados con information_schema.role_table_grants.</a:t>
             </a:r>
           </a:p>
           <a:p>
@@ -11475,7 +11475,7 @@
                 </a:solidFill>
                 <a:latin typeface="Calibri"/>
               </a:rPr>
-              <a:t>ExamLab</a:t>
+              <a:t>la plataforma del curso</a:t>
             </a:r>
           </a:p>
           <a:p>
